--- a/tema2_bleeding/Последовательность_остановки_кровотечения.pptx
+++ b/tema2_bleeding/Последовательность_остановки_кровотечения.pptx
@@ -18,6 +18,8 @@
     <p:sldId id="266" r:id="rId17"/>
     <p:sldId id="267" r:id="rId18"/>
     <p:sldId id="268" r:id="rId19"/>
+    <p:sldId id="269" r:id="rId20"/>
+    <p:sldId id="270" r:id="rId21"/>
   </p:sldIdLst>
   <p:sldSz cx="24384000" cy="13716000" type="screen4x3"/>
   <p:notesSz cx="6858000" cy="9144000"/>
@@ -3519,7 +3521,7 @@
                 <a:ea typeface="Open Sans"/>
                 <a:cs typeface="Open Sans"/>
               </a:rPr>
-              <a:t>Действия после остановки кровотечения</a:t>
+              <a:t>Подробный осмотр — живот, ноги, руки</a:t>
             </a:r>
           </a:p>
         </p:txBody>
@@ -3569,14 +3571,83 @@
       </p:sp>
       <p:sp>
         <p:nvSpPr>
-          <p:cNvPr id="6" name="TextBox 5"/>
+          <p:cNvPr id="6" name="Rectangle 5"/>
+          <p:cNvSpPr/>
+          <p:nvPr/>
+        </p:nvSpPr>
+        <p:spPr>
+          <a:xfrm>
+            <a:off x="800000" y="1900000"/>
+            <a:ext cx="7433333" cy="10500000"/>
+          </a:xfrm>
+          <a:prstGeom prst="rect">
+            <a:avLst/>
+          </a:prstGeom>
+          <a:solidFill>
+            <a:srgbClr val="FFFFFF"/>
+          </a:solidFill>
+          <a:ln w="12700">
+            <a:solidFill>
+              <a:srgbClr val="E1E1E1"/>
+            </a:solidFill>
+          </a:ln>
+        </p:spPr>
+        <p:style>
+          <a:lnRef idx="1">
+            <a:schemeClr val="accent1"/>
+          </a:lnRef>
+          <a:fillRef idx="3">
+            <a:schemeClr val="accent1"/>
+          </a:fillRef>
+          <a:effectRef idx="2">
+            <a:schemeClr val="accent1"/>
+          </a:effectRef>
+          <a:fontRef idx="minor">
+            <a:schemeClr val="lt1"/>
+          </a:fontRef>
+        </p:style>
+        <p:txBody>
+          <a:bodyPr rtlCol="0" anchor="ctr"/>
+          <a:lstStyle/>
+          <a:p>
+            <a:pPr algn="ctr"/>
+          </a:p>
+        </p:txBody>
+      </p:sp>
+      <p:pic>
+        <p:nvPicPr>
+          <p:cNvPr id="7" name="Picture 6" descr="exam_abdomen.png"/>
+          <p:cNvPicPr>
+            <a:picLocks noChangeAspect="1"/>
+          </p:cNvPicPr>
+          <p:nvPr/>
+        </p:nvPicPr>
+        <p:blipFill>
+          <a:blip r:embed="rId2"/>
+          <a:stretch>
+            <a:fillRect/>
+          </a:stretch>
+        </p:blipFill>
+        <p:spPr>
+          <a:xfrm>
+            <a:off x="1994598" y="2000000"/>
+            <a:ext cx="5044137" cy="6359999"/>
+          </a:xfrm>
+          <a:prstGeom prst="rect">
+            <a:avLst/>
+          </a:prstGeom>
+        </p:spPr>
+      </p:pic>
+      <p:sp>
+        <p:nvSpPr>
+          <p:cNvPr id="8" name="TextBox 7"/>
           <p:cNvSpPr txBox="1"/>
           <p:nvPr/>
         </p:nvSpPr>
         <p:spPr>
           <a:xfrm>
-            <a:off x="800000" y="1950000"/>
-            <a:ext cx="22800000" cy="8500000"/>
+            <a:off x="950000" y="8410000"/>
+            <a:ext cx="7133333" cy="3890000"/>
           </a:xfrm>
           <a:prstGeom prst="rect">
             <a:avLst/>
@@ -3584,18 +3655,14 @@
           <a:noFill/>
         </p:spPr>
         <p:txBody>
-          <a:bodyPr wrap="square">
+          <a:bodyPr wrap="square" anchor="t">
             <a:spAutoFit/>
           </a:bodyPr>
           <a:lstStyle/>
           <a:p>
-            <a:pPr algn="l">
-              <a:spcAft>
-                <a:spcPts val="1000"/>
-              </a:spcAft>
-            </a:pPr>
-            <a:r>
-              <a:rPr sz="3200" b="0">
+            <a:pPr algn="l"/>
+            <a:r>
+              <a:rPr sz="2200" b="0">
                 <a:solidFill>
                   <a:srgbClr val="333333"/>
                 </a:solidFill>
@@ -3603,17 +3670,105 @@
                 <a:ea typeface="Open Sans"/>
                 <a:cs typeface="Open Sans"/>
               </a:rPr>
-              <a:t>•  Контролируйте повязку: при промокании усильте, не снимая нижние слои.</a:t>
-            </a:r>
-          </a:p>
-          <a:p>
-            <a:pPr algn="l">
-              <a:spcAft>
-                <a:spcPts val="1000"/>
-              </a:spcAft>
-            </a:pPr>
-            <a:r>
-              <a:rPr sz="3200" b="0">
+              <a:t>Шаг 4. Осмотр живота и таза</a:t>
+            </a:r>
+          </a:p>
+        </p:txBody>
+      </p:sp>
+      <p:sp>
+        <p:nvSpPr>
+          <p:cNvPr id="9" name="Rectangle 8"/>
+          <p:cNvSpPr/>
+          <p:nvPr/>
+        </p:nvSpPr>
+        <p:spPr>
+          <a:xfrm>
+            <a:off x="8483333" y="1900000"/>
+            <a:ext cx="7433333" cy="10500000"/>
+          </a:xfrm>
+          <a:prstGeom prst="rect">
+            <a:avLst/>
+          </a:prstGeom>
+          <a:solidFill>
+            <a:srgbClr val="FFFFFF"/>
+          </a:solidFill>
+          <a:ln w="12700">
+            <a:solidFill>
+              <a:srgbClr val="E1E1E1"/>
+            </a:solidFill>
+          </a:ln>
+        </p:spPr>
+        <p:style>
+          <a:lnRef idx="1">
+            <a:schemeClr val="accent1"/>
+          </a:lnRef>
+          <a:fillRef idx="3">
+            <a:schemeClr val="accent1"/>
+          </a:fillRef>
+          <a:effectRef idx="2">
+            <a:schemeClr val="accent1"/>
+          </a:effectRef>
+          <a:fontRef idx="minor">
+            <a:schemeClr val="lt1"/>
+          </a:fontRef>
+        </p:style>
+        <p:txBody>
+          <a:bodyPr rtlCol="0" anchor="ctr"/>
+          <a:lstStyle/>
+          <a:p>
+            <a:pPr algn="ctr"/>
+          </a:p>
+        </p:txBody>
+      </p:sp>
+      <p:pic>
+        <p:nvPicPr>
+          <p:cNvPr id="10" name="Picture 9" descr="exam_legs.png"/>
+          <p:cNvPicPr>
+            <a:picLocks noChangeAspect="1"/>
+          </p:cNvPicPr>
+          <p:nvPr/>
+        </p:nvPicPr>
+        <p:blipFill>
+          <a:blip r:embed="rId3"/>
+          <a:stretch>
+            <a:fillRect/>
+          </a:stretch>
+        </p:blipFill>
+        <p:spPr>
+          <a:xfrm>
+            <a:off x="9677931" y="2000000"/>
+            <a:ext cx="5044137" cy="6359999"/>
+          </a:xfrm>
+          <a:prstGeom prst="rect">
+            <a:avLst/>
+          </a:prstGeom>
+        </p:spPr>
+      </p:pic>
+      <p:sp>
+        <p:nvSpPr>
+          <p:cNvPr id="11" name="TextBox 10"/>
+          <p:cNvSpPr txBox="1"/>
+          <p:nvPr/>
+        </p:nvSpPr>
+        <p:spPr>
+          <a:xfrm>
+            <a:off x="8633333" y="8410000"/>
+            <a:ext cx="7133333" cy="3890000"/>
+          </a:xfrm>
+          <a:prstGeom prst="rect">
+            <a:avLst/>
+          </a:prstGeom>
+          <a:noFill/>
+        </p:spPr>
+        <p:txBody>
+          <a:bodyPr wrap="square" anchor="t">
+            <a:spAutoFit/>
+          </a:bodyPr>
+          <a:lstStyle/>
+          <a:p>
+            <a:pPr algn="l"/>
+            <a:r>
+              <a:rPr sz="2200" b="0">
                 <a:solidFill>
                   <a:srgbClr val="333333"/>
                 </a:solidFill>
@@ -3621,17 +3776,105 @@
                 <a:ea typeface="Open Sans"/>
                 <a:cs typeface="Open Sans"/>
               </a:rPr>
-              <a:t>•  Проверяйте признаки жизни: сознание, дыхание, цвет кожи.</a:t>
-            </a:r>
-          </a:p>
-          <a:p>
-            <a:pPr algn="l">
-              <a:spcAft>
-                <a:spcPts val="1000"/>
-              </a:spcAft>
-            </a:pPr>
-            <a:r>
-              <a:rPr sz="3200" b="0">
+              <a:t>Шаг 5. Осмотр ног</a:t>
+            </a:r>
+          </a:p>
+        </p:txBody>
+      </p:sp>
+      <p:sp>
+        <p:nvSpPr>
+          <p:cNvPr id="12" name="Rectangle 11"/>
+          <p:cNvSpPr/>
+          <p:nvPr/>
+        </p:nvSpPr>
+        <p:spPr>
+          <a:xfrm>
+            <a:off x="16166666" y="1900000"/>
+            <a:ext cx="7433333" cy="10500000"/>
+          </a:xfrm>
+          <a:prstGeom prst="rect">
+            <a:avLst/>
+          </a:prstGeom>
+          <a:solidFill>
+            <a:srgbClr val="FFFFFF"/>
+          </a:solidFill>
+          <a:ln w="12700">
+            <a:solidFill>
+              <a:srgbClr val="E1E1E1"/>
+            </a:solidFill>
+          </a:ln>
+        </p:spPr>
+        <p:style>
+          <a:lnRef idx="1">
+            <a:schemeClr val="accent1"/>
+          </a:lnRef>
+          <a:fillRef idx="3">
+            <a:schemeClr val="accent1"/>
+          </a:fillRef>
+          <a:effectRef idx="2">
+            <a:schemeClr val="accent1"/>
+          </a:effectRef>
+          <a:fontRef idx="minor">
+            <a:schemeClr val="lt1"/>
+          </a:fontRef>
+        </p:style>
+        <p:txBody>
+          <a:bodyPr rtlCol="0" anchor="ctr"/>
+          <a:lstStyle/>
+          <a:p>
+            <a:pPr algn="ctr"/>
+          </a:p>
+        </p:txBody>
+      </p:sp>
+      <p:pic>
+        <p:nvPicPr>
+          <p:cNvPr id="13" name="Picture 12" descr="exam_arms.png"/>
+          <p:cNvPicPr>
+            <a:picLocks noChangeAspect="1"/>
+          </p:cNvPicPr>
+          <p:nvPr/>
+        </p:nvPicPr>
+        <p:blipFill>
+          <a:blip r:embed="rId4"/>
+          <a:stretch>
+            <a:fillRect/>
+          </a:stretch>
+        </p:blipFill>
+        <p:spPr>
+          <a:xfrm>
+            <a:off x="17361264" y="2000000"/>
+            <a:ext cx="5044137" cy="6359999"/>
+          </a:xfrm>
+          <a:prstGeom prst="rect">
+            <a:avLst/>
+          </a:prstGeom>
+        </p:spPr>
+      </p:pic>
+      <p:sp>
+        <p:nvSpPr>
+          <p:cNvPr id="14" name="TextBox 13"/>
+          <p:cNvSpPr txBox="1"/>
+          <p:nvPr/>
+        </p:nvSpPr>
+        <p:spPr>
+          <a:xfrm>
+            <a:off x="16316666" y="8410000"/>
+            <a:ext cx="7133333" cy="3890000"/>
+          </a:xfrm>
+          <a:prstGeom prst="rect">
+            <a:avLst/>
+          </a:prstGeom>
+          <a:noFill/>
+        </p:spPr>
+        <p:txBody>
+          <a:bodyPr wrap="square" anchor="t">
+            <a:spAutoFit/>
+          </a:bodyPr>
+          <a:lstStyle/>
+          <a:p>
+            <a:pPr algn="l"/>
+            <a:r>
+              <a:rPr sz="2200" b="0">
                 <a:solidFill>
                   <a:srgbClr val="333333"/>
                 </a:solidFill>
@@ -3639,61 +3882,7 @@
                 <a:ea typeface="Open Sans"/>
                 <a:cs typeface="Open Sans"/>
               </a:rPr>
-              <a:t>•  Следите за жгутом: время, видимость, записка.</a:t>
-            </a:r>
-          </a:p>
-          <a:p>
-            <a:pPr algn="l">
-              <a:spcAft>
-                <a:spcPts val="1000"/>
-              </a:spcAft>
-            </a:pPr>
-            <a:r>
-              <a:rPr sz="3200" b="0">
-                <a:solidFill>
-                  <a:srgbClr val="333333"/>
-                </a:solidFill>
-                <a:latin typeface="Open Sans"/>
-                <a:ea typeface="Open Sans"/>
-                <a:cs typeface="Open Sans"/>
-              </a:rPr>
-              <a:t>•  Согрейте пострадавшего, обеспечьте покой.</a:t>
-            </a:r>
-          </a:p>
-          <a:p>
-            <a:pPr algn="l">
-              <a:spcAft>
-                <a:spcPts val="1000"/>
-              </a:spcAft>
-            </a:pPr>
-            <a:r>
-              <a:rPr sz="3200" b="0">
-                <a:solidFill>
-                  <a:srgbClr val="333333"/>
-                </a:solidFill>
-                <a:latin typeface="Open Sans"/>
-                <a:ea typeface="Open Sans"/>
-                <a:cs typeface="Open Sans"/>
-              </a:rPr>
-              <a:t>•  При ухудшении — повторный вызов СМП с динамикой.</a:t>
-            </a:r>
-          </a:p>
-          <a:p>
-            <a:pPr algn="l">
-              <a:spcAft>
-                <a:spcPts val="1000"/>
-              </a:spcAft>
-            </a:pPr>
-            <a:r>
-              <a:rPr sz="3200" b="0">
-                <a:solidFill>
-                  <a:srgbClr val="333333"/>
-                </a:solidFill>
-                <a:latin typeface="Open Sans"/>
-                <a:ea typeface="Open Sans"/>
-                <a:cs typeface="Open Sans"/>
-              </a:rPr>
-              <a:t>•  Передайте бригаде: что случилось, что сделано, время жгута.</a:t>
+              <a:t>Шаг 6. Осмотр рук</a:t>
             </a:r>
           </a:p>
         </p:txBody>
@@ -3834,7 +4023,7 @@
                 <a:ea typeface="Open Sans"/>
                 <a:cs typeface="Open Sans"/>
               </a:rPr>
-              <a:t>Когда и как ослаблять жгут</a:t>
+              <a:t>Порядок подробного осмотра</a:t>
             </a:r>
           </a:p>
         </p:txBody>
@@ -3891,7 +4080,7 @@
         <p:spPr>
           <a:xfrm>
             <a:off x="800000" y="1950000"/>
-            <a:ext cx="22800000" cy="7000000"/>
+            <a:ext cx="22800000" cy="8500000"/>
           </a:xfrm>
           <a:prstGeom prst="rect">
             <a:avLst/>
@@ -3918,7 +4107,7 @@
                 <a:ea typeface="Open Sans"/>
                 <a:cs typeface="Open Sans"/>
               </a:rPr>
-              <a:t>•  Планово ослаблять жгут на месте не рекомендуется.</a:t>
+              <a:t>•  Голова → шея → грудь → живот и таз → ноги → руки.</a:t>
             </a:r>
           </a:p>
           <a:p>
@@ -3928,15 +4117,15 @@
               </a:spcAft>
             </a:pPr>
             <a:r>
-              <a:rPr sz="3200" b="1">
-                <a:solidFill>
-                  <a:srgbClr val="CC0000"/>
+              <a:rPr sz="3200" b="0">
+                <a:solidFill>
+                  <a:srgbClr val="333333"/>
                 </a:solidFill>
                 <a:latin typeface="Open Sans"/>
                 <a:ea typeface="Open Sans"/>
                 <a:cs typeface="Open Sans"/>
               </a:rPr>
-              <a:t>•  Если время превысило 60 мин / 30 мин и СМП задерживается:</a:t>
+              <a:t>•  Спина — при возможности безопасно повернуть / осмотреть.</a:t>
             </a:r>
           </a:p>
           <a:p>
@@ -3954,7 +4143,7 @@
                 <a:ea typeface="Open Sans"/>
                 <a:cs typeface="Open Sans"/>
               </a:rPr>
-              <a:t>•  подготовьте прямое давление / давящую повязку;</a:t>
+              <a:t>•  При сознании — короткий опрос о жалобах и механизме травмы.</a:t>
             </a:r>
           </a:p>
           <a:p>
@@ -3972,7 +4161,7 @@
                 <a:ea typeface="Open Sans"/>
                 <a:cs typeface="Open Sans"/>
               </a:rPr>
-              <a:t>•  медленно ослабьте жгут, оценивая кровотечение;</a:t>
+              <a:t>•  Ищите раны, деформации, болезненность, признаки внутреннего кровотечения.</a:t>
             </a:r>
           </a:p>
           <a:p>
@@ -3990,148 +4179,7 @@
                 <a:ea typeface="Open Sans"/>
                 <a:cs typeface="Open Sans"/>
               </a:rPr>
-              <a:t>•  если кровь снова бьёт струёй — немедленно затяните и обновите время;</a:t>
-            </a:r>
-          </a:p>
-          <a:p>
-            <a:pPr algn="l">
-              <a:spcAft>
-                <a:spcPts val="1000"/>
-              </a:spcAft>
-            </a:pPr>
-            <a:r>
-              <a:rPr sz="3200" b="0">
-                <a:solidFill>
-                  <a:srgbClr val="333333"/>
-                </a:solidFill>
-                <a:latin typeface="Open Sans"/>
-                <a:ea typeface="Open Sans"/>
-                <a:cs typeface="Open Sans"/>
-              </a:rPr>
-              <a:t>•  решение о снятии, как правило, принимает медработник.</a:t>
-            </a:r>
-          </a:p>
-        </p:txBody>
-      </p:sp>
-      <p:sp>
-        <p:nvSpPr>
-          <p:cNvPr id="7" name="Rounded Rectangle 6"/>
-          <p:cNvSpPr/>
-          <p:nvPr/>
-        </p:nvSpPr>
-        <p:spPr>
-          <a:xfrm>
-            <a:off x="800000" y="11000000"/>
-            <a:ext cx="22800000" cy="1800000"/>
-          </a:xfrm>
-          <a:prstGeom prst="roundRect">
-            <a:avLst/>
-          </a:prstGeom>
-          <a:solidFill>
-            <a:srgbClr val="FAFAFA"/>
-          </a:solidFill>
-          <a:ln>
-            <a:noFill/>
-          </a:ln>
-        </p:spPr>
-        <p:style>
-          <a:lnRef idx="1">
-            <a:schemeClr val="accent1"/>
-          </a:lnRef>
-          <a:fillRef idx="3">
-            <a:schemeClr val="accent1"/>
-          </a:fillRef>
-          <a:effectRef idx="2">
-            <a:schemeClr val="accent1"/>
-          </a:effectRef>
-          <a:fontRef idx="minor">
-            <a:schemeClr val="lt1"/>
-          </a:fontRef>
-        </p:style>
-        <p:txBody>
-          <a:bodyPr rtlCol="0" anchor="ctr"/>
-          <a:lstStyle/>
-          <a:p>
-            <a:pPr algn="ctr"/>
-          </a:p>
-        </p:txBody>
-      </p:sp>
-      <p:sp>
-        <p:nvSpPr>
-          <p:cNvPr id="8" name="Rectangle 7"/>
-          <p:cNvSpPr/>
-          <p:nvPr/>
-        </p:nvSpPr>
-        <p:spPr>
-          <a:xfrm>
-            <a:off x="800000" y="11000000"/>
-            <a:ext cx="120000" cy="1800000"/>
-          </a:xfrm>
-          <a:prstGeom prst="rect">
-            <a:avLst/>
-          </a:prstGeom>
-          <a:solidFill>
-            <a:srgbClr val="CC0000"/>
-          </a:solidFill>
-          <a:ln>
-            <a:noFill/>
-          </a:ln>
-        </p:spPr>
-        <p:style>
-          <a:lnRef idx="1">
-            <a:schemeClr val="accent1"/>
-          </a:lnRef>
-          <a:fillRef idx="3">
-            <a:schemeClr val="accent1"/>
-          </a:fillRef>
-          <a:effectRef idx="2">
-            <a:schemeClr val="accent1"/>
-          </a:effectRef>
-          <a:fontRef idx="minor">
-            <a:schemeClr val="lt1"/>
-          </a:fontRef>
-        </p:style>
-        <p:txBody>
-          <a:bodyPr rtlCol="0" anchor="ctr"/>
-          <a:lstStyle/>
-          <a:p>
-            <a:pPr algn="ctr"/>
-          </a:p>
-        </p:txBody>
-      </p:sp>
-      <p:sp>
-        <p:nvSpPr>
-          <p:cNvPr id="9" name="TextBox 8"/>
-          <p:cNvSpPr txBox="1"/>
-          <p:nvPr/>
-        </p:nvSpPr>
-        <p:spPr>
-          <a:xfrm>
-            <a:off x="1200000" y="11300000"/>
-            <a:ext cx="21800000" cy="1400000"/>
-          </a:xfrm>
-          <a:prstGeom prst="rect">
-            <a:avLst/>
-          </a:prstGeom>
-          <a:noFill/>
-        </p:spPr>
-        <p:txBody>
-          <a:bodyPr wrap="square" anchor="ctr">
-            <a:spAutoFit/>
-          </a:bodyPr>
-          <a:lstStyle/>
-          <a:p>
-            <a:pPr algn="l"/>
-            <a:r>
-              <a:rPr sz="2600" b="1">
-                <a:solidFill>
-                  <a:srgbClr val="CC0000"/>
-                </a:solidFill>
-                <a:latin typeface="Open Sans"/>
-                <a:ea typeface="Open Sans"/>
-                <a:cs typeface="Open Sans"/>
-              </a:rPr>
-              <a:t>Лимит жгута: ≤ 60 мин (тепло) · ≤ 30 мин (холод)!</a:t>
+              <a:t>•  Устраняйте угрозы по мере выявления (повязка, фиксация, холод).</a:t>
             </a:r>
           </a:p>
         </p:txBody>
@@ -4272,7 +4320,7 @@
                 <a:ea typeface="Open Sans"/>
                 <a:cs typeface="Open Sans"/>
               </a:rPr>
-              <a:t>Краткое резюме</a:t>
+              <a:t>Действия после остановки кровотечения</a:t>
             </a:r>
           </a:p>
         </p:txBody>
@@ -4322,102 +4370,14 @@
       </p:sp>
       <p:sp>
         <p:nvSpPr>
-          <p:cNvPr id="6" name="Rectangle 5"/>
-          <p:cNvSpPr/>
+          <p:cNvPr id="6" name="TextBox 5"/>
+          <p:cNvSpPr txBox="1"/>
           <p:nvPr/>
         </p:nvSpPr>
         <p:spPr>
           <a:xfrm>
             <a:off x="800000" y="1950000"/>
-            <a:ext cx="22800000" cy="1600000"/>
-          </a:xfrm>
-          <a:prstGeom prst="rect">
-            <a:avLst/>
-          </a:prstGeom>
-          <a:solidFill>
-            <a:srgbClr val="FFFFFF"/>
-          </a:solidFill>
-          <a:ln w="12700">
-            <a:solidFill>
-              <a:srgbClr val="E1E1E1"/>
-            </a:solidFill>
-          </a:ln>
-        </p:spPr>
-        <p:style>
-          <a:lnRef idx="1">
-            <a:schemeClr val="accent1"/>
-          </a:lnRef>
-          <a:fillRef idx="3">
-            <a:schemeClr val="accent1"/>
-          </a:fillRef>
-          <a:effectRef idx="2">
-            <a:schemeClr val="accent1"/>
-          </a:effectRef>
-          <a:fontRef idx="minor">
-            <a:schemeClr val="lt1"/>
-          </a:fontRef>
-        </p:style>
-        <p:txBody>
-          <a:bodyPr rtlCol="0" anchor="ctr"/>
-          <a:lstStyle/>
-          <a:p>
-            <a:pPr algn="ctr"/>
-          </a:p>
-        </p:txBody>
-      </p:sp>
-      <p:sp>
-        <p:nvSpPr>
-          <p:cNvPr id="7" name="Rectangle 6"/>
-          <p:cNvSpPr/>
-          <p:nvPr/>
-        </p:nvSpPr>
-        <p:spPr>
-          <a:xfrm>
-            <a:off x="800000" y="1950000"/>
-            <a:ext cx="120000" cy="1600000"/>
-          </a:xfrm>
-          <a:prstGeom prst="rect">
-            <a:avLst/>
-          </a:prstGeom>
-          <a:solidFill>
-            <a:srgbClr val="0055AA"/>
-          </a:solidFill>
-          <a:ln>
-            <a:noFill/>
-          </a:ln>
-        </p:spPr>
-        <p:style>
-          <a:lnRef idx="1">
-            <a:schemeClr val="accent1"/>
-          </a:lnRef>
-          <a:fillRef idx="3">
-            <a:schemeClr val="accent1"/>
-          </a:fillRef>
-          <a:effectRef idx="2">
-            <a:schemeClr val="accent1"/>
-          </a:effectRef>
-          <a:fontRef idx="minor">
-            <a:schemeClr val="lt1"/>
-          </a:fontRef>
-        </p:style>
-        <p:txBody>
-          <a:bodyPr rtlCol="0" anchor="ctr"/>
-          <a:lstStyle/>
-          <a:p>
-            <a:pPr algn="ctr"/>
-          </a:p>
-        </p:txBody>
-      </p:sp>
-      <p:sp>
-        <p:nvSpPr>
-          <p:cNvPr id="8" name="TextBox 7"/>
-          <p:cNvSpPr txBox="1"/>
-          <p:nvPr/>
-        </p:nvSpPr>
-        <p:spPr>
-          <a:xfrm>
-            <a:off x="1200000" y="2250000"/>
-            <a:ext cx="21800000" cy="1100000"/>
+            <a:ext cx="22800000" cy="8500000"/>
           </a:xfrm>
           <a:prstGeom prst="rect">
             <a:avLst/>
@@ -4425,14 +4385,18 @@
           <a:noFill/>
         </p:spPr>
         <p:txBody>
-          <a:bodyPr wrap="square" anchor="ctr">
+          <a:bodyPr wrap="square">
             <a:spAutoFit/>
           </a:bodyPr>
           <a:lstStyle/>
           <a:p>
-            <a:pPr algn="l"/>
-            <a:r>
-              <a:rPr sz="2600" b="0">
+            <a:pPr algn="l">
+              <a:spcAft>
+                <a:spcPts val="1000"/>
+              </a:spcAft>
+            </a:pPr>
+            <a:r>
+              <a:rPr sz="3200" b="0">
                 <a:solidFill>
                   <a:srgbClr val="333333"/>
                 </a:solidFill>
@@ -4440,124 +4404,17 @@
                 <a:ea typeface="Open Sans"/>
                 <a:cs typeface="Open Sans"/>
               </a:rPr>
-              <a:t>Алгоритм: безопасность → обзорный осмотр → остановка крови → признаки жизни → СМП.</a:t>
-            </a:r>
-          </a:p>
-        </p:txBody>
-      </p:sp>
-      <p:sp>
-        <p:nvSpPr>
-          <p:cNvPr id="9" name="Rectangle 8"/>
-          <p:cNvSpPr/>
-          <p:nvPr/>
-        </p:nvSpPr>
-        <p:spPr>
-          <a:xfrm>
-            <a:off x="800000" y="3850000"/>
-            <a:ext cx="22800000" cy="1600000"/>
-          </a:xfrm>
-          <a:prstGeom prst="rect">
-            <a:avLst/>
-          </a:prstGeom>
-          <a:solidFill>
-            <a:srgbClr val="FFFFFF"/>
-          </a:solidFill>
-          <a:ln w="12700">
-            <a:solidFill>
-              <a:srgbClr val="E1E1E1"/>
-            </a:solidFill>
-          </a:ln>
-        </p:spPr>
-        <p:style>
-          <a:lnRef idx="1">
-            <a:schemeClr val="accent1"/>
-          </a:lnRef>
-          <a:fillRef idx="3">
-            <a:schemeClr val="accent1"/>
-          </a:fillRef>
-          <a:effectRef idx="2">
-            <a:schemeClr val="accent1"/>
-          </a:effectRef>
-          <a:fontRef idx="minor">
-            <a:schemeClr val="lt1"/>
-          </a:fontRef>
-        </p:style>
-        <p:txBody>
-          <a:bodyPr rtlCol="0" anchor="ctr"/>
-          <a:lstStyle/>
-          <a:p>
-            <a:pPr algn="ctr"/>
-          </a:p>
-        </p:txBody>
-      </p:sp>
-      <p:sp>
-        <p:nvSpPr>
-          <p:cNvPr id="10" name="Rectangle 9"/>
-          <p:cNvSpPr/>
-          <p:nvPr/>
-        </p:nvSpPr>
-        <p:spPr>
-          <a:xfrm>
-            <a:off x="800000" y="3850000"/>
-            <a:ext cx="120000" cy="1600000"/>
-          </a:xfrm>
-          <a:prstGeom prst="rect">
-            <a:avLst/>
-          </a:prstGeom>
-          <a:solidFill>
-            <a:srgbClr val="0055AA"/>
-          </a:solidFill>
-          <a:ln>
-            <a:noFill/>
-          </a:ln>
-        </p:spPr>
-        <p:style>
-          <a:lnRef idx="1">
-            <a:schemeClr val="accent1"/>
-          </a:lnRef>
-          <a:fillRef idx="3">
-            <a:schemeClr val="accent1"/>
-          </a:fillRef>
-          <a:effectRef idx="2">
-            <a:schemeClr val="accent1"/>
-          </a:effectRef>
-          <a:fontRef idx="minor">
-            <a:schemeClr val="lt1"/>
-          </a:fontRef>
-        </p:style>
-        <p:txBody>
-          <a:bodyPr rtlCol="0" anchor="ctr"/>
-          <a:lstStyle/>
-          <a:p>
-            <a:pPr algn="ctr"/>
-          </a:p>
-        </p:txBody>
-      </p:sp>
-      <p:sp>
-        <p:nvSpPr>
-          <p:cNvPr id="11" name="TextBox 10"/>
-          <p:cNvSpPr txBox="1"/>
-          <p:nvPr/>
-        </p:nvSpPr>
-        <p:spPr>
-          <a:xfrm>
-            <a:off x="1200000" y="4150000"/>
-            <a:ext cx="21800000" cy="1100000"/>
-          </a:xfrm>
-          <a:prstGeom prst="rect">
-            <a:avLst/>
-          </a:prstGeom>
-          <a:noFill/>
-        </p:spPr>
-        <p:txBody>
-          <a:bodyPr wrap="square" anchor="ctr">
-            <a:spAutoFit/>
-          </a:bodyPr>
-          <a:lstStyle/>
-          <a:p>
-            <a:pPr algn="l"/>
-            <a:r>
-              <a:rPr sz="2600" b="0">
+              <a:t>•  Контролируйте повязку: при промокании усильте, не снимая нижние слои.</a:t>
+            </a:r>
+          </a:p>
+          <a:p>
+            <a:pPr algn="l">
+              <a:spcAft>
+                <a:spcPts val="1000"/>
+              </a:spcAft>
+            </a:pPr>
+            <a:r>
+              <a:rPr sz="3200" b="0">
                 <a:solidFill>
                   <a:srgbClr val="333333"/>
                 </a:solidFill>
@@ -4565,124 +4422,17 @@
                 <a:ea typeface="Open Sans"/>
                 <a:cs typeface="Open Sans"/>
               </a:rPr>
-              <a:t>Способы: от простого к сложному — давление → повязка → жгут.</a:t>
-            </a:r>
-          </a:p>
-        </p:txBody>
-      </p:sp>
-      <p:sp>
-        <p:nvSpPr>
-          <p:cNvPr id="12" name="Rectangle 11"/>
-          <p:cNvSpPr/>
-          <p:nvPr/>
-        </p:nvSpPr>
-        <p:spPr>
-          <a:xfrm>
-            <a:off x="800000" y="5750000"/>
-            <a:ext cx="22800000" cy="1600000"/>
-          </a:xfrm>
-          <a:prstGeom prst="rect">
-            <a:avLst/>
-          </a:prstGeom>
-          <a:solidFill>
-            <a:srgbClr val="FFFFFF"/>
-          </a:solidFill>
-          <a:ln w="12700">
-            <a:solidFill>
-              <a:srgbClr val="E1E1E1"/>
-            </a:solidFill>
-          </a:ln>
-        </p:spPr>
-        <p:style>
-          <a:lnRef idx="1">
-            <a:schemeClr val="accent1"/>
-          </a:lnRef>
-          <a:fillRef idx="3">
-            <a:schemeClr val="accent1"/>
-          </a:fillRef>
-          <a:effectRef idx="2">
-            <a:schemeClr val="accent1"/>
-          </a:effectRef>
-          <a:fontRef idx="minor">
-            <a:schemeClr val="lt1"/>
-          </a:fontRef>
-        </p:style>
-        <p:txBody>
-          <a:bodyPr rtlCol="0" anchor="ctr"/>
-          <a:lstStyle/>
-          <a:p>
-            <a:pPr algn="ctr"/>
-          </a:p>
-        </p:txBody>
-      </p:sp>
-      <p:sp>
-        <p:nvSpPr>
-          <p:cNvPr id="13" name="Rectangle 12"/>
-          <p:cNvSpPr/>
-          <p:nvPr/>
-        </p:nvSpPr>
-        <p:spPr>
-          <a:xfrm>
-            <a:off x="800000" y="5750000"/>
-            <a:ext cx="120000" cy="1600000"/>
-          </a:xfrm>
-          <a:prstGeom prst="rect">
-            <a:avLst/>
-          </a:prstGeom>
-          <a:solidFill>
-            <a:srgbClr val="0055AA"/>
-          </a:solidFill>
-          <a:ln>
-            <a:noFill/>
-          </a:ln>
-        </p:spPr>
-        <p:style>
-          <a:lnRef idx="1">
-            <a:schemeClr val="accent1"/>
-          </a:lnRef>
-          <a:fillRef idx="3">
-            <a:schemeClr val="accent1"/>
-          </a:fillRef>
-          <a:effectRef idx="2">
-            <a:schemeClr val="accent1"/>
-          </a:effectRef>
-          <a:fontRef idx="minor">
-            <a:schemeClr val="lt1"/>
-          </a:fontRef>
-        </p:style>
-        <p:txBody>
-          <a:bodyPr rtlCol="0" anchor="ctr"/>
-          <a:lstStyle/>
-          <a:p>
-            <a:pPr algn="ctr"/>
-          </a:p>
-        </p:txBody>
-      </p:sp>
-      <p:sp>
-        <p:nvSpPr>
-          <p:cNvPr id="14" name="TextBox 13"/>
-          <p:cNvSpPr txBox="1"/>
-          <p:nvPr/>
-        </p:nvSpPr>
-        <p:spPr>
-          <a:xfrm>
-            <a:off x="1200000" y="6050000"/>
-            <a:ext cx="21800000" cy="1100000"/>
-          </a:xfrm>
-          <a:prstGeom prst="rect">
-            <a:avLst/>
-          </a:prstGeom>
-          <a:noFill/>
-        </p:spPr>
-        <p:txBody>
-          <a:bodyPr wrap="square" anchor="ctr">
-            <a:spAutoFit/>
-          </a:bodyPr>
-          <a:lstStyle/>
-          <a:p>
-            <a:pPr algn="l"/>
-            <a:r>
-              <a:rPr sz="2600" b="0">
+              <a:t>•  Проверяйте признаки жизни: сознание, дыхание, цвет кожи.</a:t>
+            </a:r>
+          </a:p>
+          <a:p>
+            <a:pPr algn="l">
+              <a:spcAft>
+                <a:spcPts val="1000"/>
+              </a:spcAft>
+            </a:pPr>
+            <a:r>
+              <a:rPr sz="3200" b="0">
                 <a:solidFill>
                   <a:srgbClr val="333333"/>
                 </a:solidFill>
@@ -4690,124 +4440,17 @@
                 <a:ea typeface="Open Sans"/>
                 <a:cs typeface="Open Sans"/>
               </a:rPr>
-              <a:t>Профилактика шока: кровь, положение, иммобилизация, тепло.</a:t>
-            </a:r>
-          </a:p>
-        </p:txBody>
-      </p:sp>
-      <p:sp>
-        <p:nvSpPr>
-          <p:cNvPr id="15" name="Rectangle 14"/>
-          <p:cNvSpPr/>
-          <p:nvPr/>
-        </p:nvSpPr>
-        <p:spPr>
-          <a:xfrm>
-            <a:off x="800000" y="7650000"/>
-            <a:ext cx="22800000" cy="1600000"/>
-          </a:xfrm>
-          <a:prstGeom prst="rect">
-            <a:avLst/>
-          </a:prstGeom>
-          <a:solidFill>
-            <a:srgbClr val="FFFFFF"/>
-          </a:solidFill>
-          <a:ln w="12700">
-            <a:solidFill>
-              <a:srgbClr val="E1E1E1"/>
-            </a:solidFill>
-          </a:ln>
-        </p:spPr>
-        <p:style>
-          <a:lnRef idx="1">
-            <a:schemeClr val="accent1"/>
-          </a:lnRef>
-          <a:fillRef idx="3">
-            <a:schemeClr val="accent1"/>
-          </a:fillRef>
-          <a:effectRef idx="2">
-            <a:schemeClr val="accent1"/>
-          </a:effectRef>
-          <a:fontRef idx="minor">
-            <a:schemeClr val="lt1"/>
-          </a:fontRef>
-        </p:style>
-        <p:txBody>
-          <a:bodyPr rtlCol="0" anchor="ctr"/>
-          <a:lstStyle/>
-          <a:p>
-            <a:pPr algn="ctr"/>
-          </a:p>
-        </p:txBody>
-      </p:sp>
-      <p:sp>
-        <p:nvSpPr>
-          <p:cNvPr id="16" name="Rectangle 15"/>
-          <p:cNvSpPr/>
-          <p:nvPr/>
-        </p:nvSpPr>
-        <p:spPr>
-          <a:xfrm>
-            <a:off x="800000" y="7650000"/>
-            <a:ext cx="120000" cy="1600000"/>
-          </a:xfrm>
-          <a:prstGeom prst="rect">
-            <a:avLst/>
-          </a:prstGeom>
-          <a:solidFill>
-            <a:srgbClr val="0055AA"/>
-          </a:solidFill>
-          <a:ln>
-            <a:noFill/>
-          </a:ln>
-        </p:spPr>
-        <p:style>
-          <a:lnRef idx="1">
-            <a:schemeClr val="accent1"/>
-          </a:lnRef>
-          <a:fillRef idx="3">
-            <a:schemeClr val="accent1"/>
-          </a:fillRef>
-          <a:effectRef idx="2">
-            <a:schemeClr val="accent1"/>
-          </a:effectRef>
-          <a:fontRef idx="minor">
-            <a:schemeClr val="lt1"/>
-          </a:fontRef>
-        </p:style>
-        <p:txBody>
-          <a:bodyPr rtlCol="0" anchor="ctr"/>
-          <a:lstStyle/>
-          <a:p>
-            <a:pPr algn="ctr"/>
-          </a:p>
-        </p:txBody>
-      </p:sp>
-      <p:sp>
-        <p:nvSpPr>
-          <p:cNvPr id="17" name="TextBox 16"/>
-          <p:cNvSpPr txBox="1"/>
-          <p:nvPr/>
-        </p:nvSpPr>
-        <p:spPr>
-          <a:xfrm>
-            <a:off x="1200000" y="7950000"/>
-            <a:ext cx="21800000" cy="1100000"/>
-          </a:xfrm>
-          <a:prstGeom prst="rect">
-            <a:avLst/>
-          </a:prstGeom>
-          <a:noFill/>
-        </p:spPr>
-        <p:txBody>
-          <a:bodyPr wrap="square" anchor="ctr">
-            <a:spAutoFit/>
-          </a:bodyPr>
-          <a:lstStyle/>
-          <a:p>
-            <a:pPr algn="l"/>
-            <a:r>
-              <a:rPr sz="2600" b="0">
+              <a:t>•  Следите за жгутом: время, видимость, записка.</a:t>
+            </a:r>
+          </a:p>
+          <a:p>
+            <a:pPr algn="l">
+              <a:spcAft>
+                <a:spcPts val="1000"/>
+              </a:spcAft>
+            </a:pPr>
+            <a:r>
+              <a:rPr sz="3200" b="0">
                 <a:solidFill>
                   <a:srgbClr val="333333"/>
                 </a:solidFill>
@@ -4815,7 +4458,43 @@
                 <a:ea typeface="Open Sans"/>
                 <a:cs typeface="Open Sans"/>
               </a:rPr>
-              <a:t>После остановки — контроль повязки / жгута и состояния до передачи СМП.</a:t>
+              <a:t>•  Согрейте пострадавшего, обеспечьте покой.</a:t>
+            </a:r>
+          </a:p>
+          <a:p>
+            <a:pPr algn="l">
+              <a:spcAft>
+                <a:spcPts val="1000"/>
+              </a:spcAft>
+            </a:pPr>
+            <a:r>
+              <a:rPr sz="3200" b="0">
+                <a:solidFill>
+                  <a:srgbClr val="333333"/>
+                </a:solidFill>
+                <a:latin typeface="Open Sans"/>
+                <a:ea typeface="Open Sans"/>
+                <a:cs typeface="Open Sans"/>
+              </a:rPr>
+              <a:t>•  При ухудшении — повторный вызов СМП с динамикой.</a:t>
+            </a:r>
+          </a:p>
+          <a:p>
+            <a:pPr algn="l">
+              <a:spcAft>
+                <a:spcPts val="1000"/>
+              </a:spcAft>
+            </a:pPr>
+            <a:r>
+              <a:rPr sz="3200" b="0">
+                <a:solidFill>
+                  <a:srgbClr val="333333"/>
+                </a:solidFill>
+                <a:latin typeface="Open Sans"/>
+                <a:ea typeface="Open Sans"/>
+                <a:cs typeface="Open Sans"/>
+              </a:rPr>
+              <a:t>•  Передайте бригаде: что случилось, что сделано, время жгута.</a:t>
             </a:r>
           </a:p>
         </p:txBody>
@@ -4932,6 +4611,1128 @@
         </p:nvSpPr>
         <p:spPr>
           <a:xfrm>
+            <a:off x="800000" y="350000"/>
+            <a:ext cx="22800000" cy="1000000"/>
+          </a:xfrm>
+          <a:prstGeom prst="rect">
+            <a:avLst/>
+          </a:prstGeom>
+          <a:noFill/>
+        </p:spPr>
+        <p:txBody>
+          <a:bodyPr wrap="square" anchor="t">
+            <a:spAutoFit/>
+          </a:bodyPr>
+          <a:lstStyle/>
+          <a:p>
+            <a:pPr algn="l"/>
+            <a:r>
+              <a:rPr sz="4600" b="1">
+                <a:solidFill>
+                  <a:srgbClr val="333333"/>
+                </a:solidFill>
+                <a:latin typeface="Open Sans"/>
+                <a:ea typeface="Open Sans"/>
+                <a:cs typeface="Open Sans"/>
+              </a:rPr>
+              <a:t>Когда и как ослаблять жгут</a:t>
+            </a:r>
+          </a:p>
+        </p:txBody>
+      </p:sp>
+      <p:sp>
+        <p:nvSpPr>
+          <p:cNvPr id="5" name="Rectangle 4"/>
+          <p:cNvSpPr/>
+          <p:nvPr/>
+        </p:nvSpPr>
+        <p:spPr>
+          <a:xfrm>
+            <a:off x="800000" y="1450000"/>
+            <a:ext cx="22800000" cy="20000"/>
+          </a:xfrm>
+          <a:prstGeom prst="rect">
+            <a:avLst/>
+          </a:prstGeom>
+          <a:solidFill>
+            <a:srgbClr val="E1E1E1"/>
+          </a:solidFill>
+          <a:ln>
+            <a:noFill/>
+          </a:ln>
+        </p:spPr>
+        <p:style>
+          <a:lnRef idx="1">
+            <a:schemeClr val="accent1"/>
+          </a:lnRef>
+          <a:fillRef idx="3">
+            <a:schemeClr val="accent1"/>
+          </a:fillRef>
+          <a:effectRef idx="2">
+            <a:schemeClr val="accent1"/>
+          </a:effectRef>
+          <a:fontRef idx="minor">
+            <a:schemeClr val="lt1"/>
+          </a:fontRef>
+        </p:style>
+        <p:txBody>
+          <a:bodyPr rtlCol="0" anchor="ctr"/>
+          <a:lstStyle/>
+          <a:p>
+            <a:pPr algn="ctr"/>
+          </a:p>
+        </p:txBody>
+      </p:sp>
+      <p:sp>
+        <p:nvSpPr>
+          <p:cNvPr id="6" name="TextBox 5"/>
+          <p:cNvSpPr txBox="1"/>
+          <p:nvPr/>
+        </p:nvSpPr>
+        <p:spPr>
+          <a:xfrm>
+            <a:off x="800000" y="1950000"/>
+            <a:ext cx="22800000" cy="7000000"/>
+          </a:xfrm>
+          <a:prstGeom prst="rect">
+            <a:avLst/>
+          </a:prstGeom>
+          <a:noFill/>
+        </p:spPr>
+        <p:txBody>
+          <a:bodyPr wrap="square">
+            <a:spAutoFit/>
+          </a:bodyPr>
+          <a:lstStyle/>
+          <a:p>
+            <a:pPr algn="l">
+              <a:spcAft>
+                <a:spcPts val="1000"/>
+              </a:spcAft>
+            </a:pPr>
+            <a:r>
+              <a:rPr sz="3200" b="0">
+                <a:solidFill>
+                  <a:srgbClr val="333333"/>
+                </a:solidFill>
+                <a:latin typeface="Open Sans"/>
+                <a:ea typeface="Open Sans"/>
+                <a:cs typeface="Open Sans"/>
+              </a:rPr>
+              <a:t>•  Планово ослаблять жгут на месте не рекомендуется.</a:t>
+            </a:r>
+          </a:p>
+          <a:p>
+            <a:pPr algn="l">
+              <a:spcAft>
+                <a:spcPts val="1000"/>
+              </a:spcAft>
+            </a:pPr>
+            <a:r>
+              <a:rPr sz="3200" b="1">
+                <a:solidFill>
+                  <a:srgbClr val="CC0000"/>
+                </a:solidFill>
+                <a:latin typeface="Open Sans"/>
+                <a:ea typeface="Open Sans"/>
+                <a:cs typeface="Open Sans"/>
+              </a:rPr>
+              <a:t>•  Если время превысило 60 мин / 30 мин и СМП задерживается:</a:t>
+            </a:r>
+          </a:p>
+          <a:p>
+            <a:pPr algn="l">
+              <a:spcAft>
+                <a:spcPts val="1000"/>
+              </a:spcAft>
+            </a:pPr>
+            <a:r>
+              <a:rPr sz="3200" b="0">
+                <a:solidFill>
+                  <a:srgbClr val="333333"/>
+                </a:solidFill>
+                <a:latin typeface="Open Sans"/>
+                <a:ea typeface="Open Sans"/>
+                <a:cs typeface="Open Sans"/>
+              </a:rPr>
+              <a:t>•  подготовьте прямое давление / давящую повязку;</a:t>
+            </a:r>
+          </a:p>
+          <a:p>
+            <a:pPr algn="l">
+              <a:spcAft>
+                <a:spcPts val="1000"/>
+              </a:spcAft>
+            </a:pPr>
+            <a:r>
+              <a:rPr sz="3200" b="0">
+                <a:solidFill>
+                  <a:srgbClr val="333333"/>
+                </a:solidFill>
+                <a:latin typeface="Open Sans"/>
+                <a:ea typeface="Open Sans"/>
+                <a:cs typeface="Open Sans"/>
+              </a:rPr>
+              <a:t>•  медленно ослабьте жгут, оценивая кровотечение;</a:t>
+            </a:r>
+          </a:p>
+          <a:p>
+            <a:pPr algn="l">
+              <a:spcAft>
+                <a:spcPts val="1000"/>
+              </a:spcAft>
+            </a:pPr>
+            <a:r>
+              <a:rPr sz="3200" b="0">
+                <a:solidFill>
+                  <a:srgbClr val="333333"/>
+                </a:solidFill>
+                <a:latin typeface="Open Sans"/>
+                <a:ea typeface="Open Sans"/>
+                <a:cs typeface="Open Sans"/>
+              </a:rPr>
+              <a:t>•  если кровь снова бьёт струёй — немедленно затяните и обновите время;</a:t>
+            </a:r>
+          </a:p>
+          <a:p>
+            <a:pPr algn="l">
+              <a:spcAft>
+                <a:spcPts val="1000"/>
+              </a:spcAft>
+            </a:pPr>
+            <a:r>
+              <a:rPr sz="3200" b="0">
+                <a:solidFill>
+                  <a:srgbClr val="333333"/>
+                </a:solidFill>
+                <a:latin typeface="Open Sans"/>
+                <a:ea typeface="Open Sans"/>
+                <a:cs typeface="Open Sans"/>
+              </a:rPr>
+              <a:t>•  решение о снятии, как правило, принимает медработник.</a:t>
+            </a:r>
+          </a:p>
+        </p:txBody>
+      </p:sp>
+      <p:sp>
+        <p:nvSpPr>
+          <p:cNvPr id="7" name="Rounded Rectangle 6"/>
+          <p:cNvSpPr/>
+          <p:nvPr/>
+        </p:nvSpPr>
+        <p:spPr>
+          <a:xfrm>
+            <a:off x="800000" y="11000000"/>
+            <a:ext cx="22800000" cy="1800000"/>
+          </a:xfrm>
+          <a:prstGeom prst="roundRect">
+            <a:avLst/>
+          </a:prstGeom>
+          <a:solidFill>
+            <a:srgbClr val="FAFAFA"/>
+          </a:solidFill>
+          <a:ln>
+            <a:noFill/>
+          </a:ln>
+        </p:spPr>
+        <p:style>
+          <a:lnRef idx="1">
+            <a:schemeClr val="accent1"/>
+          </a:lnRef>
+          <a:fillRef idx="3">
+            <a:schemeClr val="accent1"/>
+          </a:fillRef>
+          <a:effectRef idx="2">
+            <a:schemeClr val="accent1"/>
+          </a:effectRef>
+          <a:fontRef idx="minor">
+            <a:schemeClr val="lt1"/>
+          </a:fontRef>
+        </p:style>
+        <p:txBody>
+          <a:bodyPr rtlCol="0" anchor="ctr"/>
+          <a:lstStyle/>
+          <a:p>
+            <a:pPr algn="ctr"/>
+          </a:p>
+        </p:txBody>
+      </p:sp>
+      <p:sp>
+        <p:nvSpPr>
+          <p:cNvPr id="8" name="Rectangle 7"/>
+          <p:cNvSpPr/>
+          <p:nvPr/>
+        </p:nvSpPr>
+        <p:spPr>
+          <a:xfrm>
+            <a:off x="800000" y="11000000"/>
+            <a:ext cx="120000" cy="1800000"/>
+          </a:xfrm>
+          <a:prstGeom prst="rect">
+            <a:avLst/>
+          </a:prstGeom>
+          <a:solidFill>
+            <a:srgbClr val="CC0000"/>
+          </a:solidFill>
+          <a:ln>
+            <a:noFill/>
+          </a:ln>
+        </p:spPr>
+        <p:style>
+          <a:lnRef idx="1">
+            <a:schemeClr val="accent1"/>
+          </a:lnRef>
+          <a:fillRef idx="3">
+            <a:schemeClr val="accent1"/>
+          </a:fillRef>
+          <a:effectRef idx="2">
+            <a:schemeClr val="accent1"/>
+          </a:effectRef>
+          <a:fontRef idx="minor">
+            <a:schemeClr val="lt1"/>
+          </a:fontRef>
+        </p:style>
+        <p:txBody>
+          <a:bodyPr rtlCol="0" anchor="ctr"/>
+          <a:lstStyle/>
+          <a:p>
+            <a:pPr algn="ctr"/>
+          </a:p>
+        </p:txBody>
+      </p:sp>
+      <p:sp>
+        <p:nvSpPr>
+          <p:cNvPr id="9" name="TextBox 8"/>
+          <p:cNvSpPr txBox="1"/>
+          <p:nvPr/>
+        </p:nvSpPr>
+        <p:spPr>
+          <a:xfrm>
+            <a:off x="1200000" y="11300000"/>
+            <a:ext cx="21800000" cy="1400000"/>
+          </a:xfrm>
+          <a:prstGeom prst="rect">
+            <a:avLst/>
+          </a:prstGeom>
+          <a:noFill/>
+        </p:spPr>
+        <p:txBody>
+          <a:bodyPr wrap="square" anchor="ctr">
+            <a:spAutoFit/>
+          </a:bodyPr>
+          <a:lstStyle/>
+          <a:p>
+            <a:pPr algn="l"/>
+            <a:r>
+              <a:rPr sz="2600" b="1">
+                <a:solidFill>
+                  <a:srgbClr val="CC0000"/>
+                </a:solidFill>
+                <a:latin typeface="Open Sans"/>
+                <a:ea typeface="Open Sans"/>
+                <a:cs typeface="Open Sans"/>
+              </a:rPr>
+              <a:t>Лимит жгута: ≤ 60 мин (тепло) · ≤ 30 мин (холод)!</a:t>
+            </a:r>
+          </a:p>
+        </p:txBody>
+      </p:sp>
+    </p:spTree>
+  </p:cSld>
+  <p:clrMapOvr>
+    <a:masterClrMapping/>
+  </p:clrMapOvr>
+</p:sld>
+</file>
+
+<file path=ppt/slides/slide14.xml><?xml version="1.0" encoding="utf-8"?>
+<p:sld xmlns:a="http://schemas.openxmlformats.org/drawingml/2006/main" xmlns:p="http://schemas.openxmlformats.org/presentationml/2006/main" xmlns:r="http://schemas.openxmlformats.org/officeDocument/2006/relationships">
+  <p:cSld>
+    <p:spTree>
+      <p:nvGrpSpPr>
+        <p:cNvPr id="1" name=""/>
+        <p:cNvGrpSpPr/>
+        <p:nvPr/>
+      </p:nvGrpSpPr>
+      <p:grpSpPr/>
+      <p:sp>
+        <p:nvSpPr>
+          <p:cNvPr id="2" name="Rectangle 1"/>
+          <p:cNvSpPr/>
+          <p:nvPr/>
+        </p:nvSpPr>
+        <p:spPr>
+          <a:xfrm>
+            <a:off x="0" y="0"/>
+            <a:ext cx="24384000" cy="13716000"/>
+          </a:xfrm>
+          <a:prstGeom prst="rect">
+            <a:avLst/>
+          </a:prstGeom>
+          <a:solidFill>
+            <a:srgbClr val="FFFFFF"/>
+          </a:solidFill>
+          <a:ln>
+            <a:noFill/>
+          </a:ln>
+        </p:spPr>
+        <p:style>
+          <a:lnRef idx="1">
+            <a:schemeClr val="accent1"/>
+          </a:lnRef>
+          <a:fillRef idx="3">
+            <a:schemeClr val="accent1"/>
+          </a:fillRef>
+          <a:effectRef idx="2">
+            <a:schemeClr val="accent1"/>
+          </a:effectRef>
+          <a:fontRef idx="minor">
+            <a:schemeClr val="lt1"/>
+          </a:fontRef>
+        </p:style>
+        <p:txBody>
+          <a:bodyPr rtlCol="0" anchor="ctr"/>
+          <a:lstStyle/>
+          <a:p>
+            <a:pPr algn="ctr"/>
+          </a:p>
+        </p:txBody>
+      </p:sp>
+      <p:sp>
+        <p:nvSpPr>
+          <p:cNvPr id="3" name="Rectangle 2"/>
+          <p:cNvSpPr/>
+          <p:nvPr/>
+        </p:nvSpPr>
+        <p:spPr>
+          <a:xfrm>
+            <a:off x="0" y="0"/>
+            <a:ext cx="24384000" cy="120000"/>
+          </a:xfrm>
+          <a:prstGeom prst="rect">
+            <a:avLst/>
+          </a:prstGeom>
+          <a:solidFill>
+            <a:srgbClr val="DDDDDD"/>
+          </a:solidFill>
+          <a:ln>
+            <a:noFill/>
+          </a:ln>
+        </p:spPr>
+        <p:style>
+          <a:lnRef idx="1">
+            <a:schemeClr val="accent1"/>
+          </a:lnRef>
+          <a:fillRef idx="3">
+            <a:schemeClr val="accent1"/>
+          </a:fillRef>
+          <a:effectRef idx="2">
+            <a:schemeClr val="accent1"/>
+          </a:effectRef>
+          <a:fontRef idx="minor">
+            <a:schemeClr val="lt1"/>
+          </a:fontRef>
+        </p:style>
+        <p:txBody>
+          <a:bodyPr rtlCol="0" anchor="ctr"/>
+          <a:lstStyle/>
+          <a:p>
+            <a:pPr algn="ctr"/>
+          </a:p>
+        </p:txBody>
+      </p:sp>
+      <p:sp>
+        <p:nvSpPr>
+          <p:cNvPr id="4" name="TextBox 3"/>
+          <p:cNvSpPr txBox="1"/>
+          <p:nvPr/>
+        </p:nvSpPr>
+        <p:spPr>
+          <a:xfrm>
+            <a:off x="800000" y="350000"/>
+            <a:ext cx="22800000" cy="1000000"/>
+          </a:xfrm>
+          <a:prstGeom prst="rect">
+            <a:avLst/>
+          </a:prstGeom>
+          <a:noFill/>
+        </p:spPr>
+        <p:txBody>
+          <a:bodyPr wrap="square" anchor="t">
+            <a:spAutoFit/>
+          </a:bodyPr>
+          <a:lstStyle/>
+          <a:p>
+            <a:pPr algn="l"/>
+            <a:r>
+              <a:rPr sz="4600" b="1">
+                <a:solidFill>
+                  <a:srgbClr val="333333"/>
+                </a:solidFill>
+                <a:latin typeface="Open Sans"/>
+                <a:ea typeface="Open Sans"/>
+                <a:cs typeface="Open Sans"/>
+              </a:rPr>
+              <a:t>Краткое резюме</a:t>
+            </a:r>
+          </a:p>
+        </p:txBody>
+      </p:sp>
+      <p:sp>
+        <p:nvSpPr>
+          <p:cNvPr id="5" name="Rectangle 4"/>
+          <p:cNvSpPr/>
+          <p:nvPr/>
+        </p:nvSpPr>
+        <p:spPr>
+          <a:xfrm>
+            <a:off x="800000" y="1450000"/>
+            <a:ext cx="22800000" cy="20000"/>
+          </a:xfrm>
+          <a:prstGeom prst="rect">
+            <a:avLst/>
+          </a:prstGeom>
+          <a:solidFill>
+            <a:srgbClr val="E1E1E1"/>
+          </a:solidFill>
+          <a:ln>
+            <a:noFill/>
+          </a:ln>
+        </p:spPr>
+        <p:style>
+          <a:lnRef idx="1">
+            <a:schemeClr val="accent1"/>
+          </a:lnRef>
+          <a:fillRef idx="3">
+            <a:schemeClr val="accent1"/>
+          </a:fillRef>
+          <a:effectRef idx="2">
+            <a:schemeClr val="accent1"/>
+          </a:effectRef>
+          <a:fontRef idx="minor">
+            <a:schemeClr val="lt1"/>
+          </a:fontRef>
+        </p:style>
+        <p:txBody>
+          <a:bodyPr rtlCol="0" anchor="ctr"/>
+          <a:lstStyle/>
+          <a:p>
+            <a:pPr algn="ctr"/>
+          </a:p>
+        </p:txBody>
+      </p:sp>
+      <p:sp>
+        <p:nvSpPr>
+          <p:cNvPr id="6" name="Rectangle 5"/>
+          <p:cNvSpPr/>
+          <p:nvPr/>
+        </p:nvSpPr>
+        <p:spPr>
+          <a:xfrm>
+            <a:off x="800000" y="1950000"/>
+            <a:ext cx="22800000" cy="1600000"/>
+          </a:xfrm>
+          <a:prstGeom prst="rect">
+            <a:avLst/>
+          </a:prstGeom>
+          <a:solidFill>
+            <a:srgbClr val="FFFFFF"/>
+          </a:solidFill>
+          <a:ln w="12700">
+            <a:solidFill>
+              <a:srgbClr val="E1E1E1"/>
+            </a:solidFill>
+          </a:ln>
+        </p:spPr>
+        <p:style>
+          <a:lnRef idx="1">
+            <a:schemeClr val="accent1"/>
+          </a:lnRef>
+          <a:fillRef idx="3">
+            <a:schemeClr val="accent1"/>
+          </a:fillRef>
+          <a:effectRef idx="2">
+            <a:schemeClr val="accent1"/>
+          </a:effectRef>
+          <a:fontRef idx="minor">
+            <a:schemeClr val="lt1"/>
+          </a:fontRef>
+        </p:style>
+        <p:txBody>
+          <a:bodyPr rtlCol="0" anchor="ctr"/>
+          <a:lstStyle/>
+          <a:p>
+            <a:pPr algn="ctr"/>
+          </a:p>
+        </p:txBody>
+      </p:sp>
+      <p:sp>
+        <p:nvSpPr>
+          <p:cNvPr id="7" name="Rectangle 6"/>
+          <p:cNvSpPr/>
+          <p:nvPr/>
+        </p:nvSpPr>
+        <p:spPr>
+          <a:xfrm>
+            <a:off x="800000" y="1950000"/>
+            <a:ext cx="120000" cy="1600000"/>
+          </a:xfrm>
+          <a:prstGeom prst="rect">
+            <a:avLst/>
+          </a:prstGeom>
+          <a:solidFill>
+            <a:srgbClr val="0055AA"/>
+          </a:solidFill>
+          <a:ln>
+            <a:noFill/>
+          </a:ln>
+        </p:spPr>
+        <p:style>
+          <a:lnRef idx="1">
+            <a:schemeClr val="accent1"/>
+          </a:lnRef>
+          <a:fillRef idx="3">
+            <a:schemeClr val="accent1"/>
+          </a:fillRef>
+          <a:effectRef idx="2">
+            <a:schemeClr val="accent1"/>
+          </a:effectRef>
+          <a:fontRef idx="minor">
+            <a:schemeClr val="lt1"/>
+          </a:fontRef>
+        </p:style>
+        <p:txBody>
+          <a:bodyPr rtlCol="0" anchor="ctr"/>
+          <a:lstStyle/>
+          <a:p>
+            <a:pPr algn="ctr"/>
+          </a:p>
+        </p:txBody>
+      </p:sp>
+      <p:sp>
+        <p:nvSpPr>
+          <p:cNvPr id="8" name="TextBox 7"/>
+          <p:cNvSpPr txBox="1"/>
+          <p:nvPr/>
+        </p:nvSpPr>
+        <p:spPr>
+          <a:xfrm>
+            <a:off x="1200000" y="2250000"/>
+            <a:ext cx="21800000" cy="1100000"/>
+          </a:xfrm>
+          <a:prstGeom prst="rect">
+            <a:avLst/>
+          </a:prstGeom>
+          <a:noFill/>
+        </p:spPr>
+        <p:txBody>
+          <a:bodyPr wrap="square" anchor="ctr">
+            <a:spAutoFit/>
+          </a:bodyPr>
+          <a:lstStyle/>
+          <a:p>
+            <a:pPr algn="l"/>
+            <a:r>
+              <a:rPr sz="2600" b="0">
+                <a:solidFill>
+                  <a:srgbClr val="333333"/>
+                </a:solidFill>
+                <a:latin typeface="Open Sans"/>
+                <a:ea typeface="Open Sans"/>
+                <a:cs typeface="Open Sans"/>
+              </a:rPr>
+              <a:t>Алгоритм: безопасность → обзорный осмотр → остановка крови → признаки жизни → СМП.</a:t>
+            </a:r>
+          </a:p>
+        </p:txBody>
+      </p:sp>
+      <p:sp>
+        <p:nvSpPr>
+          <p:cNvPr id="9" name="Rectangle 8"/>
+          <p:cNvSpPr/>
+          <p:nvPr/>
+        </p:nvSpPr>
+        <p:spPr>
+          <a:xfrm>
+            <a:off x="800000" y="3850000"/>
+            <a:ext cx="22800000" cy="1600000"/>
+          </a:xfrm>
+          <a:prstGeom prst="rect">
+            <a:avLst/>
+          </a:prstGeom>
+          <a:solidFill>
+            <a:srgbClr val="FFFFFF"/>
+          </a:solidFill>
+          <a:ln w="12700">
+            <a:solidFill>
+              <a:srgbClr val="E1E1E1"/>
+            </a:solidFill>
+          </a:ln>
+        </p:spPr>
+        <p:style>
+          <a:lnRef idx="1">
+            <a:schemeClr val="accent1"/>
+          </a:lnRef>
+          <a:fillRef idx="3">
+            <a:schemeClr val="accent1"/>
+          </a:fillRef>
+          <a:effectRef idx="2">
+            <a:schemeClr val="accent1"/>
+          </a:effectRef>
+          <a:fontRef idx="minor">
+            <a:schemeClr val="lt1"/>
+          </a:fontRef>
+        </p:style>
+        <p:txBody>
+          <a:bodyPr rtlCol="0" anchor="ctr"/>
+          <a:lstStyle/>
+          <a:p>
+            <a:pPr algn="ctr"/>
+          </a:p>
+        </p:txBody>
+      </p:sp>
+      <p:sp>
+        <p:nvSpPr>
+          <p:cNvPr id="10" name="Rectangle 9"/>
+          <p:cNvSpPr/>
+          <p:nvPr/>
+        </p:nvSpPr>
+        <p:spPr>
+          <a:xfrm>
+            <a:off x="800000" y="3850000"/>
+            <a:ext cx="120000" cy="1600000"/>
+          </a:xfrm>
+          <a:prstGeom prst="rect">
+            <a:avLst/>
+          </a:prstGeom>
+          <a:solidFill>
+            <a:srgbClr val="0055AA"/>
+          </a:solidFill>
+          <a:ln>
+            <a:noFill/>
+          </a:ln>
+        </p:spPr>
+        <p:style>
+          <a:lnRef idx="1">
+            <a:schemeClr val="accent1"/>
+          </a:lnRef>
+          <a:fillRef idx="3">
+            <a:schemeClr val="accent1"/>
+          </a:fillRef>
+          <a:effectRef idx="2">
+            <a:schemeClr val="accent1"/>
+          </a:effectRef>
+          <a:fontRef idx="minor">
+            <a:schemeClr val="lt1"/>
+          </a:fontRef>
+        </p:style>
+        <p:txBody>
+          <a:bodyPr rtlCol="0" anchor="ctr"/>
+          <a:lstStyle/>
+          <a:p>
+            <a:pPr algn="ctr"/>
+          </a:p>
+        </p:txBody>
+      </p:sp>
+      <p:sp>
+        <p:nvSpPr>
+          <p:cNvPr id="11" name="TextBox 10"/>
+          <p:cNvSpPr txBox="1"/>
+          <p:nvPr/>
+        </p:nvSpPr>
+        <p:spPr>
+          <a:xfrm>
+            <a:off x="1200000" y="4150000"/>
+            <a:ext cx="21800000" cy="1100000"/>
+          </a:xfrm>
+          <a:prstGeom prst="rect">
+            <a:avLst/>
+          </a:prstGeom>
+          <a:noFill/>
+        </p:spPr>
+        <p:txBody>
+          <a:bodyPr wrap="square" anchor="ctr">
+            <a:spAutoFit/>
+          </a:bodyPr>
+          <a:lstStyle/>
+          <a:p>
+            <a:pPr algn="l"/>
+            <a:r>
+              <a:rPr sz="2600" b="0">
+                <a:solidFill>
+                  <a:srgbClr val="333333"/>
+                </a:solidFill>
+                <a:latin typeface="Open Sans"/>
+                <a:ea typeface="Open Sans"/>
+                <a:cs typeface="Open Sans"/>
+              </a:rPr>
+              <a:t>Способы: от простого к сложному — давление → повязка → жгут.</a:t>
+            </a:r>
+          </a:p>
+        </p:txBody>
+      </p:sp>
+      <p:sp>
+        <p:nvSpPr>
+          <p:cNvPr id="12" name="Rectangle 11"/>
+          <p:cNvSpPr/>
+          <p:nvPr/>
+        </p:nvSpPr>
+        <p:spPr>
+          <a:xfrm>
+            <a:off x="800000" y="5750000"/>
+            <a:ext cx="22800000" cy="1600000"/>
+          </a:xfrm>
+          <a:prstGeom prst="rect">
+            <a:avLst/>
+          </a:prstGeom>
+          <a:solidFill>
+            <a:srgbClr val="FFFFFF"/>
+          </a:solidFill>
+          <a:ln w="12700">
+            <a:solidFill>
+              <a:srgbClr val="E1E1E1"/>
+            </a:solidFill>
+          </a:ln>
+        </p:spPr>
+        <p:style>
+          <a:lnRef idx="1">
+            <a:schemeClr val="accent1"/>
+          </a:lnRef>
+          <a:fillRef idx="3">
+            <a:schemeClr val="accent1"/>
+          </a:fillRef>
+          <a:effectRef idx="2">
+            <a:schemeClr val="accent1"/>
+          </a:effectRef>
+          <a:fontRef idx="minor">
+            <a:schemeClr val="lt1"/>
+          </a:fontRef>
+        </p:style>
+        <p:txBody>
+          <a:bodyPr rtlCol="0" anchor="ctr"/>
+          <a:lstStyle/>
+          <a:p>
+            <a:pPr algn="ctr"/>
+          </a:p>
+        </p:txBody>
+      </p:sp>
+      <p:sp>
+        <p:nvSpPr>
+          <p:cNvPr id="13" name="Rectangle 12"/>
+          <p:cNvSpPr/>
+          <p:nvPr/>
+        </p:nvSpPr>
+        <p:spPr>
+          <a:xfrm>
+            <a:off x="800000" y="5750000"/>
+            <a:ext cx="120000" cy="1600000"/>
+          </a:xfrm>
+          <a:prstGeom prst="rect">
+            <a:avLst/>
+          </a:prstGeom>
+          <a:solidFill>
+            <a:srgbClr val="0055AA"/>
+          </a:solidFill>
+          <a:ln>
+            <a:noFill/>
+          </a:ln>
+        </p:spPr>
+        <p:style>
+          <a:lnRef idx="1">
+            <a:schemeClr val="accent1"/>
+          </a:lnRef>
+          <a:fillRef idx="3">
+            <a:schemeClr val="accent1"/>
+          </a:fillRef>
+          <a:effectRef idx="2">
+            <a:schemeClr val="accent1"/>
+          </a:effectRef>
+          <a:fontRef idx="minor">
+            <a:schemeClr val="lt1"/>
+          </a:fontRef>
+        </p:style>
+        <p:txBody>
+          <a:bodyPr rtlCol="0" anchor="ctr"/>
+          <a:lstStyle/>
+          <a:p>
+            <a:pPr algn="ctr"/>
+          </a:p>
+        </p:txBody>
+      </p:sp>
+      <p:sp>
+        <p:nvSpPr>
+          <p:cNvPr id="14" name="TextBox 13"/>
+          <p:cNvSpPr txBox="1"/>
+          <p:nvPr/>
+        </p:nvSpPr>
+        <p:spPr>
+          <a:xfrm>
+            <a:off x="1200000" y="6050000"/>
+            <a:ext cx="21800000" cy="1100000"/>
+          </a:xfrm>
+          <a:prstGeom prst="rect">
+            <a:avLst/>
+          </a:prstGeom>
+          <a:noFill/>
+        </p:spPr>
+        <p:txBody>
+          <a:bodyPr wrap="square" anchor="ctr">
+            <a:spAutoFit/>
+          </a:bodyPr>
+          <a:lstStyle/>
+          <a:p>
+            <a:pPr algn="l"/>
+            <a:r>
+              <a:rPr sz="2600" b="0">
+                <a:solidFill>
+                  <a:srgbClr val="333333"/>
+                </a:solidFill>
+                <a:latin typeface="Open Sans"/>
+                <a:ea typeface="Open Sans"/>
+                <a:cs typeface="Open Sans"/>
+              </a:rPr>
+              <a:t>Профилактика шока: кровь, положение, иммобилизация, тепло.</a:t>
+            </a:r>
+          </a:p>
+        </p:txBody>
+      </p:sp>
+      <p:sp>
+        <p:nvSpPr>
+          <p:cNvPr id="15" name="Rectangle 14"/>
+          <p:cNvSpPr/>
+          <p:nvPr/>
+        </p:nvSpPr>
+        <p:spPr>
+          <a:xfrm>
+            <a:off x="800000" y="7650000"/>
+            <a:ext cx="22800000" cy="1600000"/>
+          </a:xfrm>
+          <a:prstGeom prst="rect">
+            <a:avLst/>
+          </a:prstGeom>
+          <a:solidFill>
+            <a:srgbClr val="FFFFFF"/>
+          </a:solidFill>
+          <a:ln w="12700">
+            <a:solidFill>
+              <a:srgbClr val="E1E1E1"/>
+            </a:solidFill>
+          </a:ln>
+        </p:spPr>
+        <p:style>
+          <a:lnRef idx="1">
+            <a:schemeClr val="accent1"/>
+          </a:lnRef>
+          <a:fillRef idx="3">
+            <a:schemeClr val="accent1"/>
+          </a:fillRef>
+          <a:effectRef idx="2">
+            <a:schemeClr val="accent1"/>
+          </a:effectRef>
+          <a:fontRef idx="minor">
+            <a:schemeClr val="lt1"/>
+          </a:fontRef>
+        </p:style>
+        <p:txBody>
+          <a:bodyPr rtlCol="0" anchor="ctr"/>
+          <a:lstStyle/>
+          <a:p>
+            <a:pPr algn="ctr"/>
+          </a:p>
+        </p:txBody>
+      </p:sp>
+      <p:sp>
+        <p:nvSpPr>
+          <p:cNvPr id="16" name="Rectangle 15"/>
+          <p:cNvSpPr/>
+          <p:nvPr/>
+        </p:nvSpPr>
+        <p:spPr>
+          <a:xfrm>
+            <a:off x="800000" y="7650000"/>
+            <a:ext cx="120000" cy="1600000"/>
+          </a:xfrm>
+          <a:prstGeom prst="rect">
+            <a:avLst/>
+          </a:prstGeom>
+          <a:solidFill>
+            <a:srgbClr val="0055AA"/>
+          </a:solidFill>
+          <a:ln>
+            <a:noFill/>
+          </a:ln>
+        </p:spPr>
+        <p:style>
+          <a:lnRef idx="1">
+            <a:schemeClr val="accent1"/>
+          </a:lnRef>
+          <a:fillRef idx="3">
+            <a:schemeClr val="accent1"/>
+          </a:fillRef>
+          <a:effectRef idx="2">
+            <a:schemeClr val="accent1"/>
+          </a:effectRef>
+          <a:fontRef idx="minor">
+            <a:schemeClr val="lt1"/>
+          </a:fontRef>
+        </p:style>
+        <p:txBody>
+          <a:bodyPr rtlCol="0" anchor="ctr"/>
+          <a:lstStyle/>
+          <a:p>
+            <a:pPr algn="ctr"/>
+          </a:p>
+        </p:txBody>
+      </p:sp>
+      <p:sp>
+        <p:nvSpPr>
+          <p:cNvPr id="17" name="TextBox 16"/>
+          <p:cNvSpPr txBox="1"/>
+          <p:nvPr/>
+        </p:nvSpPr>
+        <p:spPr>
+          <a:xfrm>
+            <a:off x="1200000" y="7950000"/>
+            <a:ext cx="21800000" cy="1100000"/>
+          </a:xfrm>
+          <a:prstGeom prst="rect">
+            <a:avLst/>
+          </a:prstGeom>
+          <a:noFill/>
+        </p:spPr>
+        <p:txBody>
+          <a:bodyPr wrap="square" anchor="ctr">
+            <a:spAutoFit/>
+          </a:bodyPr>
+          <a:lstStyle/>
+          <a:p>
+            <a:pPr algn="l"/>
+            <a:r>
+              <a:rPr sz="2600" b="0">
+                <a:solidFill>
+                  <a:srgbClr val="333333"/>
+                </a:solidFill>
+                <a:latin typeface="Open Sans"/>
+                <a:ea typeface="Open Sans"/>
+                <a:cs typeface="Open Sans"/>
+              </a:rPr>
+              <a:t>После остановки — контроль повязки / жгута и состояния до передачи СМП.</a:t>
+            </a:r>
+          </a:p>
+        </p:txBody>
+      </p:sp>
+    </p:spTree>
+  </p:cSld>
+  <p:clrMapOvr>
+    <a:masterClrMapping/>
+  </p:clrMapOvr>
+</p:sld>
+</file>
+
+<file path=ppt/slides/slide15.xml><?xml version="1.0" encoding="utf-8"?>
+<p:sld xmlns:a="http://schemas.openxmlformats.org/drawingml/2006/main" xmlns:p="http://schemas.openxmlformats.org/presentationml/2006/main" xmlns:r="http://schemas.openxmlformats.org/officeDocument/2006/relationships">
+  <p:cSld>
+    <p:spTree>
+      <p:nvGrpSpPr>
+        <p:cNvPr id="1" name=""/>
+        <p:cNvGrpSpPr/>
+        <p:nvPr/>
+      </p:nvGrpSpPr>
+      <p:grpSpPr/>
+      <p:sp>
+        <p:nvSpPr>
+          <p:cNvPr id="2" name="Rectangle 1"/>
+          <p:cNvSpPr/>
+          <p:nvPr/>
+        </p:nvSpPr>
+        <p:spPr>
+          <a:xfrm>
+            <a:off x="0" y="0"/>
+            <a:ext cx="24384000" cy="13716000"/>
+          </a:xfrm>
+          <a:prstGeom prst="rect">
+            <a:avLst/>
+          </a:prstGeom>
+          <a:solidFill>
+            <a:srgbClr val="FFFFFF"/>
+          </a:solidFill>
+          <a:ln>
+            <a:noFill/>
+          </a:ln>
+        </p:spPr>
+        <p:style>
+          <a:lnRef idx="1">
+            <a:schemeClr val="accent1"/>
+          </a:lnRef>
+          <a:fillRef idx="3">
+            <a:schemeClr val="accent1"/>
+          </a:fillRef>
+          <a:effectRef idx="2">
+            <a:schemeClr val="accent1"/>
+          </a:effectRef>
+          <a:fontRef idx="minor">
+            <a:schemeClr val="lt1"/>
+          </a:fontRef>
+        </p:style>
+        <p:txBody>
+          <a:bodyPr rtlCol="0" anchor="ctr"/>
+          <a:lstStyle/>
+          <a:p>
+            <a:pPr algn="ctr"/>
+          </a:p>
+        </p:txBody>
+      </p:sp>
+      <p:sp>
+        <p:nvSpPr>
+          <p:cNvPr id="3" name="Rectangle 2"/>
+          <p:cNvSpPr/>
+          <p:nvPr/>
+        </p:nvSpPr>
+        <p:spPr>
+          <a:xfrm>
+            <a:off x="0" y="0"/>
+            <a:ext cx="24384000" cy="120000"/>
+          </a:xfrm>
+          <a:prstGeom prst="rect">
+            <a:avLst/>
+          </a:prstGeom>
+          <a:solidFill>
+            <a:srgbClr val="DDDDDD"/>
+          </a:solidFill>
+          <a:ln>
+            <a:noFill/>
+          </a:ln>
+        </p:spPr>
+        <p:style>
+          <a:lnRef idx="1">
+            <a:schemeClr val="accent1"/>
+          </a:lnRef>
+          <a:fillRef idx="3">
+            <a:schemeClr val="accent1"/>
+          </a:fillRef>
+          <a:effectRef idx="2">
+            <a:schemeClr val="accent1"/>
+          </a:effectRef>
+          <a:fontRef idx="minor">
+            <a:schemeClr val="lt1"/>
+          </a:fontRef>
+        </p:style>
+        <p:txBody>
+          <a:bodyPr rtlCol="0" anchor="ctr"/>
+          <a:lstStyle/>
+          <a:p>
+            <a:pPr algn="ctr"/>
+          </a:p>
+        </p:txBody>
+      </p:sp>
+      <p:sp>
+        <p:nvSpPr>
+          <p:cNvPr id="4" name="TextBox 3"/>
+          <p:cNvSpPr txBox="1"/>
+          <p:nvPr/>
+        </p:nvSpPr>
+        <p:spPr>
+          <a:xfrm>
             <a:off x="800000" y="5500000"/>
             <a:ext cx="22800000" cy="1200000"/>
           </a:xfrm>
@@ -8775,7 +9576,7 @@
         <p:spPr>
           <a:xfrm>
             <a:off x="800000" y="1950000"/>
-            <a:ext cx="22800000" cy="8500000"/>
+            <a:ext cx="12000000" cy="7500000"/>
           </a:xfrm>
           <a:prstGeom prst="rect">
             <a:avLst/>
@@ -8794,7 +9595,7 @@
               </a:spcAft>
             </a:pPr>
             <a:r>
-              <a:rPr sz="3200" b="0">
+              <a:rPr sz="2800" b="0">
                 <a:solidFill>
                   <a:srgbClr val="333333"/>
                 </a:solidFill>
@@ -8812,7 +9613,7 @@
               </a:spcAft>
             </a:pPr>
             <a:r>
-              <a:rPr sz="3200" b="0">
+              <a:rPr sz="2800" b="0">
                 <a:solidFill>
                   <a:srgbClr val="333333"/>
                 </a:solidFill>
@@ -8830,7 +9631,7 @@
               </a:spcAft>
             </a:pPr>
             <a:r>
-              <a:rPr sz="3200" b="0">
+              <a:rPr sz="2800" b="0">
                 <a:solidFill>
                   <a:srgbClr val="333333"/>
                 </a:solidFill>
@@ -8848,7 +9649,7 @@
               </a:spcAft>
             </a:pPr>
             <a:r>
-              <a:rPr sz="3200" b="0">
+              <a:rPr sz="2800" b="0">
                 <a:solidFill>
                   <a:srgbClr val="333333"/>
                 </a:solidFill>
@@ -8856,7 +9657,7 @@
                 <a:ea typeface="Open Sans"/>
                 <a:cs typeface="Open Sans"/>
               </a:rPr>
-              <a:t>•  Защитить от переохлаждения (укрыть, изотермическое покрывало).</a:t>
+              <a:t>•  Защитить от переохлаждения.</a:t>
             </a:r>
           </a:p>
           <a:p>
@@ -8866,7 +9667,7 @@
               </a:spcAft>
             </a:pPr>
             <a:r>
-              <a:rPr sz="3200" b="0">
+              <a:rPr sz="2800" b="0">
                 <a:solidFill>
                   <a:srgbClr val="333333"/>
                 </a:solidFill>
@@ -8884,7 +9685,7 @@
               </a:spcAft>
             </a:pPr>
             <a:r>
-              <a:rPr sz="3200" b="0">
+              <a:rPr sz="2800" b="0">
                 <a:solidFill>
                   <a:srgbClr val="333333"/>
                 </a:solidFill>
@@ -8892,11 +9693,80 @@
                 <a:ea typeface="Open Sans"/>
                 <a:cs typeface="Open Sans"/>
               </a:rPr>
-              <a:t>•  Покой, психологическая поддержка, контроль сознания и дыхания.</a:t>
-            </a:r>
-          </a:p>
-        </p:txBody>
-      </p:sp>
+              <a:t>•  Покой, поддержка, контроль сознания и дыхания.</a:t>
+            </a:r>
+          </a:p>
+        </p:txBody>
+      </p:sp>
+      <p:sp>
+        <p:nvSpPr>
+          <p:cNvPr id="7" name="Rectangle 6"/>
+          <p:cNvSpPr/>
+          <p:nvPr/>
+        </p:nvSpPr>
+        <p:spPr>
+          <a:xfrm>
+            <a:off x="13500000" y="1950000"/>
+            <a:ext cx="10000000" cy="8500000"/>
+          </a:xfrm>
+          <a:prstGeom prst="rect">
+            <a:avLst/>
+          </a:prstGeom>
+          <a:solidFill>
+            <a:srgbClr val="FFFFFF"/>
+          </a:solidFill>
+          <a:ln w="12700">
+            <a:solidFill>
+              <a:srgbClr val="E1E1E1"/>
+            </a:solidFill>
+          </a:ln>
+        </p:spPr>
+        <p:style>
+          <a:lnRef idx="1">
+            <a:schemeClr val="accent1"/>
+          </a:lnRef>
+          <a:fillRef idx="3">
+            <a:schemeClr val="accent1"/>
+          </a:fillRef>
+          <a:effectRef idx="2">
+            <a:schemeClr val="accent1"/>
+          </a:effectRef>
+          <a:fontRef idx="minor">
+            <a:schemeClr val="lt1"/>
+          </a:fontRef>
+        </p:style>
+        <p:txBody>
+          <a:bodyPr rtlCol="0" anchor="ctr"/>
+          <a:lstStyle/>
+          <a:p>
+            <a:pPr algn="ctr"/>
+          </a:p>
+        </p:txBody>
+      </p:sp>
+      <p:pic>
+        <p:nvPicPr>
+          <p:cNvPr id="8" name="Picture 7" descr="shock_prev.png"/>
+          <p:cNvPicPr>
+            <a:picLocks noChangeAspect="1"/>
+          </p:cNvPicPr>
+          <p:nvPr/>
+        </p:nvPicPr>
+        <p:blipFill>
+          <a:blip r:embed="rId2"/>
+          <a:stretch>
+            <a:fillRect/>
+          </a:stretch>
+        </p:blipFill>
+        <p:spPr>
+          <a:xfrm>
+            <a:off x="13650000" y="2205882"/>
+            <a:ext cx="9700000" cy="7988235"/>
+          </a:xfrm>
+          <a:prstGeom prst="rect">
+            <a:avLst/>
+          </a:prstGeom>
+        </p:spPr>
+      </p:pic>
     </p:spTree>
   </p:cSld>
   <p:clrMapOvr>
@@ -9033,7 +9903,7 @@
                 <a:ea typeface="Open Sans"/>
                 <a:cs typeface="Open Sans"/>
               </a:rPr>
-              <a:t>Порядок подробного осмотра</a:t>
+              <a:t>Подробный осмотр — голова, шея, грудь</a:t>
             </a:r>
           </a:p>
         </p:txBody>
@@ -9083,14 +9953,83 @@
       </p:sp>
       <p:sp>
         <p:nvSpPr>
-          <p:cNvPr id="6" name="TextBox 5"/>
+          <p:cNvPr id="6" name="Rectangle 5"/>
+          <p:cNvSpPr/>
+          <p:nvPr/>
+        </p:nvSpPr>
+        <p:spPr>
+          <a:xfrm>
+            <a:off x="800000" y="1900000"/>
+            <a:ext cx="7433333" cy="10500000"/>
+          </a:xfrm>
+          <a:prstGeom prst="rect">
+            <a:avLst/>
+          </a:prstGeom>
+          <a:solidFill>
+            <a:srgbClr val="FFFFFF"/>
+          </a:solidFill>
+          <a:ln w="12700">
+            <a:solidFill>
+              <a:srgbClr val="E1E1E1"/>
+            </a:solidFill>
+          </a:ln>
+        </p:spPr>
+        <p:style>
+          <a:lnRef idx="1">
+            <a:schemeClr val="accent1"/>
+          </a:lnRef>
+          <a:fillRef idx="3">
+            <a:schemeClr val="accent1"/>
+          </a:fillRef>
+          <a:effectRef idx="2">
+            <a:schemeClr val="accent1"/>
+          </a:effectRef>
+          <a:fontRef idx="minor">
+            <a:schemeClr val="lt1"/>
+          </a:fontRef>
+        </p:style>
+        <p:txBody>
+          <a:bodyPr rtlCol="0" anchor="ctr"/>
+          <a:lstStyle/>
+          <a:p>
+            <a:pPr algn="ctr"/>
+          </a:p>
+        </p:txBody>
+      </p:sp>
+      <p:pic>
+        <p:nvPicPr>
+          <p:cNvPr id="7" name="Picture 6" descr="exam_head.png"/>
+          <p:cNvPicPr>
+            <a:picLocks noChangeAspect="1"/>
+          </p:cNvPicPr>
+          <p:nvPr/>
+        </p:nvPicPr>
+        <p:blipFill>
+          <a:blip r:embed="rId2"/>
+          <a:stretch>
+            <a:fillRect/>
+          </a:stretch>
+        </p:blipFill>
+        <p:spPr>
+          <a:xfrm>
+            <a:off x="1994598" y="2000000"/>
+            <a:ext cx="5044137" cy="6359999"/>
+          </a:xfrm>
+          <a:prstGeom prst="rect">
+            <a:avLst/>
+          </a:prstGeom>
+        </p:spPr>
+      </p:pic>
+      <p:sp>
+        <p:nvSpPr>
+          <p:cNvPr id="8" name="TextBox 7"/>
           <p:cNvSpPr txBox="1"/>
           <p:nvPr/>
         </p:nvSpPr>
         <p:spPr>
           <a:xfrm>
-            <a:off x="800000" y="1950000"/>
-            <a:ext cx="22800000" cy="8500000"/>
+            <a:off x="950000" y="8410000"/>
+            <a:ext cx="7133333" cy="3890000"/>
           </a:xfrm>
           <a:prstGeom prst="rect">
             <a:avLst/>
@@ -9098,18 +10037,14 @@
           <a:noFill/>
         </p:spPr>
         <p:txBody>
-          <a:bodyPr wrap="square">
+          <a:bodyPr wrap="square" anchor="t">
             <a:spAutoFit/>
           </a:bodyPr>
           <a:lstStyle/>
           <a:p>
-            <a:pPr algn="l">
-              <a:spcAft>
-                <a:spcPts val="1000"/>
-              </a:spcAft>
-            </a:pPr>
-            <a:r>
-              <a:rPr sz="3200" b="0">
+            <a:pPr algn="l"/>
+            <a:r>
+              <a:rPr sz="2200" b="0">
                 <a:solidFill>
                   <a:srgbClr val="333333"/>
                 </a:solidFill>
@@ -9117,17 +10052,105 @@
                 <a:ea typeface="Open Sans"/>
                 <a:cs typeface="Open Sans"/>
               </a:rPr>
-              <a:t>•  Голова → шея → грудь → живот и таз → ноги → руки.</a:t>
-            </a:r>
-          </a:p>
-          <a:p>
-            <a:pPr algn="l">
-              <a:spcAft>
-                <a:spcPts val="1000"/>
-              </a:spcAft>
-            </a:pPr>
-            <a:r>
-              <a:rPr sz="3200" b="0">
+              <a:t>Шаг 1. Осмотр головы</a:t>
+            </a:r>
+          </a:p>
+        </p:txBody>
+      </p:sp>
+      <p:sp>
+        <p:nvSpPr>
+          <p:cNvPr id="9" name="Rectangle 8"/>
+          <p:cNvSpPr/>
+          <p:nvPr/>
+        </p:nvSpPr>
+        <p:spPr>
+          <a:xfrm>
+            <a:off x="8483333" y="1900000"/>
+            <a:ext cx="7433333" cy="10500000"/>
+          </a:xfrm>
+          <a:prstGeom prst="rect">
+            <a:avLst/>
+          </a:prstGeom>
+          <a:solidFill>
+            <a:srgbClr val="FFFFFF"/>
+          </a:solidFill>
+          <a:ln w="12700">
+            <a:solidFill>
+              <a:srgbClr val="E1E1E1"/>
+            </a:solidFill>
+          </a:ln>
+        </p:spPr>
+        <p:style>
+          <a:lnRef idx="1">
+            <a:schemeClr val="accent1"/>
+          </a:lnRef>
+          <a:fillRef idx="3">
+            <a:schemeClr val="accent1"/>
+          </a:fillRef>
+          <a:effectRef idx="2">
+            <a:schemeClr val="accent1"/>
+          </a:effectRef>
+          <a:fontRef idx="minor">
+            <a:schemeClr val="lt1"/>
+          </a:fontRef>
+        </p:style>
+        <p:txBody>
+          <a:bodyPr rtlCol="0" anchor="ctr"/>
+          <a:lstStyle/>
+          <a:p>
+            <a:pPr algn="ctr"/>
+          </a:p>
+        </p:txBody>
+      </p:sp>
+      <p:pic>
+        <p:nvPicPr>
+          <p:cNvPr id="10" name="Picture 9" descr="exam_neck.png"/>
+          <p:cNvPicPr>
+            <a:picLocks noChangeAspect="1"/>
+          </p:cNvPicPr>
+          <p:nvPr/>
+        </p:nvPicPr>
+        <p:blipFill>
+          <a:blip r:embed="rId3"/>
+          <a:stretch>
+            <a:fillRect/>
+          </a:stretch>
+        </p:blipFill>
+        <p:spPr>
+          <a:xfrm>
+            <a:off x="9677931" y="2000000"/>
+            <a:ext cx="5044137" cy="6359999"/>
+          </a:xfrm>
+          <a:prstGeom prst="rect">
+            <a:avLst/>
+          </a:prstGeom>
+        </p:spPr>
+      </p:pic>
+      <p:sp>
+        <p:nvSpPr>
+          <p:cNvPr id="11" name="TextBox 10"/>
+          <p:cNvSpPr txBox="1"/>
+          <p:nvPr/>
+        </p:nvSpPr>
+        <p:spPr>
+          <a:xfrm>
+            <a:off x="8633333" y="8410000"/>
+            <a:ext cx="7133333" cy="3890000"/>
+          </a:xfrm>
+          <a:prstGeom prst="rect">
+            <a:avLst/>
+          </a:prstGeom>
+          <a:noFill/>
+        </p:spPr>
+        <p:txBody>
+          <a:bodyPr wrap="square" anchor="t">
+            <a:spAutoFit/>
+          </a:bodyPr>
+          <a:lstStyle/>
+          <a:p>
+            <a:pPr algn="l"/>
+            <a:r>
+              <a:rPr sz="2200" b="0">
                 <a:solidFill>
                   <a:srgbClr val="333333"/>
                 </a:solidFill>
@@ -9135,17 +10158,105 @@
                 <a:ea typeface="Open Sans"/>
                 <a:cs typeface="Open Sans"/>
               </a:rPr>
-              <a:t>•  Спина — при возможности безопасно повернуть / осмотреть.</a:t>
-            </a:r>
-          </a:p>
-          <a:p>
-            <a:pPr algn="l">
-              <a:spcAft>
-                <a:spcPts val="1000"/>
-              </a:spcAft>
-            </a:pPr>
-            <a:r>
-              <a:rPr sz="3200" b="0">
+              <a:t>Шаг 2. Осмотр шеи</a:t>
+            </a:r>
+          </a:p>
+        </p:txBody>
+      </p:sp>
+      <p:sp>
+        <p:nvSpPr>
+          <p:cNvPr id="12" name="Rectangle 11"/>
+          <p:cNvSpPr/>
+          <p:nvPr/>
+        </p:nvSpPr>
+        <p:spPr>
+          <a:xfrm>
+            <a:off x="16166666" y="1900000"/>
+            <a:ext cx="7433333" cy="10500000"/>
+          </a:xfrm>
+          <a:prstGeom prst="rect">
+            <a:avLst/>
+          </a:prstGeom>
+          <a:solidFill>
+            <a:srgbClr val="FFFFFF"/>
+          </a:solidFill>
+          <a:ln w="12700">
+            <a:solidFill>
+              <a:srgbClr val="E1E1E1"/>
+            </a:solidFill>
+          </a:ln>
+        </p:spPr>
+        <p:style>
+          <a:lnRef idx="1">
+            <a:schemeClr val="accent1"/>
+          </a:lnRef>
+          <a:fillRef idx="3">
+            <a:schemeClr val="accent1"/>
+          </a:fillRef>
+          <a:effectRef idx="2">
+            <a:schemeClr val="accent1"/>
+          </a:effectRef>
+          <a:fontRef idx="minor">
+            <a:schemeClr val="lt1"/>
+          </a:fontRef>
+        </p:style>
+        <p:txBody>
+          <a:bodyPr rtlCol="0" anchor="ctr"/>
+          <a:lstStyle/>
+          <a:p>
+            <a:pPr algn="ctr"/>
+          </a:p>
+        </p:txBody>
+      </p:sp>
+      <p:pic>
+        <p:nvPicPr>
+          <p:cNvPr id="13" name="Picture 12" descr="exam_chest.png"/>
+          <p:cNvPicPr>
+            <a:picLocks noChangeAspect="1"/>
+          </p:cNvPicPr>
+          <p:nvPr/>
+        </p:nvPicPr>
+        <p:blipFill>
+          <a:blip r:embed="rId4"/>
+          <a:stretch>
+            <a:fillRect/>
+          </a:stretch>
+        </p:blipFill>
+        <p:spPr>
+          <a:xfrm>
+            <a:off x="17361264" y="2000000"/>
+            <a:ext cx="5044137" cy="6359999"/>
+          </a:xfrm>
+          <a:prstGeom prst="rect">
+            <a:avLst/>
+          </a:prstGeom>
+        </p:spPr>
+      </p:pic>
+      <p:sp>
+        <p:nvSpPr>
+          <p:cNvPr id="14" name="TextBox 13"/>
+          <p:cNvSpPr txBox="1"/>
+          <p:nvPr/>
+        </p:nvSpPr>
+        <p:spPr>
+          <a:xfrm>
+            <a:off x="16316666" y="8410000"/>
+            <a:ext cx="7133333" cy="3890000"/>
+          </a:xfrm>
+          <a:prstGeom prst="rect">
+            <a:avLst/>
+          </a:prstGeom>
+          <a:noFill/>
+        </p:spPr>
+        <p:txBody>
+          <a:bodyPr wrap="square" anchor="t">
+            <a:spAutoFit/>
+          </a:bodyPr>
+          <a:lstStyle/>
+          <a:p>
+            <a:pPr algn="l"/>
+            <a:r>
+              <a:rPr sz="2200" b="0">
                 <a:solidFill>
                   <a:srgbClr val="333333"/>
                 </a:solidFill>
@@ -9153,43 +10264,7 @@
                 <a:ea typeface="Open Sans"/>
                 <a:cs typeface="Open Sans"/>
               </a:rPr>
-              <a:t>•  При сознании — короткий опрос о жалобах и механизме травмы.</a:t>
-            </a:r>
-          </a:p>
-          <a:p>
-            <a:pPr algn="l">
-              <a:spcAft>
-                <a:spcPts val="1000"/>
-              </a:spcAft>
-            </a:pPr>
-            <a:r>
-              <a:rPr sz="3200" b="0">
-                <a:solidFill>
-                  <a:srgbClr val="333333"/>
-                </a:solidFill>
-                <a:latin typeface="Open Sans"/>
-                <a:ea typeface="Open Sans"/>
-                <a:cs typeface="Open Sans"/>
-              </a:rPr>
-              <a:t>•  Ищите раны, деформации, болезненность, признаки внутреннего кровотечения.</a:t>
-            </a:r>
-          </a:p>
-          <a:p>
-            <a:pPr algn="l">
-              <a:spcAft>
-                <a:spcPts val="1000"/>
-              </a:spcAft>
-            </a:pPr>
-            <a:r>
-              <a:rPr sz="3200" b="0">
-                <a:solidFill>
-                  <a:srgbClr val="333333"/>
-                </a:solidFill>
-                <a:latin typeface="Open Sans"/>
-                <a:ea typeface="Open Sans"/>
-                <a:cs typeface="Open Sans"/>
-              </a:rPr>
-              <a:t>•  Устраняйте угрозы по мере выявления (повязка, фиксация, холод).</a:t>
+              <a:t>Шаг 3. Осмотр груди</a:t>
             </a:r>
           </a:p>
         </p:txBody>

--- a/tema2_bleeding/Последовательность_остановки_кровотечения.pptx
+++ b/tema2_bleeding/Последовательность_остановки_кровотечения.pptx
@@ -19,7 +19,6 @@
     <p:sldId id="267" r:id="rId18"/>
     <p:sldId id="268" r:id="rId19"/>
     <p:sldId id="269" r:id="rId20"/>
-    <p:sldId id="270" r:id="rId21"/>
   </p:sldIdLst>
   <p:sldSz cx="24384000" cy="13716000" type="screen4x3"/>
   <p:notesSz cx="6858000" cy="9144000"/>
@@ -3147,100 +3146,14 @@
       </p:sp>
       <p:sp>
         <p:nvSpPr>
-          <p:cNvPr id="3" name="Rectangle 2"/>
-          <p:cNvSpPr/>
-          <p:nvPr/>
-        </p:nvSpPr>
-        <p:spPr>
-          <a:xfrm>
-            <a:off x="0" y="0"/>
-            <a:ext cx="24384000" cy="120000"/>
-          </a:xfrm>
-          <a:prstGeom prst="rect">
-            <a:avLst/>
-          </a:prstGeom>
-          <a:solidFill>
-            <a:srgbClr val="DDDDDD"/>
-          </a:solidFill>
-          <a:ln>
-            <a:noFill/>
-          </a:ln>
-        </p:spPr>
-        <p:style>
-          <a:lnRef idx="1">
-            <a:schemeClr val="accent1"/>
-          </a:lnRef>
-          <a:fillRef idx="3">
-            <a:schemeClr val="accent1"/>
-          </a:fillRef>
-          <a:effectRef idx="2">
-            <a:schemeClr val="accent1"/>
-          </a:effectRef>
-          <a:fontRef idx="minor">
-            <a:schemeClr val="lt1"/>
-          </a:fontRef>
-        </p:style>
-        <p:txBody>
-          <a:bodyPr rtlCol="0" anchor="ctr"/>
-          <a:lstStyle/>
-          <a:p>
-            <a:pPr algn="ctr"/>
-          </a:p>
-        </p:txBody>
-      </p:sp>
-      <p:sp>
-        <p:nvSpPr>
-          <p:cNvPr id="4" name="Rectangle 3"/>
-          <p:cNvSpPr/>
-          <p:nvPr/>
-        </p:nvSpPr>
-        <p:spPr>
-          <a:xfrm>
-            <a:off x="0" y="4200000"/>
-            <a:ext cx="24384000" cy="2800000"/>
-          </a:xfrm>
-          <a:prstGeom prst="rect">
-            <a:avLst/>
-          </a:prstGeom>
-          <a:solidFill>
-            <a:srgbClr val="FAFAFA"/>
-          </a:solidFill>
-          <a:ln>
-            <a:noFill/>
-          </a:ln>
-        </p:spPr>
-        <p:style>
-          <a:lnRef idx="1">
-            <a:schemeClr val="accent1"/>
-          </a:lnRef>
-          <a:fillRef idx="3">
-            <a:schemeClr val="accent1"/>
-          </a:fillRef>
-          <a:effectRef idx="2">
-            <a:schemeClr val="accent1"/>
-          </a:effectRef>
-          <a:fontRef idx="minor">
-            <a:schemeClr val="lt1"/>
-          </a:fontRef>
-        </p:style>
-        <p:txBody>
-          <a:bodyPr rtlCol="0" anchor="ctr"/>
-          <a:lstStyle/>
-          <a:p>
-            <a:pPr algn="ctr"/>
-          </a:p>
-        </p:txBody>
-      </p:sp>
-      <p:sp>
-        <p:nvSpPr>
-          <p:cNvPr id="5" name="TextBox 4"/>
+          <p:cNvPr id="3" name="TextBox 2"/>
           <p:cNvSpPr txBox="1"/>
           <p:nvPr/>
         </p:nvSpPr>
         <p:spPr>
           <a:xfrm>
-            <a:off x="800000" y="4600000"/>
-            <a:ext cx="22800000" cy="1400000"/>
+            <a:off x="360000" y="4800000"/>
+            <a:ext cx="23664000" cy="1600000"/>
           </a:xfrm>
           <a:prstGeom prst="rect">
             <a:avLst/>
@@ -3253,7 +3166,7 @@
           </a:bodyPr>
           <a:lstStyle/>
           <a:p>
-            <a:pPr algn="l"/>
+            <a:pPr algn="ctr"/>
             <a:r>
               <a:rPr sz="4600" b="1">
                 <a:solidFill>
@@ -3270,14 +3183,14 @@
       </p:sp>
       <p:sp>
         <p:nvSpPr>
-          <p:cNvPr id="6" name="Rectangle 5"/>
+          <p:cNvPr id="4" name="Rectangle 3"/>
           <p:cNvSpPr/>
           <p:nvPr/>
         </p:nvSpPr>
         <p:spPr>
           <a:xfrm>
-            <a:off x="800000" y="6200000"/>
-            <a:ext cx="12000000" cy="20000"/>
+            <a:off x="7000000" y="6600000"/>
+            <a:ext cx="10000000" cy="25000"/>
           </a:xfrm>
           <a:prstGeom prst="rect">
             <a:avLst/>
@@ -3313,14 +3226,14 @@
       </p:sp>
       <p:sp>
         <p:nvSpPr>
-          <p:cNvPr id="7" name="TextBox 6"/>
+          <p:cNvPr id="5" name="TextBox 4"/>
           <p:cNvSpPr txBox="1"/>
           <p:nvPr/>
         </p:nvSpPr>
         <p:spPr>
           <a:xfrm>
-            <a:off x="800000" y="6500000"/>
-            <a:ext cx="22800000" cy="600000"/>
+            <a:off x="360000" y="6900000"/>
+            <a:ext cx="23664000" cy="800000"/>
           </a:xfrm>
           <a:prstGeom prst="rect">
             <a:avLst/>
@@ -3333,11 +3246,11 @@
           </a:bodyPr>
           <a:lstStyle/>
           <a:p>
-            <a:pPr algn="l"/>
+            <a:pPr algn="ctr"/>
             <a:r>
               <a:rPr sz="2600" b="0">
                 <a:solidFill>
-                  <a:srgbClr val="0055AA"/>
+                  <a:srgbClr val="333333"/>
                 </a:solidFill>
                 <a:latin typeface="Open Sans"/>
                 <a:ea typeface="Open Sans"/>
@@ -3350,14 +3263,14 @@
       </p:sp>
       <p:sp>
         <p:nvSpPr>
-          <p:cNvPr id="8" name="TextBox 7"/>
+          <p:cNvPr id="6" name="TextBox 5"/>
           <p:cNvSpPr txBox="1"/>
           <p:nvPr/>
         </p:nvSpPr>
         <p:spPr>
           <a:xfrm>
-            <a:off x="800000" y="7200000"/>
-            <a:ext cx="22800000" cy="500000"/>
+            <a:off x="360000" y="7800000"/>
+            <a:ext cx="23664000" cy="500000"/>
           </a:xfrm>
           <a:prstGeom prst="rect">
             <a:avLst/>
@@ -3370,11 +3283,11 @@
           </a:bodyPr>
           <a:lstStyle/>
           <a:p>
-            <a:pPr algn="l"/>
+            <a:pPr algn="ctr"/>
             <a:r>
               <a:rPr sz="2000" b="0">
                 <a:solidFill>
-                  <a:srgbClr val="333333"/>
+                  <a:srgbClr val="0055AA"/>
                 </a:solidFill>
                 <a:latin typeface="Open Sans"/>
                 <a:ea typeface="Open Sans"/>
@@ -3448,57 +3361,14 @@
       </p:sp>
       <p:sp>
         <p:nvSpPr>
-          <p:cNvPr id="3" name="Rectangle 2"/>
-          <p:cNvSpPr/>
-          <p:nvPr/>
-        </p:nvSpPr>
-        <p:spPr>
-          <a:xfrm>
-            <a:off x="0" y="0"/>
-            <a:ext cx="24384000" cy="120000"/>
-          </a:xfrm>
-          <a:prstGeom prst="rect">
-            <a:avLst/>
-          </a:prstGeom>
-          <a:solidFill>
-            <a:srgbClr val="DDDDDD"/>
-          </a:solidFill>
-          <a:ln>
-            <a:noFill/>
-          </a:ln>
-        </p:spPr>
-        <p:style>
-          <a:lnRef idx="1">
-            <a:schemeClr val="accent1"/>
-          </a:lnRef>
-          <a:fillRef idx="3">
-            <a:schemeClr val="accent1"/>
-          </a:fillRef>
-          <a:effectRef idx="2">
-            <a:schemeClr val="accent1"/>
-          </a:effectRef>
-          <a:fontRef idx="minor">
-            <a:schemeClr val="lt1"/>
-          </a:fontRef>
-        </p:style>
-        <p:txBody>
-          <a:bodyPr rtlCol="0" anchor="ctr"/>
-          <a:lstStyle/>
-          <a:p>
-            <a:pPr algn="ctr"/>
-          </a:p>
-        </p:txBody>
-      </p:sp>
-      <p:sp>
-        <p:nvSpPr>
-          <p:cNvPr id="4" name="TextBox 3"/>
+          <p:cNvPr id="3" name="TextBox 2"/>
           <p:cNvSpPr txBox="1"/>
           <p:nvPr/>
         </p:nvSpPr>
         <p:spPr>
           <a:xfrm>
-            <a:off x="800000" y="350000"/>
-            <a:ext cx="22800000" cy="1000000"/>
+            <a:off x="360000" y="350000"/>
+            <a:ext cx="23664000" cy="1100000"/>
           </a:xfrm>
           <a:prstGeom prst="rect">
             <a:avLst/>
@@ -3521,21 +3391,21 @@
                 <a:ea typeface="Open Sans"/>
                 <a:cs typeface="Open Sans"/>
               </a:rPr>
-              <a:t>Подробный осмотр — живот, ноги, руки</a:t>
-            </a:r>
-          </a:p>
-        </p:txBody>
-      </p:sp>
-      <p:sp>
-        <p:nvSpPr>
-          <p:cNvPr id="5" name="Rectangle 4"/>
+              <a:t>Подробный осмотр — часть 2</a:t>
+            </a:r>
+          </a:p>
+        </p:txBody>
+      </p:sp>
+      <p:sp>
+        <p:nvSpPr>
+          <p:cNvPr id="4" name="Rectangle 3"/>
           <p:cNvSpPr/>
           <p:nvPr/>
         </p:nvSpPr>
         <p:spPr>
           <a:xfrm>
-            <a:off x="800000" y="1450000"/>
-            <a:ext cx="22800000" cy="20000"/>
+            <a:off x="360000" y="1450000"/>
+            <a:ext cx="23664000" cy="20000"/>
           </a:xfrm>
           <a:prstGeom prst="rect">
             <a:avLst/>
@@ -3571,14 +3441,14 @@
       </p:sp>
       <p:sp>
         <p:nvSpPr>
-          <p:cNvPr id="6" name="Rectangle 5"/>
+          <p:cNvPr id="5" name="Rectangle 4"/>
           <p:cNvSpPr/>
           <p:nvPr/>
         </p:nvSpPr>
         <p:spPr>
           <a:xfrm>
-            <a:off x="800000" y="1900000"/>
-            <a:ext cx="7433333" cy="10500000"/>
+            <a:off x="360000" y="1900000"/>
+            <a:ext cx="7721333" cy="9000000"/>
           </a:xfrm>
           <a:prstGeom prst="rect">
             <a:avLst/>
@@ -3586,7 +3456,7 @@
           <a:solidFill>
             <a:srgbClr val="FFFFFF"/>
           </a:solidFill>
-          <a:ln w="12700">
+          <a:ln w="15875">
             <a:solidFill>
               <a:srgbClr val="E1E1E1"/>
             </a:solidFill>
@@ -3616,7 +3486,7 @@
       </p:sp>
       <p:pic>
         <p:nvPicPr>
-          <p:cNvPr id="7" name="Picture 6" descr="exam_abdomen.png"/>
+          <p:cNvPr id="6" name="Picture 5" descr="exam_abdomen.png"/>
           <p:cNvPicPr>
             <a:picLocks noChangeAspect="1"/>
           </p:cNvPicPr>
@@ -3630,8 +3500,8 @@
         </p:blipFill>
         <p:spPr>
           <a:xfrm>
-            <a:off x="1994598" y="2000000"/>
-            <a:ext cx="5044137" cy="6359999"/>
+            <a:off x="1920666" y="2000000"/>
+            <a:ext cx="4600000" cy="5800000"/>
           </a:xfrm>
           <a:prstGeom prst="rect">
             <a:avLst/>
@@ -3640,14 +3510,14 @@
       </p:pic>
       <p:sp>
         <p:nvSpPr>
-          <p:cNvPr id="8" name="TextBox 7"/>
+          <p:cNvPr id="7" name="TextBox 6"/>
           <p:cNvSpPr txBox="1"/>
           <p:nvPr/>
         </p:nvSpPr>
         <p:spPr>
           <a:xfrm>
-            <a:off x="950000" y="8410000"/>
-            <a:ext cx="7133333" cy="3890000"/>
+            <a:off x="510000" y="7900000"/>
+            <a:ext cx="7421333" cy="2900000"/>
           </a:xfrm>
           <a:prstGeom prst="rect">
             <a:avLst/>
@@ -3660,9 +3530,9 @@
           </a:bodyPr>
           <a:lstStyle/>
           <a:p>
-            <a:pPr algn="l"/>
-            <a:r>
-              <a:rPr sz="2200" b="0">
+            <a:pPr algn="ctr"/>
+            <a:r>
+              <a:rPr sz="2000" b="0">
                 <a:solidFill>
                   <a:srgbClr val="333333"/>
                 </a:solidFill>
@@ -3670,21 +3540,21 @@
                 <a:ea typeface="Open Sans"/>
                 <a:cs typeface="Open Sans"/>
               </a:rPr>
-              <a:t>Шаг 4. Осмотр живота и таза</a:t>
-            </a:r>
-          </a:p>
-        </p:txBody>
-      </p:sp>
-      <p:sp>
-        <p:nvSpPr>
-          <p:cNvPr id="9" name="Rectangle 8"/>
+              <a:t>4. Живот и таз</a:t>
+            </a:r>
+          </a:p>
+        </p:txBody>
+      </p:sp>
+      <p:sp>
+        <p:nvSpPr>
+          <p:cNvPr id="8" name="Rectangle 7"/>
           <p:cNvSpPr/>
           <p:nvPr/>
         </p:nvSpPr>
         <p:spPr>
           <a:xfrm>
-            <a:off x="8483333" y="1900000"/>
-            <a:ext cx="7433333" cy="10500000"/>
+            <a:off x="8331333" y="1900000"/>
+            <a:ext cx="7721333" cy="9000000"/>
           </a:xfrm>
           <a:prstGeom prst="rect">
             <a:avLst/>
@@ -3692,7 +3562,7 @@
           <a:solidFill>
             <a:srgbClr val="FFFFFF"/>
           </a:solidFill>
-          <a:ln w="12700">
+          <a:ln w="15875">
             <a:solidFill>
               <a:srgbClr val="E1E1E1"/>
             </a:solidFill>
@@ -3722,7 +3592,7 @@
       </p:sp>
       <p:pic>
         <p:nvPicPr>
-          <p:cNvPr id="10" name="Picture 9" descr="exam_legs.png"/>
+          <p:cNvPr id="9" name="Picture 8" descr="exam_legs.png"/>
           <p:cNvPicPr>
             <a:picLocks noChangeAspect="1"/>
           </p:cNvPicPr>
@@ -3736,8 +3606,8 @@
         </p:blipFill>
         <p:spPr>
           <a:xfrm>
-            <a:off x="9677931" y="2000000"/>
-            <a:ext cx="5044137" cy="6359999"/>
+            <a:off x="9891999" y="2000000"/>
+            <a:ext cx="4600000" cy="5800000"/>
           </a:xfrm>
           <a:prstGeom prst="rect">
             <a:avLst/>
@@ -3746,14 +3616,14 @@
       </p:pic>
       <p:sp>
         <p:nvSpPr>
-          <p:cNvPr id="11" name="TextBox 10"/>
+          <p:cNvPr id="10" name="TextBox 9"/>
           <p:cNvSpPr txBox="1"/>
           <p:nvPr/>
         </p:nvSpPr>
         <p:spPr>
           <a:xfrm>
-            <a:off x="8633333" y="8410000"/>
-            <a:ext cx="7133333" cy="3890000"/>
+            <a:off x="8481333" y="7900000"/>
+            <a:ext cx="7421333" cy="2900000"/>
           </a:xfrm>
           <a:prstGeom prst="rect">
             <a:avLst/>
@@ -3766,9 +3636,9 @@
           </a:bodyPr>
           <a:lstStyle/>
           <a:p>
-            <a:pPr algn="l"/>
-            <a:r>
-              <a:rPr sz="2200" b="0">
+            <a:pPr algn="ctr"/>
+            <a:r>
+              <a:rPr sz="2000" b="0">
                 <a:solidFill>
                   <a:srgbClr val="333333"/>
                 </a:solidFill>
@@ -3776,21 +3646,21 @@
                 <a:ea typeface="Open Sans"/>
                 <a:cs typeface="Open Sans"/>
               </a:rPr>
-              <a:t>Шаг 5. Осмотр ног</a:t>
-            </a:r>
-          </a:p>
-        </p:txBody>
-      </p:sp>
-      <p:sp>
-        <p:nvSpPr>
-          <p:cNvPr id="12" name="Rectangle 11"/>
+              <a:t>5. Ноги</a:t>
+            </a:r>
+          </a:p>
+        </p:txBody>
+      </p:sp>
+      <p:sp>
+        <p:nvSpPr>
+          <p:cNvPr id="11" name="Rectangle 10"/>
           <p:cNvSpPr/>
           <p:nvPr/>
         </p:nvSpPr>
         <p:spPr>
           <a:xfrm>
-            <a:off x="16166666" y="1900000"/>
-            <a:ext cx="7433333" cy="10500000"/>
+            <a:off x="16302666" y="1900000"/>
+            <a:ext cx="7721333" cy="9000000"/>
           </a:xfrm>
           <a:prstGeom prst="rect">
             <a:avLst/>
@@ -3798,7 +3668,7 @@
           <a:solidFill>
             <a:srgbClr val="FFFFFF"/>
           </a:solidFill>
-          <a:ln w="12700">
+          <a:ln w="15875">
             <a:solidFill>
               <a:srgbClr val="E1E1E1"/>
             </a:solidFill>
@@ -3828,7 +3698,7 @@
       </p:sp>
       <p:pic>
         <p:nvPicPr>
-          <p:cNvPr id="13" name="Picture 12" descr="exam_arms.png"/>
+          <p:cNvPr id="12" name="Picture 11" descr="exam_arms.png"/>
           <p:cNvPicPr>
             <a:picLocks noChangeAspect="1"/>
           </p:cNvPicPr>
@@ -3842,8 +3712,8 @@
         </p:blipFill>
         <p:spPr>
           <a:xfrm>
-            <a:off x="17361264" y="2000000"/>
-            <a:ext cx="5044137" cy="6359999"/>
+            <a:off x="17863332" y="2000000"/>
+            <a:ext cx="4600000" cy="5800000"/>
           </a:xfrm>
           <a:prstGeom prst="rect">
             <a:avLst/>
@@ -3852,14 +3722,14 @@
       </p:pic>
       <p:sp>
         <p:nvSpPr>
-          <p:cNvPr id="14" name="TextBox 13"/>
+          <p:cNvPr id="13" name="TextBox 12"/>
           <p:cNvSpPr txBox="1"/>
           <p:nvPr/>
         </p:nvSpPr>
         <p:spPr>
           <a:xfrm>
-            <a:off x="16316666" y="8410000"/>
-            <a:ext cx="7133333" cy="3890000"/>
+            <a:off x="16452666" y="7900000"/>
+            <a:ext cx="7421333" cy="2900000"/>
           </a:xfrm>
           <a:prstGeom prst="rect">
             <a:avLst/>
@@ -3872,9 +3742,9 @@
           </a:bodyPr>
           <a:lstStyle/>
           <a:p>
-            <a:pPr algn="l"/>
-            <a:r>
-              <a:rPr sz="2200" b="0">
+            <a:pPr algn="ctr"/>
+            <a:r>
+              <a:rPr sz="2000" b="0">
                 <a:solidFill>
                   <a:srgbClr val="333333"/>
                 </a:solidFill>
@@ -3882,7 +3752,7 @@
                 <a:ea typeface="Open Sans"/>
                 <a:cs typeface="Open Sans"/>
               </a:rPr>
-              <a:t>Шаг 6. Осмотр рук</a:t>
+              <a:t>6. Руки</a:t>
             </a:r>
           </a:p>
         </p:txBody>
@@ -3950,57 +3820,14 @@
       </p:sp>
       <p:sp>
         <p:nvSpPr>
-          <p:cNvPr id="3" name="Rectangle 2"/>
-          <p:cNvSpPr/>
-          <p:nvPr/>
-        </p:nvSpPr>
-        <p:spPr>
-          <a:xfrm>
-            <a:off x="0" y="0"/>
-            <a:ext cx="24384000" cy="120000"/>
-          </a:xfrm>
-          <a:prstGeom prst="rect">
-            <a:avLst/>
-          </a:prstGeom>
-          <a:solidFill>
-            <a:srgbClr val="DDDDDD"/>
-          </a:solidFill>
-          <a:ln>
-            <a:noFill/>
-          </a:ln>
-        </p:spPr>
-        <p:style>
-          <a:lnRef idx="1">
-            <a:schemeClr val="accent1"/>
-          </a:lnRef>
-          <a:fillRef idx="3">
-            <a:schemeClr val="accent1"/>
-          </a:fillRef>
-          <a:effectRef idx="2">
-            <a:schemeClr val="accent1"/>
-          </a:effectRef>
-          <a:fontRef idx="minor">
-            <a:schemeClr val="lt1"/>
-          </a:fontRef>
-        </p:style>
-        <p:txBody>
-          <a:bodyPr rtlCol="0" anchor="ctr"/>
-          <a:lstStyle/>
-          <a:p>
-            <a:pPr algn="ctr"/>
-          </a:p>
-        </p:txBody>
-      </p:sp>
-      <p:sp>
-        <p:nvSpPr>
-          <p:cNvPr id="4" name="TextBox 3"/>
+          <p:cNvPr id="3" name="TextBox 2"/>
           <p:cNvSpPr txBox="1"/>
           <p:nvPr/>
         </p:nvSpPr>
         <p:spPr>
           <a:xfrm>
-            <a:off x="800000" y="350000"/>
-            <a:ext cx="22800000" cy="1000000"/>
+            <a:off x="360000" y="350000"/>
+            <a:ext cx="23664000" cy="1100000"/>
           </a:xfrm>
           <a:prstGeom prst="rect">
             <a:avLst/>
@@ -4023,21 +3850,21 @@
                 <a:ea typeface="Open Sans"/>
                 <a:cs typeface="Open Sans"/>
               </a:rPr>
-              <a:t>Порядок подробного осмотра</a:t>
-            </a:r>
-          </a:p>
-        </p:txBody>
-      </p:sp>
-      <p:sp>
-        <p:nvSpPr>
-          <p:cNvPr id="5" name="Rectangle 4"/>
+              <a:t>После остановки кровотечения</a:t>
+            </a:r>
+          </a:p>
+        </p:txBody>
+      </p:sp>
+      <p:sp>
+        <p:nvSpPr>
+          <p:cNvPr id="4" name="Rectangle 3"/>
           <p:cNvSpPr/>
           <p:nvPr/>
         </p:nvSpPr>
         <p:spPr>
           <a:xfrm>
-            <a:off x="800000" y="1450000"/>
-            <a:ext cx="22800000" cy="20000"/>
+            <a:off x="360000" y="1450000"/>
+            <a:ext cx="23664000" cy="20000"/>
           </a:xfrm>
           <a:prstGeom prst="rect">
             <a:avLst/>
@@ -4073,14 +3900,14 @@
       </p:sp>
       <p:sp>
         <p:nvSpPr>
-          <p:cNvPr id="6" name="TextBox 5"/>
+          <p:cNvPr id="5" name="TextBox 4"/>
           <p:cNvSpPr txBox="1"/>
           <p:nvPr/>
         </p:nvSpPr>
         <p:spPr>
           <a:xfrm>
-            <a:off x="800000" y="1950000"/>
-            <a:ext cx="22800000" cy="8500000"/>
+            <a:off x="860000" y="2000000"/>
+            <a:ext cx="22664000" cy="7500000"/>
           </a:xfrm>
           <a:prstGeom prst="rect">
             <a:avLst/>
@@ -4095,7 +3922,7 @@
           <a:p>
             <a:pPr algn="l">
               <a:spcAft>
-                <a:spcPts val="1000"/>
+                <a:spcPts val="1400"/>
               </a:spcAft>
             </a:pPr>
             <a:r>
@@ -4107,13 +3934,13 @@
                 <a:ea typeface="Open Sans"/>
                 <a:cs typeface="Open Sans"/>
               </a:rPr>
-              <a:t>•  Голова → шея → грудь → живот и таз → ноги → руки.</a:t>
+              <a:t>•  Контроль повязки (при промокании — усилить)</a:t>
             </a:r>
           </a:p>
           <a:p>
             <a:pPr algn="l">
               <a:spcAft>
-                <a:spcPts val="1000"/>
+                <a:spcPts val="1400"/>
               </a:spcAft>
             </a:pPr>
             <a:r>
@@ -4125,13 +3952,13 @@
                 <a:ea typeface="Open Sans"/>
                 <a:cs typeface="Open Sans"/>
               </a:rPr>
-              <a:t>•  Спина — при возможности безопасно повернуть / осмотреть.</a:t>
+              <a:t>•  Сознание, дыхание, цвет кожи</a:t>
             </a:r>
           </a:p>
           <a:p>
             <a:pPr algn="l">
               <a:spcAft>
-                <a:spcPts val="1000"/>
+                <a:spcPts val="1400"/>
               </a:spcAft>
             </a:pPr>
             <a:r>
@@ -4143,13 +3970,13 @@
                 <a:ea typeface="Open Sans"/>
                 <a:cs typeface="Open Sans"/>
               </a:rPr>
-              <a:t>•  При сознании — короткий опрос о жалобах и механизме травмы.</a:t>
+              <a:t>•  Жгут: время, видимость, записка</a:t>
             </a:r>
           </a:p>
           <a:p>
             <a:pPr algn="l">
               <a:spcAft>
-                <a:spcPts val="1000"/>
+                <a:spcPts val="1400"/>
               </a:spcAft>
             </a:pPr>
             <a:r>
@@ -4161,13 +3988,13 @@
                 <a:ea typeface="Open Sans"/>
                 <a:cs typeface="Open Sans"/>
               </a:rPr>
-              <a:t>•  Ищите раны, деформации, болезненность, признаки внутреннего кровотечения.</a:t>
+              <a:t>•  Согреть, обеспечить покой</a:t>
             </a:r>
           </a:p>
           <a:p>
             <a:pPr algn="l">
               <a:spcAft>
-                <a:spcPts val="1000"/>
+                <a:spcPts val="1400"/>
               </a:spcAft>
             </a:pPr>
             <a:r>
@@ -4179,7 +4006,7 @@
                 <a:ea typeface="Open Sans"/>
                 <a:cs typeface="Open Sans"/>
               </a:rPr>
-              <a:t>•  Устраняйте угрозы по мере выявления (повязка, фиксация, холод).</a:t>
+              <a:t>•  Передать бригаде: что сделано и время жгута</a:t>
             </a:r>
           </a:p>
         </p:txBody>
@@ -4247,57 +4074,14 @@
       </p:sp>
       <p:sp>
         <p:nvSpPr>
-          <p:cNvPr id="3" name="Rectangle 2"/>
-          <p:cNvSpPr/>
-          <p:nvPr/>
-        </p:nvSpPr>
-        <p:spPr>
-          <a:xfrm>
-            <a:off x="0" y="0"/>
-            <a:ext cx="24384000" cy="120000"/>
-          </a:xfrm>
-          <a:prstGeom prst="rect">
-            <a:avLst/>
-          </a:prstGeom>
-          <a:solidFill>
-            <a:srgbClr val="DDDDDD"/>
-          </a:solidFill>
-          <a:ln>
-            <a:noFill/>
-          </a:ln>
-        </p:spPr>
-        <p:style>
-          <a:lnRef idx="1">
-            <a:schemeClr val="accent1"/>
-          </a:lnRef>
-          <a:fillRef idx="3">
-            <a:schemeClr val="accent1"/>
-          </a:fillRef>
-          <a:effectRef idx="2">
-            <a:schemeClr val="accent1"/>
-          </a:effectRef>
-          <a:fontRef idx="minor">
-            <a:schemeClr val="lt1"/>
-          </a:fontRef>
-        </p:style>
-        <p:txBody>
-          <a:bodyPr rtlCol="0" anchor="ctr"/>
-          <a:lstStyle/>
-          <a:p>
-            <a:pPr algn="ctr"/>
-          </a:p>
-        </p:txBody>
-      </p:sp>
-      <p:sp>
-        <p:nvSpPr>
-          <p:cNvPr id="4" name="TextBox 3"/>
+          <p:cNvPr id="3" name="TextBox 2"/>
           <p:cNvSpPr txBox="1"/>
           <p:nvPr/>
         </p:nvSpPr>
         <p:spPr>
           <a:xfrm>
-            <a:off x="800000" y="350000"/>
-            <a:ext cx="22800000" cy="1000000"/>
+            <a:off x="360000" y="350000"/>
+            <a:ext cx="23664000" cy="1100000"/>
           </a:xfrm>
           <a:prstGeom prst="rect">
             <a:avLst/>
@@ -4320,21 +4104,21 @@
                 <a:ea typeface="Open Sans"/>
                 <a:cs typeface="Open Sans"/>
               </a:rPr>
-              <a:t>Действия после остановки кровотечения</a:t>
-            </a:r>
-          </a:p>
-        </p:txBody>
-      </p:sp>
-      <p:sp>
-        <p:nvSpPr>
-          <p:cNvPr id="5" name="Rectangle 4"/>
+              <a:t>Когда и как ослаблять жгут</a:t>
+            </a:r>
+          </a:p>
+        </p:txBody>
+      </p:sp>
+      <p:sp>
+        <p:nvSpPr>
+          <p:cNvPr id="4" name="Rectangle 3"/>
           <p:cNvSpPr/>
           <p:nvPr/>
         </p:nvSpPr>
         <p:spPr>
           <a:xfrm>
-            <a:off x="800000" y="1450000"/>
-            <a:ext cx="22800000" cy="20000"/>
+            <a:off x="360000" y="1450000"/>
+            <a:ext cx="23664000" cy="20000"/>
           </a:xfrm>
           <a:prstGeom prst="rect">
             <a:avLst/>
@@ -4370,14 +4154,14 @@
       </p:sp>
       <p:sp>
         <p:nvSpPr>
-          <p:cNvPr id="6" name="TextBox 5"/>
+          <p:cNvPr id="5" name="TextBox 4"/>
           <p:cNvSpPr txBox="1"/>
           <p:nvPr/>
         </p:nvSpPr>
         <p:spPr>
           <a:xfrm>
-            <a:off x="800000" y="1950000"/>
-            <a:ext cx="22800000" cy="8500000"/>
+            <a:off x="860000" y="2000000"/>
+            <a:ext cx="22664000" cy="6500000"/>
           </a:xfrm>
           <a:prstGeom prst="rect">
             <a:avLst/>
@@ -4392,7 +4176,7 @@
           <a:p>
             <a:pPr algn="l">
               <a:spcAft>
-                <a:spcPts val="1000"/>
+                <a:spcPts val="1400"/>
               </a:spcAft>
             </a:pPr>
             <a:r>
@@ -4404,31 +4188,31 @@
                 <a:ea typeface="Open Sans"/>
                 <a:cs typeface="Open Sans"/>
               </a:rPr>
-              <a:t>•  Контролируйте повязку: при промокании усильте, не снимая нижние слои.</a:t>
+              <a:t>•  Планово ослаблять на месте не рекомендуется</a:t>
             </a:r>
           </a:p>
           <a:p>
             <a:pPr algn="l">
               <a:spcAft>
-                <a:spcPts val="1000"/>
+                <a:spcPts val="1400"/>
               </a:spcAft>
             </a:pPr>
             <a:r>
-              <a:rPr sz="3200" b="0">
-                <a:solidFill>
-                  <a:srgbClr val="333333"/>
+              <a:rPr sz="3200" b="1">
+                <a:solidFill>
+                  <a:srgbClr val="CC0000"/>
                 </a:solidFill>
                 <a:latin typeface="Open Sans"/>
                 <a:ea typeface="Open Sans"/>
                 <a:cs typeface="Open Sans"/>
               </a:rPr>
-              <a:t>•  Проверяйте признаки жизни: сознание, дыхание, цвет кожи.</a:t>
+              <a:t>•  Если превышен лимит 60 / 30 мин и СМП нет:</a:t>
             </a:r>
           </a:p>
           <a:p>
             <a:pPr algn="l">
               <a:spcAft>
-                <a:spcPts val="1000"/>
+                <a:spcPts val="1400"/>
               </a:spcAft>
             </a:pPr>
             <a:r>
@@ -4440,13 +4224,13 @@
                 <a:ea typeface="Open Sans"/>
                 <a:cs typeface="Open Sans"/>
               </a:rPr>
-              <a:t>•  Следите за жгутом: время, видимость, записка.</a:t>
+              <a:t>•  Подготовить давление / повязку</a:t>
             </a:r>
           </a:p>
           <a:p>
             <a:pPr algn="l">
               <a:spcAft>
-                <a:spcPts val="1000"/>
+                <a:spcPts val="1400"/>
               </a:spcAft>
             </a:pPr>
             <a:r>
@@ -4458,13 +4242,13 @@
                 <a:ea typeface="Open Sans"/>
                 <a:cs typeface="Open Sans"/>
               </a:rPr>
-              <a:t>•  Согрейте пострадавшего, обеспечьте покой.</a:t>
+              <a:t>•  Медленно ослабить, оценивая кровь</a:t>
             </a:r>
           </a:p>
           <a:p>
             <a:pPr algn="l">
               <a:spcAft>
-                <a:spcPts val="1000"/>
+                <a:spcPts val="1400"/>
               </a:spcAft>
             </a:pPr>
             <a:r>
@@ -4476,25 +4260,130 @@
                 <a:ea typeface="Open Sans"/>
                 <a:cs typeface="Open Sans"/>
               </a:rPr>
-              <a:t>•  При ухудшении — повторный вызов СМП с динамикой.</a:t>
-            </a:r>
-          </a:p>
-          <a:p>
-            <a:pPr algn="l">
-              <a:spcAft>
-                <a:spcPts val="1000"/>
-              </a:spcAft>
-            </a:pPr>
-            <a:r>
-              <a:rPr sz="3200" b="0">
-                <a:solidFill>
-                  <a:srgbClr val="333333"/>
+              <a:t>•  При струе — сразу затянуть и обновить время</a:t>
+            </a:r>
+          </a:p>
+        </p:txBody>
+      </p:sp>
+      <p:sp>
+        <p:nvSpPr>
+          <p:cNvPr id="6" name="Rounded Rectangle 5"/>
+          <p:cNvSpPr/>
+          <p:nvPr/>
+        </p:nvSpPr>
+        <p:spPr>
+          <a:xfrm>
+            <a:off x="360000" y="11200000"/>
+            <a:ext cx="23664000" cy="1500000"/>
+          </a:xfrm>
+          <a:prstGeom prst="roundRect">
+            <a:avLst/>
+          </a:prstGeom>
+          <a:solidFill>
+            <a:srgbClr val="F7F7F7"/>
+          </a:solidFill>
+          <a:ln>
+            <a:noFill/>
+          </a:ln>
+        </p:spPr>
+        <p:style>
+          <a:lnRef idx="1">
+            <a:schemeClr val="accent1"/>
+          </a:lnRef>
+          <a:fillRef idx="3">
+            <a:schemeClr val="accent1"/>
+          </a:fillRef>
+          <a:effectRef idx="2">
+            <a:schemeClr val="accent1"/>
+          </a:effectRef>
+          <a:fontRef idx="minor">
+            <a:schemeClr val="lt1"/>
+          </a:fontRef>
+        </p:style>
+        <p:txBody>
+          <a:bodyPr rtlCol="0" anchor="ctr"/>
+          <a:lstStyle/>
+          <a:p>
+            <a:pPr algn="ctr"/>
+          </a:p>
+        </p:txBody>
+      </p:sp>
+      <p:sp>
+        <p:nvSpPr>
+          <p:cNvPr id="7" name="Rectangle 6"/>
+          <p:cNvSpPr/>
+          <p:nvPr/>
+        </p:nvSpPr>
+        <p:spPr>
+          <a:xfrm>
+            <a:off x="360000" y="11200000"/>
+            <a:ext cx="120000" cy="1500000"/>
+          </a:xfrm>
+          <a:prstGeom prst="rect">
+            <a:avLst/>
+          </a:prstGeom>
+          <a:solidFill>
+            <a:srgbClr val="CC0000"/>
+          </a:solidFill>
+          <a:ln>
+            <a:noFill/>
+          </a:ln>
+        </p:spPr>
+        <p:style>
+          <a:lnRef idx="1">
+            <a:schemeClr val="accent1"/>
+          </a:lnRef>
+          <a:fillRef idx="3">
+            <a:schemeClr val="accent1"/>
+          </a:fillRef>
+          <a:effectRef idx="2">
+            <a:schemeClr val="accent1"/>
+          </a:effectRef>
+          <a:fontRef idx="minor">
+            <a:schemeClr val="lt1"/>
+          </a:fontRef>
+        </p:style>
+        <p:txBody>
+          <a:bodyPr rtlCol="0" anchor="ctr"/>
+          <a:lstStyle/>
+          <a:p>
+            <a:pPr algn="ctr"/>
+          </a:p>
+        </p:txBody>
+      </p:sp>
+      <p:sp>
+        <p:nvSpPr>
+          <p:cNvPr id="8" name="TextBox 7"/>
+          <p:cNvSpPr txBox="1"/>
+          <p:nvPr/>
+        </p:nvSpPr>
+        <p:spPr>
+          <a:xfrm>
+            <a:off x="760000" y="11400000"/>
+            <a:ext cx="23064000" cy="1100000"/>
+          </a:xfrm>
+          <a:prstGeom prst="rect">
+            <a:avLst/>
+          </a:prstGeom>
+          <a:noFill/>
+        </p:spPr>
+        <p:txBody>
+          <a:bodyPr wrap="square" anchor="ctr">
+            <a:spAutoFit/>
+          </a:bodyPr>
+          <a:lstStyle/>
+          <a:p>
+            <a:pPr algn="l"/>
+            <a:r>
+              <a:rPr sz="2600" b="1">
+                <a:solidFill>
+                  <a:srgbClr val="CC0000"/>
                 </a:solidFill>
                 <a:latin typeface="Open Sans"/>
                 <a:ea typeface="Open Sans"/>
                 <a:cs typeface="Open Sans"/>
               </a:rPr>
-              <a:t>•  Передайте бригаде: что случилось, что сделано, время жгута.</a:t>
+              <a:t>Лимит жгута: ≤ 60 мин (тепло) · ≤ 30 мин (холод)</a:t>
             </a:r>
           </a:p>
         </p:txBody>
@@ -4562,57 +4451,14 @@
       </p:sp>
       <p:sp>
         <p:nvSpPr>
-          <p:cNvPr id="3" name="Rectangle 2"/>
-          <p:cNvSpPr/>
-          <p:nvPr/>
-        </p:nvSpPr>
-        <p:spPr>
-          <a:xfrm>
-            <a:off x="0" y="0"/>
-            <a:ext cx="24384000" cy="120000"/>
-          </a:xfrm>
-          <a:prstGeom prst="rect">
-            <a:avLst/>
-          </a:prstGeom>
-          <a:solidFill>
-            <a:srgbClr val="DDDDDD"/>
-          </a:solidFill>
-          <a:ln>
-            <a:noFill/>
-          </a:ln>
-        </p:spPr>
-        <p:style>
-          <a:lnRef idx="1">
-            <a:schemeClr val="accent1"/>
-          </a:lnRef>
-          <a:fillRef idx="3">
-            <a:schemeClr val="accent1"/>
-          </a:fillRef>
-          <a:effectRef idx="2">
-            <a:schemeClr val="accent1"/>
-          </a:effectRef>
-          <a:fontRef idx="minor">
-            <a:schemeClr val="lt1"/>
-          </a:fontRef>
-        </p:style>
-        <p:txBody>
-          <a:bodyPr rtlCol="0" anchor="ctr"/>
-          <a:lstStyle/>
-          <a:p>
-            <a:pPr algn="ctr"/>
-          </a:p>
-        </p:txBody>
-      </p:sp>
-      <p:sp>
-        <p:nvSpPr>
-          <p:cNvPr id="4" name="TextBox 3"/>
+          <p:cNvPr id="3" name="TextBox 2"/>
           <p:cNvSpPr txBox="1"/>
           <p:nvPr/>
         </p:nvSpPr>
         <p:spPr>
           <a:xfrm>
-            <a:off x="800000" y="350000"/>
-            <a:ext cx="22800000" cy="1000000"/>
+            <a:off x="360000" y="350000"/>
+            <a:ext cx="23664000" cy="1100000"/>
           </a:xfrm>
           <a:prstGeom prst="rect">
             <a:avLst/>
@@ -4625,7 +4471,7 @@
           </a:bodyPr>
           <a:lstStyle/>
           <a:p>
-            <a:pPr algn="l"/>
+            <a:pPr algn="ctr"/>
             <a:r>
               <a:rPr sz="4600" b="1">
                 <a:solidFill>
@@ -4635,21 +4481,21 @@
                 <a:ea typeface="Open Sans"/>
                 <a:cs typeface="Open Sans"/>
               </a:rPr>
-              <a:t>Когда и как ослаблять жгут</a:t>
-            </a:r>
-          </a:p>
-        </p:txBody>
-      </p:sp>
-      <p:sp>
-        <p:nvSpPr>
-          <p:cNvPr id="5" name="Rectangle 4"/>
+              <a:t>Главное запомнить</a:t>
+            </a:r>
+          </a:p>
+        </p:txBody>
+      </p:sp>
+      <p:sp>
+        <p:nvSpPr>
+          <p:cNvPr id="4" name="Rectangle 3"/>
           <p:cNvSpPr/>
           <p:nvPr/>
         </p:nvSpPr>
         <p:spPr>
           <a:xfrm>
-            <a:off x="800000" y="1450000"/>
-            <a:ext cx="22800000" cy="20000"/>
+            <a:off x="360000" y="1450000"/>
+            <a:ext cx="23664000" cy="20000"/>
           </a:xfrm>
           <a:prstGeom prst="rect">
             <a:avLst/>
@@ -4685,151 +4531,20 @@
       </p:sp>
       <p:sp>
         <p:nvSpPr>
-          <p:cNvPr id="6" name="TextBox 5"/>
-          <p:cNvSpPr txBox="1"/>
-          <p:nvPr/>
-        </p:nvSpPr>
-        <p:spPr>
-          <a:xfrm>
-            <a:off x="800000" y="1950000"/>
-            <a:ext cx="22800000" cy="7000000"/>
-          </a:xfrm>
-          <a:prstGeom prst="rect">
-            <a:avLst/>
-          </a:prstGeom>
-          <a:noFill/>
-        </p:spPr>
-        <p:txBody>
-          <a:bodyPr wrap="square">
-            <a:spAutoFit/>
-          </a:bodyPr>
-          <a:lstStyle/>
-          <a:p>
-            <a:pPr algn="l">
-              <a:spcAft>
-                <a:spcPts val="1000"/>
-              </a:spcAft>
-            </a:pPr>
-            <a:r>
-              <a:rPr sz="3200" b="0">
-                <a:solidFill>
-                  <a:srgbClr val="333333"/>
-                </a:solidFill>
-                <a:latin typeface="Open Sans"/>
-                <a:ea typeface="Open Sans"/>
-                <a:cs typeface="Open Sans"/>
-              </a:rPr>
-              <a:t>•  Планово ослаблять жгут на месте не рекомендуется.</a:t>
-            </a:r>
-          </a:p>
-          <a:p>
-            <a:pPr algn="l">
-              <a:spcAft>
-                <a:spcPts val="1000"/>
-              </a:spcAft>
-            </a:pPr>
-            <a:r>
-              <a:rPr sz="3200" b="1">
-                <a:solidFill>
-                  <a:srgbClr val="CC0000"/>
-                </a:solidFill>
-                <a:latin typeface="Open Sans"/>
-                <a:ea typeface="Open Sans"/>
-                <a:cs typeface="Open Sans"/>
-              </a:rPr>
-              <a:t>•  Если время превысило 60 мин / 30 мин и СМП задерживается:</a:t>
-            </a:r>
-          </a:p>
-          <a:p>
-            <a:pPr algn="l">
-              <a:spcAft>
-                <a:spcPts val="1000"/>
-              </a:spcAft>
-            </a:pPr>
-            <a:r>
-              <a:rPr sz="3200" b="0">
-                <a:solidFill>
-                  <a:srgbClr val="333333"/>
-                </a:solidFill>
-                <a:latin typeface="Open Sans"/>
-                <a:ea typeface="Open Sans"/>
-                <a:cs typeface="Open Sans"/>
-              </a:rPr>
-              <a:t>•  подготовьте прямое давление / давящую повязку;</a:t>
-            </a:r>
-          </a:p>
-          <a:p>
-            <a:pPr algn="l">
-              <a:spcAft>
-                <a:spcPts val="1000"/>
-              </a:spcAft>
-            </a:pPr>
-            <a:r>
-              <a:rPr sz="3200" b="0">
-                <a:solidFill>
-                  <a:srgbClr val="333333"/>
-                </a:solidFill>
-                <a:latin typeface="Open Sans"/>
-                <a:ea typeface="Open Sans"/>
-                <a:cs typeface="Open Sans"/>
-              </a:rPr>
-              <a:t>•  медленно ослабьте жгут, оценивая кровотечение;</a:t>
-            </a:r>
-          </a:p>
-          <a:p>
-            <a:pPr algn="l">
-              <a:spcAft>
-                <a:spcPts val="1000"/>
-              </a:spcAft>
-            </a:pPr>
-            <a:r>
-              <a:rPr sz="3200" b="0">
-                <a:solidFill>
-                  <a:srgbClr val="333333"/>
-                </a:solidFill>
-                <a:latin typeface="Open Sans"/>
-                <a:ea typeface="Open Sans"/>
-                <a:cs typeface="Open Sans"/>
-              </a:rPr>
-              <a:t>•  если кровь снова бьёт струёй — немедленно затяните и обновите время;</a:t>
-            </a:r>
-          </a:p>
-          <a:p>
-            <a:pPr algn="l">
-              <a:spcAft>
-                <a:spcPts val="1000"/>
-              </a:spcAft>
-            </a:pPr>
-            <a:r>
-              <a:rPr sz="3200" b="0">
-                <a:solidFill>
-                  <a:srgbClr val="333333"/>
-                </a:solidFill>
-                <a:latin typeface="Open Sans"/>
-                <a:ea typeface="Open Sans"/>
-                <a:cs typeface="Open Sans"/>
-              </a:rPr>
-              <a:t>•  решение о снятии, как правило, принимает медработник.</a:t>
-            </a:r>
-          </a:p>
-        </p:txBody>
-      </p:sp>
-      <p:sp>
-        <p:nvSpPr>
-          <p:cNvPr id="7" name="Rounded Rectangle 6"/>
+          <p:cNvPr id="5" name="Oval 4"/>
           <p:cNvSpPr/>
           <p:nvPr/>
         </p:nvSpPr>
         <p:spPr>
           <a:xfrm>
-            <a:off x="800000" y="11000000"/>
-            <a:ext cx="22800000" cy="1800000"/>
-          </a:xfrm>
-          <a:prstGeom prst="roundRect">
+            <a:off x="1860000" y="2150000"/>
+            <a:ext cx="600000" cy="600000"/>
+          </a:xfrm>
+          <a:prstGeom prst="ellipse">
             <a:avLst/>
           </a:prstGeom>
           <a:solidFill>
-            <a:srgbClr val="FAFAFA"/>
+            <a:srgbClr val="0055AA"/>
           </a:solidFill>
           <a:ln>
             <a:noFill/>
@@ -4859,20 +4574,94 @@
       </p:sp>
       <p:sp>
         <p:nvSpPr>
-          <p:cNvPr id="8" name="Rectangle 7"/>
+          <p:cNvPr id="6" name="TextBox 5"/>
+          <p:cNvSpPr txBox="1"/>
+          <p:nvPr/>
+        </p:nvSpPr>
+        <p:spPr>
+          <a:xfrm>
+            <a:off x="1860000" y="2150000"/>
+            <a:ext cx="600000" cy="600000"/>
+          </a:xfrm>
+          <a:prstGeom prst="rect">
+            <a:avLst/>
+          </a:prstGeom>
+          <a:noFill/>
+        </p:spPr>
+        <p:txBody>
+          <a:bodyPr wrap="square" anchor="ctr">
+            <a:spAutoFit/>
+          </a:bodyPr>
+          <a:lstStyle/>
+          <a:p>
+            <a:pPr algn="ctr"/>
+            <a:r>
+              <a:rPr sz="2400" b="1">
+                <a:solidFill>
+                  <a:srgbClr val="FFFFFF"/>
+                </a:solidFill>
+                <a:latin typeface="Open Sans"/>
+                <a:ea typeface="Open Sans"/>
+                <a:cs typeface="Open Sans"/>
+              </a:rPr>
+              <a:t>OK</a:t>
+            </a:r>
+          </a:p>
+        </p:txBody>
+      </p:sp>
+      <p:sp>
+        <p:nvSpPr>
+          <p:cNvPr id="7" name="TextBox 6"/>
+          <p:cNvSpPr txBox="1"/>
+          <p:nvPr/>
+        </p:nvSpPr>
+        <p:spPr>
+          <a:xfrm>
+            <a:off x="2860000" y="2000000"/>
+            <a:ext cx="18000000" cy="900000"/>
+          </a:xfrm>
+          <a:prstGeom prst="rect">
+            <a:avLst/>
+          </a:prstGeom>
+          <a:noFill/>
+        </p:spPr>
+        <p:txBody>
+          <a:bodyPr wrap="square" anchor="ctr">
+            <a:spAutoFit/>
+          </a:bodyPr>
+          <a:lstStyle/>
+          <a:p>
+            <a:pPr algn="l"/>
+            <a:r>
+              <a:rPr sz="2800" b="0">
+                <a:solidFill>
+                  <a:srgbClr val="333333"/>
+                </a:solidFill>
+                <a:latin typeface="Open Sans"/>
+                <a:ea typeface="Open Sans"/>
+                <a:cs typeface="Open Sans"/>
+              </a:rPr>
+              <a:t>Безопасность → осмотр → кровь → признаки жизни → СМП</a:t>
+            </a:r>
+          </a:p>
+        </p:txBody>
+      </p:sp>
+      <p:sp>
+        <p:nvSpPr>
+          <p:cNvPr id="8" name="Oval 7"/>
           <p:cNvSpPr/>
           <p:nvPr/>
         </p:nvSpPr>
         <p:spPr>
           <a:xfrm>
-            <a:off x="800000" y="11000000"/>
-            <a:ext cx="120000" cy="1800000"/>
-          </a:xfrm>
-          <a:prstGeom prst="rect">
+            <a:off x="1860000" y="3750000"/>
+            <a:ext cx="600000" cy="600000"/>
+          </a:xfrm>
+          <a:prstGeom prst="ellipse">
             <a:avLst/>
           </a:prstGeom>
           <a:solidFill>
-            <a:srgbClr val="CC0000"/>
+            <a:srgbClr val="0055AA"/>
           </a:solidFill>
           <a:ln>
             <a:noFill/>
@@ -4908,8 +4697,8 @@
         </p:nvSpPr>
         <p:spPr>
           <a:xfrm>
-            <a:off x="1200000" y="11300000"/>
-            <a:ext cx="21800000" cy="1400000"/>
+            <a:off x="1860000" y="3750000"/>
+            <a:ext cx="600000" cy="600000"/>
           </a:xfrm>
           <a:prstGeom prst="rect">
             <a:avLst/>
@@ -4922,17 +4711,325 @@
           </a:bodyPr>
           <a:lstStyle/>
           <a:p>
-            <a:pPr algn="l"/>
-            <a:r>
-              <a:rPr sz="2600" b="1">
-                <a:solidFill>
-                  <a:srgbClr val="CC0000"/>
+            <a:pPr algn="ctr"/>
+            <a:r>
+              <a:rPr sz="2400" b="1">
+                <a:solidFill>
+                  <a:srgbClr val="FFFFFF"/>
                 </a:solidFill>
                 <a:latin typeface="Open Sans"/>
                 <a:ea typeface="Open Sans"/>
                 <a:cs typeface="Open Sans"/>
               </a:rPr>
-              <a:t>Лимит жгута: ≤ 60 мин (тепло) · ≤ 30 мин (холод)!</a:t>
+              <a:t>OK</a:t>
+            </a:r>
+          </a:p>
+        </p:txBody>
+      </p:sp>
+      <p:sp>
+        <p:nvSpPr>
+          <p:cNvPr id="10" name="TextBox 9"/>
+          <p:cNvSpPr txBox="1"/>
+          <p:nvPr/>
+        </p:nvSpPr>
+        <p:spPr>
+          <a:xfrm>
+            <a:off x="2860000" y="3600000"/>
+            <a:ext cx="18000000" cy="900000"/>
+          </a:xfrm>
+          <a:prstGeom prst="rect">
+            <a:avLst/>
+          </a:prstGeom>
+          <a:noFill/>
+        </p:spPr>
+        <p:txBody>
+          <a:bodyPr wrap="square" anchor="ctr">
+            <a:spAutoFit/>
+          </a:bodyPr>
+          <a:lstStyle/>
+          <a:p>
+            <a:pPr algn="l"/>
+            <a:r>
+              <a:rPr sz="2800" b="0">
+                <a:solidFill>
+                  <a:srgbClr val="333333"/>
+                </a:solidFill>
+                <a:latin typeface="Open Sans"/>
+                <a:ea typeface="Open Sans"/>
+                <a:cs typeface="Open Sans"/>
+              </a:rPr>
+              <a:t>Способы: давление → повязка → жгут</a:t>
+            </a:r>
+          </a:p>
+        </p:txBody>
+      </p:sp>
+      <p:sp>
+        <p:nvSpPr>
+          <p:cNvPr id="11" name="Oval 10"/>
+          <p:cNvSpPr/>
+          <p:nvPr/>
+        </p:nvSpPr>
+        <p:spPr>
+          <a:xfrm>
+            <a:off x="1860000" y="5350000"/>
+            <a:ext cx="600000" cy="600000"/>
+          </a:xfrm>
+          <a:prstGeom prst="ellipse">
+            <a:avLst/>
+          </a:prstGeom>
+          <a:solidFill>
+            <a:srgbClr val="0055AA"/>
+          </a:solidFill>
+          <a:ln>
+            <a:noFill/>
+          </a:ln>
+        </p:spPr>
+        <p:style>
+          <a:lnRef idx="1">
+            <a:schemeClr val="accent1"/>
+          </a:lnRef>
+          <a:fillRef idx="3">
+            <a:schemeClr val="accent1"/>
+          </a:fillRef>
+          <a:effectRef idx="2">
+            <a:schemeClr val="accent1"/>
+          </a:effectRef>
+          <a:fontRef idx="minor">
+            <a:schemeClr val="lt1"/>
+          </a:fontRef>
+        </p:style>
+        <p:txBody>
+          <a:bodyPr rtlCol="0" anchor="ctr"/>
+          <a:lstStyle/>
+          <a:p>
+            <a:pPr algn="ctr"/>
+          </a:p>
+        </p:txBody>
+      </p:sp>
+      <p:sp>
+        <p:nvSpPr>
+          <p:cNvPr id="12" name="TextBox 11"/>
+          <p:cNvSpPr txBox="1"/>
+          <p:nvPr/>
+        </p:nvSpPr>
+        <p:spPr>
+          <a:xfrm>
+            <a:off x="1860000" y="5350000"/>
+            <a:ext cx="600000" cy="600000"/>
+          </a:xfrm>
+          <a:prstGeom prst="rect">
+            <a:avLst/>
+          </a:prstGeom>
+          <a:noFill/>
+        </p:spPr>
+        <p:txBody>
+          <a:bodyPr wrap="square" anchor="ctr">
+            <a:spAutoFit/>
+          </a:bodyPr>
+          <a:lstStyle/>
+          <a:p>
+            <a:pPr algn="ctr"/>
+            <a:r>
+              <a:rPr sz="2400" b="1">
+                <a:solidFill>
+                  <a:srgbClr val="FFFFFF"/>
+                </a:solidFill>
+                <a:latin typeface="Open Sans"/>
+                <a:ea typeface="Open Sans"/>
+                <a:cs typeface="Open Sans"/>
+              </a:rPr>
+              <a:t>OK</a:t>
+            </a:r>
+          </a:p>
+        </p:txBody>
+      </p:sp>
+      <p:sp>
+        <p:nvSpPr>
+          <p:cNvPr id="13" name="TextBox 12"/>
+          <p:cNvSpPr txBox="1"/>
+          <p:nvPr/>
+        </p:nvSpPr>
+        <p:spPr>
+          <a:xfrm>
+            <a:off x="2860000" y="5200000"/>
+            <a:ext cx="18000000" cy="900000"/>
+          </a:xfrm>
+          <a:prstGeom prst="rect">
+            <a:avLst/>
+          </a:prstGeom>
+          <a:noFill/>
+        </p:spPr>
+        <p:txBody>
+          <a:bodyPr wrap="square" anchor="ctr">
+            <a:spAutoFit/>
+          </a:bodyPr>
+          <a:lstStyle/>
+          <a:p>
+            <a:pPr algn="l"/>
+            <a:r>
+              <a:rPr sz="2800" b="0">
+                <a:solidFill>
+                  <a:srgbClr val="333333"/>
+                </a:solidFill>
+                <a:latin typeface="Open Sans"/>
+                <a:ea typeface="Open Sans"/>
+                <a:cs typeface="Open Sans"/>
+              </a:rPr>
+              <a:t>Профилактика шока: кровь, положение, тепло</a:t>
+            </a:r>
+          </a:p>
+        </p:txBody>
+      </p:sp>
+      <p:sp>
+        <p:nvSpPr>
+          <p:cNvPr id="14" name="Oval 13"/>
+          <p:cNvSpPr/>
+          <p:nvPr/>
+        </p:nvSpPr>
+        <p:spPr>
+          <a:xfrm>
+            <a:off x="1860000" y="6950000"/>
+            <a:ext cx="600000" cy="600000"/>
+          </a:xfrm>
+          <a:prstGeom prst="ellipse">
+            <a:avLst/>
+          </a:prstGeom>
+          <a:solidFill>
+            <a:srgbClr val="0055AA"/>
+          </a:solidFill>
+          <a:ln>
+            <a:noFill/>
+          </a:ln>
+        </p:spPr>
+        <p:style>
+          <a:lnRef idx="1">
+            <a:schemeClr val="accent1"/>
+          </a:lnRef>
+          <a:fillRef idx="3">
+            <a:schemeClr val="accent1"/>
+          </a:fillRef>
+          <a:effectRef idx="2">
+            <a:schemeClr val="accent1"/>
+          </a:effectRef>
+          <a:fontRef idx="minor">
+            <a:schemeClr val="lt1"/>
+          </a:fontRef>
+        </p:style>
+        <p:txBody>
+          <a:bodyPr rtlCol="0" anchor="ctr"/>
+          <a:lstStyle/>
+          <a:p>
+            <a:pPr algn="ctr"/>
+          </a:p>
+        </p:txBody>
+      </p:sp>
+      <p:sp>
+        <p:nvSpPr>
+          <p:cNvPr id="15" name="TextBox 14"/>
+          <p:cNvSpPr txBox="1"/>
+          <p:nvPr/>
+        </p:nvSpPr>
+        <p:spPr>
+          <a:xfrm>
+            <a:off x="1860000" y="6950000"/>
+            <a:ext cx="600000" cy="600000"/>
+          </a:xfrm>
+          <a:prstGeom prst="rect">
+            <a:avLst/>
+          </a:prstGeom>
+          <a:noFill/>
+        </p:spPr>
+        <p:txBody>
+          <a:bodyPr wrap="square" anchor="ctr">
+            <a:spAutoFit/>
+          </a:bodyPr>
+          <a:lstStyle/>
+          <a:p>
+            <a:pPr algn="ctr"/>
+            <a:r>
+              <a:rPr sz="2400" b="1">
+                <a:solidFill>
+                  <a:srgbClr val="FFFFFF"/>
+                </a:solidFill>
+                <a:latin typeface="Open Sans"/>
+                <a:ea typeface="Open Sans"/>
+                <a:cs typeface="Open Sans"/>
+              </a:rPr>
+              <a:t>OK</a:t>
+            </a:r>
+          </a:p>
+        </p:txBody>
+      </p:sp>
+      <p:sp>
+        <p:nvSpPr>
+          <p:cNvPr id="16" name="TextBox 15"/>
+          <p:cNvSpPr txBox="1"/>
+          <p:nvPr/>
+        </p:nvSpPr>
+        <p:spPr>
+          <a:xfrm>
+            <a:off x="2860000" y="6800000"/>
+            <a:ext cx="18000000" cy="900000"/>
+          </a:xfrm>
+          <a:prstGeom prst="rect">
+            <a:avLst/>
+          </a:prstGeom>
+          <a:noFill/>
+        </p:spPr>
+        <p:txBody>
+          <a:bodyPr wrap="square" anchor="ctr">
+            <a:spAutoFit/>
+          </a:bodyPr>
+          <a:lstStyle/>
+          <a:p>
+            <a:pPr algn="l"/>
+            <a:r>
+              <a:rPr sz="2800" b="0">
+                <a:solidFill>
+                  <a:srgbClr val="333333"/>
+                </a:solidFill>
+                <a:latin typeface="Open Sans"/>
+                <a:ea typeface="Open Sans"/>
+                <a:cs typeface="Open Sans"/>
+              </a:rPr>
+              <a:t>После остановки — контроль до передачи СМП</a:t>
+            </a:r>
+          </a:p>
+        </p:txBody>
+      </p:sp>
+      <p:sp>
+        <p:nvSpPr>
+          <p:cNvPr id="17" name="TextBox 16"/>
+          <p:cNvSpPr txBox="1"/>
+          <p:nvPr/>
+        </p:nvSpPr>
+        <p:spPr>
+          <a:xfrm>
+            <a:off x="360000" y="11200000"/>
+            <a:ext cx="23664000" cy="1200000"/>
+          </a:xfrm>
+          <a:prstGeom prst="rect">
+            <a:avLst/>
+          </a:prstGeom>
+          <a:noFill/>
+        </p:spPr>
+        <p:txBody>
+          <a:bodyPr wrap="square" anchor="t">
+            <a:spAutoFit/>
+          </a:bodyPr>
+          <a:lstStyle/>
+          <a:p>
+            <a:pPr algn="ctr"/>
+            <a:r>
+              <a:rPr sz="2600" b="1">
+                <a:solidFill>
+                  <a:srgbClr val="CC0000"/>
+                </a:solidFill>
+                <a:latin typeface="Open Sans"/>
+                <a:ea typeface="Open Sans"/>
+                <a:cs typeface="Open Sans"/>
+              </a:rPr>
+              <a:t>Сначала угрожающее жизни кровотечение!</a:t>
             </a:r>
           </a:p>
         </p:txBody>
@@ -5000,57 +5097,14 @@
       </p:sp>
       <p:sp>
         <p:nvSpPr>
-          <p:cNvPr id="3" name="Rectangle 2"/>
-          <p:cNvSpPr/>
-          <p:nvPr/>
-        </p:nvSpPr>
-        <p:spPr>
-          <a:xfrm>
-            <a:off x="0" y="0"/>
-            <a:ext cx="24384000" cy="120000"/>
-          </a:xfrm>
-          <a:prstGeom prst="rect">
-            <a:avLst/>
-          </a:prstGeom>
-          <a:solidFill>
-            <a:srgbClr val="DDDDDD"/>
-          </a:solidFill>
-          <a:ln>
-            <a:noFill/>
-          </a:ln>
-        </p:spPr>
-        <p:style>
-          <a:lnRef idx="1">
-            <a:schemeClr val="accent1"/>
-          </a:lnRef>
-          <a:fillRef idx="3">
-            <a:schemeClr val="accent1"/>
-          </a:fillRef>
-          <a:effectRef idx="2">
-            <a:schemeClr val="accent1"/>
-          </a:effectRef>
-          <a:fontRef idx="minor">
-            <a:schemeClr val="lt1"/>
-          </a:fontRef>
-        </p:style>
-        <p:txBody>
-          <a:bodyPr rtlCol="0" anchor="ctr"/>
-          <a:lstStyle/>
-          <a:p>
-            <a:pPr algn="ctr"/>
-          </a:p>
-        </p:txBody>
-      </p:sp>
-      <p:sp>
-        <p:nvSpPr>
-          <p:cNvPr id="4" name="TextBox 3"/>
+          <p:cNvPr id="3" name="TextBox 2"/>
           <p:cNvSpPr txBox="1"/>
           <p:nvPr/>
         </p:nvSpPr>
         <p:spPr>
           <a:xfrm>
-            <a:off x="800000" y="350000"/>
-            <a:ext cx="22800000" cy="1000000"/>
+            <a:off x="360000" y="5500000"/>
+            <a:ext cx="23664000" cy="1200000"/>
           </a:xfrm>
           <a:prstGeom prst="rect">
             <a:avLst/>
@@ -5063,7 +5117,7 @@
           </a:bodyPr>
           <a:lstStyle/>
           <a:p>
-            <a:pPr algn="l"/>
+            <a:pPr algn="ctr"/>
             <a:r>
               <a:rPr sz="4600" b="1">
                 <a:solidFill>
@@ -5073,109 +5127,21 @@
                 <a:ea typeface="Open Sans"/>
                 <a:cs typeface="Open Sans"/>
               </a:rPr>
-              <a:t>Краткое резюме</a:t>
-            </a:r>
-          </a:p>
-        </p:txBody>
-      </p:sp>
-      <p:sp>
-        <p:nvSpPr>
-          <p:cNvPr id="5" name="Rectangle 4"/>
+              <a:t>Благодарим за внимание</a:t>
+            </a:r>
+          </a:p>
+        </p:txBody>
+      </p:sp>
+      <p:sp>
+        <p:nvSpPr>
+          <p:cNvPr id="4" name="Rectangle 3"/>
           <p:cNvSpPr/>
           <p:nvPr/>
         </p:nvSpPr>
         <p:spPr>
           <a:xfrm>
-            <a:off x="800000" y="1450000"/>
-            <a:ext cx="22800000" cy="20000"/>
-          </a:xfrm>
-          <a:prstGeom prst="rect">
-            <a:avLst/>
-          </a:prstGeom>
-          <a:solidFill>
-            <a:srgbClr val="E1E1E1"/>
-          </a:solidFill>
-          <a:ln>
-            <a:noFill/>
-          </a:ln>
-        </p:spPr>
-        <p:style>
-          <a:lnRef idx="1">
-            <a:schemeClr val="accent1"/>
-          </a:lnRef>
-          <a:fillRef idx="3">
-            <a:schemeClr val="accent1"/>
-          </a:fillRef>
-          <a:effectRef idx="2">
-            <a:schemeClr val="accent1"/>
-          </a:effectRef>
-          <a:fontRef idx="minor">
-            <a:schemeClr val="lt1"/>
-          </a:fontRef>
-        </p:style>
-        <p:txBody>
-          <a:bodyPr rtlCol="0" anchor="ctr"/>
-          <a:lstStyle/>
-          <a:p>
-            <a:pPr algn="ctr"/>
-          </a:p>
-        </p:txBody>
-      </p:sp>
-      <p:sp>
-        <p:nvSpPr>
-          <p:cNvPr id="6" name="Rectangle 5"/>
-          <p:cNvSpPr/>
-          <p:nvPr/>
-        </p:nvSpPr>
-        <p:spPr>
-          <a:xfrm>
-            <a:off x="800000" y="1950000"/>
-            <a:ext cx="22800000" cy="1600000"/>
-          </a:xfrm>
-          <a:prstGeom prst="rect">
-            <a:avLst/>
-          </a:prstGeom>
-          <a:solidFill>
-            <a:srgbClr val="FFFFFF"/>
-          </a:solidFill>
-          <a:ln w="12700">
-            <a:solidFill>
-              <a:srgbClr val="E1E1E1"/>
-            </a:solidFill>
-          </a:ln>
-        </p:spPr>
-        <p:style>
-          <a:lnRef idx="1">
-            <a:schemeClr val="accent1"/>
-          </a:lnRef>
-          <a:fillRef idx="3">
-            <a:schemeClr val="accent1"/>
-          </a:fillRef>
-          <a:effectRef idx="2">
-            <a:schemeClr val="accent1"/>
-          </a:effectRef>
-          <a:fontRef idx="minor">
-            <a:schemeClr val="lt1"/>
-          </a:fontRef>
-        </p:style>
-        <p:txBody>
-          <a:bodyPr rtlCol="0" anchor="ctr"/>
-          <a:lstStyle/>
-          <a:p>
-            <a:pPr algn="ctr"/>
-          </a:p>
-        </p:txBody>
-      </p:sp>
-      <p:sp>
-        <p:nvSpPr>
-          <p:cNvPr id="7" name="Rectangle 6"/>
-          <p:cNvSpPr/>
-          <p:nvPr/>
-        </p:nvSpPr>
-        <p:spPr>
-          <a:xfrm>
-            <a:off x="800000" y="1950000"/>
-            <a:ext cx="120000" cy="1600000"/>
+            <a:off x="7000000" y="7000000"/>
+            <a:ext cx="10000000" cy="25000"/>
           </a:xfrm>
           <a:prstGeom prst="rect">
             <a:avLst/>
@@ -5211,530 +5177,14 @@
       </p:sp>
       <p:sp>
         <p:nvSpPr>
-          <p:cNvPr id="8" name="TextBox 7"/>
+          <p:cNvPr id="5" name="TextBox 4"/>
           <p:cNvSpPr txBox="1"/>
           <p:nvPr/>
         </p:nvSpPr>
         <p:spPr>
           <a:xfrm>
-            <a:off x="1200000" y="2250000"/>
-            <a:ext cx="21800000" cy="1100000"/>
-          </a:xfrm>
-          <a:prstGeom prst="rect">
-            <a:avLst/>
-          </a:prstGeom>
-          <a:noFill/>
-        </p:spPr>
-        <p:txBody>
-          <a:bodyPr wrap="square" anchor="ctr">
-            <a:spAutoFit/>
-          </a:bodyPr>
-          <a:lstStyle/>
-          <a:p>
-            <a:pPr algn="l"/>
-            <a:r>
-              <a:rPr sz="2600" b="0">
-                <a:solidFill>
-                  <a:srgbClr val="333333"/>
-                </a:solidFill>
-                <a:latin typeface="Open Sans"/>
-                <a:ea typeface="Open Sans"/>
-                <a:cs typeface="Open Sans"/>
-              </a:rPr>
-              <a:t>Алгоритм: безопасность → обзорный осмотр → остановка крови → признаки жизни → СМП.</a:t>
-            </a:r>
-          </a:p>
-        </p:txBody>
-      </p:sp>
-      <p:sp>
-        <p:nvSpPr>
-          <p:cNvPr id="9" name="Rectangle 8"/>
-          <p:cNvSpPr/>
-          <p:nvPr/>
-        </p:nvSpPr>
-        <p:spPr>
-          <a:xfrm>
-            <a:off x="800000" y="3850000"/>
-            <a:ext cx="22800000" cy="1600000"/>
-          </a:xfrm>
-          <a:prstGeom prst="rect">
-            <a:avLst/>
-          </a:prstGeom>
-          <a:solidFill>
-            <a:srgbClr val="FFFFFF"/>
-          </a:solidFill>
-          <a:ln w="12700">
-            <a:solidFill>
-              <a:srgbClr val="E1E1E1"/>
-            </a:solidFill>
-          </a:ln>
-        </p:spPr>
-        <p:style>
-          <a:lnRef idx="1">
-            <a:schemeClr val="accent1"/>
-          </a:lnRef>
-          <a:fillRef idx="3">
-            <a:schemeClr val="accent1"/>
-          </a:fillRef>
-          <a:effectRef idx="2">
-            <a:schemeClr val="accent1"/>
-          </a:effectRef>
-          <a:fontRef idx="minor">
-            <a:schemeClr val="lt1"/>
-          </a:fontRef>
-        </p:style>
-        <p:txBody>
-          <a:bodyPr rtlCol="0" anchor="ctr"/>
-          <a:lstStyle/>
-          <a:p>
-            <a:pPr algn="ctr"/>
-          </a:p>
-        </p:txBody>
-      </p:sp>
-      <p:sp>
-        <p:nvSpPr>
-          <p:cNvPr id="10" name="Rectangle 9"/>
-          <p:cNvSpPr/>
-          <p:nvPr/>
-        </p:nvSpPr>
-        <p:spPr>
-          <a:xfrm>
-            <a:off x="800000" y="3850000"/>
-            <a:ext cx="120000" cy="1600000"/>
-          </a:xfrm>
-          <a:prstGeom prst="rect">
-            <a:avLst/>
-          </a:prstGeom>
-          <a:solidFill>
-            <a:srgbClr val="0055AA"/>
-          </a:solidFill>
-          <a:ln>
-            <a:noFill/>
-          </a:ln>
-        </p:spPr>
-        <p:style>
-          <a:lnRef idx="1">
-            <a:schemeClr val="accent1"/>
-          </a:lnRef>
-          <a:fillRef idx="3">
-            <a:schemeClr val="accent1"/>
-          </a:fillRef>
-          <a:effectRef idx="2">
-            <a:schemeClr val="accent1"/>
-          </a:effectRef>
-          <a:fontRef idx="minor">
-            <a:schemeClr val="lt1"/>
-          </a:fontRef>
-        </p:style>
-        <p:txBody>
-          <a:bodyPr rtlCol="0" anchor="ctr"/>
-          <a:lstStyle/>
-          <a:p>
-            <a:pPr algn="ctr"/>
-          </a:p>
-        </p:txBody>
-      </p:sp>
-      <p:sp>
-        <p:nvSpPr>
-          <p:cNvPr id="11" name="TextBox 10"/>
-          <p:cNvSpPr txBox="1"/>
-          <p:nvPr/>
-        </p:nvSpPr>
-        <p:spPr>
-          <a:xfrm>
-            <a:off x="1200000" y="4150000"/>
-            <a:ext cx="21800000" cy="1100000"/>
-          </a:xfrm>
-          <a:prstGeom prst="rect">
-            <a:avLst/>
-          </a:prstGeom>
-          <a:noFill/>
-        </p:spPr>
-        <p:txBody>
-          <a:bodyPr wrap="square" anchor="ctr">
-            <a:spAutoFit/>
-          </a:bodyPr>
-          <a:lstStyle/>
-          <a:p>
-            <a:pPr algn="l"/>
-            <a:r>
-              <a:rPr sz="2600" b="0">
-                <a:solidFill>
-                  <a:srgbClr val="333333"/>
-                </a:solidFill>
-                <a:latin typeface="Open Sans"/>
-                <a:ea typeface="Open Sans"/>
-                <a:cs typeface="Open Sans"/>
-              </a:rPr>
-              <a:t>Способы: от простого к сложному — давление → повязка → жгут.</a:t>
-            </a:r>
-          </a:p>
-        </p:txBody>
-      </p:sp>
-      <p:sp>
-        <p:nvSpPr>
-          <p:cNvPr id="12" name="Rectangle 11"/>
-          <p:cNvSpPr/>
-          <p:nvPr/>
-        </p:nvSpPr>
-        <p:spPr>
-          <a:xfrm>
-            <a:off x="800000" y="5750000"/>
-            <a:ext cx="22800000" cy="1600000"/>
-          </a:xfrm>
-          <a:prstGeom prst="rect">
-            <a:avLst/>
-          </a:prstGeom>
-          <a:solidFill>
-            <a:srgbClr val="FFFFFF"/>
-          </a:solidFill>
-          <a:ln w="12700">
-            <a:solidFill>
-              <a:srgbClr val="E1E1E1"/>
-            </a:solidFill>
-          </a:ln>
-        </p:spPr>
-        <p:style>
-          <a:lnRef idx="1">
-            <a:schemeClr val="accent1"/>
-          </a:lnRef>
-          <a:fillRef idx="3">
-            <a:schemeClr val="accent1"/>
-          </a:fillRef>
-          <a:effectRef idx="2">
-            <a:schemeClr val="accent1"/>
-          </a:effectRef>
-          <a:fontRef idx="minor">
-            <a:schemeClr val="lt1"/>
-          </a:fontRef>
-        </p:style>
-        <p:txBody>
-          <a:bodyPr rtlCol="0" anchor="ctr"/>
-          <a:lstStyle/>
-          <a:p>
-            <a:pPr algn="ctr"/>
-          </a:p>
-        </p:txBody>
-      </p:sp>
-      <p:sp>
-        <p:nvSpPr>
-          <p:cNvPr id="13" name="Rectangle 12"/>
-          <p:cNvSpPr/>
-          <p:nvPr/>
-        </p:nvSpPr>
-        <p:spPr>
-          <a:xfrm>
-            <a:off x="800000" y="5750000"/>
-            <a:ext cx="120000" cy="1600000"/>
-          </a:xfrm>
-          <a:prstGeom prst="rect">
-            <a:avLst/>
-          </a:prstGeom>
-          <a:solidFill>
-            <a:srgbClr val="0055AA"/>
-          </a:solidFill>
-          <a:ln>
-            <a:noFill/>
-          </a:ln>
-        </p:spPr>
-        <p:style>
-          <a:lnRef idx="1">
-            <a:schemeClr val="accent1"/>
-          </a:lnRef>
-          <a:fillRef idx="3">
-            <a:schemeClr val="accent1"/>
-          </a:fillRef>
-          <a:effectRef idx="2">
-            <a:schemeClr val="accent1"/>
-          </a:effectRef>
-          <a:fontRef idx="minor">
-            <a:schemeClr val="lt1"/>
-          </a:fontRef>
-        </p:style>
-        <p:txBody>
-          <a:bodyPr rtlCol="0" anchor="ctr"/>
-          <a:lstStyle/>
-          <a:p>
-            <a:pPr algn="ctr"/>
-          </a:p>
-        </p:txBody>
-      </p:sp>
-      <p:sp>
-        <p:nvSpPr>
-          <p:cNvPr id="14" name="TextBox 13"/>
-          <p:cNvSpPr txBox="1"/>
-          <p:nvPr/>
-        </p:nvSpPr>
-        <p:spPr>
-          <a:xfrm>
-            <a:off x="1200000" y="6050000"/>
-            <a:ext cx="21800000" cy="1100000"/>
-          </a:xfrm>
-          <a:prstGeom prst="rect">
-            <a:avLst/>
-          </a:prstGeom>
-          <a:noFill/>
-        </p:spPr>
-        <p:txBody>
-          <a:bodyPr wrap="square" anchor="ctr">
-            <a:spAutoFit/>
-          </a:bodyPr>
-          <a:lstStyle/>
-          <a:p>
-            <a:pPr algn="l"/>
-            <a:r>
-              <a:rPr sz="2600" b="0">
-                <a:solidFill>
-                  <a:srgbClr val="333333"/>
-                </a:solidFill>
-                <a:latin typeface="Open Sans"/>
-                <a:ea typeface="Open Sans"/>
-                <a:cs typeface="Open Sans"/>
-              </a:rPr>
-              <a:t>Профилактика шока: кровь, положение, иммобилизация, тепло.</a:t>
-            </a:r>
-          </a:p>
-        </p:txBody>
-      </p:sp>
-      <p:sp>
-        <p:nvSpPr>
-          <p:cNvPr id="15" name="Rectangle 14"/>
-          <p:cNvSpPr/>
-          <p:nvPr/>
-        </p:nvSpPr>
-        <p:spPr>
-          <a:xfrm>
-            <a:off x="800000" y="7650000"/>
-            <a:ext cx="22800000" cy="1600000"/>
-          </a:xfrm>
-          <a:prstGeom prst="rect">
-            <a:avLst/>
-          </a:prstGeom>
-          <a:solidFill>
-            <a:srgbClr val="FFFFFF"/>
-          </a:solidFill>
-          <a:ln w="12700">
-            <a:solidFill>
-              <a:srgbClr val="E1E1E1"/>
-            </a:solidFill>
-          </a:ln>
-        </p:spPr>
-        <p:style>
-          <a:lnRef idx="1">
-            <a:schemeClr val="accent1"/>
-          </a:lnRef>
-          <a:fillRef idx="3">
-            <a:schemeClr val="accent1"/>
-          </a:fillRef>
-          <a:effectRef idx="2">
-            <a:schemeClr val="accent1"/>
-          </a:effectRef>
-          <a:fontRef idx="minor">
-            <a:schemeClr val="lt1"/>
-          </a:fontRef>
-        </p:style>
-        <p:txBody>
-          <a:bodyPr rtlCol="0" anchor="ctr"/>
-          <a:lstStyle/>
-          <a:p>
-            <a:pPr algn="ctr"/>
-          </a:p>
-        </p:txBody>
-      </p:sp>
-      <p:sp>
-        <p:nvSpPr>
-          <p:cNvPr id="16" name="Rectangle 15"/>
-          <p:cNvSpPr/>
-          <p:nvPr/>
-        </p:nvSpPr>
-        <p:spPr>
-          <a:xfrm>
-            <a:off x="800000" y="7650000"/>
-            <a:ext cx="120000" cy="1600000"/>
-          </a:xfrm>
-          <a:prstGeom prst="rect">
-            <a:avLst/>
-          </a:prstGeom>
-          <a:solidFill>
-            <a:srgbClr val="0055AA"/>
-          </a:solidFill>
-          <a:ln>
-            <a:noFill/>
-          </a:ln>
-        </p:spPr>
-        <p:style>
-          <a:lnRef idx="1">
-            <a:schemeClr val="accent1"/>
-          </a:lnRef>
-          <a:fillRef idx="3">
-            <a:schemeClr val="accent1"/>
-          </a:fillRef>
-          <a:effectRef idx="2">
-            <a:schemeClr val="accent1"/>
-          </a:effectRef>
-          <a:fontRef idx="minor">
-            <a:schemeClr val="lt1"/>
-          </a:fontRef>
-        </p:style>
-        <p:txBody>
-          <a:bodyPr rtlCol="0" anchor="ctr"/>
-          <a:lstStyle/>
-          <a:p>
-            <a:pPr algn="ctr"/>
-          </a:p>
-        </p:txBody>
-      </p:sp>
-      <p:sp>
-        <p:nvSpPr>
-          <p:cNvPr id="17" name="TextBox 16"/>
-          <p:cNvSpPr txBox="1"/>
-          <p:nvPr/>
-        </p:nvSpPr>
-        <p:spPr>
-          <a:xfrm>
-            <a:off x="1200000" y="7950000"/>
-            <a:ext cx="21800000" cy="1100000"/>
-          </a:xfrm>
-          <a:prstGeom prst="rect">
-            <a:avLst/>
-          </a:prstGeom>
-          <a:noFill/>
-        </p:spPr>
-        <p:txBody>
-          <a:bodyPr wrap="square" anchor="ctr">
-            <a:spAutoFit/>
-          </a:bodyPr>
-          <a:lstStyle/>
-          <a:p>
-            <a:pPr algn="l"/>
-            <a:r>
-              <a:rPr sz="2600" b="0">
-                <a:solidFill>
-                  <a:srgbClr val="333333"/>
-                </a:solidFill>
-                <a:latin typeface="Open Sans"/>
-                <a:ea typeface="Open Sans"/>
-                <a:cs typeface="Open Sans"/>
-              </a:rPr>
-              <a:t>После остановки — контроль повязки / жгута и состояния до передачи СМП.</a:t>
-            </a:r>
-          </a:p>
-        </p:txBody>
-      </p:sp>
-    </p:spTree>
-  </p:cSld>
-  <p:clrMapOvr>
-    <a:masterClrMapping/>
-  </p:clrMapOvr>
-</p:sld>
-</file>
-
-<file path=ppt/slides/slide15.xml><?xml version="1.0" encoding="utf-8"?>
-<p:sld xmlns:a="http://schemas.openxmlformats.org/drawingml/2006/main" xmlns:p="http://schemas.openxmlformats.org/presentationml/2006/main" xmlns:r="http://schemas.openxmlformats.org/officeDocument/2006/relationships">
-  <p:cSld>
-    <p:spTree>
-      <p:nvGrpSpPr>
-        <p:cNvPr id="1" name=""/>
-        <p:cNvGrpSpPr/>
-        <p:nvPr/>
-      </p:nvGrpSpPr>
-      <p:grpSpPr/>
-      <p:sp>
-        <p:nvSpPr>
-          <p:cNvPr id="2" name="Rectangle 1"/>
-          <p:cNvSpPr/>
-          <p:nvPr/>
-        </p:nvSpPr>
-        <p:spPr>
-          <a:xfrm>
-            <a:off x="0" y="0"/>
-            <a:ext cx="24384000" cy="13716000"/>
-          </a:xfrm>
-          <a:prstGeom prst="rect">
-            <a:avLst/>
-          </a:prstGeom>
-          <a:solidFill>
-            <a:srgbClr val="FFFFFF"/>
-          </a:solidFill>
-          <a:ln>
-            <a:noFill/>
-          </a:ln>
-        </p:spPr>
-        <p:style>
-          <a:lnRef idx="1">
-            <a:schemeClr val="accent1"/>
-          </a:lnRef>
-          <a:fillRef idx="3">
-            <a:schemeClr val="accent1"/>
-          </a:fillRef>
-          <a:effectRef idx="2">
-            <a:schemeClr val="accent1"/>
-          </a:effectRef>
-          <a:fontRef idx="minor">
-            <a:schemeClr val="lt1"/>
-          </a:fontRef>
-        </p:style>
-        <p:txBody>
-          <a:bodyPr rtlCol="0" anchor="ctr"/>
-          <a:lstStyle/>
-          <a:p>
-            <a:pPr algn="ctr"/>
-          </a:p>
-        </p:txBody>
-      </p:sp>
-      <p:sp>
-        <p:nvSpPr>
-          <p:cNvPr id="3" name="Rectangle 2"/>
-          <p:cNvSpPr/>
-          <p:nvPr/>
-        </p:nvSpPr>
-        <p:spPr>
-          <a:xfrm>
-            <a:off x="0" y="0"/>
-            <a:ext cx="24384000" cy="120000"/>
-          </a:xfrm>
-          <a:prstGeom prst="rect">
-            <a:avLst/>
-          </a:prstGeom>
-          <a:solidFill>
-            <a:srgbClr val="DDDDDD"/>
-          </a:solidFill>
-          <a:ln>
-            <a:noFill/>
-          </a:ln>
-        </p:spPr>
-        <p:style>
-          <a:lnRef idx="1">
-            <a:schemeClr val="accent1"/>
-          </a:lnRef>
-          <a:fillRef idx="3">
-            <a:schemeClr val="accent1"/>
-          </a:fillRef>
-          <a:effectRef idx="2">
-            <a:schemeClr val="accent1"/>
-          </a:effectRef>
-          <a:fontRef idx="minor">
-            <a:schemeClr val="lt1"/>
-          </a:fontRef>
-        </p:style>
-        <p:txBody>
-          <a:bodyPr rtlCol="0" anchor="ctr"/>
-          <a:lstStyle/>
-          <a:p>
-            <a:pPr algn="ctr"/>
-          </a:p>
-        </p:txBody>
-      </p:sp>
-      <p:sp>
-        <p:nvSpPr>
-          <p:cNvPr id="4" name="TextBox 3"/>
-          <p:cNvSpPr txBox="1"/>
-          <p:nvPr/>
-        </p:nvSpPr>
-        <p:spPr>
-          <a:xfrm>
-            <a:off x="800000" y="5500000"/>
-            <a:ext cx="22800000" cy="1200000"/>
+            <a:off x="360000" y="7400000"/>
+            <a:ext cx="23664000" cy="500000"/>
           </a:xfrm>
           <a:prstGeom prst="rect">
             <a:avLst/>
@@ -5747,87 +5197,7 @@
           </a:bodyPr>
           <a:lstStyle/>
           <a:p>
-            <a:pPr algn="l"/>
-            <a:r>
-              <a:rPr sz="4600" b="1">
-                <a:solidFill>
-                  <a:srgbClr val="333333"/>
-                </a:solidFill>
-                <a:latin typeface="Open Sans"/>
-                <a:ea typeface="Open Sans"/>
-                <a:cs typeface="Open Sans"/>
-              </a:rPr>
-              <a:t>Спасибо за внимание</a:t>
-            </a:r>
-          </a:p>
-        </p:txBody>
-      </p:sp>
-      <p:sp>
-        <p:nvSpPr>
-          <p:cNvPr id="5" name="Rectangle 4"/>
-          <p:cNvSpPr/>
-          <p:nvPr/>
-        </p:nvSpPr>
-        <p:spPr>
-          <a:xfrm>
-            <a:off x="800000" y="6900000"/>
-            <a:ext cx="10000000" cy="20000"/>
-          </a:xfrm>
-          <a:prstGeom prst="rect">
-            <a:avLst/>
-          </a:prstGeom>
-          <a:solidFill>
-            <a:srgbClr val="0055AA"/>
-          </a:solidFill>
-          <a:ln>
-            <a:noFill/>
-          </a:ln>
-        </p:spPr>
-        <p:style>
-          <a:lnRef idx="1">
-            <a:schemeClr val="accent1"/>
-          </a:lnRef>
-          <a:fillRef idx="3">
-            <a:schemeClr val="accent1"/>
-          </a:fillRef>
-          <a:effectRef idx="2">
-            <a:schemeClr val="accent1"/>
-          </a:effectRef>
-          <a:fontRef idx="minor">
-            <a:schemeClr val="lt1"/>
-          </a:fontRef>
-        </p:style>
-        <p:txBody>
-          <a:bodyPr rtlCol="0" anchor="ctr"/>
-          <a:lstStyle/>
-          <a:p>
-            <a:pPr algn="ctr"/>
-          </a:p>
-        </p:txBody>
-      </p:sp>
-      <p:sp>
-        <p:nvSpPr>
-          <p:cNvPr id="6" name="TextBox 5"/>
-          <p:cNvSpPr txBox="1"/>
-          <p:nvPr/>
-        </p:nvSpPr>
-        <p:spPr>
-          <a:xfrm>
-            <a:off x="800000" y="7200000"/>
-            <a:ext cx="22800000" cy="500000"/>
-          </a:xfrm>
-          <a:prstGeom prst="rect">
-            <a:avLst/>
-          </a:prstGeom>
-          <a:noFill/>
-        </p:spPr>
-        <p:txBody>
-          <a:bodyPr wrap="square" anchor="t">
-            <a:spAutoFit/>
-          </a:bodyPr>
-          <a:lstStyle/>
-          <a:p>
-            <a:pPr algn="l"/>
+            <a:pPr algn="ctr"/>
             <a:r>
               <a:rPr sz="2000" b="0">
                 <a:solidFill>
@@ -5905,14 +5275,562 @@
       </p:sp>
       <p:sp>
         <p:nvSpPr>
-          <p:cNvPr id="3" name="Rectangle 2"/>
+          <p:cNvPr id="3" name="TextBox 2"/>
+          <p:cNvSpPr txBox="1"/>
+          <p:nvPr/>
+        </p:nvSpPr>
+        <p:spPr>
+          <a:xfrm>
+            <a:off x="360000" y="350000"/>
+            <a:ext cx="23664000" cy="1100000"/>
+          </a:xfrm>
+          <a:prstGeom prst="rect">
+            <a:avLst/>
+          </a:prstGeom>
+          <a:noFill/>
+        </p:spPr>
+        <p:txBody>
+          <a:bodyPr wrap="square" anchor="t">
+            <a:spAutoFit/>
+          </a:bodyPr>
+          <a:lstStyle/>
+          <a:p>
+            <a:pPr algn="ctr"/>
+            <a:r>
+              <a:rPr sz="4600" b="1">
+                <a:solidFill>
+                  <a:srgbClr val="333333"/>
+                </a:solidFill>
+                <a:latin typeface="Open Sans"/>
+                <a:ea typeface="Open Sans"/>
+                <a:cs typeface="Open Sans"/>
+              </a:rPr>
+              <a:t>Содержание</a:t>
+            </a:r>
+          </a:p>
+        </p:txBody>
+      </p:sp>
+      <p:sp>
+        <p:nvSpPr>
+          <p:cNvPr id="4" name="Rectangle 3"/>
           <p:cNvSpPr/>
           <p:nvPr/>
         </p:nvSpPr>
         <p:spPr>
           <a:xfrm>
-            <a:off x="0" y="0"/>
-            <a:ext cx="24384000" cy="120000"/>
+            <a:off x="360000" y="1450000"/>
+            <a:ext cx="23664000" cy="20000"/>
+          </a:xfrm>
+          <a:prstGeom prst="rect">
+            <a:avLst/>
+          </a:prstGeom>
+          <a:solidFill>
+            <a:srgbClr val="E1E1E1"/>
+          </a:solidFill>
+          <a:ln>
+            <a:noFill/>
+          </a:ln>
+        </p:spPr>
+        <p:style>
+          <a:lnRef idx="1">
+            <a:schemeClr val="accent1"/>
+          </a:lnRef>
+          <a:fillRef idx="3">
+            <a:schemeClr val="accent1"/>
+          </a:fillRef>
+          <a:effectRef idx="2">
+            <a:schemeClr val="accent1"/>
+          </a:effectRef>
+          <a:fontRef idx="minor">
+            <a:schemeClr val="lt1"/>
+          </a:fontRef>
+        </p:style>
+        <p:txBody>
+          <a:bodyPr rtlCol="0" anchor="ctr"/>
+          <a:lstStyle/>
+          <a:p>
+            <a:pPr algn="ctr"/>
+          </a:p>
+        </p:txBody>
+      </p:sp>
+      <p:sp>
+        <p:nvSpPr>
+          <p:cNvPr id="5" name="Oval 4"/>
+          <p:cNvSpPr/>
+          <p:nvPr/>
+        </p:nvSpPr>
+        <p:spPr>
+          <a:xfrm>
+            <a:off x="2360000" y="2000000"/>
+            <a:ext cx="700000" cy="700000"/>
+          </a:xfrm>
+          <a:prstGeom prst="ellipse">
+            <a:avLst/>
+          </a:prstGeom>
+          <a:solidFill>
+            <a:srgbClr val="0055AA"/>
+          </a:solidFill>
+          <a:ln>
+            <a:noFill/>
+          </a:ln>
+        </p:spPr>
+        <p:style>
+          <a:lnRef idx="1">
+            <a:schemeClr val="accent1"/>
+          </a:lnRef>
+          <a:fillRef idx="3">
+            <a:schemeClr val="accent1"/>
+          </a:fillRef>
+          <a:effectRef idx="2">
+            <a:schemeClr val="accent1"/>
+          </a:effectRef>
+          <a:fontRef idx="minor">
+            <a:schemeClr val="lt1"/>
+          </a:fontRef>
+        </p:style>
+        <p:txBody>
+          <a:bodyPr rtlCol="0" anchor="ctr"/>
+          <a:lstStyle/>
+          <a:p>
+            <a:pPr algn="ctr"/>
+          </a:p>
+        </p:txBody>
+      </p:sp>
+      <p:sp>
+        <p:nvSpPr>
+          <p:cNvPr id="6" name="TextBox 5"/>
+          <p:cNvSpPr txBox="1"/>
+          <p:nvPr/>
+        </p:nvSpPr>
+        <p:spPr>
+          <a:xfrm>
+            <a:off x="2360000" y="2000000"/>
+            <a:ext cx="700000" cy="700000"/>
+          </a:xfrm>
+          <a:prstGeom prst="rect">
+            <a:avLst/>
+          </a:prstGeom>
+          <a:noFill/>
+        </p:spPr>
+        <p:txBody>
+          <a:bodyPr wrap="square" anchor="ctr">
+            <a:spAutoFit/>
+          </a:bodyPr>
+          <a:lstStyle/>
+          <a:p>
+            <a:pPr algn="ctr"/>
+            <a:r>
+              <a:rPr sz="2600" b="1">
+                <a:solidFill>
+                  <a:srgbClr val="FFFFFF"/>
+                </a:solidFill>
+                <a:latin typeface="Open Sans"/>
+                <a:ea typeface="Open Sans"/>
+                <a:cs typeface="Open Sans"/>
+              </a:rPr>
+              <a:t>1</a:t>
+            </a:r>
+          </a:p>
+        </p:txBody>
+      </p:sp>
+      <p:sp>
+        <p:nvSpPr>
+          <p:cNvPr id="7" name="TextBox 6"/>
+          <p:cNvSpPr txBox="1"/>
+          <p:nvPr/>
+        </p:nvSpPr>
+        <p:spPr>
+          <a:xfrm>
+            <a:off x="3360000" y="2000000"/>
+            <a:ext cx="14000000" cy="700000"/>
+          </a:xfrm>
+          <a:prstGeom prst="rect">
+            <a:avLst/>
+          </a:prstGeom>
+          <a:noFill/>
+        </p:spPr>
+        <p:txBody>
+          <a:bodyPr wrap="square" anchor="ctr">
+            <a:spAutoFit/>
+          </a:bodyPr>
+          <a:lstStyle/>
+          <a:p>
+            <a:pPr algn="l"/>
+            <a:r>
+              <a:rPr sz="3200" b="0">
+                <a:solidFill>
+                  <a:srgbClr val="333333"/>
+                </a:solidFill>
+                <a:latin typeface="Open Sans"/>
+                <a:ea typeface="Open Sans"/>
+                <a:cs typeface="Open Sans"/>
+              </a:rPr>
+              <a:t>Полный алгоритм действий</a:t>
+            </a:r>
+          </a:p>
+        </p:txBody>
+      </p:sp>
+      <p:sp>
+        <p:nvSpPr>
+          <p:cNvPr id="8" name="Oval 7"/>
+          <p:cNvSpPr/>
+          <p:nvPr/>
+        </p:nvSpPr>
+        <p:spPr>
+          <a:xfrm>
+            <a:off x="2360000" y="3400000"/>
+            <a:ext cx="700000" cy="700000"/>
+          </a:xfrm>
+          <a:prstGeom prst="ellipse">
+            <a:avLst/>
+          </a:prstGeom>
+          <a:solidFill>
+            <a:srgbClr val="0055AA"/>
+          </a:solidFill>
+          <a:ln>
+            <a:noFill/>
+          </a:ln>
+        </p:spPr>
+        <p:style>
+          <a:lnRef idx="1">
+            <a:schemeClr val="accent1"/>
+          </a:lnRef>
+          <a:fillRef idx="3">
+            <a:schemeClr val="accent1"/>
+          </a:fillRef>
+          <a:effectRef idx="2">
+            <a:schemeClr val="accent1"/>
+          </a:effectRef>
+          <a:fontRef idx="minor">
+            <a:schemeClr val="lt1"/>
+          </a:fontRef>
+        </p:style>
+        <p:txBody>
+          <a:bodyPr rtlCol="0" anchor="ctr"/>
+          <a:lstStyle/>
+          <a:p>
+            <a:pPr algn="ctr"/>
+          </a:p>
+        </p:txBody>
+      </p:sp>
+      <p:sp>
+        <p:nvSpPr>
+          <p:cNvPr id="9" name="TextBox 8"/>
+          <p:cNvSpPr txBox="1"/>
+          <p:nvPr/>
+        </p:nvSpPr>
+        <p:spPr>
+          <a:xfrm>
+            <a:off x="2360000" y="3400000"/>
+            <a:ext cx="700000" cy="700000"/>
+          </a:xfrm>
+          <a:prstGeom prst="rect">
+            <a:avLst/>
+          </a:prstGeom>
+          <a:noFill/>
+        </p:spPr>
+        <p:txBody>
+          <a:bodyPr wrap="square" anchor="ctr">
+            <a:spAutoFit/>
+          </a:bodyPr>
+          <a:lstStyle/>
+          <a:p>
+            <a:pPr algn="ctr"/>
+            <a:r>
+              <a:rPr sz="2600" b="1">
+                <a:solidFill>
+                  <a:srgbClr val="FFFFFF"/>
+                </a:solidFill>
+                <a:latin typeface="Open Sans"/>
+                <a:ea typeface="Open Sans"/>
+                <a:cs typeface="Open Sans"/>
+              </a:rPr>
+              <a:t>2</a:t>
+            </a:r>
+          </a:p>
+        </p:txBody>
+      </p:sp>
+      <p:sp>
+        <p:nvSpPr>
+          <p:cNvPr id="10" name="TextBox 9"/>
+          <p:cNvSpPr txBox="1"/>
+          <p:nvPr/>
+        </p:nvSpPr>
+        <p:spPr>
+          <a:xfrm>
+            <a:off x="3360000" y="3400000"/>
+            <a:ext cx="14000000" cy="700000"/>
+          </a:xfrm>
+          <a:prstGeom prst="rect">
+            <a:avLst/>
+          </a:prstGeom>
+          <a:noFill/>
+        </p:spPr>
+        <p:txBody>
+          <a:bodyPr wrap="square" anchor="ctr">
+            <a:spAutoFit/>
+          </a:bodyPr>
+          <a:lstStyle/>
+          <a:p>
+            <a:pPr algn="l"/>
+            <a:r>
+              <a:rPr sz="3200" b="0">
+                <a:solidFill>
+                  <a:srgbClr val="333333"/>
+                </a:solidFill>
+                <a:latin typeface="Open Sans"/>
+                <a:ea typeface="Open Sans"/>
+                <a:cs typeface="Open Sans"/>
+              </a:rPr>
+              <a:t>Приоритетность способов</a:t>
+            </a:r>
+          </a:p>
+        </p:txBody>
+      </p:sp>
+      <p:sp>
+        <p:nvSpPr>
+          <p:cNvPr id="11" name="Oval 10"/>
+          <p:cNvSpPr/>
+          <p:nvPr/>
+        </p:nvSpPr>
+        <p:spPr>
+          <a:xfrm>
+            <a:off x="2360000" y="4800000"/>
+            <a:ext cx="700000" cy="700000"/>
+          </a:xfrm>
+          <a:prstGeom prst="ellipse">
+            <a:avLst/>
+          </a:prstGeom>
+          <a:solidFill>
+            <a:srgbClr val="0055AA"/>
+          </a:solidFill>
+          <a:ln>
+            <a:noFill/>
+          </a:ln>
+        </p:spPr>
+        <p:style>
+          <a:lnRef idx="1">
+            <a:schemeClr val="accent1"/>
+          </a:lnRef>
+          <a:fillRef idx="3">
+            <a:schemeClr val="accent1"/>
+          </a:fillRef>
+          <a:effectRef idx="2">
+            <a:schemeClr val="accent1"/>
+          </a:effectRef>
+          <a:fontRef idx="minor">
+            <a:schemeClr val="lt1"/>
+          </a:fontRef>
+        </p:style>
+        <p:txBody>
+          <a:bodyPr rtlCol="0" anchor="ctr"/>
+          <a:lstStyle/>
+          <a:p>
+            <a:pPr algn="ctr"/>
+          </a:p>
+        </p:txBody>
+      </p:sp>
+      <p:sp>
+        <p:nvSpPr>
+          <p:cNvPr id="12" name="TextBox 11"/>
+          <p:cNvSpPr txBox="1"/>
+          <p:nvPr/>
+        </p:nvSpPr>
+        <p:spPr>
+          <a:xfrm>
+            <a:off x="2360000" y="4800000"/>
+            <a:ext cx="700000" cy="700000"/>
+          </a:xfrm>
+          <a:prstGeom prst="rect">
+            <a:avLst/>
+          </a:prstGeom>
+          <a:noFill/>
+        </p:spPr>
+        <p:txBody>
+          <a:bodyPr wrap="square" anchor="ctr">
+            <a:spAutoFit/>
+          </a:bodyPr>
+          <a:lstStyle/>
+          <a:p>
+            <a:pPr algn="ctr"/>
+            <a:r>
+              <a:rPr sz="2600" b="1">
+                <a:solidFill>
+                  <a:srgbClr val="FFFFFF"/>
+                </a:solidFill>
+                <a:latin typeface="Open Sans"/>
+                <a:ea typeface="Open Sans"/>
+                <a:cs typeface="Open Sans"/>
+              </a:rPr>
+              <a:t>3</a:t>
+            </a:r>
+          </a:p>
+        </p:txBody>
+      </p:sp>
+      <p:sp>
+        <p:nvSpPr>
+          <p:cNvPr id="13" name="TextBox 12"/>
+          <p:cNvSpPr txBox="1"/>
+          <p:nvPr/>
+        </p:nvSpPr>
+        <p:spPr>
+          <a:xfrm>
+            <a:off x="3360000" y="4800000"/>
+            <a:ext cx="14000000" cy="700000"/>
+          </a:xfrm>
+          <a:prstGeom prst="rect">
+            <a:avLst/>
+          </a:prstGeom>
+          <a:noFill/>
+        </p:spPr>
+        <p:txBody>
+          <a:bodyPr wrap="square" anchor="ctr">
+            <a:spAutoFit/>
+          </a:bodyPr>
+          <a:lstStyle/>
+          <a:p>
+            <a:pPr algn="l"/>
+            <a:r>
+              <a:rPr sz="3200" b="0">
+                <a:solidFill>
+                  <a:srgbClr val="333333"/>
+                </a:solidFill>
+                <a:latin typeface="Open Sans"/>
+                <a:ea typeface="Open Sans"/>
+                <a:cs typeface="Open Sans"/>
+              </a:rPr>
+              <a:t>Профилактика травматического шока</a:t>
+            </a:r>
+          </a:p>
+        </p:txBody>
+      </p:sp>
+      <p:sp>
+        <p:nvSpPr>
+          <p:cNvPr id="14" name="Oval 13"/>
+          <p:cNvSpPr/>
+          <p:nvPr/>
+        </p:nvSpPr>
+        <p:spPr>
+          <a:xfrm>
+            <a:off x="2360000" y="6200000"/>
+            <a:ext cx="700000" cy="700000"/>
+          </a:xfrm>
+          <a:prstGeom prst="ellipse">
+            <a:avLst/>
+          </a:prstGeom>
+          <a:solidFill>
+            <a:srgbClr val="0055AA"/>
+          </a:solidFill>
+          <a:ln>
+            <a:noFill/>
+          </a:ln>
+        </p:spPr>
+        <p:style>
+          <a:lnRef idx="1">
+            <a:schemeClr val="accent1"/>
+          </a:lnRef>
+          <a:fillRef idx="3">
+            <a:schemeClr val="accent1"/>
+          </a:fillRef>
+          <a:effectRef idx="2">
+            <a:schemeClr val="accent1"/>
+          </a:effectRef>
+          <a:fontRef idx="minor">
+            <a:schemeClr val="lt1"/>
+          </a:fontRef>
+        </p:style>
+        <p:txBody>
+          <a:bodyPr rtlCol="0" anchor="ctr"/>
+          <a:lstStyle/>
+          <a:p>
+            <a:pPr algn="ctr"/>
+          </a:p>
+        </p:txBody>
+      </p:sp>
+      <p:sp>
+        <p:nvSpPr>
+          <p:cNvPr id="15" name="TextBox 14"/>
+          <p:cNvSpPr txBox="1"/>
+          <p:nvPr/>
+        </p:nvSpPr>
+        <p:spPr>
+          <a:xfrm>
+            <a:off x="2360000" y="6200000"/>
+            <a:ext cx="700000" cy="700000"/>
+          </a:xfrm>
+          <a:prstGeom prst="rect">
+            <a:avLst/>
+          </a:prstGeom>
+          <a:noFill/>
+        </p:spPr>
+        <p:txBody>
+          <a:bodyPr wrap="square" anchor="ctr">
+            <a:spAutoFit/>
+          </a:bodyPr>
+          <a:lstStyle/>
+          <a:p>
+            <a:pPr algn="ctr"/>
+            <a:r>
+              <a:rPr sz="2600" b="1">
+                <a:solidFill>
+                  <a:srgbClr val="FFFFFF"/>
+                </a:solidFill>
+                <a:latin typeface="Open Sans"/>
+                <a:ea typeface="Open Sans"/>
+                <a:cs typeface="Open Sans"/>
+              </a:rPr>
+              <a:t>4</a:t>
+            </a:r>
+          </a:p>
+        </p:txBody>
+      </p:sp>
+      <p:sp>
+        <p:nvSpPr>
+          <p:cNvPr id="16" name="TextBox 15"/>
+          <p:cNvSpPr txBox="1"/>
+          <p:nvPr/>
+        </p:nvSpPr>
+        <p:spPr>
+          <a:xfrm>
+            <a:off x="3360000" y="6200000"/>
+            <a:ext cx="14000000" cy="700000"/>
+          </a:xfrm>
+          <a:prstGeom prst="rect">
+            <a:avLst/>
+          </a:prstGeom>
+          <a:noFill/>
+        </p:spPr>
+        <p:txBody>
+          <a:bodyPr wrap="square" anchor="ctr">
+            <a:spAutoFit/>
+          </a:bodyPr>
+          <a:lstStyle/>
+          <a:p>
+            <a:pPr algn="l"/>
+            <a:r>
+              <a:rPr sz="3200" b="0">
+                <a:solidFill>
+                  <a:srgbClr val="333333"/>
+                </a:solidFill>
+                <a:latin typeface="Open Sans"/>
+                <a:ea typeface="Open Sans"/>
+                <a:cs typeface="Open Sans"/>
+              </a:rPr>
+              <a:t>Подробный осмотр и контроль</a:t>
+            </a:r>
+          </a:p>
+        </p:txBody>
+      </p:sp>
+      <p:sp>
+        <p:nvSpPr>
+          <p:cNvPr id="17" name="Rectangle 16"/>
+          <p:cNvSpPr/>
+          <p:nvPr/>
+        </p:nvSpPr>
+        <p:spPr>
+          <a:xfrm>
+            <a:off x="22000000" y="1600000"/>
+            <a:ext cx="80000" cy="9000000"/>
           </a:xfrm>
           <a:prstGeom prst="rect">
             <a:avLst/>
@@ -5943,734 +5861,6 @@
           <a:lstStyle/>
           <a:p>
             <a:pPr algn="ctr"/>
-          </a:p>
-        </p:txBody>
-      </p:sp>
-      <p:sp>
-        <p:nvSpPr>
-          <p:cNvPr id="4" name="TextBox 3"/>
-          <p:cNvSpPr txBox="1"/>
-          <p:nvPr/>
-        </p:nvSpPr>
-        <p:spPr>
-          <a:xfrm>
-            <a:off x="800000" y="350000"/>
-            <a:ext cx="22800000" cy="1000000"/>
-          </a:xfrm>
-          <a:prstGeom prst="rect">
-            <a:avLst/>
-          </a:prstGeom>
-          <a:noFill/>
-        </p:spPr>
-        <p:txBody>
-          <a:bodyPr wrap="square" anchor="t">
-            <a:spAutoFit/>
-          </a:bodyPr>
-          <a:lstStyle/>
-          <a:p>
-            <a:pPr algn="l"/>
-            <a:r>
-              <a:rPr sz="4600" b="1">
-                <a:solidFill>
-                  <a:srgbClr val="333333"/>
-                </a:solidFill>
-                <a:latin typeface="Open Sans"/>
-                <a:ea typeface="Open Sans"/>
-                <a:cs typeface="Open Sans"/>
-              </a:rPr>
-              <a:t>Содержание</a:t>
-            </a:r>
-          </a:p>
-        </p:txBody>
-      </p:sp>
-      <p:sp>
-        <p:nvSpPr>
-          <p:cNvPr id="5" name="Rectangle 4"/>
-          <p:cNvSpPr/>
-          <p:nvPr/>
-        </p:nvSpPr>
-        <p:spPr>
-          <a:xfrm>
-            <a:off x="800000" y="1450000"/>
-            <a:ext cx="22800000" cy="20000"/>
-          </a:xfrm>
-          <a:prstGeom prst="rect">
-            <a:avLst/>
-          </a:prstGeom>
-          <a:solidFill>
-            <a:srgbClr val="E1E1E1"/>
-          </a:solidFill>
-          <a:ln>
-            <a:noFill/>
-          </a:ln>
-        </p:spPr>
-        <p:style>
-          <a:lnRef idx="1">
-            <a:schemeClr val="accent1"/>
-          </a:lnRef>
-          <a:fillRef idx="3">
-            <a:schemeClr val="accent1"/>
-          </a:fillRef>
-          <a:effectRef idx="2">
-            <a:schemeClr val="accent1"/>
-          </a:effectRef>
-          <a:fontRef idx="minor">
-            <a:schemeClr val="lt1"/>
-          </a:fontRef>
-        </p:style>
-        <p:txBody>
-          <a:bodyPr rtlCol="0" anchor="ctr"/>
-          <a:lstStyle/>
-          <a:p>
-            <a:pPr algn="ctr"/>
-          </a:p>
-        </p:txBody>
-      </p:sp>
-      <p:sp>
-        <p:nvSpPr>
-          <p:cNvPr id="6" name="Rounded Rectangle 5"/>
-          <p:cNvSpPr/>
-          <p:nvPr/>
-        </p:nvSpPr>
-        <p:spPr>
-          <a:xfrm>
-            <a:off x="800000" y="1950000"/>
-            <a:ext cx="900000" cy="900000"/>
-          </a:xfrm>
-          <a:prstGeom prst="roundRect">
-            <a:avLst/>
-          </a:prstGeom>
-          <a:solidFill>
-            <a:srgbClr val="0055AA"/>
-          </a:solidFill>
-          <a:ln>
-            <a:noFill/>
-          </a:ln>
-        </p:spPr>
-        <p:style>
-          <a:lnRef idx="1">
-            <a:schemeClr val="accent1"/>
-          </a:lnRef>
-          <a:fillRef idx="3">
-            <a:schemeClr val="accent1"/>
-          </a:fillRef>
-          <a:effectRef idx="2">
-            <a:schemeClr val="accent1"/>
-          </a:effectRef>
-          <a:fontRef idx="minor">
-            <a:schemeClr val="lt1"/>
-          </a:fontRef>
-        </p:style>
-        <p:txBody>
-          <a:bodyPr rtlCol="0" anchor="ctr"/>
-          <a:lstStyle/>
-          <a:p>
-            <a:pPr algn="ctr"/>
-          </a:p>
-        </p:txBody>
-      </p:sp>
-      <p:sp>
-        <p:nvSpPr>
-          <p:cNvPr id="7" name="TextBox 6"/>
-          <p:cNvSpPr txBox="1"/>
-          <p:nvPr/>
-        </p:nvSpPr>
-        <p:spPr>
-          <a:xfrm>
-            <a:off x="800000" y="1950000"/>
-            <a:ext cx="900000" cy="900000"/>
-          </a:xfrm>
-          <a:prstGeom prst="rect">
-            <a:avLst/>
-          </a:prstGeom>
-          <a:noFill/>
-        </p:spPr>
-        <p:txBody>
-          <a:bodyPr wrap="square" anchor="ctr">
-            <a:spAutoFit/>
-          </a:bodyPr>
-          <a:lstStyle/>
-          <a:p>
-            <a:pPr algn="ctr"/>
-            <a:r>
-              <a:rPr sz="3200" b="1">
-                <a:solidFill>
-                  <a:srgbClr val="FFFFFF"/>
-                </a:solidFill>
-                <a:latin typeface="Open Sans"/>
-                <a:ea typeface="Open Sans"/>
-                <a:cs typeface="Open Sans"/>
-              </a:rPr>
-              <a:t>1</a:t>
-            </a:r>
-          </a:p>
-        </p:txBody>
-      </p:sp>
-      <p:sp>
-        <p:nvSpPr>
-          <p:cNvPr id="8" name="Rectangle 7"/>
-          <p:cNvSpPr/>
-          <p:nvPr/>
-        </p:nvSpPr>
-        <p:spPr>
-          <a:xfrm>
-            <a:off x="1900000" y="1950000"/>
-            <a:ext cx="20500000" cy="900000"/>
-          </a:xfrm>
-          <a:prstGeom prst="rect">
-            <a:avLst/>
-          </a:prstGeom>
-          <a:solidFill>
-            <a:srgbClr val="FFFFFF"/>
-          </a:solidFill>
-          <a:ln w="12700">
-            <a:solidFill>
-              <a:srgbClr val="E1E1E1"/>
-            </a:solidFill>
-          </a:ln>
-        </p:spPr>
-        <p:style>
-          <a:lnRef idx="1">
-            <a:schemeClr val="accent1"/>
-          </a:lnRef>
-          <a:fillRef idx="3">
-            <a:schemeClr val="accent1"/>
-          </a:fillRef>
-          <a:effectRef idx="2">
-            <a:schemeClr val="accent1"/>
-          </a:effectRef>
-          <a:fontRef idx="minor">
-            <a:schemeClr val="lt1"/>
-          </a:fontRef>
-        </p:style>
-        <p:txBody>
-          <a:bodyPr rtlCol="0" anchor="ctr"/>
-          <a:lstStyle/>
-          <a:p>
-            <a:pPr algn="ctr"/>
-          </a:p>
-        </p:txBody>
-      </p:sp>
-      <p:sp>
-        <p:nvSpPr>
-          <p:cNvPr id="9" name="TextBox 8"/>
-          <p:cNvSpPr txBox="1"/>
-          <p:nvPr/>
-        </p:nvSpPr>
-        <p:spPr>
-          <a:xfrm>
-            <a:off x="2200000" y="1950000"/>
-            <a:ext cx="19500000" cy="900000"/>
-          </a:xfrm>
-          <a:prstGeom prst="rect">
-            <a:avLst/>
-          </a:prstGeom>
-          <a:noFill/>
-        </p:spPr>
-        <p:txBody>
-          <a:bodyPr wrap="square" anchor="ctr">
-            <a:spAutoFit/>
-          </a:bodyPr>
-          <a:lstStyle/>
-          <a:p>
-            <a:pPr algn="l"/>
-            <a:r>
-              <a:rPr sz="3200" b="0">
-                <a:solidFill>
-                  <a:srgbClr val="333333"/>
-                </a:solidFill>
-                <a:latin typeface="Open Sans"/>
-                <a:ea typeface="Open Sans"/>
-                <a:cs typeface="Open Sans"/>
-              </a:rPr>
-              <a:t>Полный алгоритм действий</a:t>
-            </a:r>
-          </a:p>
-        </p:txBody>
-      </p:sp>
-      <p:sp>
-        <p:nvSpPr>
-          <p:cNvPr id="10" name="Rounded Rectangle 9"/>
-          <p:cNvSpPr/>
-          <p:nvPr/>
-        </p:nvSpPr>
-        <p:spPr>
-          <a:xfrm>
-            <a:off x="800000" y="3150000"/>
-            <a:ext cx="900000" cy="900000"/>
-          </a:xfrm>
-          <a:prstGeom prst="roundRect">
-            <a:avLst/>
-          </a:prstGeom>
-          <a:solidFill>
-            <a:srgbClr val="0055AA"/>
-          </a:solidFill>
-          <a:ln>
-            <a:noFill/>
-          </a:ln>
-        </p:spPr>
-        <p:style>
-          <a:lnRef idx="1">
-            <a:schemeClr val="accent1"/>
-          </a:lnRef>
-          <a:fillRef idx="3">
-            <a:schemeClr val="accent1"/>
-          </a:fillRef>
-          <a:effectRef idx="2">
-            <a:schemeClr val="accent1"/>
-          </a:effectRef>
-          <a:fontRef idx="minor">
-            <a:schemeClr val="lt1"/>
-          </a:fontRef>
-        </p:style>
-        <p:txBody>
-          <a:bodyPr rtlCol="0" anchor="ctr"/>
-          <a:lstStyle/>
-          <a:p>
-            <a:pPr algn="ctr"/>
-          </a:p>
-        </p:txBody>
-      </p:sp>
-      <p:sp>
-        <p:nvSpPr>
-          <p:cNvPr id="11" name="TextBox 10"/>
-          <p:cNvSpPr txBox="1"/>
-          <p:nvPr/>
-        </p:nvSpPr>
-        <p:spPr>
-          <a:xfrm>
-            <a:off x="800000" y="3150000"/>
-            <a:ext cx="900000" cy="900000"/>
-          </a:xfrm>
-          <a:prstGeom prst="rect">
-            <a:avLst/>
-          </a:prstGeom>
-          <a:noFill/>
-        </p:spPr>
-        <p:txBody>
-          <a:bodyPr wrap="square" anchor="ctr">
-            <a:spAutoFit/>
-          </a:bodyPr>
-          <a:lstStyle/>
-          <a:p>
-            <a:pPr algn="ctr"/>
-            <a:r>
-              <a:rPr sz="3200" b="1">
-                <a:solidFill>
-                  <a:srgbClr val="FFFFFF"/>
-                </a:solidFill>
-                <a:latin typeface="Open Sans"/>
-                <a:ea typeface="Open Sans"/>
-                <a:cs typeface="Open Sans"/>
-              </a:rPr>
-              <a:t>2</a:t>
-            </a:r>
-          </a:p>
-        </p:txBody>
-      </p:sp>
-      <p:sp>
-        <p:nvSpPr>
-          <p:cNvPr id="12" name="Rectangle 11"/>
-          <p:cNvSpPr/>
-          <p:nvPr/>
-        </p:nvSpPr>
-        <p:spPr>
-          <a:xfrm>
-            <a:off x="1900000" y="3150000"/>
-            <a:ext cx="20500000" cy="900000"/>
-          </a:xfrm>
-          <a:prstGeom prst="rect">
-            <a:avLst/>
-          </a:prstGeom>
-          <a:solidFill>
-            <a:srgbClr val="FFFFFF"/>
-          </a:solidFill>
-          <a:ln w="12700">
-            <a:solidFill>
-              <a:srgbClr val="E1E1E1"/>
-            </a:solidFill>
-          </a:ln>
-        </p:spPr>
-        <p:style>
-          <a:lnRef idx="1">
-            <a:schemeClr val="accent1"/>
-          </a:lnRef>
-          <a:fillRef idx="3">
-            <a:schemeClr val="accent1"/>
-          </a:fillRef>
-          <a:effectRef idx="2">
-            <a:schemeClr val="accent1"/>
-          </a:effectRef>
-          <a:fontRef idx="minor">
-            <a:schemeClr val="lt1"/>
-          </a:fontRef>
-        </p:style>
-        <p:txBody>
-          <a:bodyPr rtlCol="0" anchor="ctr"/>
-          <a:lstStyle/>
-          <a:p>
-            <a:pPr algn="ctr"/>
-          </a:p>
-        </p:txBody>
-      </p:sp>
-      <p:sp>
-        <p:nvSpPr>
-          <p:cNvPr id="13" name="TextBox 12"/>
-          <p:cNvSpPr txBox="1"/>
-          <p:nvPr/>
-        </p:nvSpPr>
-        <p:spPr>
-          <a:xfrm>
-            <a:off x="2200000" y="3150000"/>
-            <a:ext cx="19500000" cy="900000"/>
-          </a:xfrm>
-          <a:prstGeom prst="rect">
-            <a:avLst/>
-          </a:prstGeom>
-          <a:noFill/>
-        </p:spPr>
-        <p:txBody>
-          <a:bodyPr wrap="square" anchor="ctr">
-            <a:spAutoFit/>
-          </a:bodyPr>
-          <a:lstStyle/>
-          <a:p>
-            <a:pPr algn="l"/>
-            <a:r>
-              <a:rPr sz="3200" b="0">
-                <a:solidFill>
-                  <a:srgbClr val="333333"/>
-                </a:solidFill>
-                <a:latin typeface="Open Sans"/>
-                <a:ea typeface="Open Sans"/>
-                <a:cs typeface="Open Sans"/>
-              </a:rPr>
-              <a:t>Приоритетность способов остановки</a:t>
-            </a:r>
-          </a:p>
-        </p:txBody>
-      </p:sp>
-      <p:sp>
-        <p:nvSpPr>
-          <p:cNvPr id="14" name="Rounded Rectangle 13"/>
-          <p:cNvSpPr/>
-          <p:nvPr/>
-        </p:nvSpPr>
-        <p:spPr>
-          <a:xfrm>
-            <a:off x="800000" y="4350000"/>
-            <a:ext cx="900000" cy="900000"/>
-          </a:xfrm>
-          <a:prstGeom prst="roundRect">
-            <a:avLst/>
-          </a:prstGeom>
-          <a:solidFill>
-            <a:srgbClr val="0055AA"/>
-          </a:solidFill>
-          <a:ln>
-            <a:noFill/>
-          </a:ln>
-        </p:spPr>
-        <p:style>
-          <a:lnRef idx="1">
-            <a:schemeClr val="accent1"/>
-          </a:lnRef>
-          <a:fillRef idx="3">
-            <a:schemeClr val="accent1"/>
-          </a:fillRef>
-          <a:effectRef idx="2">
-            <a:schemeClr val="accent1"/>
-          </a:effectRef>
-          <a:fontRef idx="minor">
-            <a:schemeClr val="lt1"/>
-          </a:fontRef>
-        </p:style>
-        <p:txBody>
-          <a:bodyPr rtlCol="0" anchor="ctr"/>
-          <a:lstStyle/>
-          <a:p>
-            <a:pPr algn="ctr"/>
-          </a:p>
-        </p:txBody>
-      </p:sp>
-      <p:sp>
-        <p:nvSpPr>
-          <p:cNvPr id="15" name="TextBox 14"/>
-          <p:cNvSpPr txBox="1"/>
-          <p:nvPr/>
-        </p:nvSpPr>
-        <p:spPr>
-          <a:xfrm>
-            <a:off x="800000" y="4350000"/>
-            <a:ext cx="900000" cy="900000"/>
-          </a:xfrm>
-          <a:prstGeom prst="rect">
-            <a:avLst/>
-          </a:prstGeom>
-          <a:noFill/>
-        </p:spPr>
-        <p:txBody>
-          <a:bodyPr wrap="square" anchor="ctr">
-            <a:spAutoFit/>
-          </a:bodyPr>
-          <a:lstStyle/>
-          <a:p>
-            <a:pPr algn="ctr"/>
-            <a:r>
-              <a:rPr sz="3200" b="1">
-                <a:solidFill>
-                  <a:srgbClr val="FFFFFF"/>
-                </a:solidFill>
-                <a:latin typeface="Open Sans"/>
-                <a:ea typeface="Open Sans"/>
-                <a:cs typeface="Open Sans"/>
-              </a:rPr>
-              <a:t>3</a:t>
-            </a:r>
-          </a:p>
-        </p:txBody>
-      </p:sp>
-      <p:sp>
-        <p:nvSpPr>
-          <p:cNvPr id="16" name="Rectangle 15"/>
-          <p:cNvSpPr/>
-          <p:nvPr/>
-        </p:nvSpPr>
-        <p:spPr>
-          <a:xfrm>
-            <a:off x="1900000" y="4350000"/>
-            <a:ext cx="20500000" cy="900000"/>
-          </a:xfrm>
-          <a:prstGeom prst="rect">
-            <a:avLst/>
-          </a:prstGeom>
-          <a:solidFill>
-            <a:srgbClr val="FFFFFF"/>
-          </a:solidFill>
-          <a:ln w="12700">
-            <a:solidFill>
-              <a:srgbClr val="E1E1E1"/>
-            </a:solidFill>
-          </a:ln>
-        </p:spPr>
-        <p:style>
-          <a:lnRef idx="1">
-            <a:schemeClr val="accent1"/>
-          </a:lnRef>
-          <a:fillRef idx="3">
-            <a:schemeClr val="accent1"/>
-          </a:fillRef>
-          <a:effectRef idx="2">
-            <a:schemeClr val="accent1"/>
-          </a:effectRef>
-          <a:fontRef idx="minor">
-            <a:schemeClr val="lt1"/>
-          </a:fontRef>
-        </p:style>
-        <p:txBody>
-          <a:bodyPr rtlCol="0" anchor="ctr"/>
-          <a:lstStyle/>
-          <a:p>
-            <a:pPr algn="ctr"/>
-          </a:p>
-        </p:txBody>
-      </p:sp>
-      <p:sp>
-        <p:nvSpPr>
-          <p:cNvPr id="17" name="TextBox 16"/>
-          <p:cNvSpPr txBox="1"/>
-          <p:nvPr/>
-        </p:nvSpPr>
-        <p:spPr>
-          <a:xfrm>
-            <a:off x="2200000" y="4350000"/>
-            <a:ext cx="19500000" cy="900000"/>
-          </a:xfrm>
-          <a:prstGeom prst="rect">
-            <a:avLst/>
-          </a:prstGeom>
-          <a:noFill/>
-        </p:spPr>
-        <p:txBody>
-          <a:bodyPr wrap="square" anchor="ctr">
-            <a:spAutoFit/>
-          </a:bodyPr>
-          <a:lstStyle/>
-          <a:p>
-            <a:pPr algn="l"/>
-            <a:r>
-              <a:rPr sz="3200" b="0">
-                <a:solidFill>
-                  <a:srgbClr val="333333"/>
-                </a:solidFill>
-                <a:latin typeface="Open Sans"/>
-                <a:ea typeface="Open Sans"/>
-                <a:cs typeface="Open Sans"/>
-              </a:rPr>
-              <a:t>Профилактика травматического шока</a:t>
-            </a:r>
-          </a:p>
-        </p:txBody>
-      </p:sp>
-      <p:sp>
-        <p:nvSpPr>
-          <p:cNvPr id="18" name="Rounded Rectangle 17"/>
-          <p:cNvSpPr/>
-          <p:nvPr/>
-        </p:nvSpPr>
-        <p:spPr>
-          <a:xfrm>
-            <a:off x="800000" y="5550000"/>
-            <a:ext cx="900000" cy="900000"/>
-          </a:xfrm>
-          <a:prstGeom prst="roundRect">
-            <a:avLst/>
-          </a:prstGeom>
-          <a:solidFill>
-            <a:srgbClr val="0055AA"/>
-          </a:solidFill>
-          <a:ln>
-            <a:noFill/>
-          </a:ln>
-        </p:spPr>
-        <p:style>
-          <a:lnRef idx="1">
-            <a:schemeClr val="accent1"/>
-          </a:lnRef>
-          <a:fillRef idx="3">
-            <a:schemeClr val="accent1"/>
-          </a:fillRef>
-          <a:effectRef idx="2">
-            <a:schemeClr val="accent1"/>
-          </a:effectRef>
-          <a:fontRef idx="minor">
-            <a:schemeClr val="lt1"/>
-          </a:fontRef>
-        </p:style>
-        <p:txBody>
-          <a:bodyPr rtlCol="0" anchor="ctr"/>
-          <a:lstStyle/>
-          <a:p>
-            <a:pPr algn="ctr"/>
-          </a:p>
-        </p:txBody>
-      </p:sp>
-      <p:sp>
-        <p:nvSpPr>
-          <p:cNvPr id="19" name="TextBox 18"/>
-          <p:cNvSpPr txBox="1"/>
-          <p:nvPr/>
-        </p:nvSpPr>
-        <p:spPr>
-          <a:xfrm>
-            <a:off x="800000" y="5550000"/>
-            <a:ext cx="900000" cy="900000"/>
-          </a:xfrm>
-          <a:prstGeom prst="rect">
-            <a:avLst/>
-          </a:prstGeom>
-          <a:noFill/>
-        </p:spPr>
-        <p:txBody>
-          <a:bodyPr wrap="square" anchor="ctr">
-            <a:spAutoFit/>
-          </a:bodyPr>
-          <a:lstStyle/>
-          <a:p>
-            <a:pPr algn="ctr"/>
-            <a:r>
-              <a:rPr sz="3200" b="1">
-                <a:solidFill>
-                  <a:srgbClr val="FFFFFF"/>
-                </a:solidFill>
-                <a:latin typeface="Open Sans"/>
-                <a:ea typeface="Open Sans"/>
-                <a:cs typeface="Open Sans"/>
-              </a:rPr>
-              <a:t>4</a:t>
-            </a:r>
-          </a:p>
-        </p:txBody>
-      </p:sp>
-      <p:sp>
-        <p:nvSpPr>
-          <p:cNvPr id="20" name="Rectangle 19"/>
-          <p:cNvSpPr/>
-          <p:nvPr/>
-        </p:nvSpPr>
-        <p:spPr>
-          <a:xfrm>
-            <a:off x="1900000" y="5550000"/>
-            <a:ext cx="20500000" cy="900000"/>
-          </a:xfrm>
-          <a:prstGeom prst="rect">
-            <a:avLst/>
-          </a:prstGeom>
-          <a:solidFill>
-            <a:srgbClr val="FFFFFF"/>
-          </a:solidFill>
-          <a:ln w="12700">
-            <a:solidFill>
-              <a:srgbClr val="E1E1E1"/>
-            </a:solidFill>
-          </a:ln>
-        </p:spPr>
-        <p:style>
-          <a:lnRef idx="1">
-            <a:schemeClr val="accent1"/>
-          </a:lnRef>
-          <a:fillRef idx="3">
-            <a:schemeClr val="accent1"/>
-          </a:fillRef>
-          <a:effectRef idx="2">
-            <a:schemeClr val="accent1"/>
-          </a:effectRef>
-          <a:fontRef idx="minor">
-            <a:schemeClr val="lt1"/>
-          </a:fontRef>
-        </p:style>
-        <p:txBody>
-          <a:bodyPr rtlCol="0" anchor="ctr"/>
-          <a:lstStyle/>
-          <a:p>
-            <a:pPr algn="ctr"/>
-          </a:p>
-        </p:txBody>
-      </p:sp>
-      <p:sp>
-        <p:nvSpPr>
-          <p:cNvPr id="21" name="TextBox 20"/>
-          <p:cNvSpPr txBox="1"/>
-          <p:nvPr/>
-        </p:nvSpPr>
-        <p:spPr>
-          <a:xfrm>
-            <a:off x="2200000" y="5550000"/>
-            <a:ext cx="19500000" cy="900000"/>
-          </a:xfrm>
-          <a:prstGeom prst="rect">
-            <a:avLst/>
-          </a:prstGeom>
-          <a:noFill/>
-        </p:spPr>
-        <p:txBody>
-          <a:bodyPr wrap="square" anchor="ctr">
-            <a:spAutoFit/>
-          </a:bodyPr>
-          <a:lstStyle/>
-          <a:p>
-            <a:pPr algn="l"/>
-            <a:r>
-              <a:rPr sz="3200" b="0">
-                <a:solidFill>
-                  <a:srgbClr val="333333"/>
-                </a:solidFill>
-                <a:latin typeface="Open Sans"/>
-                <a:ea typeface="Open Sans"/>
-                <a:cs typeface="Open Sans"/>
-              </a:rPr>
-              <a:t>Подробный осмотр и действия после остановки</a:t>
-            </a:r>
           </a:p>
         </p:txBody>
       </p:sp>
@@ -6737,57 +5927,14 @@
       </p:sp>
       <p:sp>
         <p:nvSpPr>
-          <p:cNvPr id="3" name="Rectangle 2"/>
-          <p:cNvSpPr/>
-          <p:nvPr/>
-        </p:nvSpPr>
-        <p:spPr>
-          <a:xfrm>
-            <a:off x="0" y="0"/>
-            <a:ext cx="24384000" cy="120000"/>
-          </a:xfrm>
-          <a:prstGeom prst="rect">
-            <a:avLst/>
-          </a:prstGeom>
-          <a:solidFill>
-            <a:srgbClr val="DDDDDD"/>
-          </a:solidFill>
-          <a:ln>
-            <a:noFill/>
-          </a:ln>
-        </p:spPr>
-        <p:style>
-          <a:lnRef idx="1">
-            <a:schemeClr val="accent1"/>
-          </a:lnRef>
-          <a:fillRef idx="3">
-            <a:schemeClr val="accent1"/>
-          </a:fillRef>
-          <a:effectRef idx="2">
-            <a:schemeClr val="accent1"/>
-          </a:effectRef>
-          <a:fontRef idx="minor">
-            <a:schemeClr val="lt1"/>
-          </a:fontRef>
-        </p:style>
-        <p:txBody>
-          <a:bodyPr rtlCol="0" anchor="ctr"/>
-          <a:lstStyle/>
-          <a:p>
-            <a:pPr algn="ctr"/>
-          </a:p>
-        </p:txBody>
-      </p:sp>
-      <p:sp>
-        <p:nvSpPr>
-          <p:cNvPr id="4" name="TextBox 3"/>
+          <p:cNvPr id="3" name="TextBox 2"/>
           <p:cNvSpPr txBox="1"/>
           <p:nvPr/>
         </p:nvSpPr>
         <p:spPr>
           <a:xfrm>
-            <a:off x="800000" y="350000"/>
-            <a:ext cx="22800000" cy="1000000"/>
+            <a:off x="360000" y="350000"/>
+            <a:ext cx="23664000" cy="1100000"/>
           </a:xfrm>
           <a:prstGeom prst="rect">
             <a:avLst/>
@@ -6817,14 +5964,14 @@
       </p:sp>
       <p:sp>
         <p:nvSpPr>
-          <p:cNvPr id="5" name="Rectangle 4"/>
+          <p:cNvPr id="4" name="Rectangle 3"/>
           <p:cNvSpPr/>
           <p:nvPr/>
         </p:nvSpPr>
         <p:spPr>
           <a:xfrm>
-            <a:off x="800000" y="1450000"/>
-            <a:ext cx="22800000" cy="20000"/>
+            <a:off x="360000" y="1450000"/>
+            <a:ext cx="23664000" cy="20000"/>
           </a:xfrm>
           <a:prstGeom prst="rect">
             <a:avLst/>
@@ -6860,60 +6007,25 @@
       </p:sp>
       <p:sp>
         <p:nvSpPr>
-          <p:cNvPr id="6" name="TextBox 5"/>
-          <p:cNvSpPr txBox="1"/>
-          <p:nvPr/>
-        </p:nvSpPr>
-        <p:spPr>
-          <a:xfrm>
-            <a:off x="800000" y="1550000"/>
-            <a:ext cx="22800000" cy="600000"/>
-          </a:xfrm>
-          <a:prstGeom prst="rect">
-            <a:avLst/>
-          </a:prstGeom>
-          <a:noFill/>
-        </p:spPr>
-        <p:txBody>
-          <a:bodyPr wrap="square" anchor="t">
-            <a:spAutoFit/>
-          </a:bodyPr>
-          <a:lstStyle/>
-          <a:p>
-            <a:pPr algn="l"/>
-            <a:r>
-              <a:rPr sz="2600" b="1">
-                <a:solidFill>
-                  <a:srgbClr val="0055AA"/>
-                </a:solidFill>
-                <a:latin typeface="Open Sans"/>
-                <a:ea typeface="Open Sans"/>
-                <a:cs typeface="Open Sans"/>
-              </a:rPr>
-              <a:t>Приказ Минздрава РФ № 220н</a:t>
-            </a:r>
-          </a:p>
-        </p:txBody>
-      </p:sp>
-      <p:sp>
-        <p:nvSpPr>
-          <p:cNvPr id="7" name="Rounded Rectangle 6"/>
+          <p:cNvPr id="5" name="Rounded Rectangle 4"/>
           <p:cNvSpPr/>
           <p:nvPr/>
         </p:nvSpPr>
         <p:spPr>
           <a:xfrm>
-            <a:off x="800000" y="2500000"/>
-            <a:ext cx="11000000" cy="1600000"/>
+            <a:off x="1860000" y="1800000"/>
+            <a:ext cx="19000000" cy="1112500"/>
           </a:xfrm>
           <a:prstGeom prst="roundRect">
             <a:avLst/>
           </a:prstGeom>
           <a:solidFill>
-            <a:srgbClr val="DDDDDD"/>
+            <a:srgbClr val="F7F7F7"/>
           </a:solidFill>
-          <a:ln>
-            <a:noFill/>
+          <a:ln w="15875">
+            <a:solidFill>
+              <a:srgbClr val="E1E1E1"/>
+            </a:solidFill>
           </a:ln>
         </p:spPr>
         <p:style>
@@ -6940,90 +6052,16 @@
       </p:sp>
       <p:sp>
         <p:nvSpPr>
-          <p:cNvPr id="8" name="TextBox 7"/>
-          <p:cNvSpPr txBox="1"/>
-          <p:nvPr/>
-        </p:nvSpPr>
-        <p:spPr>
-          <a:xfrm>
-            <a:off x="880000" y="2560000"/>
-            <a:ext cx="500000" cy="1480000"/>
-          </a:xfrm>
-          <a:prstGeom prst="rect">
-            <a:avLst/>
-          </a:prstGeom>
-          <a:noFill/>
-        </p:spPr>
-        <p:txBody>
-          <a:bodyPr wrap="square" anchor="ctr">
-            <a:spAutoFit/>
-          </a:bodyPr>
-          <a:lstStyle/>
-          <a:p>
-            <a:pPr algn="l"/>
-            <a:r>
-              <a:rPr sz="2400" b="1">
-                <a:solidFill>
-                  <a:srgbClr val="333333"/>
-                </a:solidFill>
-                <a:latin typeface="Open Sans"/>
-                <a:ea typeface="Open Sans"/>
-                <a:cs typeface="Open Sans"/>
-              </a:rPr>
-              <a:t>1</a:t>
-            </a:r>
-          </a:p>
-        </p:txBody>
-      </p:sp>
-      <p:sp>
-        <p:nvSpPr>
-          <p:cNvPr id="9" name="TextBox 8"/>
-          <p:cNvSpPr txBox="1"/>
-          <p:nvPr/>
-        </p:nvSpPr>
-        <p:spPr>
-          <a:xfrm>
-            <a:off x="1400000" y="2580000"/>
-            <a:ext cx="10300000" cy="1440000"/>
-          </a:xfrm>
-          <a:prstGeom prst="rect">
-            <a:avLst/>
-          </a:prstGeom>
-          <a:noFill/>
-        </p:spPr>
-        <p:txBody>
-          <a:bodyPr wrap="square" anchor="ctr">
-            <a:spAutoFit/>
-          </a:bodyPr>
-          <a:lstStyle/>
-          <a:p>
-            <a:pPr algn="l"/>
-            <a:r>
-              <a:rPr sz="2000" b="0">
-                <a:solidFill>
-                  <a:srgbClr val="333333"/>
-                </a:solidFill>
-                <a:latin typeface="Open Sans"/>
-                <a:ea typeface="Open Sans"/>
-                <a:cs typeface="Open Sans"/>
-              </a:rPr>
-              <a:t>Оценка обстановки → безопасность (СИЗ)</a:t>
-            </a:r>
-          </a:p>
-        </p:txBody>
-      </p:sp>
-      <p:sp>
-        <p:nvSpPr>
-          <p:cNvPr id="10" name="Rounded Rectangle 9"/>
+          <p:cNvPr id="6" name="Oval 5"/>
           <p:cNvSpPr/>
           <p:nvPr/>
         </p:nvSpPr>
         <p:spPr>
           <a:xfrm>
-            <a:off x="12600000" y="2500000"/>
-            <a:ext cx="11000000" cy="1600000"/>
-          </a:xfrm>
-          <a:prstGeom prst="roundRect">
+            <a:off x="2160000" y="1956250"/>
+            <a:ext cx="800000" cy="800000"/>
+          </a:xfrm>
+          <a:prstGeom prst="ellipse">
             <a:avLst/>
           </a:prstGeom>
           <a:solidFill>
@@ -7057,14 +6095,14 @@
       </p:sp>
       <p:sp>
         <p:nvSpPr>
-          <p:cNvPr id="11" name="TextBox 10"/>
+          <p:cNvPr id="7" name="TextBox 6"/>
           <p:cNvSpPr txBox="1"/>
           <p:nvPr/>
         </p:nvSpPr>
         <p:spPr>
           <a:xfrm>
-            <a:off x="12680000" y="2560000"/>
-            <a:ext cx="500000" cy="1480000"/>
+            <a:off x="2160000" y="1956250"/>
+            <a:ext cx="800000" cy="800000"/>
           </a:xfrm>
           <a:prstGeom prst="rect">
             <a:avLst/>
@@ -7077,9 +6115,9 @@
           </a:bodyPr>
           <a:lstStyle/>
           <a:p>
-            <a:pPr algn="l"/>
-            <a:r>
-              <a:rPr sz="2400" b="1">
+            <a:pPr algn="ctr"/>
+            <a:r>
+              <a:rPr sz="2600" b="1">
                 <a:solidFill>
                   <a:srgbClr val="FFFFFF"/>
                 </a:solidFill>
@@ -7087,21 +6125,21 @@
                 <a:ea typeface="Open Sans"/>
                 <a:cs typeface="Open Sans"/>
               </a:rPr>
-              <a:t>2</a:t>
-            </a:r>
-          </a:p>
-        </p:txBody>
-      </p:sp>
-      <p:sp>
-        <p:nvSpPr>
-          <p:cNvPr id="12" name="TextBox 11"/>
+              <a:t>1</a:t>
+            </a:r>
+          </a:p>
+        </p:txBody>
+      </p:sp>
+      <p:sp>
+        <p:nvSpPr>
+          <p:cNvPr id="8" name="TextBox 7"/>
           <p:cNvSpPr txBox="1"/>
           <p:nvPr/>
         </p:nvSpPr>
         <p:spPr>
           <a:xfrm>
-            <a:off x="13200000" y="2580000"/>
-            <a:ext cx="10300000" cy="1440000"/>
+            <a:off x="3260000" y="2000000"/>
+            <a:ext cx="17000000" cy="712500"/>
           </a:xfrm>
           <a:prstGeom prst="rect">
             <a:avLst/>
@@ -7116,31 +6154,31 @@
           <a:p>
             <a:pPr algn="l"/>
             <a:r>
-              <a:rPr sz="2000" b="0">
-                <a:solidFill>
-                  <a:srgbClr val="FFFFFF"/>
+              <a:rPr sz="2800" b="0">
+                <a:solidFill>
+                  <a:srgbClr val="333333"/>
                 </a:solidFill>
                 <a:latin typeface="Open Sans"/>
                 <a:ea typeface="Open Sans"/>
                 <a:cs typeface="Open Sans"/>
               </a:rPr>
-              <a:t>Обзорный осмотр — поиск кровотечения</a:t>
-            </a:r>
-          </a:p>
-        </p:txBody>
-      </p:sp>
-      <p:sp>
-        <p:nvSpPr>
-          <p:cNvPr id="13" name="Rounded Rectangle 12"/>
+              <a:t>Безопасность (СИЗ)</a:t>
+            </a:r>
+          </a:p>
+        </p:txBody>
+      </p:sp>
+      <p:sp>
+        <p:nvSpPr>
+          <p:cNvPr id="9" name="Down Arrow 8"/>
           <p:cNvSpPr/>
           <p:nvPr/>
         </p:nvSpPr>
         <p:spPr>
           <a:xfrm>
-            <a:off x="800000" y="4500000"/>
-            <a:ext cx="11000000" cy="1600000"/>
-          </a:xfrm>
-          <a:prstGeom prst="roundRect">
+            <a:off x="11360000" y="2932500"/>
+            <a:ext cx="350000" cy="180000"/>
+          </a:xfrm>
+          <a:prstGeom prst="downArrow">
             <a:avLst/>
           </a:prstGeom>
           <a:solidFill>
@@ -7174,14 +6212,102 @@
       </p:sp>
       <p:sp>
         <p:nvSpPr>
-          <p:cNvPr id="14" name="TextBox 13"/>
+          <p:cNvPr id="10" name="Rounded Rectangle 9"/>
+          <p:cNvSpPr/>
+          <p:nvPr/>
+        </p:nvSpPr>
+        <p:spPr>
+          <a:xfrm>
+            <a:off x="1860000" y="3162500"/>
+            <a:ext cx="19000000" cy="1112500"/>
+          </a:xfrm>
+          <a:prstGeom prst="roundRect">
+            <a:avLst/>
+          </a:prstGeom>
+          <a:solidFill>
+            <a:srgbClr val="F7F7F7"/>
+          </a:solidFill>
+          <a:ln w="15875">
+            <a:solidFill>
+              <a:srgbClr val="E1E1E1"/>
+            </a:solidFill>
+          </a:ln>
+        </p:spPr>
+        <p:style>
+          <a:lnRef idx="1">
+            <a:schemeClr val="accent1"/>
+          </a:lnRef>
+          <a:fillRef idx="3">
+            <a:schemeClr val="accent1"/>
+          </a:fillRef>
+          <a:effectRef idx="2">
+            <a:schemeClr val="accent1"/>
+          </a:effectRef>
+          <a:fontRef idx="minor">
+            <a:schemeClr val="lt1"/>
+          </a:fontRef>
+        </p:style>
+        <p:txBody>
+          <a:bodyPr rtlCol="0" anchor="ctr"/>
+          <a:lstStyle/>
+          <a:p>
+            <a:pPr algn="ctr"/>
+          </a:p>
+        </p:txBody>
+      </p:sp>
+      <p:sp>
+        <p:nvSpPr>
+          <p:cNvPr id="11" name="Oval 10"/>
+          <p:cNvSpPr/>
+          <p:nvPr/>
+        </p:nvSpPr>
+        <p:spPr>
+          <a:xfrm>
+            <a:off x="2160000" y="3318750"/>
+            <a:ext cx="800000" cy="800000"/>
+          </a:xfrm>
+          <a:prstGeom prst="ellipse">
+            <a:avLst/>
+          </a:prstGeom>
+          <a:solidFill>
+            <a:srgbClr val="0055AA"/>
+          </a:solidFill>
+          <a:ln>
+            <a:noFill/>
+          </a:ln>
+        </p:spPr>
+        <p:style>
+          <a:lnRef idx="1">
+            <a:schemeClr val="accent1"/>
+          </a:lnRef>
+          <a:fillRef idx="3">
+            <a:schemeClr val="accent1"/>
+          </a:fillRef>
+          <a:effectRef idx="2">
+            <a:schemeClr val="accent1"/>
+          </a:effectRef>
+          <a:fontRef idx="minor">
+            <a:schemeClr val="lt1"/>
+          </a:fontRef>
+        </p:style>
+        <p:txBody>
+          <a:bodyPr rtlCol="0" anchor="ctr"/>
+          <a:lstStyle/>
+          <a:p>
+            <a:pPr algn="ctr"/>
+          </a:p>
+        </p:txBody>
+      </p:sp>
+      <p:sp>
+        <p:nvSpPr>
+          <p:cNvPr id="12" name="TextBox 11"/>
           <p:cNvSpPr txBox="1"/>
           <p:nvPr/>
         </p:nvSpPr>
         <p:spPr>
           <a:xfrm>
-            <a:off x="880000" y="4560000"/>
-            <a:ext cx="500000" cy="1480000"/>
+            <a:off x="2160000" y="3318750"/>
+            <a:ext cx="800000" cy="800000"/>
           </a:xfrm>
           <a:prstGeom prst="rect">
             <a:avLst/>
@@ -7194,11 +6320,214 @@
           </a:bodyPr>
           <a:lstStyle/>
           <a:p>
+            <a:pPr algn="ctr"/>
+            <a:r>
+              <a:rPr sz="2600" b="1">
+                <a:solidFill>
+                  <a:srgbClr val="FFFFFF"/>
+                </a:solidFill>
+                <a:latin typeface="Open Sans"/>
+                <a:ea typeface="Open Sans"/>
+                <a:cs typeface="Open Sans"/>
+              </a:rPr>
+              <a:t>2</a:t>
+            </a:r>
+          </a:p>
+        </p:txBody>
+      </p:sp>
+      <p:sp>
+        <p:nvSpPr>
+          <p:cNvPr id="13" name="TextBox 12"/>
+          <p:cNvSpPr txBox="1"/>
+          <p:nvPr/>
+        </p:nvSpPr>
+        <p:spPr>
+          <a:xfrm>
+            <a:off x="3260000" y="3362500"/>
+            <a:ext cx="17000000" cy="712500"/>
+          </a:xfrm>
+          <a:prstGeom prst="rect">
+            <a:avLst/>
+          </a:prstGeom>
+          <a:noFill/>
+        </p:spPr>
+        <p:txBody>
+          <a:bodyPr wrap="square" anchor="ctr">
+            <a:spAutoFit/>
+          </a:bodyPr>
+          <a:lstStyle/>
+          <a:p>
             <a:pPr algn="l"/>
             <a:r>
-              <a:rPr sz="2400" b="1">
-                <a:solidFill>
-                  <a:srgbClr val="FFFFFF"/>
+              <a:rPr sz="2800" b="0">
+                <a:solidFill>
+                  <a:srgbClr val="333333"/>
+                </a:solidFill>
+                <a:latin typeface="Open Sans"/>
+                <a:ea typeface="Open Sans"/>
+                <a:cs typeface="Open Sans"/>
+              </a:rPr>
+              <a:t>Обзорный осмотр</a:t>
+            </a:r>
+          </a:p>
+        </p:txBody>
+      </p:sp>
+      <p:sp>
+        <p:nvSpPr>
+          <p:cNvPr id="14" name="Down Arrow 13"/>
+          <p:cNvSpPr/>
+          <p:nvPr/>
+        </p:nvSpPr>
+        <p:spPr>
+          <a:xfrm>
+            <a:off x="11360000" y="4295000"/>
+            <a:ext cx="350000" cy="180000"/>
+          </a:xfrm>
+          <a:prstGeom prst="downArrow">
+            <a:avLst/>
+          </a:prstGeom>
+          <a:solidFill>
+            <a:srgbClr val="0055AA"/>
+          </a:solidFill>
+          <a:ln>
+            <a:noFill/>
+          </a:ln>
+        </p:spPr>
+        <p:style>
+          <a:lnRef idx="1">
+            <a:schemeClr val="accent1"/>
+          </a:lnRef>
+          <a:fillRef idx="3">
+            <a:schemeClr val="accent1"/>
+          </a:fillRef>
+          <a:effectRef idx="2">
+            <a:schemeClr val="accent1"/>
+          </a:effectRef>
+          <a:fontRef idx="minor">
+            <a:schemeClr val="lt1"/>
+          </a:fontRef>
+        </p:style>
+        <p:txBody>
+          <a:bodyPr rtlCol="0" anchor="ctr"/>
+          <a:lstStyle/>
+          <a:p>
+            <a:pPr algn="ctr"/>
+          </a:p>
+        </p:txBody>
+      </p:sp>
+      <p:sp>
+        <p:nvSpPr>
+          <p:cNvPr id="15" name="Rounded Rectangle 14"/>
+          <p:cNvSpPr/>
+          <p:nvPr/>
+        </p:nvSpPr>
+        <p:spPr>
+          <a:xfrm>
+            <a:off x="1860000" y="4525000"/>
+            <a:ext cx="19000000" cy="1112500"/>
+          </a:xfrm>
+          <a:prstGeom prst="roundRect">
+            <a:avLst/>
+          </a:prstGeom>
+          <a:solidFill>
+            <a:srgbClr val="0055AA"/>
+          </a:solidFill>
+          <a:ln>
+            <a:noFill/>
+          </a:ln>
+        </p:spPr>
+        <p:style>
+          <a:lnRef idx="1">
+            <a:schemeClr val="accent1"/>
+          </a:lnRef>
+          <a:fillRef idx="3">
+            <a:schemeClr val="accent1"/>
+          </a:fillRef>
+          <a:effectRef idx="2">
+            <a:schemeClr val="accent1"/>
+          </a:effectRef>
+          <a:fontRef idx="minor">
+            <a:schemeClr val="lt1"/>
+          </a:fontRef>
+        </p:style>
+        <p:txBody>
+          <a:bodyPr rtlCol="0" anchor="ctr"/>
+          <a:lstStyle/>
+          <a:p>
+            <a:pPr algn="ctr"/>
+          </a:p>
+        </p:txBody>
+      </p:sp>
+      <p:sp>
+        <p:nvSpPr>
+          <p:cNvPr id="16" name="Oval 15"/>
+          <p:cNvSpPr/>
+          <p:nvPr/>
+        </p:nvSpPr>
+        <p:spPr>
+          <a:xfrm>
+            <a:off x="2160000" y="4681250"/>
+            <a:ext cx="800000" cy="800000"/>
+          </a:xfrm>
+          <a:prstGeom prst="ellipse">
+            <a:avLst/>
+          </a:prstGeom>
+          <a:solidFill>
+            <a:srgbClr val="FFFFFF"/>
+          </a:solidFill>
+          <a:ln>
+            <a:noFill/>
+          </a:ln>
+        </p:spPr>
+        <p:style>
+          <a:lnRef idx="1">
+            <a:schemeClr val="accent1"/>
+          </a:lnRef>
+          <a:fillRef idx="3">
+            <a:schemeClr val="accent1"/>
+          </a:fillRef>
+          <a:effectRef idx="2">
+            <a:schemeClr val="accent1"/>
+          </a:effectRef>
+          <a:fontRef idx="minor">
+            <a:schemeClr val="lt1"/>
+          </a:fontRef>
+        </p:style>
+        <p:txBody>
+          <a:bodyPr rtlCol="0" anchor="ctr"/>
+          <a:lstStyle/>
+          <a:p>
+            <a:pPr algn="ctr"/>
+          </a:p>
+        </p:txBody>
+      </p:sp>
+      <p:sp>
+        <p:nvSpPr>
+          <p:cNvPr id="17" name="TextBox 16"/>
+          <p:cNvSpPr txBox="1"/>
+          <p:nvPr/>
+        </p:nvSpPr>
+        <p:spPr>
+          <a:xfrm>
+            <a:off x="2160000" y="4681250"/>
+            <a:ext cx="800000" cy="800000"/>
+          </a:xfrm>
+          <a:prstGeom prst="rect">
+            <a:avLst/>
+          </a:prstGeom>
+          <a:noFill/>
+        </p:spPr>
+        <p:txBody>
+          <a:bodyPr wrap="square" anchor="ctr">
+            <a:spAutoFit/>
+          </a:bodyPr>
+          <a:lstStyle/>
+          <a:p>
+            <a:pPr algn="ctr"/>
+            <a:r>
+              <a:rPr sz="2600" b="1">
+                <a:solidFill>
+                  <a:srgbClr val="0055AA"/>
                 </a:solidFill>
                 <a:latin typeface="Open Sans"/>
                 <a:ea typeface="Open Sans"/>
@@ -7211,14 +6540,14 @@
       </p:sp>
       <p:sp>
         <p:nvSpPr>
-          <p:cNvPr id="15" name="TextBox 14"/>
+          <p:cNvPr id="18" name="TextBox 17"/>
           <p:cNvSpPr txBox="1"/>
           <p:nvPr/>
         </p:nvSpPr>
         <p:spPr>
           <a:xfrm>
-            <a:off x="1400000" y="4580000"/>
-            <a:ext cx="10300000" cy="1440000"/>
+            <a:off x="3260000" y="4725000"/>
+            <a:ext cx="17000000" cy="712500"/>
           </a:xfrm>
           <a:prstGeom prst="rect">
             <a:avLst/>
@@ -7233,7 +6562,7 @@
           <a:p>
             <a:pPr algn="l"/>
             <a:r>
-              <a:rPr sz="2000" b="0">
+              <a:rPr sz="2800" b="0">
                 <a:solidFill>
                   <a:srgbClr val="FFFFFF"/>
                 </a:solidFill>
@@ -7241,27 +6570,27 @@
                 <a:ea typeface="Open Sans"/>
                 <a:cs typeface="Open Sans"/>
               </a:rPr>
-              <a:t>Временная остановка кровотечения</a:t>
-            </a:r>
-          </a:p>
-        </p:txBody>
-      </p:sp>
-      <p:sp>
-        <p:nvSpPr>
-          <p:cNvPr id="16" name="Rounded Rectangle 15"/>
+              <a:t>Остановка кровотечения</a:t>
+            </a:r>
+          </a:p>
+        </p:txBody>
+      </p:sp>
+      <p:sp>
+        <p:nvSpPr>
+          <p:cNvPr id="19" name="Down Arrow 18"/>
           <p:cNvSpPr/>
           <p:nvPr/>
         </p:nvSpPr>
         <p:spPr>
           <a:xfrm>
-            <a:off x="12600000" y="4500000"/>
-            <a:ext cx="11000000" cy="1600000"/>
-          </a:xfrm>
-          <a:prstGeom prst="roundRect">
+            <a:off x="11360000" y="5657500"/>
+            <a:ext cx="350000" cy="180000"/>
+          </a:xfrm>
+          <a:prstGeom prst="downArrow">
             <a:avLst/>
           </a:prstGeom>
           <a:solidFill>
-            <a:srgbClr val="DDDDDD"/>
+            <a:srgbClr val="0055AA"/>
           </a:solidFill>
           <a:ln>
             <a:noFill/>
@@ -7291,14 +6620,102 @@
       </p:sp>
       <p:sp>
         <p:nvSpPr>
-          <p:cNvPr id="17" name="TextBox 16"/>
+          <p:cNvPr id="20" name="Rounded Rectangle 19"/>
+          <p:cNvSpPr/>
+          <p:nvPr/>
+        </p:nvSpPr>
+        <p:spPr>
+          <a:xfrm>
+            <a:off x="1860000" y="5887500"/>
+            <a:ext cx="19000000" cy="1112500"/>
+          </a:xfrm>
+          <a:prstGeom prst="roundRect">
+            <a:avLst/>
+          </a:prstGeom>
+          <a:solidFill>
+            <a:srgbClr val="F7F7F7"/>
+          </a:solidFill>
+          <a:ln w="15875">
+            <a:solidFill>
+              <a:srgbClr val="E1E1E1"/>
+            </a:solidFill>
+          </a:ln>
+        </p:spPr>
+        <p:style>
+          <a:lnRef idx="1">
+            <a:schemeClr val="accent1"/>
+          </a:lnRef>
+          <a:fillRef idx="3">
+            <a:schemeClr val="accent1"/>
+          </a:fillRef>
+          <a:effectRef idx="2">
+            <a:schemeClr val="accent1"/>
+          </a:effectRef>
+          <a:fontRef idx="minor">
+            <a:schemeClr val="lt1"/>
+          </a:fontRef>
+        </p:style>
+        <p:txBody>
+          <a:bodyPr rtlCol="0" anchor="ctr"/>
+          <a:lstStyle/>
+          <a:p>
+            <a:pPr algn="ctr"/>
+          </a:p>
+        </p:txBody>
+      </p:sp>
+      <p:sp>
+        <p:nvSpPr>
+          <p:cNvPr id="21" name="Oval 20"/>
+          <p:cNvSpPr/>
+          <p:nvPr/>
+        </p:nvSpPr>
+        <p:spPr>
+          <a:xfrm>
+            <a:off x="2160000" y="6043750"/>
+            <a:ext cx="800000" cy="800000"/>
+          </a:xfrm>
+          <a:prstGeom prst="ellipse">
+            <a:avLst/>
+          </a:prstGeom>
+          <a:solidFill>
+            <a:srgbClr val="0055AA"/>
+          </a:solidFill>
+          <a:ln>
+            <a:noFill/>
+          </a:ln>
+        </p:spPr>
+        <p:style>
+          <a:lnRef idx="1">
+            <a:schemeClr val="accent1"/>
+          </a:lnRef>
+          <a:fillRef idx="3">
+            <a:schemeClr val="accent1"/>
+          </a:fillRef>
+          <a:effectRef idx="2">
+            <a:schemeClr val="accent1"/>
+          </a:effectRef>
+          <a:fontRef idx="minor">
+            <a:schemeClr val="lt1"/>
+          </a:fontRef>
+        </p:style>
+        <p:txBody>
+          <a:bodyPr rtlCol="0" anchor="ctr"/>
+          <a:lstStyle/>
+          <a:p>
+            <a:pPr algn="ctr"/>
+          </a:p>
+        </p:txBody>
+      </p:sp>
+      <p:sp>
+        <p:nvSpPr>
+          <p:cNvPr id="22" name="TextBox 21"/>
           <p:cNvSpPr txBox="1"/>
           <p:nvPr/>
         </p:nvSpPr>
         <p:spPr>
           <a:xfrm>
-            <a:off x="12680000" y="4560000"/>
-            <a:ext cx="500000" cy="1480000"/>
+            <a:off x="2160000" y="6043750"/>
+            <a:ext cx="800000" cy="800000"/>
           </a:xfrm>
           <a:prstGeom prst="rect">
             <a:avLst/>
@@ -7311,11 +6728,11 @@
           </a:bodyPr>
           <a:lstStyle/>
           <a:p>
-            <a:pPr algn="l"/>
-            <a:r>
-              <a:rPr sz="2400" b="1">
-                <a:solidFill>
-                  <a:srgbClr val="333333"/>
+            <a:pPr algn="ctr"/>
+            <a:r>
+              <a:rPr sz="2600" b="1">
+                <a:solidFill>
+                  <a:srgbClr val="FFFFFF"/>
                 </a:solidFill>
                 <a:latin typeface="Open Sans"/>
                 <a:ea typeface="Open Sans"/>
@@ -7328,14 +6745,14 @@
       </p:sp>
       <p:sp>
         <p:nvSpPr>
-          <p:cNvPr id="18" name="TextBox 17"/>
+          <p:cNvPr id="23" name="TextBox 22"/>
           <p:cNvSpPr txBox="1"/>
           <p:nvPr/>
         </p:nvSpPr>
         <p:spPr>
           <a:xfrm>
-            <a:off x="13200000" y="4580000"/>
-            <a:ext cx="10300000" cy="1440000"/>
+            <a:off x="3260000" y="6087500"/>
+            <a:ext cx="17000000" cy="712500"/>
           </a:xfrm>
           <a:prstGeom prst="rect">
             <a:avLst/>
@@ -7350,7 +6767,7 @@
           <a:p>
             <a:pPr algn="l"/>
             <a:r>
-              <a:rPr sz="2000" b="0">
+              <a:rPr sz="2800" b="0">
                 <a:solidFill>
                   <a:srgbClr val="333333"/>
                 </a:solidFill>
@@ -7358,27 +6775,27 @@
                 <a:ea typeface="Open Sans"/>
                 <a:cs typeface="Open Sans"/>
               </a:rPr>
-              <a:t>Признаки жизни: сознание → дыхание</a:t>
-            </a:r>
-          </a:p>
-        </p:txBody>
-      </p:sp>
-      <p:sp>
-        <p:nvSpPr>
-          <p:cNvPr id="19" name="Rounded Rectangle 18"/>
+              <a:t>Признаки жизни</a:t>
+            </a:r>
+          </a:p>
+        </p:txBody>
+      </p:sp>
+      <p:sp>
+        <p:nvSpPr>
+          <p:cNvPr id="24" name="Down Arrow 23"/>
           <p:cNvSpPr/>
           <p:nvPr/>
         </p:nvSpPr>
         <p:spPr>
           <a:xfrm>
-            <a:off x="800000" y="6500000"/>
-            <a:ext cx="11000000" cy="1600000"/>
-          </a:xfrm>
-          <a:prstGeom prst="roundRect">
+            <a:off x="11360000" y="7020000"/>
+            <a:ext cx="350000" cy="180000"/>
+          </a:xfrm>
+          <a:prstGeom prst="downArrow">
             <a:avLst/>
           </a:prstGeom>
           <a:solidFill>
-            <a:srgbClr val="DDDDDD"/>
+            <a:srgbClr val="0055AA"/>
           </a:solidFill>
           <a:ln>
             <a:noFill/>
@@ -7408,14 +6825,102 @@
       </p:sp>
       <p:sp>
         <p:nvSpPr>
-          <p:cNvPr id="20" name="TextBox 19"/>
+          <p:cNvPr id="25" name="Rounded Rectangle 24"/>
+          <p:cNvSpPr/>
+          <p:nvPr/>
+        </p:nvSpPr>
+        <p:spPr>
+          <a:xfrm>
+            <a:off x="1860000" y="7250000"/>
+            <a:ext cx="19000000" cy="1112500"/>
+          </a:xfrm>
+          <a:prstGeom prst="roundRect">
+            <a:avLst/>
+          </a:prstGeom>
+          <a:solidFill>
+            <a:srgbClr val="F7F7F7"/>
+          </a:solidFill>
+          <a:ln w="15875">
+            <a:solidFill>
+              <a:srgbClr val="E1E1E1"/>
+            </a:solidFill>
+          </a:ln>
+        </p:spPr>
+        <p:style>
+          <a:lnRef idx="1">
+            <a:schemeClr val="accent1"/>
+          </a:lnRef>
+          <a:fillRef idx="3">
+            <a:schemeClr val="accent1"/>
+          </a:fillRef>
+          <a:effectRef idx="2">
+            <a:schemeClr val="accent1"/>
+          </a:effectRef>
+          <a:fontRef idx="minor">
+            <a:schemeClr val="lt1"/>
+          </a:fontRef>
+        </p:style>
+        <p:txBody>
+          <a:bodyPr rtlCol="0" anchor="ctr"/>
+          <a:lstStyle/>
+          <a:p>
+            <a:pPr algn="ctr"/>
+          </a:p>
+        </p:txBody>
+      </p:sp>
+      <p:sp>
+        <p:nvSpPr>
+          <p:cNvPr id="26" name="Oval 25"/>
+          <p:cNvSpPr/>
+          <p:nvPr/>
+        </p:nvSpPr>
+        <p:spPr>
+          <a:xfrm>
+            <a:off x="2160000" y="7406250"/>
+            <a:ext cx="800000" cy="800000"/>
+          </a:xfrm>
+          <a:prstGeom prst="ellipse">
+            <a:avLst/>
+          </a:prstGeom>
+          <a:solidFill>
+            <a:srgbClr val="0055AA"/>
+          </a:solidFill>
+          <a:ln>
+            <a:noFill/>
+          </a:ln>
+        </p:spPr>
+        <p:style>
+          <a:lnRef idx="1">
+            <a:schemeClr val="accent1"/>
+          </a:lnRef>
+          <a:fillRef idx="3">
+            <a:schemeClr val="accent1"/>
+          </a:fillRef>
+          <a:effectRef idx="2">
+            <a:schemeClr val="accent1"/>
+          </a:effectRef>
+          <a:fontRef idx="minor">
+            <a:schemeClr val="lt1"/>
+          </a:fontRef>
+        </p:style>
+        <p:txBody>
+          <a:bodyPr rtlCol="0" anchor="ctr"/>
+          <a:lstStyle/>
+          <a:p>
+            <a:pPr algn="ctr"/>
+          </a:p>
+        </p:txBody>
+      </p:sp>
+      <p:sp>
+        <p:nvSpPr>
+          <p:cNvPr id="27" name="TextBox 26"/>
           <p:cNvSpPr txBox="1"/>
           <p:nvPr/>
         </p:nvSpPr>
         <p:spPr>
           <a:xfrm>
-            <a:off x="880000" y="6560000"/>
-            <a:ext cx="500000" cy="1480000"/>
+            <a:off x="2160000" y="7406250"/>
+            <a:ext cx="800000" cy="800000"/>
           </a:xfrm>
           <a:prstGeom prst="rect">
             <a:avLst/>
@@ -7428,11 +6933,11 @@
           </a:bodyPr>
           <a:lstStyle/>
           <a:p>
-            <a:pPr algn="l"/>
-            <a:r>
-              <a:rPr sz="2400" b="1">
-                <a:solidFill>
-                  <a:srgbClr val="333333"/>
+            <a:pPr algn="ctr"/>
+            <a:r>
+              <a:rPr sz="2600" b="1">
+                <a:solidFill>
+                  <a:srgbClr val="FFFFFF"/>
                 </a:solidFill>
                 <a:latin typeface="Open Sans"/>
                 <a:ea typeface="Open Sans"/>
@@ -7445,14 +6950,14 @@
       </p:sp>
       <p:sp>
         <p:nvSpPr>
-          <p:cNvPr id="21" name="TextBox 20"/>
+          <p:cNvPr id="28" name="TextBox 27"/>
           <p:cNvSpPr txBox="1"/>
           <p:nvPr/>
         </p:nvSpPr>
         <p:spPr>
           <a:xfrm>
-            <a:off x="1400000" y="6580000"/>
-            <a:ext cx="10300000" cy="1440000"/>
+            <a:off x="3260000" y="7450000"/>
+            <a:ext cx="17000000" cy="712500"/>
           </a:xfrm>
           <a:prstGeom prst="rect">
             <a:avLst/>
@@ -7467,7 +6972,7 @@
           <a:p>
             <a:pPr algn="l"/>
             <a:r>
-              <a:rPr sz="2000" b="0">
+              <a:rPr sz="2800" b="0">
                 <a:solidFill>
                   <a:srgbClr val="333333"/>
                 </a:solidFill>
@@ -7475,27 +6980,27 @@
                 <a:ea typeface="Open Sans"/>
                 <a:cs typeface="Open Sans"/>
               </a:rPr>
-              <a:t>СЛР при отсутствии признаков жизни</a:t>
-            </a:r>
-          </a:p>
-        </p:txBody>
-      </p:sp>
-      <p:sp>
-        <p:nvSpPr>
-          <p:cNvPr id="22" name="Rounded Rectangle 21"/>
+              <a:t>СЛР при необходимости</a:t>
+            </a:r>
+          </a:p>
+        </p:txBody>
+      </p:sp>
+      <p:sp>
+        <p:nvSpPr>
+          <p:cNvPr id="29" name="Down Arrow 28"/>
           <p:cNvSpPr/>
           <p:nvPr/>
         </p:nvSpPr>
         <p:spPr>
           <a:xfrm>
-            <a:off x="12600000" y="6500000"/>
-            <a:ext cx="11000000" cy="1600000"/>
-          </a:xfrm>
-          <a:prstGeom prst="roundRect">
+            <a:off x="11360000" y="8382500"/>
+            <a:ext cx="350000" cy="180000"/>
+          </a:xfrm>
+          <a:prstGeom prst="downArrow">
             <a:avLst/>
           </a:prstGeom>
           <a:solidFill>
-            <a:srgbClr val="DDDDDD"/>
+            <a:srgbClr val="0055AA"/>
           </a:solidFill>
           <a:ln>
             <a:noFill/>
@@ -7525,14 +7030,102 @@
       </p:sp>
       <p:sp>
         <p:nvSpPr>
-          <p:cNvPr id="23" name="TextBox 22"/>
+          <p:cNvPr id="30" name="Rounded Rectangle 29"/>
+          <p:cNvSpPr/>
+          <p:nvPr/>
+        </p:nvSpPr>
+        <p:spPr>
+          <a:xfrm>
+            <a:off x="1860000" y="8612500"/>
+            <a:ext cx="19000000" cy="1112500"/>
+          </a:xfrm>
+          <a:prstGeom prst="roundRect">
+            <a:avLst/>
+          </a:prstGeom>
+          <a:solidFill>
+            <a:srgbClr val="F7F7F7"/>
+          </a:solidFill>
+          <a:ln w="15875">
+            <a:solidFill>
+              <a:srgbClr val="E1E1E1"/>
+            </a:solidFill>
+          </a:ln>
+        </p:spPr>
+        <p:style>
+          <a:lnRef idx="1">
+            <a:schemeClr val="accent1"/>
+          </a:lnRef>
+          <a:fillRef idx="3">
+            <a:schemeClr val="accent1"/>
+          </a:fillRef>
+          <a:effectRef idx="2">
+            <a:schemeClr val="accent1"/>
+          </a:effectRef>
+          <a:fontRef idx="minor">
+            <a:schemeClr val="lt1"/>
+          </a:fontRef>
+        </p:style>
+        <p:txBody>
+          <a:bodyPr rtlCol="0" anchor="ctr"/>
+          <a:lstStyle/>
+          <a:p>
+            <a:pPr algn="ctr"/>
+          </a:p>
+        </p:txBody>
+      </p:sp>
+      <p:sp>
+        <p:nvSpPr>
+          <p:cNvPr id="31" name="Oval 30"/>
+          <p:cNvSpPr/>
+          <p:nvPr/>
+        </p:nvSpPr>
+        <p:spPr>
+          <a:xfrm>
+            <a:off x="2160000" y="8768750"/>
+            <a:ext cx="800000" cy="800000"/>
+          </a:xfrm>
+          <a:prstGeom prst="ellipse">
+            <a:avLst/>
+          </a:prstGeom>
+          <a:solidFill>
+            <a:srgbClr val="0055AA"/>
+          </a:solidFill>
+          <a:ln>
+            <a:noFill/>
+          </a:ln>
+        </p:spPr>
+        <p:style>
+          <a:lnRef idx="1">
+            <a:schemeClr val="accent1"/>
+          </a:lnRef>
+          <a:fillRef idx="3">
+            <a:schemeClr val="accent1"/>
+          </a:fillRef>
+          <a:effectRef idx="2">
+            <a:schemeClr val="accent1"/>
+          </a:effectRef>
+          <a:fontRef idx="minor">
+            <a:schemeClr val="lt1"/>
+          </a:fontRef>
+        </p:style>
+        <p:txBody>
+          <a:bodyPr rtlCol="0" anchor="ctr"/>
+          <a:lstStyle/>
+          <a:p>
+            <a:pPr algn="ctr"/>
+          </a:p>
+        </p:txBody>
+      </p:sp>
+      <p:sp>
+        <p:nvSpPr>
+          <p:cNvPr id="32" name="TextBox 31"/>
           <p:cNvSpPr txBox="1"/>
           <p:nvPr/>
         </p:nvSpPr>
         <p:spPr>
           <a:xfrm>
-            <a:off x="12680000" y="6560000"/>
-            <a:ext cx="500000" cy="1480000"/>
+            <a:off x="2160000" y="8768750"/>
+            <a:ext cx="800000" cy="800000"/>
           </a:xfrm>
           <a:prstGeom prst="rect">
             <a:avLst/>
@@ -7545,11 +7138,11 @@
           </a:bodyPr>
           <a:lstStyle/>
           <a:p>
-            <a:pPr algn="l"/>
-            <a:r>
-              <a:rPr sz="2400" b="1">
-                <a:solidFill>
-                  <a:srgbClr val="333333"/>
+            <a:pPr algn="ctr"/>
+            <a:r>
+              <a:rPr sz="2600" b="1">
+                <a:solidFill>
+                  <a:srgbClr val="FFFFFF"/>
                 </a:solidFill>
                 <a:latin typeface="Open Sans"/>
                 <a:ea typeface="Open Sans"/>
@@ -7562,14 +7155,14 @@
       </p:sp>
       <p:sp>
         <p:nvSpPr>
-          <p:cNvPr id="24" name="TextBox 23"/>
+          <p:cNvPr id="33" name="TextBox 32"/>
           <p:cNvSpPr txBox="1"/>
           <p:nvPr/>
         </p:nvSpPr>
         <p:spPr>
           <a:xfrm>
-            <a:off x="13200000" y="6580000"/>
-            <a:ext cx="10300000" cy="1440000"/>
+            <a:off x="3260000" y="8812500"/>
+            <a:ext cx="17000000" cy="712500"/>
           </a:xfrm>
           <a:prstGeom prst="rect">
             <a:avLst/>
@@ -7584,7 +7177,7 @@
           <a:p>
             <a:pPr algn="l"/>
             <a:r>
-              <a:rPr sz="2000" b="0">
+              <a:rPr sz="2800" b="0">
                 <a:solidFill>
                   <a:srgbClr val="333333"/>
                 </a:solidFill>
@@ -7592,27 +7185,27 @@
                 <a:ea typeface="Open Sans"/>
                 <a:cs typeface="Open Sans"/>
               </a:rPr>
-              <a:t>Вызов скорой медицинской помощи</a:t>
-            </a:r>
-          </a:p>
-        </p:txBody>
-      </p:sp>
-      <p:sp>
-        <p:nvSpPr>
-          <p:cNvPr id="25" name="Rounded Rectangle 24"/>
+              <a:t>Вызов СМП</a:t>
+            </a:r>
+          </a:p>
+        </p:txBody>
+      </p:sp>
+      <p:sp>
+        <p:nvSpPr>
+          <p:cNvPr id="34" name="Down Arrow 33"/>
           <p:cNvSpPr/>
           <p:nvPr/>
         </p:nvSpPr>
         <p:spPr>
           <a:xfrm>
-            <a:off x="800000" y="8500000"/>
-            <a:ext cx="11000000" cy="1600000"/>
-          </a:xfrm>
-          <a:prstGeom prst="roundRect">
+            <a:off x="11360000" y="9745000"/>
+            <a:ext cx="350000" cy="180000"/>
+          </a:xfrm>
+          <a:prstGeom prst="downArrow">
             <a:avLst/>
           </a:prstGeom>
           <a:solidFill>
-            <a:srgbClr val="DDDDDD"/>
+            <a:srgbClr val="0055AA"/>
           </a:solidFill>
           <a:ln>
             <a:noFill/>
@@ -7642,14 +7235,102 @@
       </p:sp>
       <p:sp>
         <p:nvSpPr>
-          <p:cNvPr id="26" name="TextBox 25"/>
+          <p:cNvPr id="35" name="Rounded Rectangle 34"/>
+          <p:cNvSpPr/>
+          <p:nvPr/>
+        </p:nvSpPr>
+        <p:spPr>
+          <a:xfrm>
+            <a:off x="1860000" y="9975000"/>
+            <a:ext cx="19000000" cy="1112500"/>
+          </a:xfrm>
+          <a:prstGeom prst="roundRect">
+            <a:avLst/>
+          </a:prstGeom>
+          <a:solidFill>
+            <a:srgbClr val="F7F7F7"/>
+          </a:solidFill>
+          <a:ln w="15875">
+            <a:solidFill>
+              <a:srgbClr val="E1E1E1"/>
+            </a:solidFill>
+          </a:ln>
+        </p:spPr>
+        <p:style>
+          <a:lnRef idx="1">
+            <a:schemeClr val="accent1"/>
+          </a:lnRef>
+          <a:fillRef idx="3">
+            <a:schemeClr val="accent1"/>
+          </a:fillRef>
+          <a:effectRef idx="2">
+            <a:schemeClr val="accent1"/>
+          </a:effectRef>
+          <a:fontRef idx="minor">
+            <a:schemeClr val="lt1"/>
+          </a:fontRef>
+        </p:style>
+        <p:txBody>
+          <a:bodyPr rtlCol="0" anchor="ctr"/>
+          <a:lstStyle/>
+          <a:p>
+            <a:pPr algn="ctr"/>
+          </a:p>
+        </p:txBody>
+      </p:sp>
+      <p:sp>
+        <p:nvSpPr>
+          <p:cNvPr id="36" name="Oval 35"/>
+          <p:cNvSpPr/>
+          <p:nvPr/>
+        </p:nvSpPr>
+        <p:spPr>
+          <a:xfrm>
+            <a:off x="2160000" y="10131250"/>
+            <a:ext cx="800000" cy="800000"/>
+          </a:xfrm>
+          <a:prstGeom prst="ellipse">
+            <a:avLst/>
+          </a:prstGeom>
+          <a:solidFill>
+            <a:srgbClr val="0055AA"/>
+          </a:solidFill>
+          <a:ln>
+            <a:noFill/>
+          </a:ln>
+        </p:spPr>
+        <p:style>
+          <a:lnRef idx="1">
+            <a:schemeClr val="accent1"/>
+          </a:lnRef>
+          <a:fillRef idx="3">
+            <a:schemeClr val="accent1"/>
+          </a:fillRef>
+          <a:effectRef idx="2">
+            <a:schemeClr val="accent1"/>
+          </a:effectRef>
+          <a:fontRef idx="minor">
+            <a:schemeClr val="lt1"/>
+          </a:fontRef>
+        </p:style>
+        <p:txBody>
+          <a:bodyPr rtlCol="0" anchor="ctr"/>
+          <a:lstStyle/>
+          <a:p>
+            <a:pPr algn="ctr"/>
+          </a:p>
+        </p:txBody>
+      </p:sp>
+      <p:sp>
+        <p:nvSpPr>
+          <p:cNvPr id="37" name="TextBox 36"/>
           <p:cNvSpPr txBox="1"/>
           <p:nvPr/>
         </p:nvSpPr>
         <p:spPr>
           <a:xfrm>
-            <a:off x="880000" y="8560000"/>
-            <a:ext cx="500000" cy="1480000"/>
+            <a:off x="2160000" y="10131250"/>
+            <a:ext cx="800000" cy="800000"/>
           </a:xfrm>
           <a:prstGeom prst="rect">
             <a:avLst/>
@@ -7662,11 +7343,11 @@
           </a:bodyPr>
           <a:lstStyle/>
           <a:p>
-            <a:pPr algn="l"/>
-            <a:r>
-              <a:rPr sz="2400" b="1">
-                <a:solidFill>
-                  <a:srgbClr val="333333"/>
+            <a:pPr algn="ctr"/>
+            <a:r>
+              <a:rPr sz="2600" b="1">
+                <a:solidFill>
+                  <a:srgbClr val="FFFFFF"/>
                 </a:solidFill>
                 <a:latin typeface="Open Sans"/>
                 <a:ea typeface="Open Sans"/>
@@ -7679,14 +7360,14 @@
       </p:sp>
       <p:sp>
         <p:nvSpPr>
-          <p:cNvPr id="27" name="TextBox 26"/>
+          <p:cNvPr id="38" name="TextBox 37"/>
           <p:cNvSpPr txBox="1"/>
           <p:nvPr/>
         </p:nvSpPr>
         <p:spPr>
           <a:xfrm>
-            <a:off x="1400000" y="8580000"/>
-            <a:ext cx="10300000" cy="1440000"/>
+            <a:off x="3260000" y="10175000"/>
+            <a:ext cx="17000000" cy="712500"/>
           </a:xfrm>
           <a:prstGeom prst="rect">
             <a:avLst/>
@@ -7701,7 +7382,7 @@
           <a:p>
             <a:pPr algn="l"/>
             <a:r>
-              <a:rPr sz="2000" b="0">
+              <a:rPr sz="2800" b="0">
                 <a:solidFill>
                   <a:srgbClr val="333333"/>
                 </a:solidFill>
@@ -7709,27 +7390,27 @@
                 <a:ea typeface="Open Sans"/>
                 <a:cs typeface="Open Sans"/>
               </a:rPr>
-              <a:t>Подробный осмотр и помощь при травмах</a:t>
-            </a:r>
-          </a:p>
-        </p:txBody>
-      </p:sp>
-      <p:sp>
-        <p:nvSpPr>
-          <p:cNvPr id="28" name="Rounded Rectangle 27"/>
+              <a:t>Подробный осмотр</a:t>
+            </a:r>
+          </a:p>
+        </p:txBody>
+      </p:sp>
+      <p:sp>
+        <p:nvSpPr>
+          <p:cNvPr id="39" name="Down Arrow 38"/>
           <p:cNvSpPr/>
           <p:nvPr/>
         </p:nvSpPr>
         <p:spPr>
           <a:xfrm>
-            <a:off x="12600000" y="8500000"/>
-            <a:ext cx="11000000" cy="1600000"/>
-          </a:xfrm>
-          <a:prstGeom prst="roundRect">
+            <a:off x="11360000" y="11107500"/>
+            <a:ext cx="350000" cy="180000"/>
+          </a:xfrm>
+          <a:prstGeom prst="downArrow">
             <a:avLst/>
           </a:prstGeom>
           <a:solidFill>
-            <a:srgbClr val="DDDDDD"/>
+            <a:srgbClr val="0055AA"/>
           </a:solidFill>
           <a:ln>
             <a:noFill/>
@@ -7759,14 +7440,102 @@
       </p:sp>
       <p:sp>
         <p:nvSpPr>
-          <p:cNvPr id="29" name="TextBox 28"/>
+          <p:cNvPr id="40" name="Rounded Rectangle 39"/>
+          <p:cNvSpPr/>
+          <p:nvPr/>
+        </p:nvSpPr>
+        <p:spPr>
+          <a:xfrm>
+            <a:off x="1860000" y="11337500"/>
+            <a:ext cx="19000000" cy="1112500"/>
+          </a:xfrm>
+          <a:prstGeom prst="roundRect">
+            <a:avLst/>
+          </a:prstGeom>
+          <a:solidFill>
+            <a:srgbClr val="F7F7F7"/>
+          </a:solidFill>
+          <a:ln w="15875">
+            <a:solidFill>
+              <a:srgbClr val="E1E1E1"/>
+            </a:solidFill>
+          </a:ln>
+        </p:spPr>
+        <p:style>
+          <a:lnRef idx="1">
+            <a:schemeClr val="accent1"/>
+          </a:lnRef>
+          <a:fillRef idx="3">
+            <a:schemeClr val="accent1"/>
+          </a:fillRef>
+          <a:effectRef idx="2">
+            <a:schemeClr val="accent1"/>
+          </a:effectRef>
+          <a:fontRef idx="minor">
+            <a:schemeClr val="lt1"/>
+          </a:fontRef>
+        </p:style>
+        <p:txBody>
+          <a:bodyPr rtlCol="0" anchor="ctr"/>
+          <a:lstStyle/>
+          <a:p>
+            <a:pPr algn="ctr"/>
+          </a:p>
+        </p:txBody>
+      </p:sp>
+      <p:sp>
+        <p:nvSpPr>
+          <p:cNvPr id="41" name="Oval 40"/>
+          <p:cNvSpPr/>
+          <p:nvPr/>
+        </p:nvSpPr>
+        <p:spPr>
+          <a:xfrm>
+            <a:off x="2160000" y="11493750"/>
+            <a:ext cx="800000" cy="800000"/>
+          </a:xfrm>
+          <a:prstGeom prst="ellipse">
+            <a:avLst/>
+          </a:prstGeom>
+          <a:solidFill>
+            <a:srgbClr val="0055AA"/>
+          </a:solidFill>
+          <a:ln>
+            <a:noFill/>
+          </a:ln>
+        </p:spPr>
+        <p:style>
+          <a:lnRef idx="1">
+            <a:schemeClr val="accent1"/>
+          </a:lnRef>
+          <a:fillRef idx="3">
+            <a:schemeClr val="accent1"/>
+          </a:fillRef>
+          <a:effectRef idx="2">
+            <a:schemeClr val="accent1"/>
+          </a:effectRef>
+          <a:fontRef idx="minor">
+            <a:schemeClr val="lt1"/>
+          </a:fontRef>
+        </p:style>
+        <p:txBody>
+          <a:bodyPr rtlCol="0" anchor="ctr"/>
+          <a:lstStyle/>
+          <a:p>
+            <a:pPr algn="ctr"/>
+          </a:p>
+        </p:txBody>
+      </p:sp>
+      <p:sp>
+        <p:nvSpPr>
+          <p:cNvPr id="42" name="TextBox 41"/>
           <p:cNvSpPr txBox="1"/>
           <p:nvPr/>
         </p:nvSpPr>
         <p:spPr>
           <a:xfrm>
-            <a:off x="12680000" y="8560000"/>
-            <a:ext cx="500000" cy="1480000"/>
+            <a:off x="2160000" y="11493750"/>
+            <a:ext cx="800000" cy="800000"/>
           </a:xfrm>
           <a:prstGeom prst="rect">
             <a:avLst/>
@@ -7779,11 +7548,11 @@
           </a:bodyPr>
           <a:lstStyle/>
           <a:p>
-            <a:pPr algn="l"/>
-            <a:r>
-              <a:rPr sz="2400" b="1">
-                <a:solidFill>
-                  <a:srgbClr val="333333"/>
+            <a:pPr algn="ctr"/>
+            <a:r>
+              <a:rPr sz="2600" b="1">
+                <a:solidFill>
+                  <a:srgbClr val="FFFFFF"/>
                 </a:solidFill>
                 <a:latin typeface="Open Sans"/>
                 <a:ea typeface="Open Sans"/>
@@ -7796,14 +7565,14 @@
       </p:sp>
       <p:sp>
         <p:nvSpPr>
-          <p:cNvPr id="30" name="TextBox 29"/>
+          <p:cNvPr id="43" name="TextBox 42"/>
           <p:cNvSpPr txBox="1"/>
           <p:nvPr/>
         </p:nvSpPr>
         <p:spPr>
           <a:xfrm>
-            <a:off x="13200000" y="8580000"/>
-            <a:ext cx="10300000" cy="1440000"/>
+            <a:off x="3260000" y="11537500"/>
+            <a:ext cx="17000000" cy="712500"/>
           </a:xfrm>
           <a:prstGeom prst="rect">
             <a:avLst/>
@@ -7818,7 +7587,7 @@
           <a:p>
             <a:pPr algn="l"/>
             <a:r>
-              <a:rPr sz="2000" b="0">
+              <a:rPr sz="2800" b="0">
                 <a:solidFill>
                   <a:srgbClr val="333333"/>
                 </a:solidFill>
@@ -7826,7 +7595,7 @@
                 <a:ea typeface="Open Sans"/>
                 <a:cs typeface="Open Sans"/>
               </a:rPr>
-              <a:t>Положение, тепло, контроль, передача СМП</a:t>
+              <a:t>Положение, тепло, передача СМП</a:t>
             </a:r>
           </a:p>
         </p:txBody>
@@ -7894,57 +7663,14 @@
       </p:sp>
       <p:sp>
         <p:nvSpPr>
-          <p:cNvPr id="3" name="Rectangle 2"/>
-          <p:cNvSpPr/>
-          <p:nvPr/>
-        </p:nvSpPr>
-        <p:spPr>
-          <a:xfrm>
-            <a:off x="0" y="0"/>
-            <a:ext cx="24384000" cy="120000"/>
-          </a:xfrm>
-          <a:prstGeom prst="rect">
-            <a:avLst/>
-          </a:prstGeom>
-          <a:solidFill>
-            <a:srgbClr val="DDDDDD"/>
-          </a:solidFill>
-          <a:ln>
-            <a:noFill/>
-          </a:ln>
-        </p:spPr>
-        <p:style>
-          <a:lnRef idx="1">
-            <a:schemeClr val="accent1"/>
-          </a:lnRef>
-          <a:fillRef idx="3">
-            <a:schemeClr val="accent1"/>
-          </a:fillRef>
-          <a:effectRef idx="2">
-            <a:schemeClr val="accent1"/>
-          </a:effectRef>
-          <a:fontRef idx="minor">
-            <a:schemeClr val="lt1"/>
-          </a:fontRef>
-        </p:style>
-        <p:txBody>
-          <a:bodyPr rtlCol="0" anchor="ctr"/>
-          <a:lstStyle/>
-          <a:p>
-            <a:pPr algn="ctr"/>
-          </a:p>
-        </p:txBody>
-      </p:sp>
-      <p:sp>
-        <p:nvSpPr>
-          <p:cNvPr id="4" name="TextBox 3"/>
+          <p:cNvPr id="3" name="TextBox 2"/>
           <p:cNvSpPr txBox="1"/>
           <p:nvPr/>
         </p:nvSpPr>
         <p:spPr>
           <a:xfrm>
-            <a:off x="800000" y="350000"/>
-            <a:ext cx="22800000" cy="1000000"/>
+            <a:off x="360000" y="350000"/>
+            <a:ext cx="23664000" cy="1100000"/>
           </a:xfrm>
           <a:prstGeom prst="rect">
             <a:avLst/>
@@ -7967,21 +7693,21 @@
                 <a:ea typeface="Open Sans"/>
                 <a:cs typeface="Open Sans"/>
               </a:rPr>
-              <a:t>Оценка состояния пострадавшего</a:t>
-            </a:r>
-          </a:p>
-        </p:txBody>
-      </p:sp>
-      <p:sp>
-        <p:nvSpPr>
-          <p:cNvPr id="5" name="Rectangle 4"/>
+              <a:t>Приоритетность способов остановки</a:t>
+            </a:r>
+          </a:p>
+        </p:txBody>
+      </p:sp>
+      <p:sp>
+        <p:nvSpPr>
+          <p:cNvPr id="4" name="Rectangle 3"/>
           <p:cNvSpPr/>
           <p:nvPr/>
         </p:nvSpPr>
         <p:spPr>
           <a:xfrm>
-            <a:off x="800000" y="1450000"/>
-            <a:ext cx="22800000" cy="20000"/>
+            <a:off x="360000" y="1450000"/>
+            <a:ext cx="23664000" cy="20000"/>
           </a:xfrm>
           <a:prstGeom prst="rect">
             <a:avLst/>
@@ -8017,14 +7743,57 @@
       </p:sp>
       <p:sp>
         <p:nvSpPr>
+          <p:cNvPr id="5" name="Rounded Rectangle 4"/>
+          <p:cNvSpPr/>
+          <p:nvPr/>
+        </p:nvSpPr>
+        <p:spPr>
+          <a:xfrm>
+            <a:off x="360000" y="4100000"/>
+            <a:ext cx="7521333" cy="3200000"/>
+          </a:xfrm>
+          <a:prstGeom prst="roundRect">
+            <a:avLst/>
+          </a:prstGeom>
+          <a:solidFill>
+            <a:srgbClr val="0055AA"/>
+          </a:solidFill>
+          <a:ln>
+            <a:noFill/>
+          </a:ln>
+        </p:spPr>
+        <p:style>
+          <a:lnRef idx="1">
+            <a:schemeClr val="accent1"/>
+          </a:lnRef>
+          <a:fillRef idx="3">
+            <a:schemeClr val="accent1"/>
+          </a:fillRef>
+          <a:effectRef idx="2">
+            <a:schemeClr val="accent1"/>
+          </a:effectRef>
+          <a:fontRef idx="minor">
+            <a:schemeClr val="lt1"/>
+          </a:fontRef>
+        </p:style>
+        <p:txBody>
+          <a:bodyPr rtlCol="0" anchor="ctr"/>
+          <a:lstStyle/>
+          <a:p>
+            <a:pPr algn="ctr"/>
+          </a:p>
+        </p:txBody>
+      </p:sp>
+      <p:sp>
+        <p:nvSpPr>
           <p:cNvPr id="6" name="TextBox 5"/>
           <p:cNvSpPr txBox="1"/>
           <p:nvPr/>
         </p:nvSpPr>
         <p:spPr>
           <a:xfrm>
-            <a:off x="800000" y="1950000"/>
-            <a:ext cx="22800000" cy="8500000"/>
+            <a:off x="460000" y="4300000"/>
+            <a:ext cx="7321333" cy="600000"/>
           </a:xfrm>
           <a:prstGeom prst="rect">
             <a:avLst/>
@@ -8032,72 +7801,213 @@
           <a:noFill/>
         </p:spPr>
         <p:txBody>
-          <a:bodyPr wrap="square">
+          <a:bodyPr wrap="square" anchor="t">
             <a:spAutoFit/>
           </a:bodyPr>
           <a:lstStyle/>
           <a:p>
-            <a:pPr algn="l">
-              <a:spcAft>
-                <a:spcPts val="1000"/>
-              </a:spcAft>
-            </a:pPr>
-            <a:r>
-              <a:rPr sz="3200" b="0">
-                <a:solidFill>
-                  <a:srgbClr val="333333"/>
+            <a:pPr algn="ctr"/>
+            <a:r>
+              <a:rPr sz="2800" b="1">
+                <a:solidFill>
+                  <a:srgbClr val="FFFFFF"/>
                 </a:solidFill>
                 <a:latin typeface="Open Sans"/>
                 <a:ea typeface="Open Sans"/>
                 <a:cs typeface="Open Sans"/>
               </a:rPr>
-              <a:t>•  При массивном кровотечении сначала остановите кровь.</a:t>
-            </a:r>
-          </a:p>
-          <a:p>
-            <a:pPr algn="l">
-              <a:spcAft>
-                <a:spcPts val="1000"/>
-              </a:spcAft>
-            </a:pPr>
-            <a:r>
-              <a:rPr sz="3200" b="0">
-                <a:solidFill>
-                  <a:srgbClr val="333333"/>
+              <a:t>1</a:t>
+            </a:r>
+          </a:p>
+        </p:txBody>
+      </p:sp>
+      <p:sp>
+        <p:nvSpPr>
+          <p:cNvPr id="7" name="TextBox 6"/>
+          <p:cNvSpPr txBox="1"/>
+          <p:nvPr/>
+        </p:nvSpPr>
+        <p:spPr>
+          <a:xfrm>
+            <a:off x="510000" y="5100000"/>
+            <a:ext cx="7221333" cy="1900000"/>
+          </a:xfrm>
+          <a:prstGeom prst="rect">
+            <a:avLst/>
+          </a:prstGeom>
+          <a:noFill/>
+        </p:spPr>
+        <p:txBody>
+          <a:bodyPr wrap="square" anchor="t">
+            <a:spAutoFit/>
+          </a:bodyPr>
+          <a:lstStyle/>
+          <a:p>
+            <a:pPr algn="ctr"/>
+            <a:r>
+              <a:rPr sz="2400" b="0">
+                <a:solidFill>
+                  <a:srgbClr val="FFFFFF"/>
                 </a:solidFill>
                 <a:latin typeface="Open Sans"/>
                 <a:ea typeface="Open Sans"/>
                 <a:cs typeface="Open Sans"/>
               </a:rPr>
-              <a:t>•  Сознание: громко обратитесь, осторожно потрясите за плечи.</a:t>
-            </a:r>
-          </a:p>
-          <a:p>
-            <a:pPr algn="l">
-              <a:spcAft>
-                <a:spcPts val="1000"/>
-              </a:spcAft>
-            </a:pPr>
-            <a:r>
-              <a:rPr sz="3200" b="0">
-                <a:solidFill>
-                  <a:srgbClr val="333333"/>
+              <a:t>Прямое давление</a:t>
+            </a:r>
+          </a:p>
+        </p:txBody>
+      </p:sp>
+      <p:sp>
+        <p:nvSpPr>
+          <p:cNvPr id="8" name="Right Arrow 7"/>
+          <p:cNvSpPr/>
+          <p:nvPr/>
+        </p:nvSpPr>
+        <p:spPr>
+          <a:xfrm>
+            <a:off x="7981333" y="5550000"/>
+            <a:ext cx="350000" cy="300000"/>
+          </a:xfrm>
+          <a:prstGeom prst="rightArrow">
+            <a:avLst/>
+          </a:prstGeom>
+          <a:solidFill>
+            <a:srgbClr val="0055AA"/>
+          </a:solidFill>
+          <a:ln>
+            <a:noFill/>
+          </a:ln>
+        </p:spPr>
+        <p:style>
+          <a:lnRef idx="1">
+            <a:schemeClr val="accent1"/>
+          </a:lnRef>
+          <a:fillRef idx="3">
+            <a:schemeClr val="accent1"/>
+          </a:fillRef>
+          <a:effectRef idx="2">
+            <a:schemeClr val="accent1"/>
+          </a:effectRef>
+          <a:fontRef idx="minor">
+            <a:schemeClr val="lt1"/>
+          </a:fontRef>
+        </p:style>
+        <p:txBody>
+          <a:bodyPr rtlCol="0" anchor="ctr"/>
+          <a:lstStyle/>
+          <a:p>
+            <a:pPr algn="ctr"/>
+          </a:p>
+        </p:txBody>
+      </p:sp>
+      <p:sp>
+        <p:nvSpPr>
+          <p:cNvPr id="9" name="Rounded Rectangle 8"/>
+          <p:cNvSpPr/>
+          <p:nvPr/>
+        </p:nvSpPr>
+        <p:spPr>
+          <a:xfrm>
+            <a:off x="8431333" y="4100000"/>
+            <a:ext cx="7521333" cy="3200000"/>
+          </a:xfrm>
+          <a:prstGeom prst="roundRect">
+            <a:avLst/>
+          </a:prstGeom>
+          <a:solidFill>
+            <a:srgbClr val="F7F7F7"/>
+          </a:solidFill>
+          <a:ln w="15875">
+            <a:solidFill>
+              <a:srgbClr val="E1E1E1"/>
+            </a:solidFill>
+          </a:ln>
+        </p:spPr>
+        <p:style>
+          <a:lnRef idx="1">
+            <a:schemeClr val="accent1"/>
+          </a:lnRef>
+          <a:fillRef idx="3">
+            <a:schemeClr val="accent1"/>
+          </a:fillRef>
+          <a:effectRef idx="2">
+            <a:schemeClr val="accent1"/>
+          </a:effectRef>
+          <a:fontRef idx="minor">
+            <a:schemeClr val="lt1"/>
+          </a:fontRef>
+        </p:style>
+        <p:txBody>
+          <a:bodyPr rtlCol="0" anchor="ctr"/>
+          <a:lstStyle/>
+          <a:p>
+            <a:pPr algn="ctr"/>
+          </a:p>
+        </p:txBody>
+      </p:sp>
+      <p:sp>
+        <p:nvSpPr>
+          <p:cNvPr id="10" name="TextBox 9"/>
+          <p:cNvSpPr txBox="1"/>
+          <p:nvPr/>
+        </p:nvSpPr>
+        <p:spPr>
+          <a:xfrm>
+            <a:off x="8531333" y="4300000"/>
+            <a:ext cx="7321333" cy="600000"/>
+          </a:xfrm>
+          <a:prstGeom prst="rect">
+            <a:avLst/>
+          </a:prstGeom>
+          <a:noFill/>
+        </p:spPr>
+        <p:txBody>
+          <a:bodyPr wrap="square" anchor="t">
+            <a:spAutoFit/>
+          </a:bodyPr>
+          <a:lstStyle/>
+          <a:p>
+            <a:pPr algn="ctr"/>
+            <a:r>
+              <a:rPr sz="2800" b="1">
+                <a:solidFill>
+                  <a:srgbClr val="0055AA"/>
                 </a:solidFill>
                 <a:latin typeface="Open Sans"/>
                 <a:ea typeface="Open Sans"/>
                 <a:cs typeface="Open Sans"/>
               </a:rPr>
-              <a:t>•  Дыхание: смотрю–слушаю–ощущаю не более 10 секунд.</a:t>
-            </a:r>
-          </a:p>
-          <a:p>
-            <a:pPr algn="l">
-              <a:spcAft>
-                <a:spcPts val="1000"/>
-              </a:spcAft>
-            </a:pPr>
-            <a:r>
-              <a:rPr sz="3200" b="0">
+              <a:t>2</a:t>
+            </a:r>
+          </a:p>
+        </p:txBody>
+      </p:sp>
+      <p:sp>
+        <p:nvSpPr>
+          <p:cNvPr id="11" name="TextBox 10"/>
+          <p:cNvSpPr txBox="1"/>
+          <p:nvPr/>
+        </p:nvSpPr>
+        <p:spPr>
+          <a:xfrm>
+            <a:off x="8581333" y="5100000"/>
+            <a:ext cx="7221333" cy="1900000"/>
+          </a:xfrm>
+          <a:prstGeom prst="rect">
+            <a:avLst/>
+          </a:prstGeom>
+          <a:noFill/>
+        </p:spPr>
+        <p:txBody>
+          <a:bodyPr wrap="square" anchor="t">
+            <a:spAutoFit/>
+          </a:bodyPr>
+          <a:lstStyle/>
+          <a:p>
+            <a:pPr algn="ctr"/>
+            <a:r>
+              <a:rPr sz="2400" b="0">
                 <a:solidFill>
                   <a:srgbClr val="333333"/>
                 </a:solidFill>
@@ -8105,25 +8015,169 @@
                 <a:ea typeface="Open Sans"/>
                 <a:cs typeface="Open Sans"/>
               </a:rPr>
-              <a:t>•  При нескольких травмах — сначала то, что угрожает жизни сейчас.</a:t>
-            </a:r>
-          </a:p>
-          <a:p>
-            <a:pPr algn="l">
-              <a:spcAft>
-                <a:spcPts val="1000"/>
-              </a:spcAft>
-            </a:pPr>
-            <a:r>
-              <a:rPr sz="3200" b="0">
-                <a:solidFill>
-                  <a:srgbClr val="333333"/>
+              <a:t>Давящая повязка</a:t>
+            </a:r>
+          </a:p>
+        </p:txBody>
+      </p:sp>
+      <p:sp>
+        <p:nvSpPr>
+          <p:cNvPr id="12" name="Right Arrow 11"/>
+          <p:cNvSpPr/>
+          <p:nvPr/>
+        </p:nvSpPr>
+        <p:spPr>
+          <a:xfrm>
+            <a:off x="16052666" y="5550000"/>
+            <a:ext cx="350000" cy="300000"/>
+          </a:xfrm>
+          <a:prstGeom prst="rightArrow">
+            <a:avLst/>
+          </a:prstGeom>
+          <a:solidFill>
+            <a:srgbClr val="0055AA"/>
+          </a:solidFill>
+          <a:ln>
+            <a:noFill/>
+          </a:ln>
+        </p:spPr>
+        <p:style>
+          <a:lnRef idx="1">
+            <a:schemeClr val="accent1"/>
+          </a:lnRef>
+          <a:fillRef idx="3">
+            <a:schemeClr val="accent1"/>
+          </a:fillRef>
+          <a:effectRef idx="2">
+            <a:schemeClr val="accent1"/>
+          </a:effectRef>
+          <a:fontRef idx="minor">
+            <a:schemeClr val="lt1"/>
+          </a:fontRef>
+        </p:style>
+        <p:txBody>
+          <a:bodyPr rtlCol="0" anchor="ctr"/>
+          <a:lstStyle/>
+          <a:p>
+            <a:pPr algn="ctr"/>
+          </a:p>
+        </p:txBody>
+      </p:sp>
+      <p:sp>
+        <p:nvSpPr>
+          <p:cNvPr id="13" name="Rounded Rectangle 12"/>
+          <p:cNvSpPr/>
+          <p:nvPr/>
+        </p:nvSpPr>
+        <p:spPr>
+          <a:xfrm>
+            <a:off x="16502666" y="4100000"/>
+            <a:ext cx="7521333" cy="3200000"/>
+          </a:xfrm>
+          <a:prstGeom prst="roundRect">
+            <a:avLst/>
+          </a:prstGeom>
+          <a:solidFill>
+            <a:srgbClr val="F7F7F7"/>
+          </a:solidFill>
+          <a:ln w="15875">
+            <a:solidFill>
+              <a:srgbClr val="E1E1E1"/>
+            </a:solidFill>
+          </a:ln>
+        </p:spPr>
+        <p:style>
+          <a:lnRef idx="1">
+            <a:schemeClr val="accent1"/>
+          </a:lnRef>
+          <a:fillRef idx="3">
+            <a:schemeClr val="accent1"/>
+          </a:fillRef>
+          <a:effectRef idx="2">
+            <a:schemeClr val="accent1"/>
+          </a:effectRef>
+          <a:fontRef idx="minor">
+            <a:schemeClr val="lt1"/>
+          </a:fontRef>
+        </p:style>
+        <p:txBody>
+          <a:bodyPr rtlCol="0" anchor="ctr"/>
+          <a:lstStyle/>
+          <a:p>
+            <a:pPr algn="ctr"/>
+          </a:p>
+        </p:txBody>
+      </p:sp>
+      <p:sp>
+        <p:nvSpPr>
+          <p:cNvPr id="14" name="TextBox 13"/>
+          <p:cNvSpPr txBox="1"/>
+          <p:nvPr/>
+        </p:nvSpPr>
+        <p:spPr>
+          <a:xfrm>
+            <a:off x="16602666" y="4300000"/>
+            <a:ext cx="7321333" cy="600000"/>
+          </a:xfrm>
+          <a:prstGeom prst="rect">
+            <a:avLst/>
+          </a:prstGeom>
+          <a:noFill/>
+        </p:spPr>
+        <p:txBody>
+          <a:bodyPr wrap="square" anchor="t">
+            <a:spAutoFit/>
+          </a:bodyPr>
+          <a:lstStyle/>
+          <a:p>
+            <a:pPr algn="ctr"/>
+            <a:r>
+              <a:rPr sz="2800" b="1">
+                <a:solidFill>
+                  <a:srgbClr val="0055AA"/>
                 </a:solidFill>
                 <a:latin typeface="Open Sans"/>
                 <a:ea typeface="Open Sans"/>
                 <a:cs typeface="Open Sans"/>
               </a:rPr>
-              <a:t>•  Не тратьте время на второстепенные раны при угрожающем кровотечении.</a:t>
+              <a:t>3</a:t>
+            </a:r>
+          </a:p>
+        </p:txBody>
+      </p:sp>
+      <p:sp>
+        <p:nvSpPr>
+          <p:cNvPr id="15" name="TextBox 14"/>
+          <p:cNvSpPr txBox="1"/>
+          <p:nvPr/>
+        </p:nvSpPr>
+        <p:spPr>
+          <a:xfrm>
+            <a:off x="16652666" y="5100000"/>
+            <a:ext cx="7221333" cy="1900000"/>
+          </a:xfrm>
+          <a:prstGeom prst="rect">
+            <a:avLst/>
+          </a:prstGeom>
+          <a:noFill/>
+        </p:spPr>
+        <p:txBody>
+          <a:bodyPr wrap="square" anchor="t">
+            <a:spAutoFit/>
+          </a:bodyPr>
+          <a:lstStyle/>
+          <a:p>
+            <a:pPr algn="ctr"/>
+            <a:r>
+              <a:rPr sz="2400" b="0">
+                <a:solidFill>
+                  <a:srgbClr val="333333"/>
+                </a:solidFill>
+                <a:latin typeface="Open Sans"/>
+                <a:ea typeface="Open Sans"/>
+                <a:cs typeface="Open Sans"/>
+              </a:rPr>
+              <a:t>Жгут по показаниям</a:t>
             </a:r>
           </a:p>
         </p:txBody>
@@ -8191,57 +8245,14 @@
       </p:sp>
       <p:sp>
         <p:nvSpPr>
-          <p:cNvPr id="3" name="Rectangle 2"/>
-          <p:cNvSpPr/>
-          <p:nvPr/>
-        </p:nvSpPr>
-        <p:spPr>
-          <a:xfrm>
-            <a:off x="0" y="0"/>
-            <a:ext cx="24384000" cy="120000"/>
-          </a:xfrm>
-          <a:prstGeom prst="rect">
-            <a:avLst/>
-          </a:prstGeom>
-          <a:solidFill>
-            <a:srgbClr val="DDDDDD"/>
-          </a:solidFill>
-          <a:ln>
-            <a:noFill/>
-          </a:ln>
-        </p:spPr>
-        <p:style>
-          <a:lnRef idx="1">
-            <a:schemeClr val="accent1"/>
-          </a:lnRef>
-          <a:fillRef idx="3">
-            <a:schemeClr val="accent1"/>
-          </a:fillRef>
-          <a:effectRef idx="2">
-            <a:schemeClr val="accent1"/>
-          </a:effectRef>
-          <a:fontRef idx="minor">
-            <a:schemeClr val="lt1"/>
-          </a:fontRef>
-        </p:style>
-        <p:txBody>
-          <a:bodyPr rtlCol="0" anchor="ctr"/>
-          <a:lstStyle/>
-          <a:p>
-            <a:pPr algn="ctr"/>
-          </a:p>
-        </p:txBody>
-      </p:sp>
-      <p:sp>
-        <p:nvSpPr>
-          <p:cNvPr id="4" name="TextBox 3"/>
+          <p:cNvPr id="3" name="TextBox 2"/>
           <p:cNvSpPr txBox="1"/>
           <p:nvPr/>
         </p:nvSpPr>
         <p:spPr>
           <a:xfrm>
-            <a:off x="800000" y="350000"/>
-            <a:ext cx="22800000" cy="1000000"/>
+            <a:off x="360000" y="350000"/>
+            <a:ext cx="23664000" cy="1100000"/>
           </a:xfrm>
           <a:prstGeom prst="rect">
             <a:avLst/>
@@ -8264,21 +8275,21 @@
                 <a:ea typeface="Open Sans"/>
                 <a:cs typeface="Open Sans"/>
               </a:rPr>
-              <a:t>Приоритетность способов остановки</a:t>
-            </a:r>
-          </a:p>
-        </p:txBody>
-      </p:sp>
-      <p:sp>
-        <p:nvSpPr>
-          <p:cNvPr id="5" name="Rectangle 4"/>
+              <a:t>Оценка состояния пострадавшего</a:t>
+            </a:r>
+          </a:p>
+        </p:txBody>
+      </p:sp>
+      <p:sp>
+        <p:nvSpPr>
+          <p:cNvPr id="4" name="Rectangle 3"/>
           <p:cNvSpPr/>
           <p:nvPr/>
         </p:nvSpPr>
         <p:spPr>
           <a:xfrm>
-            <a:off x="800000" y="1450000"/>
-            <a:ext cx="22800000" cy="20000"/>
+            <a:off x="360000" y="1450000"/>
+            <a:ext cx="23664000" cy="20000"/>
           </a:xfrm>
           <a:prstGeom prst="rect">
             <a:avLst/>
@@ -8314,57 +8325,14 @@
       </p:sp>
       <p:sp>
         <p:nvSpPr>
-          <p:cNvPr id="6" name="Rounded Rectangle 5"/>
-          <p:cNvSpPr/>
-          <p:nvPr/>
-        </p:nvSpPr>
-        <p:spPr>
-          <a:xfrm>
-            <a:off x="1200000" y="4250000"/>
-            <a:ext cx="5000000" cy="3500000"/>
-          </a:xfrm>
-          <a:prstGeom prst="roundRect">
-            <a:avLst/>
-          </a:prstGeom>
-          <a:solidFill>
-            <a:srgbClr val="0055AA"/>
-          </a:solidFill>
-          <a:ln>
-            <a:noFill/>
-          </a:ln>
-        </p:spPr>
-        <p:style>
-          <a:lnRef idx="1">
-            <a:schemeClr val="accent1"/>
-          </a:lnRef>
-          <a:fillRef idx="3">
-            <a:schemeClr val="accent1"/>
-          </a:fillRef>
-          <a:effectRef idx="2">
-            <a:schemeClr val="accent1"/>
-          </a:effectRef>
-          <a:fontRef idx="minor">
-            <a:schemeClr val="lt1"/>
-          </a:fontRef>
-        </p:style>
-        <p:txBody>
-          <a:bodyPr rtlCol="0" anchor="ctr"/>
-          <a:lstStyle/>
-          <a:p>
-            <a:pPr algn="ctr"/>
-          </a:p>
-        </p:txBody>
-      </p:sp>
-      <p:sp>
-        <p:nvSpPr>
-          <p:cNvPr id="7" name="TextBox 6"/>
+          <p:cNvPr id="5" name="TextBox 4"/>
           <p:cNvSpPr txBox="1"/>
           <p:nvPr/>
         </p:nvSpPr>
         <p:spPr>
           <a:xfrm>
-            <a:off x="1200000" y="4450000"/>
-            <a:ext cx="5000000" cy="800000"/>
+            <a:off x="860000" y="2000000"/>
+            <a:ext cx="22664000" cy="7500000"/>
           </a:xfrm>
           <a:prstGeom prst="rect">
             <a:avLst/>
@@ -8372,175 +8340,54 @@
           <a:noFill/>
         </p:spPr>
         <p:txBody>
-          <a:bodyPr wrap="square" anchor="t">
+          <a:bodyPr wrap="square">
             <a:spAutoFit/>
           </a:bodyPr>
           <a:lstStyle/>
           <a:p>
-            <a:pPr algn="ctr"/>
-            <a:r>
-              <a:rPr sz="3200" b="1">
-                <a:solidFill>
-                  <a:srgbClr val="FFFFFF"/>
+            <a:pPr algn="l">
+              <a:spcAft>
+                <a:spcPts val="1400"/>
+              </a:spcAft>
+            </a:pPr>
+            <a:r>
+              <a:rPr sz="3200" b="0">
+                <a:solidFill>
+                  <a:srgbClr val="333333"/>
                 </a:solidFill>
                 <a:latin typeface="Open Sans"/>
                 <a:ea typeface="Open Sans"/>
                 <a:cs typeface="Open Sans"/>
               </a:rPr>
-              <a:t>1</a:t>
-            </a:r>
-          </a:p>
-        </p:txBody>
-      </p:sp>
-      <p:sp>
-        <p:nvSpPr>
-          <p:cNvPr id="8" name="TextBox 7"/>
-          <p:cNvSpPr txBox="1"/>
-          <p:nvPr/>
-        </p:nvSpPr>
-        <p:spPr>
-          <a:xfrm>
-            <a:off x="1400000" y="5350000"/>
-            <a:ext cx="4600000" cy="2000000"/>
-          </a:xfrm>
-          <a:prstGeom prst="rect">
-            <a:avLst/>
-          </a:prstGeom>
-          <a:noFill/>
-        </p:spPr>
-        <p:txBody>
-          <a:bodyPr wrap="square" anchor="t">
-            <a:spAutoFit/>
-          </a:bodyPr>
-          <a:lstStyle/>
-          <a:p>
-            <a:pPr algn="ctr"/>
-            <a:r>
-              <a:rPr sz="2600" b="1">
-                <a:solidFill>
-                  <a:srgbClr val="FFFFFF"/>
+              <a:t>•  При массивном кровотечении — сначала кровь</a:t>
+            </a:r>
+          </a:p>
+          <a:p>
+            <a:pPr algn="l">
+              <a:spcAft>
+                <a:spcPts val="1400"/>
+              </a:spcAft>
+            </a:pPr>
+            <a:r>
+              <a:rPr sz="3200" b="0">
+                <a:solidFill>
+                  <a:srgbClr val="333333"/>
                 </a:solidFill>
                 <a:latin typeface="Open Sans"/>
                 <a:ea typeface="Open Sans"/>
                 <a:cs typeface="Open Sans"/>
               </a:rPr>
-              <a:t>Прямое
-давление</a:t>
-            </a:r>
-          </a:p>
-        </p:txBody>
-      </p:sp>
-      <p:sp>
-        <p:nvSpPr>
-          <p:cNvPr id="9" name="Right Arrow 8"/>
-          <p:cNvSpPr/>
-          <p:nvPr/>
-        </p:nvSpPr>
-        <p:spPr>
-          <a:xfrm>
-            <a:off x="6400000" y="5750000"/>
-            <a:ext cx="400000" cy="250000"/>
-          </a:xfrm>
-          <a:prstGeom prst="rightArrow">
-            <a:avLst/>
-          </a:prstGeom>
-          <a:solidFill>
-            <a:srgbClr val="0055AA"/>
-          </a:solidFill>
-          <a:ln>
-            <a:noFill/>
-          </a:ln>
-        </p:spPr>
-        <p:style>
-          <a:lnRef idx="1">
-            <a:schemeClr val="accent1"/>
-          </a:lnRef>
-          <a:fillRef idx="3">
-            <a:schemeClr val="accent1"/>
-          </a:fillRef>
-          <a:effectRef idx="2">
-            <a:schemeClr val="accent1"/>
-          </a:effectRef>
-          <a:fontRef idx="minor">
-            <a:schemeClr val="lt1"/>
-          </a:fontRef>
-        </p:style>
-        <p:txBody>
-          <a:bodyPr rtlCol="0" anchor="ctr"/>
-          <a:lstStyle/>
-          <a:p>
-            <a:pPr algn="ctr"/>
-          </a:p>
-        </p:txBody>
-      </p:sp>
-      <p:sp>
-        <p:nvSpPr>
-          <p:cNvPr id="10" name="Rounded Rectangle 9"/>
-          <p:cNvSpPr/>
-          <p:nvPr/>
-        </p:nvSpPr>
-        <p:spPr>
-          <a:xfrm>
-            <a:off x="8200000" y="4250000"/>
-            <a:ext cx="5000000" cy="3500000"/>
-          </a:xfrm>
-          <a:prstGeom prst="roundRect">
-            <a:avLst/>
-          </a:prstGeom>
-          <a:solidFill>
-            <a:srgbClr val="DDDDDD"/>
-          </a:solidFill>
-          <a:ln>
-            <a:noFill/>
-          </a:ln>
-        </p:spPr>
-        <p:style>
-          <a:lnRef idx="1">
-            <a:schemeClr val="accent1"/>
-          </a:lnRef>
-          <a:fillRef idx="3">
-            <a:schemeClr val="accent1"/>
-          </a:fillRef>
-          <a:effectRef idx="2">
-            <a:schemeClr val="accent1"/>
-          </a:effectRef>
-          <a:fontRef idx="minor">
-            <a:schemeClr val="lt1"/>
-          </a:fontRef>
-        </p:style>
-        <p:txBody>
-          <a:bodyPr rtlCol="0" anchor="ctr"/>
-          <a:lstStyle/>
-          <a:p>
-            <a:pPr algn="ctr"/>
-          </a:p>
-        </p:txBody>
-      </p:sp>
-      <p:sp>
-        <p:nvSpPr>
-          <p:cNvPr id="11" name="TextBox 10"/>
-          <p:cNvSpPr txBox="1"/>
-          <p:nvPr/>
-        </p:nvSpPr>
-        <p:spPr>
-          <a:xfrm>
-            <a:off x="8200000" y="4450000"/>
-            <a:ext cx="5000000" cy="800000"/>
-          </a:xfrm>
-          <a:prstGeom prst="rect">
-            <a:avLst/>
-          </a:prstGeom>
-          <a:noFill/>
-        </p:spPr>
-        <p:txBody>
-          <a:bodyPr wrap="square" anchor="t">
-            <a:spAutoFit/>
-          </a:bodyPr>
-          <a:lstStyle/>
-          <a:p>
-            <a:pPr algn="ctr"/>
-            <a:r>
-              <a:rPr sz="3200" b="1">
+              <a:t>•  Сознание: обратитесь, потрясите за плечи</a:t>
+            </a:r>
+          </a:p>
+          <a:p>
+            <a:pPr algn="l">
+              <a:spcAft>
+                <a:spcPts val="1400"/>
+              </a:spcAft>
+            </a:pPr>
+            <a:r>
+              <a:rPr sz="3200" b="0">
                 <a:solidFill>
                   <a:srgbClr val="333333"/>
                 </a:solidFill>
@@ -8548,36 +8395,17 @@
                 <a:ea typeface="Open Sans"/>
                 <a:cs typeface="Open Sans"/>
               </a:rPr>
-              <a:t>2</a:t>
-            </a:r>
-          </a:p>
-        </p:txBody>
-      </p:sp>
-      <p:sp>
-        <p:nvSpPr>
-          <p:cNvPr id="12" name="TextBox 11"/>
-          <p:cNvSpPr txBox="1"/>
-          <p:nvPr/>
-        </p:nvSpPr>
-        <p:spPr>
-          <a:xfrm>
-            <a:off x="8400000" y="5350000"/>
-            <a:ext cx="4600000" cy="2000000"/>
-          </a:xfrm>
-          <a:prstGeom prst="rect">
-            <a:avLst/>
-          </a:prstGeom>
-          <a:noFill/>
-        </p:spPr>
-        <p:txBody>
-          <a:bodyPr wrap="square" anchor="t">
-            <a:spAutoFit/>
-          </a:bodyPr>
-          <a:lstStyle/>
-          <a:p>
-            <a:pPr algn="ctr"/>
-            <a:r>
-              <a:rPr sz="2600" b="1">
+              <a:t>•  Дыхание: смотрю–слушаю–ощущаю ≤10 с</a:t>
+            </a:r>
+          </a:p>
+          <a:p>
+            <a:pPr algn="l">
+              <a:spcAft>
+                <a:spcPts val="1400"/>
+              </a:spcAft>
+            </a:pPr>
+            <a:r>
+              <a:rPr sz="3200" b="0">
                 <a:solidFill>
                   <a:srgbClr val="333333"/>
                 </a:solidFill>
@@ -8585,206 +8413,7 @@
                 <a:ea typeface="Open Sans"/>
                 <a:cs typeface="Open Sans"/>
               </a:rPr>
-              <a:t>Давящая
-повязка</a:t>
-            </a:r>
-          </a:p>
-        </p:txBody>
-      </p:sp>
-      <p:sp>
-        <p:nvSpPr>
-          <p:cNvPr id="13" name="Right Arrow 12"/>
-          <p:cNvSpPr/>
-          <p:nvPr/>
-        </p:nvSpPr>
-        <p:spPr>
-          <a:xfrm>
-            <a:off x="13400000" y="5750000"/>
-            <a:ext cx="400000" cy="250000"/>
-          </a:xfrm>
-          <a:prstGeom prst="rightArrow">
-            <a:avLst/>
-          </a:prstGeom>
-          <a:solidFill>
-            <a:srgbClr val="0055AA"/>
-          </a:solidFill>
-          <a:ln>
-            <a:noFill/>
-          </a:ln>
-        </p:spPr>
-        <p:style>
-          <a:lnRef idx="1">
-            <a:schemeClr val="accent1"/>
-          </a:lnRef>
-          <a:fillRef idx="3">
-            <a:schemeClr val="accent1"/>
-          </a:fillRef>
-          <a:effectRef idx="2">
-            <a:schemeClr val="accent1"/>
-          </a:effectRef>
-          <a:fontRef idx="minor">
-            <a:schemeClr val="lt1"/>
-          </a:fontRef>
-        </p:style>
-        <p:txBody>
-          <a:bodyPr rtlCol="0" anchor="ctr"/>
-          <a:lstStyle/>
-          <a:p>
-            <a:pPr algn="ctr"/>
-          </a:p>
-        </p:txBody>
-      </p:sp>
-      <p:sp>
-        <p:nvSpPr>
-          <p:cNvPr id="14" name="Rounded Rectangle 13"/>
-          <p:cNvSpPr/>
-          <p:nvPr/>
-        </p:nvSpPr>
-        <p:spPr>
-          <a:xfrm>
-            <a:off x="15200000" y="4250000"/>
-            <a:ext cx="5000000" cy="3500000"/>
-          </a:xfrm>
-          <a:prstGeom prst="roundRect">
-            <a:avLst/>
-          </a:prstGeom>
-          <a:solidFill>
-            <a:srgbClr val="DDDDDD"/>
-          </a:solidFill>
-          <a:ln>
-            <a:noFill/>
-          </a:ln>
-        </p:spPr>
-        <p:style>
-          <a:lnRef idx="1">
-            <a:schemeClr val="accent1"/>
-          </a:lnRef>
-          <a:fillRef idx="3">
-            <a:schemeClr val="accent1"/>
-          </a:fillRef>
-          <a:effectRef idx="2">
-            <a:schemeClr val="accent1"/>
-          </a:effectRef>
-          <a:fontRef idx="minor">
-            <a:schemeClr val="lt1"/>
-          </a:fontRef>
-        </p:style>
-        <p:txBody>
-          <a:bodyPr rtlCol="0" anchor="ctr"/>
-          <a:lstStyle/>
-          <a:p>
-            <a:pPr algn="ctr"/>
-          </a:p>
-        </p:txBody>
-      </p:sp>
-      <p:sp>
-        <p:nvSpPr>
-          <p:cNvPr id="15" name="TextBox 14"/>
-          <p:cNvSpPr txBox="1"/>
-          <p:nvPr/>
-        </p:nvSpPr>
-        <p:spPr>
-          <a:xfrm>
-            <a:off x="15200000" y="4450000"/>
-            <a:ext cx="5000000" cy="800000"/>
-          </a:xfrm>
-          <a:prstGeom prst="rect">
-            <a:avLst/>
-          </a:prstGeom>
-          <a:noFill/>
-        </p:spPr>
-        <p:txBody>
-          <a:bodyPr wrap="square" anchor="t">
-            <a:spAutoFit/>
-          </a:bodyPr>
-          <a:lstStyle/>
-          <a:p>
-            <a:pPr algn="ctr"/>
-            <a:r>
-              <a:rPr sz="3200" b="1">
-                <a:solidFill>
-                  <a:srgbClr val="333333"/>
-                </a:solidFill>
-                <a:latin typeface="Open Sans"/>
-                <a:ea typeface="Open Sans"/>
-                <a:cs typeface="Open Sans"/>
-              </a:rPr>
-              <a:t>3</a:t>
-            </a:r>
-          </a:p>
-        </p:txBody>
-      </p:sp>
-      <p:sp>
-        <p:nvSpPr>
-          <p:cNvPr id="16" name="TextBox 15"/>
-          <p:cNvSpPr txBox="1"/>
-          <p:nvPr/>
-        </p:nvSpPr>
-        <p:spPr>
-          <a:xfrm>
-            <a:off x="15400000" y="5350000"/>
-            <a:ext cx="4600000" cy="2000000"/>
-          </a:xfrm>
-          <a:prstGeom prst="rect">
-            <a:avLst/>
-          </a:prstGeom>
-          <a:noFill/>
-        </p:spPr>
-        <p:txBody>
-          <a:bodyPr wrap="square" anchor="t">
-            <a:spAutoFit/>
-          </a:bodyPr>
-          <a:lstStyle/>
-          <a:p>
-            <a:pPr algn="ctr"/>
-            <a:r>
-              <a:rPr sz="2600" b="1">
-                <a:solidFill>
-                  <a:srgbClr val="333333"/>
-                </a:solidFill>
-                <a:latin typeface="Open Sans"/>
-                <a:ea typeface="Open Sans"/>
-                <a:cs typeface="Open Sans"/>
-              </a:rPr>
-              <a:t>Жгут
-по показаниям</a:t>
-            </a:r>
-          </a:p>
-        </p:txBody>
-      </p:sp>
-      <p:sp>
-        <p:nvSpPr>
-          <p:cNvPr id="17" name="TextBox 16"/>
-          <p:cNvSpPr txBox="1"/>
-          <p:nvPr/>
-        </p:nvSpPr>
-        <p:spPr>
-          <a:xfrm>
-            <a:off x="800000" y="11000000"/>
-            <a:ext cx="22800000" cy="1500000"/>
-          </a:xfrm>
-          <a:prstGeom prst="rect">
-            <a:avLst/>
-          </a:prstGeom>
-          <a:noFill/>
-        </p:spPr>
-        <p:txBody>
-          <a:bodyPr wrap="square" anchor="t">
-            <a:spAutoFit/>
-          </a:bodyPr>
-          <a:lstStyle/>
-          <a:p>
-            <a:pPr algn="l"/>
-            <a:r>
-              <a:rPr sz="2400" b="0">
-                <a:solidFill>
-                  <a:srgbClr val="333333"/>
-                </a:solidFill>
-                <a:latin typeface="Open Sans"/>
-                <a:ea typeface="Open Sans"/>
-                <a:cs typeface="Open Sans"/>
-              </a:rPr>
-              <a:t>Дополнительно (по учебным программам): пальцевое прижатие, максимальное сгибание.</a:t>
+              <a:t>•  Сначала то, что угрожает жизни сейчас</a:t>
             </a:r>
           </a:p>
         </p:txBody>
@@ -8852,57 +8481,14 @@
       </p:sp>
       <p:sp>
         <p:nvSpPr>
-          <p:cNvPr id="3" name="Rectangle 2"/>
-          <p:cNvSpPr/>
-          <p:nvPr/>
-        </p:nvSpPr>
-        <p:spPr>
-          <a:xfrm>
-            <a:off x="0" y="0"/>
-            <a:ext cx="24384000" cy="120000"/>
-          </a:xfrm>
-          <a:prstGeom prst="rect">
-            <a:avLst/>
-          </a:prstGeom>
-          <a:solidFill>
-            <a:srgbClr val="DDDDDD"/>
-          </a:solidFill>
-          <a:ln>
-            <a:noFill/>
-          </a:ln>
-        </p:spPr>
-        <p:style>
-          <a:lnRef idx="1">
-            <a:schemeClr val="accent1"/>
-          </a:lnRef>
-          <a:fillRef idx="3">
-            <a:schemeClr val="accent1"/>
-          </a:fillRef>
-          <a:effectRef idx="2">
-            <a:schemeClr val="accent1"/>
-          </a:effectRef>
-          <a:fontRef idx="minor">
-            <a:schemeClr val="lt1"/>
-          </a:fontRef>
-        </p:style>
-        <p:txBody>
-          <a:bodyPr rtlCol="0" anchor="ctr"/>
-          <a:lstStyle/>
-          <a:p>
-            <a:pPr algn="ctr"/>
-          </a:p>
-        </p:txBody>
-      </p:sp>
-      <p:sp>
-        <p:nvSpPr>
-          <p:cNvPr id="4" name="TextBox 3"/>
+          <p:cNvPr id="3" name="TextBox 2"/>
           <p:cNvSpPr txBox="1"/>
           <p:nvPr/>
         </p:nvSpPr>
         <p:spPr>
           <a:xfrm>
-            <a:off x="800000" y="350000"/>
-            <a:ext cx="22800000" cy="1000000"/>
+            <a:off x="360000" y="350000"/>
+            <a:ext cx="23664000" cy="1100000"/>
           </a:xfrm>
           <a:prstGeom prst="rect">
             <a:avLst/>
@@ -8932,14 +8518,14 @@
       </p:sp>
       <p:sp>
         <p:nvSpPr>
-          <p:cNvPr id="5" name="Rectangle 4"/>
+          <p:cNvPr id="4" name="Rectangle 3"/>
           <p:cNvSpPr/>
           <p:nvPr/>
         </p:nvSpPr>
         <p:spPr>
           <a:xfrm>
-            <a:off x="800000" y="1450000"/>
-            <a:ext cx="22800000" cy="20000"/>
+            <a:off x="360000" y="1450000"/>
+            <a:ext cx="23664000" cy="20000"/>
           </a:xfrm>
           <a:prstGeom prst="rect">
             <a:avLst/>
@@ -8975,14 +8561,14 @@
       </p:sp>
       <p:sp>
         <p:nvSpPr>
-          <p:cNvPr id="6" name="TextBox 5"/>
+          <p:cNvPr id="5" name="TextBox 4"/>
           <p:cNvSpPr txBox="1"/>
           <p:nvPr/>
         </p:nvSpPr>
         <p:spPr>
           <a:xfrm>
-            <a:off x="800000" y="1950000"/>
-            <a:ext cx="22800000" cy="8500000"/>
+            <a:off x="860000" y="2000000"/>
+            <a:ext cx="22664000" cy="7500000"/>
           </a:xfrm>
           <a:prstGeom prst="rect">
             <a:avLst/>
@@ -8997,7 +8583,7 @@
           <a:p>
             <a:pPr algn="l">
               <a:spcAft>
-                <a:spcPts val="1000"/>
+                <a:spcPts val="1400"/>
               </a:spcAft>
             </a:pPr>
             <a:r>
@@ -9009,13 +8595,13 @@
                 <a:ea typeface="Open Sans"/>
                 <a:cs typeface="Open Sans"/>
               </a:rPr>
-              <a:t>•  Сначала — угрожающее жизни кровотечение.</a:t>
+              <a:t>•  Угрожающее жизни кровотечение</a:t>
             </a:r>
           </a:p>
           <a:p>
             <a:pPr algn="l">
               <a:spcAft>
-                <a:spcPts val="1000"/>
+                <a:spcPts val="1400"/>
               </a:spcAft>
             </a:pPr>
             <a:r>
@@ -9027,13 +8613,13 @@
                 <a:ea typeface="Open Sans"/>
                 <a:cs typeface="Open Sans"/>
               </a:rPr>
-              <a:t>•  Затем — проходимость дыхательных путей и дыхание / СЛР.</a:t>
+              <a:t>•  Дыхательные пути и дыхание / СЛР</a:t>
             </a:r>
           </a:p>
           <a:p>
             <a:pPr algn="l">
               <a:spcAft>
-                <a:spcPts val="1000"/>
+                <a:spcPts val="1400"/>
               </a:spcAft>
             </a:pPr>
             <a:r>
@@ -9045,13 +8631,13 @@
                 <a:ea typeface="Open Sans"/>
                 <a:cs typeface="Open Sans"/>
               </a:rPr>
-              <a:t>•  Затем — остальные кровотечения и раны.</a:t>
+              <a:t>•  Остальные кровотечения и раны</a:t>
             </a:r>
           </a:p>
           <a:p>
             <a:pPr algn="l">
               <a:spcAft>
-                <a:spcPts val="1000"/>
+                <a:spcPts val="1400"/>
               </a:spcAft>
             </a:pPr>
             <a:r>
@@ -9063,13 +8649,13 @@
                 <a:ea typeface="Open Sans"/>
                 <a:cs typeface="Open Sans"/>
               </a:rPr>
-              <a:t>•  Затем — иммобилизация, повязки, оптимальное положение.</a:t>
+              <a:t>•  Иммобилизация и положение</a:t>
             </a:r>
           </a:p>
           <a:p>
             <a:pPr algn="l">
               <a:spcAft>
-                <a:spcPts val="1000"/>
+                <a:spcPts val="1400"/>
               </a:spcAft>
             </a:pPr>
             <a:r>
@@ -9081,7 +8667,7 @@
                 <a:ea typeface="Open Sans"/>
                 <a:cs typeface="Open Sans"/>
               </a:rPr>
-              <a:t>•  При нескольких пострадавших — приоритет детям и массивным кровотечениям.</a:t>
+              <a:t>•  При нескольких пострадавших — дети и массивные кровотечения</a:t>
             </a:r>
           </a:p>
         </p:txBody>
@@ -9149,57 +8735,14 @@
       </p:sp>
       <p:sp>
         <p:nvSpPr>
-          <p:cNvPr id="3" name="Rectangle 2"/>
-          <p:cNvSpPr/>
-          <p:nvPr/>
-        </p:nvSpPr>
-        <p:spPr>
-          <a:xfrm>
-            <a:off x="0" y="0"/>
-            <a:ext cx="24384000" cy="120000"/>
-          </a:xfrm>
-          <a:prstGeom prst="rect">
-            <a:avLst/>
-          </a:prstGeom>
-          <a:solidFill>
-            <a:srgbClr val="DDDDDD"/>
-          </a:solidFill>
-          <a:ln>
-            <a:noFill/>
-          </a:ln>
-        </p:spPr>
-        <p:style>
-          <a:lnRef idx="1">
-            <a:schemeClr val="accent1"/>
-          </a:lnRef>
-          <a:fillRef idx="3">
-            <a:schemeClr val="accent1"/>
-          </a:fillRef>
-          <a:effectRef idx="2">
-            <a:schemeClr val="accent1"/>
-          </a:effectRef>
-          <a:fontRef idx="minor">
-            <a:schemeClr val="lt1"/>
-          </a:fontRef>
-        </p:style>
-        <p:txBody>
-          <a:bodyPr rtlCol="0" anchor="ctr"/>
-          <a:lstStyle/>
-          <a:p>
-            <a:pPr algn="ctr"/>
-          </a:p>
-        </p:txBody>
-      </p:sp>
-      <p:sp>
-        <p:nvSpPr>
-          <p:cNvPr id="4" name="TextBox 3"/>
+          <p:cNvPr id="3" name="TextBox 2"/>
           <p:cNvSpPr txBox="1"/>
           <p:nvPr/>
         </p:nvSpPr>
         <p:spPr>
           <a:xfrm>
-            <a:off x="800000" y="350000"/>
-            <a:ext cx="22800000" cy="1000000"/>
+            <a:off x="360000" y="350000"/>
+            <a:ext cx="23664000" cy="1100000"/>
           </a:xfrm>
           <a:prstGeom prst="rect">
             <a:avLst/>
@@ -9222,21 +8765,21 @@
                 <a:ea typeface="Open Sans"/>
                 <a:cs typeface="Open Sans"/>
               </a:rPr>
-              <a:t>Травматический шок: понятие и признаки</a:t>
-            </a:r>
-          </a:p>
-        </p:txBody>
-      </p:sp>
-      <p:sp>
-        <p:nvSpPr>
-          <p:cNvPr id="5" name="Rectangle 4"/>
+              <a:t>Травматический шок — признаки</a:t>
+            </a:r>
+          </a:p>
+        </p:txBody>
+      </p:sp>
+      <p:sp>
+        <p:nvSpPr>
+          <p:cNvPr id="4" name="Rectangle 3"/>
           <p:cNvSpPr/>
           <p:nvPr/>
         </p:nvSpPr>
         <p:spPr>
           <a:xfrm>
-            <a:off x="800000" y="1450000"/>
-            <a:ext cx="22800000" cy="20000"/>
+            <a:off x="360000" y="1450000"/>
+            <a:ext cx="23664000" cy="20000"/>
           </a:xfrm>
           <a:prstGeom prst="rect">
             <a:avLst/>
@@ -9272,14 +8815,57 @@
       </p:sp>
       <p:sp>
         <p:nvSpPr>
+          <p:cNvPr id="5" name="Rounded Rectangle 4"/>
+          <p:cNvSpPr/>
+          <p:nvPr/>
+        </p:nvSpPr>
+        <p:spPr>
+          <a:xfrm>
+            <a:off x="360000" y="1900000"/>
+            <a:ext cx="900000" cy="900000"/>
+          </a:xfrm>
+          <a:prstGeom prst="roundRect">
+            <a:avLst/>
+          </a:prstGeom>
+          <a:solidFill>
+            <a:srgbClr val="0055AA"/>
+          </a:solidFill>
+          <a:ln>
+            <a:noFill/>
+          </a:ln>
+        </p:spPr>
+        <p:style>
+          <a:lnRef idx="1">
+            <a:schemeClr val="accent1"/>
+          </a:lnRef>
+          <a:fillRef idx="3">
+            <a:schemeClr val="accent1"/>
+          </a:fillRef>
+          <a:effectRef idx="2">
+            <a:schemeClr val="accent1"/>
+          </a:effectRef>
+          <a:fontRef idx="minor">
+            <a:schemeClr val="lt1"/>
+          </a:fontRef>
+        </p:style>
+        <p:txBody>
+          <a:bodyPr rtlCol="0" anchor="ctr"/>
+          <a:lstStyle/>
+          <a:p>
+            <a:pPr algn="ctr"/>
+          </a:p>
+        </p:txBody>
+      </p:sp>
+      <p:sp>
+        <p:nvSpPr>
           <p:cNvPr id="6" name="TextBox 5"/>
           <p:cNvSpPr txBox="1"/>
           <p:nvPr/>
         </p:nvSpPr>
         <p:spPr>
           <a:xfrm>
-            <a:off x="800000" y="1950000"/>
-            <a:ext cx="22800000" cy="8500000"/>
+            <a:off x="360000" y="1900000"/>
+            <a:ext cx="900000" cy="900000"/>
           </a:xfrm>
           <a:prstGeom prst="rect">
             <a:avLst/>
@@ -9287,34 +8873,49 @@
           <a:noFill/>
         </p:spPr>
         <p:txBody>
-          <a:bodyPr wrap="square">
+          <a:bodyPr wrap="square" anchor="ctr">
             <a:spAutoFit/>
           </a:bodyPr>
           <a:lstStyle/>
           <a:p>
-            <a:pPr algn="l">
-              <a:spcAft>
-                <a:spcPts val="1000"/>
-              </a:spcAft>
-            </a:pPr>
-            <a:r>
-              <a:rPr sz="3200" b="0">
-                <a:solidFill>
-                  <a:srgbClr val="333333"/>
+            <a:pPr algn="ctr"/>
+            <a:r>
+              <a:rPr sz="2200" b="1">
+                <a:solidFill>
+                  <a:srgbClr val="FFFFFF"/>
                 </a:solidFill>
                 <a:latin typeface="Open Sans"/>
                 <a:ea typeface="Open Sans"/>
                 <a:cs typeface="Open Sans"/>
               </a:rPr>
-              <a:t>•  Причины: тяжёлые травмы и сильные кровотечения.</a:t>
-            </a:r>
-          </a:p>
-          <a:p>
-            <a:pPr algn="l">
-              <a:spcAft>
-                <a:spcPts val="1000"/>
-              </a:spcAft>
-            </a:pPr>
+              <a:t>!</a:t>
+            </a:r>
+          </a:p>
+        </p:txBody>
+      </p:sp>
+      <p:sp>
+        <p:nvSpPr>
+          <p:cNvPr id="7" name="TextBox 6"/>
+          <p:cNvSpPr txBox="1"/>
+          <p:nvPr/>
+        </p:nvSpPr>
+        <p:spPr>
+          <a:xfrm>
+            <a:off x="1560000" y="1900000"/>
+            <a:ext cx="22464000" cy="900000"/>
+          </a:xfrm>
+          <a:prstGeom prst="rect">
+            <a:avLst/>
+          </a:prstGeom>
+          <a:noFill/>
+        </p:spPr>
+        <p:txBody>
+          <a:bodyPr wrap="square" anchor="ctr">
+            <a:spAutoFit/>
+          </a:bodyPr>
+          <a:lstStyle/>
+          <a:p>
+            <a:pPr algn="l"/>
             <a:r>
               <a:rPr sz="3200" b="0">
                 <a:solidFill>
@@ -9324,33 +8925,114 @@
                 <a:ea typeface="Open Sans"/>
                 <a:cs typeface="Open Sans"/>
               </a:rPr>
-              <a:t>•  Наличие тяжёлой травмы и сильного кровотечения.</a:t>
-            </a:r>
-          </a:p>
-          <a:p>
-            <a:pPr algn="l">
-              <a:spcAft>
-                <a:spcPts val="1000"/>
-              </a:spcAft>
-            </a:pPr>
-            <a:r>
-              <a:rPr sz="3200" b="0">
-                <a:solidFill>
-                  <a:srgbClr val="333333"/>
+              <a:t>Тяжёлая травма и сильное кровотечение</a:t>
+            </a:r>
+          </a:p>
+        </p:txBody>
+      </p:sp>
+      <p:sp>
+        <p:nvSpPr>
+          <p:cNvPr id="8" name="Rounded Rectangle 7"/>
+          <p:cNvSpPr/>
+          <p:nvPr/>
+        </p:nvSpPr>
+        <p:spPr>
+          <a:xfrm>
+            <a:off x="360000" y="3500000"/>
+            <a:ext cx="900000" cy="900000"/>
+          </a:xfrm>
+          <a:prstGeom prst="roundRect">
+            <a:avLst/>
+          </a:prstGeom>
+          <a:solidFill>
+            <a:srgbClr val="0055AA"/>
+          </a:solidFill>
+          <a:ln>
+            <a:noFill/>
+          </a:ln>
+        </p:spPr>
+        <p:style>
+          <a:lnRef idx="1">
+            <a:schemeClr val="accent1"/>
+          </a:lnRef>
+          <a:fillRef idx="3">
+            <a:schemeClr val="accent1"/>
+          </a:fillRef>
+          <a:effectRef idx="2">
+            <a:schemeClr val="accent1"/>
+          </a:effectRef>
+          <a:fontRef idx="minor">
+            <a:schemeClr val="lt1"/>
+          </a:fontRef>
+        </p:style>
+        <p:txBody>
+          <a:bodyPr rtlCol="0" anchor="ctr"/>
+          <a:lstStyle/>
+          <a:p>
+            <a:pPr algn="ctr"/>
+          </a:p>
+        </p:txBody>
+      </p:sp>
+      <p:sp>
+        <p:nvSpPr>
+          <p:cNvPr id="9" name="TextBox 8"/>
+          <p:cNvSpPr txBox="1"/>
+          <p:nvPr/>
+        </p:nvSpPr>
+        <p:spPr>
+          <a:xfrm>
+            <a:off x="360000" y="3500000"/>
+            <a:ext cx="900000" cy="900000"/>
+          </a:xfrm>
+          <a:prstGeom prst="rect">
+            <a:avLst/>
+          </a:prstGeom>
+          <a:noFill/>
+        </p:spPr>
+        <p:txBody>
+          <a:bodyPr wrap="square" anchor="ctr">
+            <a:spAutoFit/>
+          </a:bodyPr>
+          <a:lstStyle/>
+          <a:p>
+            <a:pPr algn="ctr"/>
+            <a:r>
+              <a:rPr sz="2200" b="1">
+                <a:solidFill>
+                  <a:srgbClr val="FFFFFF"/>
                 </a:solidFill>
                 <a:latin typeface="Open Sans"/>
                 <a:ea typeface="Open Sans"/>
                 <a:cs typeface="Open Sans"/>
               </a:rPr>
-              <a:t>•  Нарушения дыхания и кровообращения (учащение).</a:t>
-            </a:r>
-          </a:p>
-          <a:p>
-            <a:pPr algn="l">
-              <a:spcAft>
-                <a:spcPts val="1000"/>
-              </a:spcAft>
-            </a:pPr>
+              <a:t>2</a:t>
+            </a:r>
+          </a:p>
+        </p:txBody>
+      </p:sp>
+      <p:sp>
+        <p:nvSpPr>
+          <p:cNvPr id="10" name="TextBox 9"/>
+          <p:cNvSpPr txBox="1"/>
+          <p:nvPr/>
+        </p:nvSpPr>
+        <p:spPr>
+          <a:xfrm>
+            <a:off x="1560000" y="3500000"/>
+            <a:ext cx="22464000" cy="900000"/>
+          </a:xfrm>
+          <a:prstGeom prst="rect">
+            <a:avLst/>
+          </a:prstGeom>
+          <a:noFill/>
+        </p:spPr>
+        <p:txBody>
+          <a:bodyPr wrap="square" anchor="ctr">
+            <a:spAutoFit/>
+          </a:bodyPr>
+          <a:lstStyle/>
+          <a:p>
+            <a:pPr algn="l"/>
             <a:r>
               <a:rPr sz="3200" b="0">
                 <a:solidFill>
@@ -9360,25 +9042,241 @@
                 <a:ea typeface="Open Sans"/>
                 <a:cs typeface="Open Sans"/>
               </a:rPr>
-              <a:t>•  Бледная холодная влажная кожа.</a:t>
-            </a:r>
-          </a:p>
-          <a:p>
-            <a:pPr algn="l">
-              <a:spcAft>
-                <a:spcPts val="1000"/>
-              </a:spcAft>
-            </a:pPr>
-            <a:r>
-              <a:rPr sz="3200" b="0">
-                <a:solidFill>
-                  <a:srgbClr val="333333"/>
+              <a:t>Учащённое дыхание и сердцебиение</a:t>
+            </a:r>
+          </a:p>
+        </p:txBody>
+      </p:sp>
+      <p:sp>
+        <p:nvSpPr>
+          <p:cNvPr id="11" name="Rounded Rectangle 10"/>
+          <p:cNvSpPr/>
+          <p:nvPr/>
+        </p:nvSpPr>
+        <p:spPr>
+          <a:xfrm>
+            <a:off x="360000" y="5100000"/>
+            <a:ext cx="900000" cy="900000"/>
+          </a:xfrm>
+          <a:prstGeom prst="roundRect">
+            <a:avLst/>
+          </a:prstGeom>
+          <a:solidFill>
+            <a:srgbClr val="0055AA"/>
+          </a:solidFill>
+          <a:ln>
+            <a:noFill/>
+          </a:ln>
+        </p:spPr>
+        <p:style>
+          <a:lnRef idx="1">
+            <a:schemeClr val="accent1"/>
+          </a:lnRef>
+          <a:fillRef idx="3">
+            <a:schemeClr val="accent1"/>
+          </a:fillRef>
+          <a:effectRef idx="2">
+            <a:schemeClr val="accent1"/>
+          </a:effectRef>
+          <a:fontRef idx="minor">
+            <a:schemeClr val="lt1"/>
+          </a:fontRef>
+        </p:style>
+        <p:txBody>
+          <a:bodyPr rtlCol="0" anchor="ctr"/>
+          <a:lstStyle/>
+          <a:p>
+            <a:pPr algn="ctr"/>
+          </a:p>
+        </p:txBody>
+      </p:sp>
+      <p:sp>
+        <p:nvSpPr>
+          <p:cNvPr id="12" name="TextBox 11"/>
+          <p:cNvSpPr txBox="1"/>
+          <p:nvPr/>
+        </p:nvSpPr>
+        <p:spPr>
+          <a:xfrm>
+            <a:off x="360000" y="5100000"/>
+            <a:ext cx="900000" cy="900000"/>
+          </a:xfrm>
+          <a:prstGeom prst="rect">
+            <a:avLst/>
+          </a:prstGeom>
+          <a:noFill/>
+        </p:spPr>
+        <p:txBody>
+          <a:bodyPr wrap="square" anchor="ctr">
+            <a:spAutoFit/>
+          </a:bodyPr>
+          <a:lstStyle/>
+          <a:p>
+            <a:pPr algn="ctr"/>
+            <a:r>
+              <a:rPr sz="2200" b="1">
+                <a:solidFill>
+                  <a:srgbClr val="FFFFFF"/>
                 </a:solidFill>
                 <a:latin typeface="Open Sans"/>
                 <a:ea typeface="Open Sans"/>
                 <a:cs typeface="Open Sans"/>
               </a:rPr>
-              <a:t>•  Возбуждение, сменяющееся апатией.</a:t>
+              <a:t>•</a:t>
+            </a:r>
+          </a:p>
+        </p:txBody>
+      </p:sp>
+      <p:sp>
+        <p:nvSpPr>
+          <p:cNvPr id="13" name="TextBox 12"/>
+          <p:cNvSpPr txBox="1"/>
+          <p:nvPr/>
+        </p:nvSpPr>
+        <p:spPr>
+          <a:xfrm>
+            <a:off x="1560000" y="5100000"/>
+            <a:ext cx="22464000" cy="900000"/>
+          </a:xfrm>
+          <a:prstGeom prst="rect">
+            <a:avLst/>
+          </a:prstGeom>
+          <a:noFill/>
+        </p:spPr>
+        <p:txBody>
+          <a:bodyPr wrap="square" anchor="ctr">
+            <a:spAutoFit/>
+          </a:bodyPr>
+          <a:lstStyle/>
+          <a:p>
+            <a:pPr algn="l"/>
+            <a:r>
+              <a:rPr sz="3200" b="0">
+                <a:solidFill>
+                  <a:srgbClr val="333333"/>
+                </a:solidFill>
+                <a:latin typeface="Open Sans"/>
+                <a:ea typeface="Open Sans"/>
+                <a:cs typeface="Open Sans"/>
+              </a:rPr>
+              <a:t>Бледная холодная влажная кожа</a:t>
+            </a:r>
+          </a:p>
+        </p:txBody>
+      </p:sp>
+      <p:sp>
+        <p:nvSpPr>
+          <p:cNvPr id="14" name="Rounded Rectangle 13"/>
+          <p:cNvSpPr/>
+          <p:nvPr/>
+        </p:nvSpPr>
+        <p:spPr>
+          <a:xfrm>
+            <a:off x="360000" y="6700000"/>
+            <a:ext cx="900000" cy="900000"/>
+          </a:xfrm>
+          <a:prstGeom prst="roundRect">
+            <a:avLst/>
+          </a:prstGeom>
+          <a:solidFill>
+            <a:srgbClr val="0055AA"/>
+          </a:solidFill>
+          <a:ln>
+            <a:noFill/>
+          </a:ln>
+        </p:spPr>
+        <p:style>
+          <a:lnRef idx="1">
+            <a:schemeClr val="accent1"/>
+          </a:lnRef>
+          <a:fillRef idx="3">
+            <a:schemeClr val="accent1"/>
+          </a:fillRef>
+          <a:effectRef idx="2">
+            <a:schemeClr val="accent1"/>
+          </a:effectRef>
+          <a:fontRef idx="minor">
+            <a:schemeClr val="lt1"/>
+          </a:fontRef>
+        </p:style>
+        <p:txBody>
+          <a:bodyPr rtlCol="0" anchor="ctr"/>
+          <a:lstStyle/>
+          <a:p>
+            <a:pPr algn="ctr"/>
+          </a:p>
+        </p:txBody>
+      </p:sp>
+      <p:sp>
+        <p:nvSpPr>
+          <p:cNvPr id="15" name="TextBox 14"/>
+          <p:cNvSpPr txBox="1"/>
+          <p:nvPr/>
+        </p:nvSpPr>
+        <p:spPr>
+          <a:xfrm>
+            <a:off x="360000" y="6700000"/>
+            <a:ext cx="900000" cy="900000"/>
+          </a:xfrm>
+          <a:prstGeom prst="rect">
+            <a:avLst/>
+          </a:prstGeom>
+          <a:noFill/>
+        </p:spPr>
+        <p:txBody>
+          <a:bodyPr wrap="square" anchor="ctr">
+            <a:spAutoFit/>
+          </a:bodyPr>
+          <a:lstStyle/>
+          <a:p>
+            <a:pPr algn="ctr"/>
+            <a:r>
+              <a:rPr sz="2200" b="1">
+                <a:solidFill>
+                  <a:srgbClr val="FFFFFF"/>
+                </a:solidFill>
+                <a:latin typeface="Open Sans"/>
+                <a:ea typeface="Open Sans"/>
+                <a:cs typeface="Open Sans"/>
+              </a:rPr>
+              <a:t>4</a:t>
+            </a:r>
+          </a:p>
+        </p:txBody>
+      </p:sp>
+      <p:sp>
+        <p:nvSpPr>
+          <p:cNvPr id="16" name="TextBox 15"/>
+          <p:cNvSpPr txBox="1"/>
+          <p:nvPr/>
+        </p:nvSpPr>
+        <p:spPr>
+          <a:xfrm>
+            <a:off x="1560000" y="6700000"/>
+            <a:ext cx="22464000" cy="900000"/>
+          </a:xfrm>
+          <a:prstGeom prst="rect">
+            <a:avLst/>
+          </a:prstGeom>
+          <a:noFill/>
+        </p:spPr>
+        <p:txBody>
+          <a:bodyPr wrap="square" anchor="ctr">
+            <a:spAutoFit/>
+          </a:bodyPr>
+          <a:lstStyle/>
+          <a:p>
+            <a:pPr algn="l"/>
+            <a:r>
+              <a:rPr sz="3200" b="0">
+                <a:solidFill>
+                  <a:srgbClr val="333333"/>
+                </a:solidFill>
+                <a:latin typeface="Open Sans"/>
+                <a:ea typeface="Open Sans"/>
+                <a:cs typeface="Open Sans"/>
+              </a:rPr>
+              <a:t>Возбуждение → апатия</a:t>
             </a:r>
           </a:p>
         </p:txBody>
@@ -9446,57 +9344,14 @@
       </p:sp>
       <p:sp>
         <p:nvSpPr>
-          <p:cNvPr id="3" name="Rectangle 2"/>
-          <p:cNvSpPr/>
-          <p:nvPr/>
-        </p:nvSpPr>
-        <p:spPr>
-          <a:xfrm>
-            <a:off x="0" y="0"/>
-            <a:ext cx="24384000" cy="120000"/>
-          </a:xfrm>
-          <a:prstGeom prst="rect">
-            <a:avLst/>
-          </a:prstGeom>
-          <a:solidFill>
-            <a:srgbClr val="DDDDDD"/>
-          </a:solidFill>
-          <a:ln>
-            <a:noFill/>
-          </a:ln>
-        </p:spPr>
-        <p:style>
-          <a:lnRef idx="1">
-            <a:schemeClr val="accent1"/>
-          </a:lnRef>
-          <a:fillRef idx="3">
-            <a:schemeClr val="accent1"/>
-          </a:fillRef>
-          <a:effectRef idx="2">
-            <a:schemeClr val="accent1"/>
-          </a:effectRef>
-          <a:fontRef idx="minor">
-            <a:schemeClr val="lt1"/>
-          </a:fontRef>
-        </p:style>
-        <p:txBody>
-          <a:bodyPr rtlCol="0" anchor="ctr"/>
-          <a:lstStyle/>
-          <a:p>
-            <a:pPr algn="ctr"/>
-          </a:p>
-        </p:txBody>
-      </p:sp>
-      <p:sp>
-        <p:nvSpPr>
-          <p:cNvPr id="4" name="TextBox 3"/>
+          <p:cNvPr id="3" name="TextBox 2"/>
           <p:cNvSpPr txBox="1"/>
           <p:nvPr/>
         </p:nvSpPr>
         <p:spPr>
           <a:xfrm>
-            <a:off x="800000" y="350000"/>
-            <a:ext cx="22800000" cy="1000000"/>
+            <a:off x="360000" y="350000"/>
+            <a:ext cx="23664000" cy="1100000"/>
           </a:xfrm>
           <a:prstGeom prst="rect">
             <a:avLst/>
@@ -9526,14 +9381,14 @@
       </p:sp>
       <p:sp>
         <p:nvSpPr>
-          <p:cNvPr id="5" name="Rectangle 4"/>
+          <p:cNvPr id="4" name="Rectangle 3"/>
           <p:cNvSpPr/>
           <p:nvPr/>
         </p:nvSpPr>
         <p:spPr>
           <a:xfrm>
-            <a:off x="800000" y="1450000"/>
-            <a:ext cx="22800000" cy="20000"/>
+            <a:off x="360000" y="1450000"/>
+            <a:ext cx="23664000" cy="20000"/>
           </a:xfrm>
           <a:prstGeom prst="rect">
             <a:avLst/>
@@ -9569,14 +9424,14 @@
       </p:sp>
       <p:sp>
         <p:nvSpPr>
-          <p:cNvPr id="6" name="TextBox 5"/>
+          <p:cNvPr id="5" name="TextBox 4"/>
           <p:cNvSpPr txBox="1"/>
           <p:nvPr/>
         </p:nvSpPr>
         <p:spPr>
           <a:xfrm>
-            <a:off x="800000" y="1950000"/>
-            <a:ext cx="12000000" cy="7500000"/>
+            <a:off x="360000" y="1900000"/>
+            <a:ext cx="13015200" cy="8000000"/>
           </a:xfrm>
           <a:prstGeom prst="rect">
             <a:avLst/>
@@ -9591,7 +9446,7 @@
           <a:p>
             <a:pPr algn="l">
               <a:spcAft>
-                <a:spcPts val="1000"/>
+                <a:spcPts val="1400"/>
               </a:spcAft>
             </a:pPr>
             <a:r>
@@ -9603,13 +9458,13 @@
                 <a:ea typeface="Open Sans"/>
                 <a:cs typeface="Open Sans"/>
               </a:rPr>
-              <a:t>•  Остановить кровотечение как можно раньше.</a:t>
+              <a:t>•  Остановить кровотечение</a:t>
             </a:r>
           </a:p>
           <a:p>
             <a:pPr algn="l">
               <a:spcAft>
-                <a:spcPts val="1000"/>
+                <a:spcPts val="1400"/>
               </a:spcAft>
             </a:pPr>
             <a:r>
@@ -9621,13 +9476,13 @@
                 <a:ea typeface="Open Sans"/>
                 <a:cs typeface="Open Sans"/>
               </a:rPr>
-              <a:t>•  Придать оптимальное положение тела.</a:t>
+              <a:t>•  Оптимальное положение тела</a:t>
             </a:r>
           </a:p>
           <a:p>
             <a:pPr algn="l">
               <a:spcAft>
-                <a:spcPts val="1000"/>
+                <a:spcPts val="1400"/>
               </a:spcAft>
             </a:pPr>
             <a:r>
@@ -9639,13 +9494,13 @@
                 <a:ea typeface="Open Sans"/>
                 <a:cs typeface="Open Sans"/>
               </a:rPr>
-              <a:t>•  Иммобилизировать повреждённые конечности.</a:t>
+              <a:t>•  Иммобилизация конечностей</a:t>
             </a:r>
           </a:p>
           <a:p>
             <a:pPr algn="l">
               <a:spcAft>
-                <a:spcPts val="1000"/>
+                <a:spcPts val="1400"/>
               </a:spcAft>
             </a:pPr>
             <a:r>
@@ -9657,13 +9512,13 @@
                 <a:ea typeface="Open Sans"/>
                 <a:cs typeface="Open Sans"/>
               </a:rPr>
-              <a:t>•  Защитить от переохлаждения.</a:t>
+              <a:t>•  Защита от переохлаждения</a:t>
             </a:r>
           </a:p>
           <a:p>
             <a:pPr algn="l">
               <a:spcAft>
-                <a:spcPts val="1000"/>
+                <a:spcPts val="1400"/>
               </a:spcAft>
             </a:pPr>
             <a:r>
@@ -9675,39 +9530,21 @@
                 <a:ea typeface="Open Sans"/>
                 <a:cs typeface="Open Sans"/>
               </a:rPr>
-              <a:t>•  Не давать есть и пить при тяжёлой травме.</a:t>
-            </a:r>
-          </a:p>
-          <a:p>
-            <a:pPr algn="l">
-              <a:spcAft>
-                <a:spcPts val="1000"/>
-              </a:spcAft>
-            </a:pPr>
-            <a:r>
-              <a:rPr sz="2800" b="0">
-                <a:solidFill>
-                  <a:srgbClr val="333333"/>
-                </a:solidFill>
-                <a:latin typeface="Open Sans"/>
-                <a:ea typeface="Open Sans"/>
-                <a:cs typeface="Open Sans"/>
-              </a:rPr>
-              <a:t>•  Покой, поддержка, контроль сознания и дыхания.</a:t>
-            </a:r>
-          </a:p>
-        </p:txBody>
-      </p:sp>
-      <p:sp>
-        <p:nvSpPr>
-          <p:cNvPr id="7" name="Rectangle 6"/>
+              <a:t>•  Не кормить и не поить</a:t>
+            </a:r>
+          </a:p>
+        </p:txBody>
+      </p:sp>
+      <p:sp>
+        <p:nvSpPr>
+          <p:cNvPr id="6" name="Rectangle 5"/>
           <p:cNvSpPr/>
           <p:nvPr/>
         </p:nvSpPr>
         <p:spPr>
           <a:xfrm>
-            <a:off x="13500000" y="1950000"/>
-            <a:ext cx="10000000" cy="8500000"/>
+            <a:off x="13775200" y="1900000"/>
+            <a:ext cx="9465600" cy="8000000"/>
           </a:xfrm>
           <a:prstGeom prst="rect">
             <a:avLst/>
@@ -9715,7 +9552,7 @@
           <a:solidFill>
             <a:srgbClr val="FFFFFF"/>
           </a:solidFill>
-          <a:ln w="12700">
+          <a:ln w="15875">
             <a:solidFill>
               <a:srgbClr val="E1E1E1"/>
             </a:solidFill>
@@ -9745,7 +9582,7 @@
       </p:sp>
       <p:pic>
         <p:nvPicPr>
-          <p:cNvPr id="8" name="Picture 7" descr="shock_prev.png"/>
+          <p:cNvPr id="7" name="Picture 6" descr="shock_prev.png"/>
           <p:cNvPicPr>
             <a:picLocks noChangeAspect="1"/>
           </p:cNvPicPr>
@@ -9759,8 +9596,8 @@
         </p:blipFill>
         <p:spPr>
           <a:xfrm>
-            <a:off x="13650000" y="2205882"/>
-            <a:ext cx="9700000" cy="7988235"/>
+            <a:off x="13875200" y="2084753"/>
+            <a:ext cx="9265600" cy="7630494"/>
           </a:xfrm>
           <a:prstGeom prst="rect">
             <a:avLst/>
@@ -9830,57 +9667,14 @@
       </p:sp>
       <p:sp>
         <p:nvSpPr>
-          <p:cNvPr id="3" name="Rectangle 2"/>
-          <p:cNvSpPr/>
-          <p:nvPr/>
-        </p:nvSpPr>
-        <p:spPr>
-          <a:xfrm>
-            <a:off x="0" y="0"/>
-            <a:ext cx="24384000" cy="120000"/>
-          </a:xfrm>
-          <a:prstGeom prst="rect">
-            <a:avLst/>
-          </a:prstGeom>
-          <a:solidFill>
-            <a:srgbClr val="DDDDDD"/>
-          </a:solidFill>
-          <a:ln>
-            <a:noFill/>
-          </a:ln>
-        </p:spPr>
-        <p:style>
-          <a:lnRef idx="1">
-            <a:schemeClr val="accent1"/>
-          </a:lnRef>
-          <a:fillRef idx="3">
-            <a:schemeClr val="accent1"/>
-          </a:fillRef>
-          <a:effectRef idx="2">
-            <a:schemeClr val="accent1"/>
-          </a:effectRef>
-          <a:fontRef idx="minor">
-            <a:schemeClr val="lt1"/>
-          </a:fontRef>
-        </p:style>
-        <p:txBody>
-          <a:bodyPr rtlCol="0" anchor="ctr"/>
-          <a:lstStyle/>
-          <a:p>
-            <a:pPr algn="ctr"/>
-          </a:p>
-        </p:txBody>
-      </p:sp>
-      <p:sp>
-        <p:nvSpPr>
-          <p:cNvPr id="4" name="TextBox 3"/>
+          <p:cNvPr id="3" name="TextBox 2"/>
           <p:cNvSpPr txBox="1"/>
           <p:nvPr/>
         </p:nvSpPr>
         <p:spPr>
           <a:xfrm>
-            <a:off x="800000" y="350000"/>
-            <a:ext cx="22800000" cy="1000000"/>
+            <a:off x="360000" y="350000"/>
+            <a:ext cx="23664000" cy="1100000"/>
           </a:xfrm>
           <a:prstGeom prst="rect">
             <a:avLst/>
@@ -9903,21 +9697,21 @@
                 <a:ea typeface="Open Sans"/>
                 <a:cs typeface="Open Sans"/>
               </a:rPr>
-              <a:t>Подробный осмотр — голова, шея, грудь</a:t>
-            </a:r>
-          </a:p>
-        </p:txBody>
-      </p:sp>
-      <p:sp>
-        <p:nvSpPr>
-          <p:cNvPr id="5" name="Rectangle 4"/>
+              <a:t>Подробный осмотр — часть 1</a:t>
+            </a:r>
+          </a:p>
+        </p:txBody>
+      </p:sp>
+      <p:sp>
+        <p:nvSpPr>
+          <p:cNvPr id="4" name="Rectangle 3"/>
           <p:cNvSpPr/>
           <p:nvPr/>
         </p:nvSpPr>
         <p:spPr>
           <a:xfrm>
-            <a:off x="800000" y="1450000"/>
-            <a:ext cx="22800000" cy="20000"/>
+            <a:off x="360000" y="1450000"/>
+            <a:ext cx="23664000" cy="20000"/>
           </a:xfrm>
           <a:prstGeom prst="rect">
             <a:avLst/>
@@ -9953,14 +9747,14 @@
       </p:sp>
       <p:sp>
         <p:nvSpPr>
-          <p:cNvPr id="6" name="Rectangle 5"/>
+          <p:cNvPr id="5" name="Rectangle 4"/>
           <p:cNvSpPr/>
           <p:nvPr/>
         </p:nvSpPr>
         <p:spPr>
           <a:xfrm>
-            <a:off x="800000" y="1900000"/>
-            <a:ext cx="7433333" cy="10500000"/>
+            <a:off x="360000" y="1900000"/>
+            <a:ext cx="7721333" cy="9000000"/>
           </a:xfrm>
           <a:prstGeom prst="rect">
             <a:avLst/>
@@ -9968,7 +9762,7 @@
           <a:solidFill>
             <a:srgbClr val="FFFFFF"/>
           </a:solidFill>
-          <a:ln w="12700">
+          <a:ln w="15875">
             <a:solidFill>
               <a:srgbClr val="E1E1E1"/>
             </a:solidFill>
@@ -9998,7 +9792,7 @@
       </p:sp>
       <p:pic>
         <p:nvPicPr>
-          <p:cNvPr id="7" name="Picture 6" descr="exam_head.png"/>
+          <p:cNvPr id="6" name="Picture 5" descr="exam_head.png"/>
           <p:cNvPicPr>
             <a:picLocks noChangeAspect="1"/>
           </p:cNvPicPr>
@@ -10012,8 +9806,8 @@
         </p:blipFill>
         <p:spPr>
           <a:xfrm>
-            <a:off x="1994598" y="2000000"/>
-            <a:ext cx="5044137" cy="6359999"/>
+            <a:off x="1920666" y="2000000"/>
+            <a:ext cx="4600000" cy="5800000"/>
           </a:xfrm>
           <a:prstGeom prst="rect">
             <a:avLst/>
@@ -10022,14 +9816,14 @@
       </p:pic>
       <p:sp>
         <p:nvSpPr>
-          <p:cNvPr id="8" name="TextBox 7"/>
+          <p:cNvPr id="7" name="TextBox 6"/>
           <p:cNvSpPr txBox="1"/>
           <p:nvPr/>
         </p:nvSpPr>
         <p:spPr>
           <a:xfrm>
-            <a:off x="950000" y="8410000"/>
-            <a:ext cx="7133333" cy="3890000"/>
+            <a:off x="510000" y="7900000"/>
+            <a:ext cx="7421333" cy="2900000"/>
           </a:xfrm>
           <a:prstGeom prst="rect">
             <a:avLst/>
@@ -10042,9 +9836,9 @@
           </a:bodyPr>
           <a:lstStyle/>
           <a:p>
-            <a:pPr algn="l"/>
-            <a:r>
-              <a:rPr sz="2200" b="0">
+            <a:pPr algn="ctr"/>
+            <a:r>
+              <a:rPr sz="2000" b="0">
                 <a:solidFill>
                   <a:srgbClr val="333333"/>
                 </a:solidFill>
@@ -10052,21 +9846,21 @@
                 <a:ea typeface="Open Sans"/>
                 <a:cs typeface="Open Sans"/>
               </a:rPr>
-              <a:t>Шаг 1. Осмотр головы</a:t>
-            </a:r>
-          </a:p>
-        </p:txBody>
-      </p:sp>
-      <p:sp>
-        <p:nvSpPr>
-          <p:cNvPr id="9" name="Rectangle 8"/>
+              <a:t>1. Голова</a:t>
+            </a:r>
+          </a:p>
+        </p:txBody>
+      </p:sp>
+      <p:sp>
+        <p:nvSpPr>
+          <p:cNvPr id="8" name="Rectangle 7"/>
           <p:cNvSpPr/>
           <p:nvPr/>
         </p:nvSpPr>
         <p:spPr>
           <a:xfrm>
-            <a:off x="8483333" y="1900000"/>
-            <a:ext cx="7433333" cy="10500000"/>
+            <a:off x="8331333" y="1900000"/>
+            <a:ext cx="7721333" cy="9000000"/>
           </a:xfrm>
           <a:prstGeom prst="rect">
             <a:avLst/>
@@ -10074,7 +9868,7 @@
           <a:solidFill>
             <a:srgbClr val="FFFFFF"/>
           </a:solidFill>
-          <a:ln w="12700">
+          <a:ln w="15875">
             <a:solidFill>
               <a:srgbClr val="E1E1E1"/>
             </a:solidFill>
@@ -10104,7 +9898,7 @@
       </p:sp>
       <p:pic>
         <p:nvPicPr>
-          <p:cNvPr id="10" name="Picture 9" descr="exam_neck.png"/>
+          <p:cNvPr id="9" name="Picture 8" descr="exam_neck.png"/>
           <p:cNvPicPr>
             <a:picLocks noChangeAspect="1"/>
           </p:cNvPicPr>
@@ -10118,8 +9912,8 @@
         </p:blipFill>
         <p:spPr>
           <a:xfrm>
-            <a:off x="9677931" y="2000000"/>
-            <a:ext cx="5044137" cy="6359999"/>
+            <a:off x="9891999" y="2000000"/>
+            <a:ext cx="4600000" cy="5800000"/>
           </a:xfrm>
           <a:prstGeom prst="rect">
             <a:avLst/>
@@ -10128,14 +9922,14 @@
       </p:pic>
       <p:sp>
         <p:nvSpPr>
-          <p:cNvPr id="11" name="TextBox 10"/>
+          <p:cNvPr id="10" name="TextBox 9"/>
           <p:cNvSpPr txBox="1"/>
           <p:nvPr/>
         </p:nvSpPr>
         <p:spPr>
           <a:xfrm>
-            <a:off x="8633333" y="8410000"/>
-            <a:ext cx="7133333" cy="3890000"/>
+            <a:off x="8481333" y="7900000"/>
+            <a:ext cx="7421333" cy="2900000"/>
           </a:xfrm>
           <a:prstGeom prst="rect">
             <a:avLst/>
@@ -10148,9 +9942,9 @@
           </a:bodyPr>
           <a:lstStyle/>
           <a:p>
-            <a:pPr algn="l"/>
-            <a:r>
-              <a:rPr sz="2200" b="0">
+            <a:pPr algn="ctr"/>
+            <a:r>
+              <a:rPr sz="2000" b="0">
                 <a:solidFill>
                   <a:srgbClr val="333333"/>
                 </a:solidFill>
@@ -10158,21 +9952,21 @@
                 <a:ea typeface="Open Sans"/>
                 <a:cs typeface="Open Sans"/>
               </a:rPr>
-              <a:t>Шаг 2. Осмотр шеи</a:t>
-            </a:r>
-          </a:p>
-        </p:txBody>
-      </p:sp>
-      <p:sp>
-        <p:nvSpPr>
-          <p:cNvPr id="12" name="Rectangle 11"/>
+              <a:t>2. Шея</a:t>
+            </a:r>
+          </a:p>
+        </p:txBody>
+      </p:sp>
+      <p:sp>
+        <p:nvSpPr>
+          <p:cNvPr id="11" name="Rectangle 10"/>
           <p:cNvSpPr/>
           <p:nvPr/>
         </p:nvSpPr>
         <p:spPr>
           <a:xfrm>
-            <a:off x="16166666" y="1900000"/>
-            <a:ext cx="7433333" cy="10500000"/>
+            <a:off x="16302666" y="1900000"/>
+            <a:ext cx="7721333" cy="9000000"/>
           </a:xfrm>
           <a:prstGeom prst="rect">
             <a:avLst/>
@@ -10180,7 +9974,7 @@
           <a:solidFill>
             <a:srgbClr val="FFFFFF"/>
           </a:solidFill>
-          <a:ln w="12700">
+          <a:ln w="15875">
             <a:solidFill>
               <a:srgbClr val="E1E1E1"/>
             </a:solidFill>
@@ -10210,7 +10004,7 @@
       </p:sp>
       <p:pic>
         <p:nvPicPr>
-          <p:cNvPr id="13" name="Picture 12" descr="exam_chest.png"/>
+          <p:cNvPr id="12" name="Picture 11" descr="exam_chest.png"/>
           <p:cNvPicPr>
             <a:picLocks noChangeAspect="1"/>
           </p:cNvPicPr>
@@ -10224,8 +10018,8 @@
         </p:blipFill>
         <p:spPr>
           <a:xfrm>
-            <a:off x="17361264" y="2000000"/>
-            <a:ext cx="5044137" cy="6359999"/>
+            <a:off x="17863332" y="2000000"/>
+            <a:ext cx="4600000" cy="5800000"/>
           </a:xfrm>
           <a:prstGeom prst="rect">
             <a:avLst/>
@@ -10234,14 +10028,14 @@
       </p:pic>
       <p:sp>
         <p:nvSpPr>
-          <p:cNvPr id="14" name="TextBox 13"/>
+          <p:cNvPr id="13" name="TextBox 12"/>
           <p:cNvSpPr txBox="1"/>
           <p:nvPr/>
         </p:nvSpPr>
         <p:spPr>
           <a:xfrm>
-            <a:off x="16316666" y="8410000"/>
-            <a:ext cx="7133333" cy="3890000"/>
+            <a:off x="16452666" y="7900000"/>
+            <a:ext cx="7421333" cy="2900000"/>
           </a:xfrm>
           <a:prstGeom prst="rect">
             <a:avLst/>
@@ -10254,9 +10048,9 @@
           </a:bodyPr>
           <a:lstStyle/>
           <a:p>
-            <a:pPr algn="l"/>
-            <a:r>
-              <a:rPr sz="2200" b="0">
+            <a:pPr algn="ctr"/>
+            <a:r>
+              <a:rPr sz="2000" b="0">
                 <a:solidFill>
                   <a:srgbClr val="333333"/>
                 </a:solidFill>
@@ -10264,7 +10058,7 @@
                 <a:ea typeface="Open Sans"/>
                 <a:cs typeface="Open Sans"/>
               </a:rPr>
-              <a:t>Шаг 3. Осмотр груди</a:t>
+              <a:t>3. Грудь</a:t>
             </a:r>
           </a:p>
         </p:txBody>

--- a/tema2_bleeding/Последовательность_остановки_кровотечения.pptx
+++ b/tema2_bleeding/Последовательность_остановки_кровотечения.pptx
@@ -3116,7 +3116,7 @@
             <a:avLst/>
           </a:prstGeom>
           <a:solidFill>
-            <a:srgbClr val="FFFFFF"/>
+            <a:srgbClr val="F2F2F2"/>
           </a:solidFill>
           <a:ln>
             <a:noFill/>
@@ -3152,8 +3152,8 @@
         </p:nvSpPr>
         <p:spPr>
           <a:xfrm>
-            <a:off x="0" y="4200000"/>
-            <a:ext cx="4000000" cy="2800000"/>
+            <a:off x="17500000" y="0"/>
+            <a:ext cx="6884000" cy="13716000"/>
           </a:xfrm>
           <a:prstGeom prst="rect">
             <a:avLst/>
@@ -3195,8 +3195,8 @@
         </p:nvSpPr>
         <p:spPr>
           <a:xfrm>
-            <a:off x="23000000" y="0"/>
-            <a:ext cx="1384000" cy="13716000"/>
+            <a:off x="0" y="4500000"/>
+            <a:ext cx="4500000" cy="2800000"/>
           </a:xfrm>
           <a:prstGeom prst="rect">
             <a:avLst/>
@@ -3238,8 +3238,8 @@
         </p:nvSpPr>
         <p:spPr>
           <a:xfrm>
-            <a:off x="700000" y="4800000"/>
-            <a:ext cx="21000000" cy="1800000"/>
+            <a:off x="700000" y="5000000"/>
+            <a:ext cx="16500000" cy="1600000"/>
           </a:xfrm>
           <a:prstGeom prst="rect">
             <a:avLst/>
@@ -3254,7 +3254,7 @@
           <a:p>
             <a:pPr algn="l"/>
             <a:r>
-              <a:rPr sz="3600" b="1">
+              <a:rPr sz="3400" b="1">
                 <a:solidFill>
                   <a:srgbClr val="333333"/>
                 </a:solidFill>
@@ -3277,7 +3277,7 @@
         <p:spPr>
           <a:xfrm>
             <a:off x="700000" y="6800000"/>
-            <a:ext cx="14000000" cy="25000"/>
+            <a:ext cx="14000000" cy="35000"/>
           </a:xfrm>
           <a:prstGeom prst="rect">
             <a:avLst/>
@@ -3380,8 +3380,8 @@
         </p:nvSpPr>
         <p:spPr>
           <a:xfrm>
-            <a:off x="700000" y="300000"/>
-            <a:ext cx="22000000" cy="900000"/>
+            <a:off x="700000" y="280000"/>
+            <a:ext cx="22000000" cy="850000"/>
           </a:xfrm>
           <a:prstGeom prst="rect">
             <a:avLst/>
@@ -3396,7 +3396,7 @@
           <a:p>
             <a:pPr algn="l"/>
             <a:r>
-              <a:rPr sz="3200" b="1">
+              <a:rPr sz="3000" b="1">
                 <a:solidFill>
                   <a:srgbClr val="333333"/>
                 </a:solidFill>
@@ -3417,14 +3417,14 @@
         </p:nvSpPr>
         <p:spPr>
           <a:xfrm>
-            <a:off x="700000" y="1250000"/>
-            <a:ext cx="22000000" cy="20000"/>
+            <a:off x="700000" y="1150000"/>
+            <a:ext cx="16000000" cy="35000"/>
           </a:xfrm>
           <a:prstGeom prst="rect">
             <a:avLst/>
           </a:prstGeom>
           <a:solidFill>
-            <a:srgbClr val="E1E1E1"/>
+            <a:srgbClr val="555555"/>
           </a:solidFill>
           <a:ln>
             <a:noFill/>
@@ -3460,7 +3460,7 @@
         </p:nvSpPr>
         <p:spPr>
           <a:xfrm>
-            <a:off x="700000" y="1350000"/>
+            <a:off x="700000" y="1250000"/>
             <a:ext cx="22000000" cy="450000"/>
           </a:xfrm>
           <a:prstGeom prst="rect">
@@ -3476,7 +3476,7 @@
           <a:p>
             <a:pPr algn="l"/>
             <a:r>
-              <a:rPr sz="1600" b="0">
+              <a:rPr sz="1400" b="0">
                 <a:solidFill>
                   <a:srgbClr val="666666"/>
                 </a:solidFill>
@@ -3587,8 +3587,8 @@
         </p:blipFill>
         <p:spPr>
           <a:xfrm>
-            <a:off x="824712" y="2900000"/>
-            <a:ext cx="7217241" cy="9100000"/>
+            <a:off x="800000" y="3270059"/>
+            <a:ext cx="7266666" cy="8359881"/>
           </a:xfrm>
           <a:prstGeom prst="rect">
             <a:avLst/>
@@ -3693,8 +3693,8 @@
         </p:blipFill>
         <p:spPr>
           <a:xfrm>
-            <a:off x="8591378" y="2900000"/>
-            <a:ext cx="7217241" cy="9100000"/>
+            <a:off x="8566666" y="3270059"/>
+            <a:ext cx="7266666" cy="8359881"/>
           </a:xfrm>
           <a:prstGeom prst="rect">
             <a:avLst/>
@@ -3799,8 +3799,8 @@
         </p:blipFill>
         <p:spPr>
           <a:xfrm>
-            <a:off x="16358044" y="2900000"/>
-            <a:ext cx="7217241" cy="9100000"/>
+            <a:off x="16333332" y="3342754"/>
+            <a:ext cx="7266666" cy="8214492"/>
           </a:xfrm>
           <a:prstGeom prst="rect">
             <a:avLst/>
@@ -5149,7 +5149,7 @@
             <a:avLst/>
           </a:prstGeom>
           <a:solidFill>
-            <a:srgbClr val="FFFFFF"/>
+            <a:srgbClr val="F2F2F2"/>
           </a:solidFill>
           <a:ln>
             <a:noFill/>
@@ -5185,8 +5185,8 @@
         </p:nvSpPr>
         <p:spPr>
           <a:xfrm>
-            <a:off x="23000000" y="0"/>
-            <a:ext cx="1384000" cy="13716000"/>
+            <a:off x="17500000" y="0"/>
+            <a:ext cx="6884000" cy="13716000"/>
           </a:xfrm>
           <a:prstGeom prst="rect">
             <a:avLst/>
@@ -5229,7 +5229,7 @@
         <p:spPr>
           <a:xfrm>
             <a:off x="700000" y="5500000"/>
-            <a:ext cx="21000000" cy="1200000"/>
+            <a:ext cx="16000000" cy="1200000"/>
           </a:xfrm>
           <a:prstGeom prst="rect">
             <a:avLst/>
@@ -5266,7 +5266,7 @@
         <p:spPr>
           <a:xfrm>
             <a:off x="700000" y="6900000"/>
-            <a:ext cx="10000000" cy="25000"/>
+            <a:ext cx="10000000" cy="35000"/>
           </a:xfrm>
           <a:prstGeom prst="rect">
             <a:avLst/>
@@ -8690,8 +8690,8 @@
         </p:nvSpPr>
         <p:spPr>
           <a:xfrm>
-            <a:off x="700000" y="300000"/>
-            <a:ext cx="22000000" cy="900000"/>
+            <a:off x="700000" y="280000"/>
+            <a:ext cx="22000000" cy="850000"/>
           </a:xfrm>
           <a:prstGeom prst="rect">
             <a:avLst/>
@@ -8706,7 +8706,7 @@
           <a:p>
             <a:pPr algn="l"/>
             <a:r>
-              <a:rPr sz="3200" b="1">
+              <a:rPr sz="3000" b="1">
                 <a:solidFill>
                   <a:srgbClr val="333333"/>
                 </a:solidFill>
@@ -8727,14 +8727,14 @@
         </p:nvSpPr>
         <p:spPr>
           <a:xfrm>
-            <a:off x="700000" y="1250000"/>
-            <a:ext cx="22000000" cy="20000"/>
+            <a:off x="700000" y="1150000"/>
+            <a:ext cx="16000000" cy="35000"/>
           </a:xfrm>
           <a:prstGeom prst="rect">
             <a:avLst/>
           </a:prstGeom>
           <a:solidFill>
-            <a:srgbClr val="E1E1E1"/>
+            <a:srgbClr val="555555"/>
           </a:solidFill>
           <a:ln>
             <a:noFill/>
@@ -8770,7 +8770,7 @@
         </p:nvSpPr>
         <p:spPr>
           <a:xfrm>
-            <a:off x="700000" y="1350000"/>
+            <a:off x="700000" y="1250000"/>
             <a:ext cx="22000000" cy="450000"/>
           </a:xfrm>
           <a:prstGeom prst="rect">
@@ -8786,7 +8786,7 @@
           <a:p>
             <a:pPr algn="l"/>
             <a:r>
-              <a:rPr sz="1600" b="0">
+              <a:rPr sz="1400" b="0">
                 <a:solidFill>
                   <a:srgbClr val="666666"/>
                 </a:solidFill>
@@ -9080,8 +9080,8 @@
         </p:nvSpPr>
         <p:spPr>
           <a:xfrm>
-            <a:off x="700000" y="300000"/>
-            <a:ext cx="22000000" cy="900000"/>
+            <a:off x="700000" y="280000"/>
+            <a:ext cx="22000000" cy="850000"/>
           </a:xfrm>
           <a:prstGeom prst="rect">
             <a:avLst/>
@@ -9096,7 +9096,7 @@
           <a:p>
             <a:pPr algn="l"/>
             <a:r>
-              <a:rPr sz="3200" b="1">
+              <a:rPr sz="3000" b="1">
                 <a:solidFill>
                   <a:srgbClr val="333333"/>
                 </a:solidFill>
@@ -9117,14 +9117,14 @@
         </p:nvSpPr>
         <p:spPr>
           <a:xfrm>
-            <a:off x="700000" y="1250000"/>
-            <a:ext cx="22000000" cy="20000"/>
+            <a:off x="700000" y="1150000"/>
+            <a:ext cx="16000000" cy="35000"/>
           </a:xfrm>
           <a:prstGeom prst="rect">
             <a:avLst/>
           </a:prstGeom>
           <a:solidFill>
-            <a:srgbClr val="E1E1E1"/>
+            <a:srgbClr val="555555"/>
           </a:solidFill>
           <a:ln>
             <a:noFill/>
@@ -9160,7 +9160,7 @@
         </p:nvSpPr>
         <p:spPr>
           <a:xfrm>
-            <a:off x="700000" y="1350000"/>
+            <a:off x="700000" y="1250000"/>
             <a:ext cx="22000000" cy="450000"/>
           </a:xfrm>
           <a:prstGeom prst="rect">
@@ -9176,7 +9176,7 @@
           <a:p>
             <a:pPr algn="l"/>
             <a:r>
-              <a:rPr sz="1600" b="0">
+              <a:rPr sz="1400" b="0">
                 <a:solidFill>
                   <a:srgbClr val="666666"/>
                 </a:solidFill>
@@ -9382,8 +9382,8 @@
         </p:blipFill>
         <p:spPr>
           <a:xfrm>
-            <a:off x="12900000" y="3047059"/>
-            <a:ext cx="9600000" cy="7905882"/>
+            <a:off x="12900000" y="2905882"/>
+            <a:ext cx="9600000" cy="8188235"/>
           </a:xfrm>
           <a:prstGeom prst="rect">
             <a:avLst/>
@@ -9459,8 +9459,8 @@
         </p:nvSpPr>
         <p:spPr>
           <a:xfrm>
-            <a:off x="700000" y="300000"/>
-            <a:ext cx="22000000" cy="900000"/>
+            <a:off x="700000" y="280000"/>
+            <a:ext cx="22000000" cy="850000"/>
           </a:xfrm>
           <a:prstGeom prst="rect">
             <a:avLst/>
@@ -9475,7 +9475,7 @@
           <a:p>
             <a:pPr algn="l"/>
             <a:r>
-              <a:rPr sz="3200" b="1">
+              <a:rPr sz="3000" b="1">
                 <a:solidFill>
                   <a:srgbClr val="333333"/>
                 </a:solidFill>
@@ -9496,14 +9496,14 @@
         </p:nvSpPr>
         <p:spPr>
           <a:xfrm>
-            <a:off x="700000" y="1250000"/>
-            <a:ext cx="22000000" cy="20000"/>
+            <a:off x="700000" y="1150000"/>
+            <a:ext cx="16000000" cy="35000"/>
           </a:xfrm>
           <a:prstGeom prst="rect">
             <a:avLst/>
           </a:prstGeom>
           <a:solidFill>
-            <a:srgbClr val="E1E1E1"/>
+            <a:srgbClr val="555555"/>
           </a:solidFill>
           <a:ln>
             <a:noFill/>
@@ -9539,7 +9539,7 @@
         </p:nvSpPr>
         <p:spPr>
           <a:xfrm>
-            <a:off x="700000" y="1350000"/>
+            <a:off x="700000" y="1250000"/>
             <a:ext cx="22000000" cy="450000"/>
           </a:xfrm>
           <a:prstGeom prst="rect">
@@ -9555,7 +9555,7 @@
           <a:p>
             <a:pPr algn="l"/>
             <a:r>
-              <a:rPr sz="1600" b="0">
+              <a:rPr sz="1400" b="0">
                 <a:solidFill>
                   <a:srgbClr val="666666"/>
                 </a:solidFill>
@@ -9666,8 +9666,8 @@
         </p:blipFill>
         <p:spPr>
           <a:xfrm>
-            <a:off x="824712" y="2900000"/>
-            <a:ext cx="7217241" cy="9100000"/>
+            <a:off x="800000" y="3270059"/>
+            <a:ext cx="7266666" cy="8359881"/>
           </a:xfrm>
           <a:prstGeom prst="rect">
             <a:avLst/>
@@ -9772,8 +9772,8 @@
         </p:blipFill>
         <p:spPr>
           <a:xfrm>
-            <a:off x="8591378" y="2900000"/>
-            <a:ext cx="7217241" cy="9100000"/>
+            <a:off x="8566666" y="3270059"/>
+            <a:ext cx="7266666" cy="8359881"/>
           </a:xfrm>
           <a:prstGeom prst="rect">
             <a:avLst/>
@@ -9878,8 +9878,8 @@
         </p:blipFill>
         <p:spPr>
           <a:xfrm>
-            <a:off x="16358044" y="2900000"/>
-            <a:ext cx="7217241" cy="9100000"/>
+            <a:off x="16333332" y="3342754"/>
+            <a:ext cx="7266666" cy="8214492"/>
           </a:xfrm>
           <a:prstGeom prst="rect">
             <a:avLst/>

--- a/tema2_bleeding/Последовательность_остановки_кровотечения.pptx
+++ b/tema2_bleeding/Последовательность_остановки_кровотечения.pptx
@@ -3526,54 +3526,9 @@
           </a:p>
         </p:txBody>
       </p:sp>
-      <p:sp>
-        <p:nvSpPr>
-          <p:cNvPr id="7" name="Rectangle 6"/>
-          <p:cNvSpPr/>
-          <p:nvPr/>
-        </p:nvSpPr>
-        <p:spPr>
-          <a:xfrm>
-            <a:off x="700000" y="2700000"/>
-            <a:ext cx="7466666" cy="9500000"/>
-          </a:xfrm>
-          <a:prstGeom prst="rect">
-            <a:avLst/>
-          </a:prstGeom>
-          <a:solidFill>
-            <a:srgbClr val="FFFFFF"/>
-          </a:solidFill>
-          <a:ln w="12700">
-            <a:solidFill>
-              <a:srgbClr val="E1E1E1"/>
-            </a:solidFill>
-          </a:ln>
-        </p:spPr>
-        <p:style>
-          <a:lnRef idx="1">
-            <a:schemeClr val="accent1"/>
-          </a:lnRef>
-          <a:fillRef idx="3">
-            <a:schemeClr val="accent1"/>
-          </a:fillRef>
-          <a:effectRef idx="2">
-            <a:schemeClr val="accent1"/>
-          </a:effectRef>
-          <a:fontRef idx="minor">
-            <a:schemeClr val="lt1"/>
-          </a:fontRef>
-        </p:style>
-        <p:txBody>
-          <a:bodyPr rtlCol="0" anchor="ctr"/>
-          <a:lstStyle/>
-          <a:p>
-            <a:pPr algn="ctr"/>
-          </a:p>
-        </p:txBody>
-      </p:sp>
       <p:pic>
         <p:nvPicPr>
-          <p:cNvPr id="8" name="Picture 7" descr="exam_abdomen.png"/>
+          <p:cNvPr id="7" name="Picture 6" descr="exam_abdomen.png"/>
           <p:cNvPicPr>
             <a:picLocks noChangeAspect="1"/>
           </p:cNvPicPr>
@@ -3587,8 +3542,8 @@
         </p:blipFill>
         <p:spPr>
           <a:xfrm>
-            <a:off x="800000" y="3270059"/>
-            <a:ext cx="7266666" cy="8359881"/>
+            <a:off x="800000" y="3392629"/>
+            <a:ext cx="7266666" cy="8314742"/>
           </a:xfrm>
           <a:prstGeom prst="rect">
             <a:avLst/>
@@ -3597,7 +3552,7 @@
       </p:pic>
       <p:sp>
         <p:nvSpPr>
-          <p:cNvPr id="9" name="TextBox 8"/>
+          <p:cNvPr id="8" name="TextBox 7"/>
           <p:cNvSpPr txBox="1"/>
           <p:nvPr/>
         </p:nvSpPr>
@@ -3632,54 +3587,9 @@
           </a:p>
         </p:txBody>
       </p:sp>
-      <p:sp>
-        <p:nvSpPr>
-          <p:cNvPr id="10" name="Rectangle 9"/>
-          <p:cNvSpPr/>
-          <p:nvPr/>
-        </p:nvSpPr>
-        <p:spPr>
-          <a:xfrm>
-            <a:off x="8466666" y="2700000"/>
-            <a:ext cx="7466666" cy="9500000"/>
-          </a:xfrm>
-          <a:prstGeom prst="rect">
-            <a:avLst/>
-          </a:prstGeom>
-          <a:solidFill>
-            <a:srgbClr val="FFFFFF"/>
-          </a:solidFill>
-          <a:ln w="12700">
-            <a:solidFill>
-              <a:srgbClr val="E1E1E1"/>
-            </a:solidFill>
-          </a:ln>
-        </p:spPr>
-        <p:style>
-          <a:lnRef idx="1">
-            <a:schemeClr val="accent1"/>
-          </a:lnRef>
-          <a:fillRef idx="3">
-            <a:schemeClr val="accent1"/>
-          </a:fillRef>
-          <a:effectRef idx="2">
-            <a:schemeClr val="accent1"/>
-          </a:effectRef>
-          <a:fontRef idx="minor">
-            <a:schemeClr val="lt1"/>
-          </a:fontRef>
-        </p:style>
-        <p:txBody>
-          <a:bodyPr rtlCol="0" anchor="ctr"/>
-          <a:lstStyle/>
-          <a:p>
-            <a:pPr algn="ctr"/>
-          </a:p>
-        </p:txBody>
-      </p:sp>
       <p:pic>
         <p:nvPicPr>
-          <p:cNvPr id="11" name="Picture 10" descr="exam_legs.png"/>
+          <p:cNvPr id="9" name="Picture 8" descr="exam_legs.png"/>
           <p:cNvPicPr>
             <a:picLocks noChangeAspect="1"/>
           </p:cNvPicPr>
@@ -3693,8 +3603,8 @@
         </p:blipFill>
         <p:spPr>
           <a:xfrm>
-            <a:off x="8566666" y="3270059"/>
-            <a:ext cx="7266666" cy="8359881"/>
+            <a:off x="8566666" y="3471070"/>
+            <a:ext cx="7266666" cy="8157860"/>
           </a:xfrm>
           <a:prstGeom prst="rect">
             <a:avLst/>
@@ -3703,7 +3613,7 @@
       </p:pic>
       <p:sp>
         <p:nvSpPr>
-          <p:cNvPr id="12" name="TextBox 11"/>
+          <p:cNvPr id="10" name="TextBox 9"/>
           <p:cNvSpPr txBox="1"/>
           <p:nvPr/>
         </p:nvSpPr>
@@ -3738,54 +3648,9 @@
           </a:p>
         </p:txBody>
       </p:sp>
-      <p:sp>
-        <p:nvSpPr>
-          <p:cNvPr id="13" name="Rectangle 12"/>
-          <p:cNvSpPr/>
-          <p:nvPr/>
-        </p:nvSpPr>
-        <p:spPr>
-          <a:xfrm>
-            <a:off x="16233332" y="2700000"/>
-            <a:ext cx="7466666" cy="9500000"/>
-          </a:xfrm>
-          <a:prstGeom prst="rect">
-            <a:avLst/>
-          </a:prstGeom>
-          <a:solidFill>
-            <a:srgbClr val="FFFFFF"/>
-          </a:solidFill>
-          <a:ln w="12700">
-            <a:solidFill>
-              <a:srgbClr val="E1E1E1"/>
-            </a:solidFill>
-          </a:ln>
-        </p:spPr>
-        <p:style>
-          <a:lnRef idx="1">
-            <a:schemeClr val="accent1"/>
-          </a:lnRef>
-          <a:fillRef idx="3">
-            <a:schemeClr val="accent1"/>
-          </a:fillRef>
-          <a:effectRef idx="2">
-            <a:schemeClr val="accent1"/>
-          </a:effectRef>
-          <a:fontRef idx="minor">
-            <a:schemeClr val="lt1"/>
-          </a:fontRef>
-        </p:style>
-        <p:txBody>
-          <a:bodyPr rtlCol="0" anchor="ctr"/>
-          <a:lstStyle/>
-          <a:p>
-            <a:pPr algn="ctr"/>
-          </a:p>
-        </p:txBody>
-      </p:sp>
       <p:pic>
         <p:nvPicPr>
-          <p:cNvPr id="14" name="Picture 13" descr="exam_arms.png"/>
+          <p:cNvPr id="11" name="Picture 10" descr="exam_arms.png"/>
           <p:cNvPicPr>
             <a:picLocks noChangeAspect="1"/>
           </p:cNvPicPr>
@@ -3799,8 +3664,8 @@
         </p:blipFill>
         <p:spPr>
           <a:xfrm>
-            <a:off x="16333332" y="3342754"/>
-            <a:ext cx="7266666" cy="8214492"/>
+            <a:off x="16333332" y="3757310"/>
+            <a:ext cx="7266666" cy="7585379"/>
           </a:xfrm>
           <a:prstGeom prst="rect">
             <a:avLst/>
@@ -9321,54 +9186,9 @@
           </a:p>
         </p:txBody>
       </p:sp>
-      <p:sp>
-        <p:nvSpPr>
-          <p:cNvPr id="8" name="Rectangle 7"/>
-          <p:cNvSpPr/>
-          <p:nvPr/>
-        </p:nvSpPr>
-        <p:spPr>
-          <a:xfrm>
-            <a:off x="12700000" y="2000000"/>
-            <a:ext cx="10000000" cy="10000000"/>
-          </a:xfrm>
-          <a:prstGeom prst="rect">
-            <a:avLst/>
-          </a:prstGeom>
-          <a:solidFill>
-            <a:srgbClr val="FFFFFF"/>
-          </a:solidFill>
-          <a:ln w="12700">
-            <a:solidFill>
-              <a:srgbClr val="E1E1E1"/>
-            </a:solidFill>
-          </a:ln>
-        </p:spPr>
-        <p:style>
-          <a:lnRef idx="1">
-            <a:schemeClr val="accent1"/>
-          </a:lnRef>
-          <a:fillRef idx="3">
-            <a:schemeClr val="accent1"/>
-          </a:fillRef>
-          <a:effectRef idx="2">
-            <a:schemeClr val="accent1"/>
-          </a:effectRef>
-          <a:fontRef idx="minor">
-            <a:schemeClr val="lt1"/>
-          </a:fontRef>
-        </p:style>
-        <p:txBody>
-          <a:bodyPr rtlCol="0" anchor="ctr"/>
-          <a:lstStyle/>
-          <a:p>
-            <a:pPr algn="ctr"/>
-          </a:p>
-        </p:txBody>
-      </p:sp>
       <p:pic>
         <p:nvPicPr>
-          <p:cNvPr id="9" name="Picture 8" descr="shock_prev.png"/>
+          <p:cNvPr id="8" name="Picture 7" descr="shock_prev.png"/>
           <p:cNvPicPr>
             <a:picLocks noChangeAspect="1"/>
           </p:cNvPicPr>
@@ -9382,8 +9202,8 @@
         </p:blipFill>
         <p:spPr>
           <a:xfrm>
-            <a:off x="12900000" y="2905882"/>
-            <a:ext cx="9600000" cy="8188235"/>
+            <a:off x="12700000" y="2617647"/>
+            <a:ext cx="10000000" cy="8764705"/>
           </a:xfrm>
           <a:prstGeom prst="rect">
             <a:avLst/>
@@ -9605,54 +9425,9 @@
           </a:p>
         </p:txBody>
       </p:sp>
-      <p:sp>
-        <p:nvSpPr>
-          <p:cNvPr id="7" name="Rectangle 6"/>
-          <p:cNvSpPr/>
-          <p:nvPr/>
-        </p:nvSpPr>
-        <p:spPr>
-          <a:xfrm>
-            <a:off x="700000" y="2700000"/>
-            <a:ext cx="7466666" cy="9500000"/>
-          </a:xfrm>
-          <a:prstGeom prst="rect">
-            <a:avLst/>
-          </a:prstGeom>
-          <a:solidFill>
-            <a:srgbClr val="FFFFFF"/>
-          </a:solidFill>
-          <a:ln w="12700">
-            <a:solidFill>
-              <a:srgbClr val="E1E1E1"/>
-            </a:solidFill>
-          </a:ln>
-        </p:spPr>
-        <p:style>
-          <a:lnRef idx="1">
-            <a:schemeClr val="accent1"/>
-          </a:lnRef>
-          <a:fillRef idx="3">
-            <a:schemeClr val="accent1"/>
-          </a:fillRef>
-          <a:effectRef idx="2">
-            <a:schemeClr val="accent1"/>
-          </a:effectRef>
-          <a:fontRef idx="minor">
-            <a:schemeClr val="lt1"/>
-          </a:fontRef>
-        </p:style>
-        <p:txBody>
-          <a:bodyPr rtlCol="0" anchor="ctr"/>
-          <a:lstStyle/>
-          <a:p>
-            <a:pPr algn="ctr"/>
-          </a:p>
-        </p:txBody>
-      </p:sp>
       <p:pic>
         <p:nvPicPr>
-          <p:cNvPr id="8" name="Picture 7" descr="exam_head.png"/>
+          <p:cNvPr id="7" name="Picture 6" descr="exam_head.png"/>
           <p:cNvPicPr>
             <a:picLocks noChangeAspect="1"/>
           </p:cNvPicPr>
@@ -9666,8 +9441,8 @@
         </p:blipFill>
         <p:spPr>
           <a:xfrm>
-            <a:off x="800000" y="3270059"/>
-            <a:ext cx="7266666" cy="8359881"/>
+            <a:off x="800000" y="3392629"/>
+            <a:ext cx="7266666" cy="8314742"/>
           </a:xfrm>
           <a:prstGeom prst="rect">
             <a:avLst/>
@@ -9676,7 +9451,7 @@
       </p:pic>
       <p:sp>
         <p:nvSpPr>
-          <p:cNvPr id="9" name="TextBox 8"/>
+          <p:cNvPr id="8" name="TextBox 7"/>
           <p:cNvSpPr txBox="1"/>
           <p:nvPr/>
         </p:nvSpPr>
@@ -9711,54 +9486,9 @@
           </a:p>
         </p:txBody>
       </p:sp>
-      <p:sp>
-        <p:nvSpPr>
-          <p:cNvPr id="10" name="Rectangle 9"/>
-          <p:cNvSpPr/>
-          <p:nvPr/>
-        </p:nvSpPr>
-        <p:spPr>
-          <a:xfrm>
-            <a:off x="8466666" y="2700000"/>
-            <a:ext cx="7466666" cy="9500000"/>
-          </a:xfrm>
-          <a:prstGeom prst="rect">
-            <a:avLst/>
-          </a:prstGeom>
-          <a:solidFill>
-            <a:srgbClr val="FFFFFF"/>
-          </a:solidFill>
-          <a:ln w="12700">
-            <a:solidFill>
-              <a:srgbClr val="E1E1E1"/>
-            </a:solidFill>
-          </a:ln>
-        </p:spPr>
-        <p:style>
-          <a:lnRef idx="1">
-            <a:schemeClr val="accent1"/>
-          </a:lnRef>
-          <a:fillRef idx="3">
-            <a:schemeClr val="accent1"/>
-          </a:fillRef>
-          <a:effectRef idx="2">
-            <a:schemeClr val="accent1"/>
-          </a:effectRef>
-          <a:fontRef idx="minor">
-            <a:schemeClr val="lt1"/>
-          </a:fontRef>
-        </p:style>
-        <p:txBody>
-          <a:bodyPr rtlCol="0" anchor="ctr"/>
-          <a:lstStyle/>
-          <a:p>
-            <a:pPr algn="ctr"/>
-          </a:p>
-        </p:txBody>
-      </p:sp>
       <p:pic>
         <p:nvPicPr>
-          <p:cNvPr id="11" name="Picture 10" descr="exam_neck.png"/>
+          <p:cNvPr id="9" name="Picture 8" descr="exam_neck.png"/>
           <p:cNvPicPr>
             <a:picLocks noChangeAspect="1"/>
           </p:cNvPicPr>
@@ -9772,8 +9502,8 @@
         </p:blipFill>
         <p:spPr>
           <a:xfrm>
-            <a:off x="8566666" y="3270059"/>
-            <a:ext cx="7266666" cy="8359881"/>
+            <a:off x="8566666" y="3471070"/>
+            <a:ext cx="7266666" cy="8157860"/>
           </a:xfrm>
           <a:prstGeom prst="rect">
             <a:avLst/>
@@ -9782,7 +9512,7 @@
       </p:pic>
       <p:sp>
         <p:nvSpPr>
-          <p:cNvPr id="12" name="TextBox 11"/>
+          <p:cNvPr id="10" name="TextBox 9"/>
           <p:cNvSpPr txBox="1"/>
           <p:nvPr/>
         </p:nvSpPr>
@@ -9817,54 +9547,9 @@
           </a:p>
         </p:txBody>
       </p:sp>
-      <p:sp>
-        <p:nvSpPr>
-          <p:cNvPr id="13" name="Rectangle 12"/>
-          <p:cNvSpPr/>
-          <p:nvPr/>
-        </p:nvSpPr>
-        <p:spPr>
-          <a:xfrm>
-            <a:off x="16233332" y="2700000"/>
-            <a:ext cx="7466666" cy="9500000"/>
-          </a:xfrm>
-          <a:prstGeom prst="rect">
-            <a:avLst/>
-          </a:prstGeom>
-          <a:solidFill>
-            <a:srgbClr val="FFFFFF"/>
-          </a:solidFill>
-          <a:ln w="12700">
-            <a:solidFill>
-              <a:srgbClr val="E1E1E1"/>
-            </a:solidFill>
-          </a:ln>
-        </p:spPr>
-        <p:style>
-          <a:lnRef idx="1">
-            <a:schemeClr val="accent1"/>
-          </a:lnRef>
-          <a:fillRef idx="3">
-            <a:schemeClr val="accent1"/>
-          </a:fillRef>
-          <a:effectRef idx="2">
-            <a:schemeClr val="accent1"/>
-          </a:effectRef>
-          <a:fontRef idx="minor">
-            <a:schemeClr val="lt1"/>
-          </a:fontRef>
-        </p:style>
-        <p:txBody>
-          <a:bodyPr rtlCol="0" anchor="ctr"/>
-          <a:lstStyle/>
-          <a:p>
-            <a:pPr algn="ctr"/>
-          </a:p>
-        </p:txBody>
-      </p:sp>
       <p:pic>
         <p:nvPicPr>
-          <p:cNvPr id="14" name="Picture 13" descr="exam_chest.png"/>
+          <p:cNvPr id="11" name="Picture 10" descr="exam_chest.png"/>
           <p:cNvPicPr>
             <a:picLocks noChangeAspect="1"/>
           </p:cNvPicPr>
@@ -9878,8 +9563,8 @@
         </p:blipFill>
         <p:spPr>
           <a:xfrm>
-            <a:off x="16333332" y="3342754"/>
-            <a:ext cx="7266666" cy="8214492"/>
+            <a:off x="16333332" y="3757310"/>
+            <a:ext cx="7266666" cy="7585379"/>
           </a:xfrm>
           <a:prstGeom prst="rect">
             <a:avLst/>
